--- a/FoxBrain_Benchmark_Priority_Radar.pptx
+++ b/FoxBrain_Benchmark_Priority_Radar.pptx
@@ -1406,15 +1406,15 @@
         </p:nvSpPr>
         <p:spPr>
           <a:xfrm>
-            <a:off x="4844140" y="3283532"/>
-            <a:ext cx="201168" cy="201168"/>
+            <a:off x="4811473" y="3273921"/>
+            <a:ext cx="237744" cy="237744"/>
           </a:xfrm>
           <a:prstGeom prst="ellipse">
             <a:avLst/>
           </a:prstGeom>
           <a:solidFill>
             <a:srgbClr val="00E5A0">
-              <a:alpha val="45000"/>
+              <a:alpha val="40000"/>
             </a:srgbClr>
           </a:solidFill>
           <a:ln w="12700">
@@ -1433,8 +1433,8 @@
         </p:nvSpPr>
         <p:spPr>
           <a:xfrm>
-            <a:off x="4891689" y="3331081"/>
-            <a:ext cx="106070" cy="106070"/>
+            <a:off x="4864508" y="3326956"/>
+            <a:ext cx="131674" cy="131674"/>
           </a:xfrm>
           <a:prstGeom prst="ellipse">
             <a:avLst/>
@@ -1458,8 +1458,8 @@
         </p:nvSpPr>
         <p:spPr>
           <a:xfrm>
-            <a:off x="4170966" y="3183367"/>
-            <a:ext cx="1188720" cy="219456"/>
+            <a:off x="4687081" y="3243563"/>
+            <a:ext cx="237744" cy="164592"/>
           </a:xfrm>
           <a:prstGeom prst="rect">
             <a:avLst/>
@@ -1475,14 +1475,14 @@
               <a:buNone/>
             </a:pPr>
             <a:r>
-              <a:rPr lang="en-US" sz="850" b="1" dirty="0">
+              <a:rPr lang="en-US" sz="700" b="1" dirty="0">
                 <a:solidFill>
                   <a:srgbClr val="00E5A0"/>
                 </a:solidFill>
               </a:rPr>
-              <a:t>HLE ✓</a:t>
-            </a:r>
-            <a:endParaRPr lang="en-US" sz="850" dirty="0"/>
+              <a:t>1</a:t>
+            </a:r>
+            <a:endParaRPr lang="en-US" sz="700" dirty="0"/>
           </a:p>
         </p:txBody>
       </p:sp>
@@ -1494,8 +1494,8 @@
         </p:nvSpPr>
         <p:spPr>
           <a:xfrm>
-            <a:off x="5107746" y="3136960"/>
-            <a:ext cx="106070" cy="106070"/>
+            <a:off x="5119735" y="3125417"/>
+            <a:ext cx="102413" cy="102413"/>
           </a:xfrm>
           <a:prstGeom prst="ellipse">
             <a:avLst/>
@@ -1519,8 +1519,8 @@
         </p:nvSpPr>
         <p:spPr>
           <a:xfrm>
-            <a:off x="4495052" y="2892185"/>
-            <a:ext cx="1188720" cy="219456"/>
+            <a:off x="5007877" y="2955338"/>
+            <a:ext cx="237744" cy="164592"/>
           </a:xfrm>
           <a:prstGeom prst="rect">
             <a:avLst/>
@@ -1536,14 +1536,14 @@
               <a:buNone/>
             </a:pPr>
             <a:r>
-              <a:rPr lang="en-US" sz="850" b="1" dirty="0">
-                <a:solidFill>
-                  <a:srgbClr val="FF9088"/>
-                </a:solidFill>
-              </a:rPr>
-              <a:t>FrontierMath</a:t>
-            </a:r>
-            <a:endParaRPr lang="en-US" sz="850" dirty="0"/>
+              <a:rPr lang="en-US" sz="700" b="1" dirty="0">
+                <a:solidFill>
+                  <a:srgbClr val="E85D4A"/>
+                </a:solidFill>
+              </a:rPr>
+              <a:t>2</a:t>
+            </a:r>
+            <a:endParaRPr lang="en-US" sz="700" dirty="0"/>
           </a:p>
         </p:txBody>
       </p:sp>
@@ -1555,8 +1555,8 @@
         </p:nvSpPr>
         <p:spPr>
           <a:xfrm>
-            <a:off x="4230346" y="3108971"/>
-            <a:ext cx="106070" cy="106070"/>
+            <a:off x="4248888" y="3048788"/>
+            <a:ext cx="102413" cy="102413"/>
           </a:xfrm>
           <a:prstGeom prst="ellipse">
             <a:avLst/>
@@ -1580,8 +1580,8 @@
         </p:nvSpPr>
         <p:spPr>
           <a:xfrm>
-            <a:off x="3527499" y="2988287"/>
-            <a:ext cx="1188720" cy="219456"/>
+            <a:off x="4056830" y="2950765"/>
+            <a:ext cx="237744" cy="164592"/>
           </a:xfrm>
           <a:prstGeom prst="rect">
             <a:avLst/>
@@ -1597,14 +1597,14 @@
               <a:buNone/>
             </a:pPr>
             <a:r>
-              <a:rPr lang="en-US" sz="850" dirty="0">
-                <a:solidFill>
-                  <a:srgbClr val="FFD060"/>
-                </a:solidFill>
-              </a:rPr>
-              <a:t>AIME 2025</a:t>
-            </a:r>
-            <a:endParaRPr lang="en-US" sz="850" dirty="0"/>
+              <a:rPr lang="en-US" sz="700" b="1" dirty="0">
+                <a:solidFill>
+                  <a:srgbClr val="E85D4A"/>
+                </a:solidFill>
+              </a:rPr>
+              <a:t>3</a:t>
+            </a:r>
+            <a:endParaRPr lang="en-US" sz="700" dirty="0"/>
           </a:p>
         </p:txBody>
       </p:sp>
@@ -1616,8 +1616,8 @@
         </p:nvSpPr>
         <p:spPr>
           <a:xfrm>
-            <a:off x="4517133" y="2696903"/>
-            <a:ext cx="106070" cy="106070"/>
+            <a:off x="4512850" y="2691930"/>
+            <a:ext cx="102413" cy="102413"/>
           </a:xfrm>
           <a:prstGeom prst="ellipse">
             <a:avLst/>
@@ -1641,8 +1641,8 @@
         </p:nvSpPr>
         <p:spPr>
           <a:xfrm>
-            <a:off x="3859694" y="2510975"/>
-            <a:ext cx="1188720" cy="219456"/>
+            <a:off x="4353516" y="2549668"/>
+            <a:ext cx="237744" cy="164592"/>
           </a:xfrm>
           <a:prstGeom prst="rect">
             <a:avLst/>
@@ -1658,14 +1658,14 @@
               <a:buNone/>
             </a:pPr>
             <a:r>
-              <a:rPr lang="en-US" sz="850" dirty="0">
-                <a:solidFill>
-                  <a:srgbClr val="FFD060"/>
-                </a:solidFill>
-              </a:rPr>
-              <a:t>AIME 2026</a:t>
-            </a:r>
-            <a:endParaRPr lang="en-US" sz="850" dirty="0"/>
+              <a:rPr lang="en-US" sz="700" b="1" dirty="0">
+                <a:solidFill>
+                  <a:srgbClr val="E85D4A"/>
+                </a:solidFill>
+              </a:rPr>
+              <a:t>4</a:t>
+            </a:r>
+            <a:endParaRPr lang="en-US" sz="700" dirty="0"/>
           </a:p>
         </p:txBody>
       </p:sp>
@@ -1677,8 +1677,8 @@
         </p:nvSpPr>
         <p:spPr>
           <a:xfrm>
-            <a:off x="4957438" y="2455700"/>
-            <a:ext cx="106070" cy="106070"/>
+            <a:off x="4895826" y="2467533"/>
+            <a:ext cx="102413" cy="102413"/>
           </a:xfrm>
           <a:prstGeom prst="ellipse">
             <a:avLst/>
@@ -1702,8 +1702,8 @@
         </p:nvSpPr>
         <p:spPr>
           <a:xfrm>
-            <a:off x="4369714" y="2231582"/>
-            <a:ext cx="1188720" cy="219456"/>
+            <a:off x="4783967" y="2297454"/>
+            <a:ext cx="237744" cy="164592"/>
           </a:xfrm>
           <a:prstGeom prst="rect">
             <a:avLst/>
@@ -1719,14 +1719,14 @@
               <a:buNone/>
             </a:pPr>
             <a:r>
-              <a:rPr lang="en-US" sz="850" dirty="0">
-                <a:solidFill>
-                  <a:srgbClr val="FFD060"/>
-                </a:solidFill>
-              </a:rPr>
-              <a:t>ARC-AGI-2</a:t>
-            </a:r>
-            <a:endParaRPr lang="en-US" sz="850" dirty="0"/>
+              <a:rPr lang="en-US" sz="700" b="1" dirty="0">
+                <a:solidFill>
+                  <a:srgbClr val="E85D4A"/>
+                </a:solidFill>
+              </a:rPr>
+              <a:t>5</a:t>
+            </a:r>
+            <a:endParaRPr lang="en-US" sz="700" dirty="0"/>
           </a:p>
         </p:txBody>
       </p:sp>
@@ -1738,8 +1738,8 @@
         </p:nvSpPr>
         <p:spPr>
           <a:xfrm>
-            <a:off x="4083233" y="2213971"/>
-            <a:ext cx="106070" cy="106070"/>
+            <a:off x="4078951" y="2208998"/>
+            <a:ext cx="102413" cy="102413"/>
           </a:xfrm>
           <a:prstGeom prst="ellipse">
             <a:avLst/>
@@ -1763,8 +1763,8 @@
         </p:nvSpPr>
         <p:spPr>
           <a:xfrm>
-            <a:off x="3438017" y="2041647"/>
-            <a:ext cx="1188720" cy="219456"/>
+            <a:off x="3919616" y="2066737"/>
+            <a:ext cx="237744" cy="164592"/>
           </a:xfrm>
           <a:prstGeom prst="rect">
             <a:avLst/>
@@ -1780,14 +1780,14 @@
               <a:buNone/>
             </a:pPr>
             <a:r>
-              <a:rPr lang="en-US" sz="850" dirty="0">
-                <a:solidFill>
-                  <a:srgbClr val="70B8E8"/>
-                </a:solidFill>
-              </a:rPr>
-              <a:t>MATH-500</a:t>
-            </a:r>
-            <a:endParaRPr lang="en-US" sz="850" dirty="0"/>
+              <a:rPr lang="en-US" sz="700" b="1" dirty="0">
+                <a:solidFill>
+                  <a:srgbClr val="E85D4A"/>
+                </a:solidFill>
+              </a:rPr>
+              <a:t>6</a:t>
+            </a:r>
+            <a:endParaRPr lang="en-US" sz="700" dirty="0"/>
           </a:p>
         </p:txBody>
       </p:sp>
@@ -1799,8 +1799,8 @@
         </p:nvSpPr>
         <p:spPr>
           <a:xfrm>
-            <a:off x="3048685" y="2640826"/>
-            <a:ext cx="106070" cy="106070"/>
+            <a:off x="3096192" y="2513275"/>
+            <a:ext cx="102413" cy="102413"/>
           </a:xfrm>
           <a:prstGeom prst="ellipse">
             <a:avLst/>
@@ -1824,8 +1824,8 @@
         </p:nvSpPr>
         <p:spPr>
           <a:xfrm>
-            <a:off x="2362841" y="2526878"/>
-            <a:ext cx="1188720" cy="219456"/>
+            <a:off x="2904135" y="2415252"/>
+            <a:ext cx="237744" cy="164592"/>
           </a:xfrm>
           <a:prstGeom prst="rect">
             <a:avLst/>
@@ -1841,14 +1841,14 @@
               <a:buNone/>
             </a:pPr>
             <a:r>
-              <a:rPr lang="en-US" sz="850" dirty="0">
+              <a:rPr lang="en-US" sz="700" b="1" dirty="0">
                 <a:solidFill>
                   <a:srgbClr val="8888CC"/>
                 </a:solidFill>
               </a:rPr>
-              <a:t>GPQA Diamond</a:t>
-            </a:r>
-            <a:endParaRPr lang="en-US" sz="850" dirty="0"/>
+              <a:t>7</a:t>
+            </a:r>
+            <a:endParaRPr lang="en-US" sz="700" dirty="0"/>
           </a:p>
         </p:txBody>
       </p:sp>
@@ -1860,8 +1860,8 @@
         </p:nvSpPr>
         <p:spPr>
           <a:xfrm>
-            <a:off x="4617992" y="1230850"/>
-            <a:ext cx="106070" cy="106070"/>
+            <a:off x="4486307" y="1264297"/>
+            <a:ext cx="102413" cy="102413"/>
           </a:xfrm>
           <a:prstGeom prst="ellipse">
             <a:avLst/>
@@ -1885,8 +1885,8 @@
         </p:nvSpPr>
         <p:spPr>
           <a:xfrm>
-            <a:off x="4035152" y="1024355"/>
-            <a:ext cx="1188720" cy="219456"/>
+            <a:off x="4374448" y="1094218"/>
+            <a:ext cx="237744" cy="164592"/>
           </a:xfrm>
           <a:prstGeom prst="rect">
             <a:avLst/>
@@ -1902,14 +1902,14 @@
               <a:buNone/>
             </a:pPr>
             <a:r>
-              <a:rPr lang="en-US" sz="850" dirty="0">
+              <a:rPr lang="en-US" sz="700" b="1" dirty="0">
                 <a:solidFill>
                   <a:srgbClr val="8888CC"/>
                 </a:solidFill>
               </a:rPr>
-              <a:t>MMLU-Pro</a:t>
-            </a:r>
-            <a:endParaRPr lang="en-US" sz="850" dirty="0"/>
+              <a:t>8</a:t>
+            </a:r>
+            <a:endParaRPr lang="en-US" sz="700" dirty="0"/>
           </a:p>
         </p:txBody>
       </p:sp>
@@ -1921,8 +1921,8 @@
         </p:nvSpPr>
         <p:spPr>
           <a:xfrm>
-            <a:off x="5271713" y="3111349"/>
-            <a:ext cx="106070" cy="106070"/>
+            <a:off x="5259788" y="3103541"/>
+            <a:ext cx="102413" cy="102413"/>
           </a:xfrm>
           <a:prstGeom prst="ellipse">
             <a:avLst/>
@@ -1946,8 +1946,8 @@
         </p:nvSpPr>
         <p:spPr>
           <a:xfrm>
-            <a:off x="4741003" y="2853769"/>
-            <a:ext cx="1188720" cy="219456"/>
+            <a:off x="5194614" y="2926171"/>
+            <a:ext cx="237744" cy="164592"/>
           </a:xfrm>
           <a:prstGeom prst="rect">
             <a:avLst/>
@@ -1963,14 +1963,14 @@
               <a:buNone/>
             </a:pPr>
             <a:r>
-              <a:rPr lang="en-US" sz="850" b="1" dirty="0">
-                <a:solidFill>
-                  <a:srgbClr val="FF9088"/>
-                </a:solidFill>
-              </a:rPr>
-              <a:t>SWE-Bench Pro</a:t>
-            </a:r>
-            <a:endParaRPr lang="en-US" sz="850" dirty="0"/>
+              <a:rPr lang="en-US" sz="700" b="1" dirty="0">
+                <a:solidFill>
+                  <a:srgbClr val="4A90D9"/>
+                </a:solidFill>
+              </a:rPr>
+              <a:t>1</a:t>
+            </a:r>
+            <a:endParaRPr lang="en-US" sz="700" dirty="0"/>
           </a:p>
         </p:txBody>
       </p:sp>
@@ -1982,8 +1982,8 @@
         </p:nvSpPr>
         <p:spPr>
           <a:xfrm>
-            <a:off x="5415307" y="3146099"/>
-            <a:ext cx="106070" cy="106070"/>
+            <a:off x="5420882" y="3139586"/>
+            <a:ext cx="102413" cy="102413"/>
           </a:xfrm>
           <a:prstGeom prst="ellipse">
             <a:avLst/>
@@ -2007,8 +2007,8 @@
         </p:nvSpPr>
         <p:spPr>
           <a:xfrm>
-            <a:off x="4956393" y="2905893"/>
-            <a:ext cx="1188720" cy="219456"/>
+            <a:off x="5409406" y="2974230"/>
+            <a:ext cx="237744" cy="164592"/>
           </a:xfrm>
           <a:prstGeom prst="rect">
             <a:avLst/>
@@ -2024,14 +2024,14 @@
               <a:buNone/>
             </a:pPr>
             <a:r>
-              <a:rPr lang="en-US" sz="850" b="1" dirty="0">
-                <a:solidFill>
-                  <a:srgbClr val="FF9088"/>
-                </a:solidFill>
-              </a:rPr>
-              <a:t>Terminal-Bench 4.0</a:t>
-            </a:r>
-            <a:endParaRPr lang="en-US" sz="850" dirty="0"/>
+              <a:rPr lang="en-US" sz="700" b="1" dirty="0">
+                <a:solidFill>
+                  <a:srgbClr val="4A90D9"/>
+                </a:solidFill>
+              </a:rPr>
+              <a:t>2</a:t>
+            </a:r>
+            <a:endParaRPr lang="en-US" sz="700" dirty="0"/>
           </a:p>
         </p:txBody>
       </p:sp>
@@ -2043,8 +2043,8 @@
         </p:nvSpPr>
         <p:spPr>
           <a:xfrm>
-            <a:off x="5536677" y="3230338"/>
-            <a:ext cx="106070" cy="106070"/>
+            <a:off x="5554845" y="3236045"/>
+            <a:ext cx="102413" cy="102413"/>
           </a:xfrm>
           <a:prstGeom prst="ellipse">
             <a:avLst/>
@@ -2068,8 +2068,8 @@
         </p:nvSpPr>
         <p:spPr>
           <a:xfrm>
-            <a:off x="5138448" y="3032251"/>
-            <a:ext cx="1188720" cy="219456"/>
+            <a:off x="5588024" y="3102841"/>
+            <a:ext cx="237744" cy="164592"/>
           </a:xfrm>
           <a:prstGeom prst="rect">
             <a:avLst/>
@@ -2085,14 +2085,14 @@
               <a:buNone/>
             </a:pPr>
             <a:r>
-              <a:rPr lang="en-US" sz="850" b="1" dirty="0">
-                <a:solidFill>
-                  <a:srgbClr val="FF9088"/>
-                </a:solidFill>
-              </a:rPr>
-              <a:t>FrontierCode Diamond</a:t>
-            </a:r>
-            <a:endParaRPr lang="en-US" sz="850" dirty="0"/>
+              <a:rPr lang="en-US" sz="700" b="1" dirty="0">
+                <a:solidFill>
+                  <a:srgbClr val="4A90D9"/>
+                </a:solidFill>
+              </a:rPr>
+              <a:t>3</a:t>
+            </a:r>
+            <a:endParaRPr lang="en-US" sz="700" dirty="0"/>
           </a:p>
         </p:txBody>
       </p:sp>
@@ -2104,8 +2104,8 @@
         </p:nvSpPr>
         <p:spPr>
           <a:xfrm>
-            <a:off x="5207113" y="2416702"/>
-            <a:ext cx="106070" cy="106070"/>
+            <a:off x="5272411" y="2408712"/>
+            <a:ext cx="102413" cy="102413"/>
           </a:xfrm>
           <a:prstGeom prst="ellipse">
             <a:avLst/>
@@ -2129,8 +2129,8 @@
         </p:nvSpPr>
         <p:spPr>
           <a:xfrm>
-            <a:off x="4658921" y="2186409"/>
-            <a:ext cx="1188720" cy="219456"/>
+            <a:off x="5207237" y="2231341"/>
+            <a:ext cx="237744" cy="164592"/>
           </a:xfrm>
           <a:prstGeom prst="rect">
             <a:avLst/>
@@ -2146,14 +2146,14 @@
               <a:buNone/>
             </a:pPr>
             <a:r>
-              <a:rPr lang="en-US" sz="850" dirty="0">
-                <a:solidFill>
-                  <a:srgbClr val="FFD060"/>
-                </a:solidFill>
-              </a:rPr>
-              <a:t>LiveCodeBench v6</a:t>
-            </a:r>
-            <a:endParaRPr lang="en-US" sz="850" dirty="0"/>
+              <a:rPr lang="en-US" sz="700" b="1" dirty="0">
+                <a:solidFill>
+                  <a:srgbClr val="4A90D9"/>
+                </a:solidFill>
+              </a:rPr>
+              <a:t>4</a:t>
+            </a:r>
+            <a:endParaRPr lang="en-US" sz="700" dirty="0"/>
           </a:p>
         </p:txBody>
       </p:sp>
@@ -2165,8 +2165,8 @@
         </p:nvSpPr>
         <p:spPr>
           <a:xfrm>
-            <a:off x="5700000" y="2512146"/>
-            <a:ext cx="106070" cy="106070"/>
+            <a:off x="5705575" y="2505633"/>
+            <a:ext cx="102413" cy="102413"/>
           </a:xfrm>
           <a:prstGeom prst="ellipse">
             <a:avLst/>
@@ -2190,8 +2190,8 @@
         </p:nvSpPr>
         <p:spPr>
           <a:xfrm>
-            <a:off x="5229848" y="2296964"/>
-            <a:ext cx="1188720" cy="219456"/>
+            <a:off x="5694098" y="2340277"/>
+            <a:ext cx="237744" cy="164592"/>
           </a:xfrm>
           <a:prstGeom prst="rect">
             <a:avLst/>
@@ -2207,14 +2207,14 @@
               <a:buNone/>
             </a:pPr>
             <a:r>
-              <a:rPr lang="en-US" sz="850" dirty="0">
-                <a:solidFill>
-                  <a:srgbClr val="FFD060"/>
-                </a:solidFill>
-              </a:rPr>
-              <a:t>DeepSWE v1.1</a:t>
-            </a:r>
-            <a:endParaRPr lang="en-US" sz="850" dirty="0"/>
+              <a:rPr lang="en-US" sz="700" b="1" dirty="0">
+                <a:solidFill>
+                  <a:srgbClr val="4A90D9"/>
+                </a:solidFill>
+              </a:rPr>
+              <a:t>5</a:t>
+            </a:r>
+            <a:endParaRPr lang="en-US" sz="700" dirty="0"/>
           </a:p>
         </p:txBody>
       </p:sp>
@@ -2226,8 +2226,8 @@
         </p:nvSpPr>
         <p:spPr>
           <a:xfrm>
-            <a:off x="6098787" y="2817131"/>
-            <a:ext cx="106070" cy="106070"/>
+            <a:off x="6065788" y="2764998"/>
+            <a:ext cx="102413" cy="102413"/>
           </a:xfrm>
           <a:prstGeom prst="ellipse">
             <a:avLst/>
@@ -2251,8 +2251,8 @@
         </p:nvSpPr>
         <p:spPr>
           <a:xfrm>
-            <a:off x="5691776" y="2650239"/>
-            <a:ext cx="1188720" cy="219456"/>
+            <a:off x="6098966" y="2631795"/>
+            <a:ext cx="237744" cy="164592"/>
           </a:xfrm>
           <a:prstGeom prst="rect">
             <a:avLst/>
@@ -2268,14 +2268,14 @@
               <a:buNone/>
             </a:pPr>
             <a:r>
-              <a:rPr lang="en-US" sz="850" dirty="0">
-                <a:solidFill>
-                  <a:srgbClr val="FFD060"/>
-                </a:solidFill>
-              </a:rPr>
-              <a:t>SWE-Bench Multilingual</a:t>
-            </a:r>
-            <a:endParaRPr lang="en-US" sz="850" dirty="0"/>
+              <a:rPr lang="en-US" sz="700" b="1" dirty="0">
+                <a:solidFill>
+                  <a:srgbClr val="4A90D9"/>
+                </a:solidFill>
+              </a:rPr>
+              <a:t>6</a:t>
+            </a:r>
+            <a:endParaRPr lang="en-US" sz="700" dirty="0"/>
           </a:p>
         </p:txBody>
       </p:sp>
@@ -2287,8 +2287,8 @@
         </p:nvSpPr>
         <p:spPr>
           <a:xfrm>
-            <a:off x="5181451" y="1767986"/>
-            <a:ext cx="106070" cy="106070"/>
+            <a:off x="5284204" y="1759595"/>
+            <a:ext cx="102413" cy="102413"/>
           </a:xfrm>
           <a:prstGeom prst="ellipse">
             <a:avLst/>
@@ -2312,8 +2312,8 @@
         </p:nvSpPr>
         <p:spPr>
           <a:xfrm>
-            <a:off x="4633982" y="1555966"/>
-            <a:ext cx="1188720" cy="219456"/>
+            <a:off x="5219030" y="1582224"/>
+            <a:ext cx="237744" cy="164592"/>
           </a:xfrm>
           <a:prstGeom prst="rect">
             <a:avLst/>
@@ -2329,14 +2329,14 @@
               <a:buNone/>
             </a:pPr>
             <a:r>
-              <a:rPr lang="en-US" sz="850" dirty="0">
-                <a:solidFill>
-                  <a:srgbClr val="70B8E8"/>
-                </a:solidFill>
-              </a:rPr>
-              <a:t>BigCodeBench</a:t>
-            </a:r>
-            <a:endParaRPr lang="en-US" sz="850" dirty="0"/>
+              <a:rPr lang="en-US" sz="700" b="1" dirty="0">
+                <a:solidFill>
+                  <a:srgbClr val="4A90D9"/>
+                </a:solidFill>
+              </a:rPr>
+              <a:t>7</a:t>
+            </a:r>
+            <a:endParaRPr lang="en-US" sz="700" dirty="0"/>
           </a:p>
         </p:txBody>
       </p:sp>
@@ -2348,8 +2348,8 @@
         </p:nvSpPr>
         <p:spPr>
           <a:xfrm>
-            <a:off x="6600699" y="2405335"/>
-            <a:ext cx="106070" cy="106070"/>
+            <a:off x="6543116" y="2324942"/>
+            <a:ext cx="102413" cy="102413"/>
           </a:xfrm>
           <a:prstGeom prst="ellipse">
             <a:avLst/>
@@ -2373,8 +2373,8 @@
         </p:nvSpPr>
         <p:spPr>
           <a:xfrm>
-            <a:off x="6179550" y="2250043"/>
-            <a:ext cx="1188720" cy="219456"/>
+            <a:off x="6576294" y="2191738"/>
+            <a:ext cx="237744" cy="164592"/>
           </a:xfrm>
           <a:prstGeom prst="rect">
             <a:avLst/>
@@ -2390,14 +2390,14 @@
               <a:buNone/>
             </a:pPr>
             <a:r>
-              <a:rPr lang="en-US" sz="850" dirty="0">
-                <a:solidFill>
-                  <a:srgbClr val="70B8E8"/>
-                </a:solidFill>
-              </a:rPr>
-              <a:t>SciCode</a:t>
-            </a:r>
-            <a:endParaRPr lang="en-US" sz="850" dirty="0"/>
+              <a:rPr lang="en-US" sz="700" b="1" dirty="0">
+                <a:solidFill>
+                  <a:srgbClr val="4A90D9"/>
+                </a:solidFill>
+              </a:rPr>
+              <a:t>8</a:t>
+            </a:r>
+            <a:endParaRPr lang="en-US" sz="700" dirty="0"/>
           </a:p>
         </p:txBody>
       </p:sp>
@@ -2409,15 +2409,15 @@
         </p:nvSpPr>
         <p:spPr>
           <a:xfrm>
-            <a:off x="5589249" y="3353163"/>
-            <a:ext cx="201168" cy="201168"/>
+            <a:off x="5579741" y="3332320"/>
+            <a:ext cx="237744" cy="237744"/>
           </a:xfrm>
           <a:prstGeom prst="ellipse">
             <a:avLst/>
           </a:prstGeom>
           <a:solidFill>
             <a:srgbClr val="00E5A0">
-              <a:alpha val="45000"/>
+              <a:alpha val="40000"/>
             </a:srgbClr>
           </a:solidFill>
           <a:ln w="12700">
@@ -2436,8 +2436,8 @@
         </p:nvSpPr>
         <p:spPr>
           <a:xfrm>
-            <a:off x="5636798" y="3400712"/>
-            <a:ext cx="106070" cy="106070"/>
+            <a:off x="5632776" y="3385355"/>
+            <a:ext cx="131674" cy="131674"/>
           </a:xfrm>
           <a:prstGeom prst="ellipse">
             <a:avLst/>
@@ -2461,8 +2461,8 @@
         </p:nvSpPr>
         <p:spPr>
           <a:xfrm>
-            <a:off x="5288629" y="3287812"/>
-            <a:ext cx="1188720" cy="219456"/>
+            <a:off x="5711438" y="3321429"/>
+            <a:ext cx="237744" cy="164592"/>
           </a:xfrm>
           <a:prstGeom prst="rect">
             <a:avLst/>
@@ -2478,14 +2478,14 @@
               <a:buNone/>
             </a:pPr>
             <a:r>
-              <a:rPr lang="en-US" sz="850" b="1" dirty="0">
+              <a:rPr lang="en-US" sz="700" b="1" dirty="0">
                 <a:solidFill>
                   <a:srgbClr val="00E5A0"/>
                 </a:solidFill>
               </a:rPr>
-              <a:t>MRCR v2 ✓</a:t>
-            </a:r>
-            <a:endParaRPr lang="en-US" sz="850" dirty="0"/>
+              <a:t>1</a:t>
+            </a:r>
+            <a:endParaRPr lang="en-US" sz="700" dirty="0"/>
           </a:p>
         </p:txBody>
       </p:sp>
@@ -2497,8 +2497,8 @@
         </p:nvSpPr>
         <p:spPr>
           <a:xfrm>
-            <a:off x="6205989" y="2973649"/>
-            <a:ext cx="106070" cy="106070"/>
+            <a:off x="6231072" y="2999002"/>
+            <a:ext cx="102413" cy="102413"/>
           </a:xfrm>
           <a:prstGeom prst="ellipse">
             <a:avLst/>
@@ -2522,8 +2522,8 @@
         </p:nvSpPr>
         <p:spPr>
           <a:xfrm>
-            <a:off x="5815953" y="2831539"/>
-            <a:ext cx="1188720" cy="219456"/>
+            <a:off x="6284740" y="2894807"/>
+            <a:ext cx="237744" cy="164592"/>
           </a:xfrm>
           <a:prstGeom prst="rect">
             <a:avLst/>
@@ -2539,14 +2539,14 @@
               <a:buNone/>
             </a:pPr>
             <a:r>
-              <a:rPr lang="en-US" sz="850" dirty="0">
-                <a:solidFill>
-                  <a:srgbClr val="FFD060"/>
-                </a:solidFill>
-              </a:rPr>
-              <a:t>GraphWalks BFS</a:t>
-            </a:r>
-            <a:endParaRPr lang="en-US" sz="850" dirty="0"/>
+              <a:rPr lang="en-US" sz="700" b="1" dirty="0">
+                <a:solidFill>
+                  <a:srgbClr val="7B68EE"/>
+                </a:solidFill>
+              </a:rPr>
+              <a:t>2</a:t>
+            </a:r>
+            <a:endParaRPr lang="en-US" sz="700" dirty="0"/>
           </a:p>
         </p:txBody>
       </p:sp>
@@ -2558,8 +2558,8 @@
         </p:nvSpPr>
         <p:spPr>
           <a:xfrm>
-            <a:off x="6304065" y="3206543"/>
-            <a:ext cx="106070" cy="106070"/>
+            <a:off x="6314674" y="3205817"/>
+            <a:ext cx="102413" cy="102413"/>
           </a:xfrm>
           <a:prstGeom prst="ellipse">
             <a:avLst/>
@@ -2583,8 +2583,8 @@
         </p:nvSpPr>
         <p:spPr>
           <a:xfrm>
-            <a:off x="5929557" y="3101308"/>
-            <a:ext cx="1188720" cy="219456"/>
+            <a:off x="6378705" y="3127261"/>
+            <a:ext cx="237744" cy="164592"/>
           </a:xfrm>
           <a:prstGeom prst="rect">
             <a:avLst/>
@@ -2600,14 +2600,14 @@
               <a:buNone/>
             </a:pPr>
             <a:r>
-              <a:rPr lang="en-US" sz="850" dirty="0">
-                <a:solidFill>
-                  <a:srgbClr val="FFD060"/>
-                </a:solidFill>
-              </a:rPr>
-              <a:t>NoLiMa</a:t>
-            </a:r>
-            <a:endParaRPr lang="en-US" sz="850" dirty="0"/>
+              <a:rPr lang="en-US" sz="700" b="1" dirty="0">
+                <a:solidFill>
+                  <a:srgbClr val="7B68EE"/>
+                </a:solidFill>
+              </a:rPr>
+              <a:t>3</a:t>
+            </a:r>
+            <a:endParaRPr lang="en-US" sz="700" dirty="0"/>
           </a:p>
         </p:txBody>
       </p:sp>
@@ -2619,8 +2619,8 @@
         </p:nvSpPr>
         <p:spPr>
           <a:xfrm>
-            <a:off x="6346261" y="3455698"/>
-            <a:ext cx="106070" cy="106070"/>
+            <a:off x="6355091" y="3425198"/>
+            <a:ext cx="102413" cy="102413"/>
           </a:xfrm>
           <a:prstGeom prst="ellipse">
             <a:avLst/>
@@ -2644,8 +2644,8 @@
         </p:nvSpPr>
         <p:spPr>
           <a:xfrm>
-            <a:off x="5978434" y="3389912"/>
-            <a:ext cx="1188720" cy="219456"/>
+            <a:off x="6424133" y="3373838"/>
+            <a:ext cx="237744" cy="164592"/>
           </a:xfrm>
           <a:prstGeom prst="rect">
             <a:avLst/>
@@ -2661,14 +2661,14 @@
               <a:buNone/>
             </a:pPr>
             <a:r>
-              <a:rPr lang="en-US" sz="850" dirty="0">
-                <a:solidFill>
-                  <a:srgbClr val="FFD060"/>
-                </a:solidFill>
-              </a:rPr>
-              <a:t>RULER</a:t>
-            </a:r>
-            <a:endParaRPr lang="en-US" sz="850" dirty="0"/>
+              <a:rPr lang="en-US" sz="700" b="1" dirty="0">
+                <a:solidFill>
+                  <a:srgbClr val="7B68EE"/>
+                </a:solidFill>
+              </a:rPr>
+              <a:t>4</a:t>
+            </a:r>
+            <a:endParaRPr lang="en-US" sz="700" dirty="0"/>
           </a:p>
         </p:txBody>
       </p:sp>
@@ -2680,8 +2680,8 @@
         </p:nvSpPr>
         <p:spPr>
           <a:xfrm>
-            <a:off x="6927433" y="3025149"/>
-            <a:ext cx="106070" cy="106070"/>
+            <a:off x="6938042" y="3024423"/>
+            <a:ext cx="102413" cy="102413"/>
           </a:xfrm>
           <a:prstGeom prst="ellipse">
             <a:avLst/>
@@ -2705,8 +2705,8 @@
         </p:nvSpPr>
         <p:spPr>
           <a:xfrm>
-            <a:off x="6535366" y="2925024"/>
-            <a:ext cx="1188720" cy="219456"/>
+            <a:off x="7002074" y="2945867"/>
+            <a:ext cx="237744" cy="164592"/>
           </a:xfrm>
           <a:prstGeom prst="rect">
             <a:avLst/>
@@ -2722,14 +2722,14 @@
               <a:buNone/>
             </a:pPr>
             <a:r>
-              <a:rPr lang="en-US" sz="850" dirty="0">
-                <a:solidFill>
-                  <a:srgbClr val="70B8E8"/>
-                </a:solidFill>
-              </a:rPr>
-              <a:t>LongBench v2</a:t>
-            </a:r>
-            <a:endParaRPr lang="en-US" sz="850" dirty="0"/>
+              <a:rPr lang="en-US" sz="700" b="1" dirty="0">
+                <a:solidFill>
+                  <a:srgbClr val="7B68EE"/>
+                </a:solidFill>
+              </a:rPr>
+              <a:t>5</a:t>
+            </a:r>
+            <a:endParaRPr lang="en-US" sz="700" dirty="0"/>
           </a:p>
         </p:txBody>
       </p:sp>
@@ -2741,15 +2741,15 @@
         </p:nvSpPr>
         <p:spPr>
           <a:xfrm>
-            <a:off x="6292226" y="3597749"/>
-            <a:ext cx="201168" cy="201168"/>
+            <a:off x="6273502" y="3643684"/>
+            <a:ext cx="237744" cy="237744"/>
           </a:xfrm>
           <a:prstGeom prst="ellipse">
             <a:avLst/>
           </a:prstGeom>
           <a:solidFill>
             <a:srgbClr val="00E5A0">
-              <a:alpha val="45000"/>
+              <a:alpha val="40000"/>
             </a:srgbClr>
           </a:solidFill>
           <a:ln w="12700">
@@ -2768,8 +2768,8 @@
         </p:nvSpPr>
         <p:spPr>
           <a:xfrm>
-            <a:off x="6339775" y="3645298"/>
-            <a:ext cx="106070" cy="106070"/>
+            <a:off x="6326537" y="3696719"/>
+            <a:ext cx="131674" cy="131674"/>
           </a:xfrm>
           <a:prstGeom prst="ellipse">
             <a:avLst/>
@@ -2793,8 +2793,8 @@
         </p:nvSpPr>
         <p:spPr>
           <a:xfrm>
-            <a:off x="5970921" y="3609532"/>
-            <a:ext cx="1188720" cy="219456"/>
+            <a:off x="6408484" y="3695463"/>
+            <a:ext cx="237744" cy="164592"/>
           </a:xfrm>
           <a:prstGeom prst="rect">
             <a:avLst/>
@@ -2810,14 +2810,14 @@
               <a:buNone/>
             </a:pPr>
             <a:r>
-              <a:rPr lang="en-US" sz="850" b="1" dirty="0">
+              <a:rPr lang="en-US" sz="700" b="1" dirty="0">
                 <a:solidFill>
                   <a:srgbClr val="00E5A0"/>
                 </a:solidFill>
               </a:rPr>
-              <a:t>MathVista ✓</a:t>
-            </a:r>
-            <a:endParaRPr lang="en-US" sz="850" dirty="0"/>
+              <a:t>1</a:t>
+            </a:r>
+            <a:endParaRPr lang="en-US" sz="700" dirty="0"/>
           </a:p>
         </p:txBody>
       </p:sp>
@@ -2829,8 +2829,8 @@
         </p:nvSpPr>
         <p:spPr>
           <a:xfrm>
-            <a:off x="5802168" y="4461633"/>
-            <a:ext cx="106070" cy="106070"/>
+            <a:off x="5862826" y="4437694"/>
+            <a:ext cx="102413" cy="102413"/>
           </a:xfrm>
           <a:prstGeom prst="ellipse">
             <a:avLst/>
@@ -2854,8 +2854,8 @@
         </p:nvSpPr>
         <p:spPr>
           <a:xfrm>
-            <a:off x="5348193" y="4555121"/>
-            <a:ext cx="1188720" cy="219456"/>
+            <a:off x="5870843" y="4511849"/>
+            <a:ext cx="237744" cy="164592"/>
           </a:xfrm>
           <a:prstGeom prst="rect">
             <a:avLst/>
@@ -2871,14 +2871,14 @@
               <a:buNone/>
             </a:pPr>
             <a:r>
-              <a:rPr lang="en-US" sz="850" dirty="0">
-                <a:solidFill>
-                  <a:srgbClr val="FFD060"/>
-                </a:solidFill>
-              </a:rPr>
-              <a:t>MMMU-Pro</a:t>
-            </a:r>
-            <a:endParaRPr lang="en-US" sz="850" dirty="0"/>
+              <a:rPr lang="en-US" sz="700" b="1" dirty="0">
+                <a:solidFill>
+                  <a:srgbClr val="F0A500"/>
+                </a:solidFill>
+              </a:rPr>
+              <a:t>2</a:t>
+            </a:r>
+            <a:endParaRPr lang="en-US" sz="700" dirty="0"/>
           </a:p>
         </p:txBody>
       </p:sp>
@@ -2890,8 +2890,8 @@
         </p:nvSpPr>
         <p:spPr>
           <a:xfrm>
-            <a:off x="6984272" y="3723500"/>
-            <a:ext cx="106070" cy="106070"/>
+            <a:off x="6980082" y="3826591"/>
+            <a:ext cx="102413" cy="102413"/>
           </a:xfrm>
           <a:prstGeom prst="ellipse">
             <a:avLst/>
@@ -2915,8 +2915,8 @@
         </p:nvSpPr>
         <p:spPr>
           <a:xfrm>
-            <a:off x="6597263" y="3685532"/>
-            <a:ext cx="1188720" cy="219456"/>
+            <a:off x="7047398" y="3810704"/>
+            <a:ext cx="237744" cy="164592"/>
           </a:xfrm>
           <a:prstGeom prst="rect">
             <a:avLst/>
@@ -2932,14 +2932,14 @@
               <a:buNone/>
             </a:pPr>
             <a:r>
-              <a:rPr lang="en-US" sz="850" dirty="0">
-                <a:solidFill>
-                  <a:srgbClr val="70B8E8"/>
-                </a:solidFill>
-              </a:rPr>
-              <a:t>CharXiv</a:t>
-            </a:r>
-            <a:endParaRPr lang="en-US" sz="850" dirty="0"/>
+              <a:rPr lang="en-US" sz="700" b="1" dirty="0">
+                <a:solidFill>
+                  <a:srgbClr val="F0A500"/>
+                </a:solidFill>
+              </a:rPr>
+              <a:t>3</a:t>
+            </a:r>
+            <a:endParaRPr lang="en-US" sz="700" dirty="0"/>
           </a:p>
         </p:txBody>
       </p:sp>
@@ -2951,8 +2951,8 @@
         </p:nvSpPr>
         <p:spPr>
           <a:xfrm>
-            <a:off x="6916174" y="4038249"/>
-            <a:ext cx="106070" cy="106070"/>
+            <a:off x="6907448" y="4100470"/>
+            <a:ext cx="102413" cy="102413"/>
           </a:xfrm>
           <a:prstGeom prst="ellipse">
             <a:avLst/>
@@ -2976,8 +2976,8 @@
         </p:nvSpPr>
         <p:spPr>
           <a:xfrm>
-            <a:off x="6523104" y="4028295"/>
-            <a:ext cx="1188720" cy="219456"/>
+            <a:off x="6969090" y="4105980"/>
+            <a:ext cx="237744" cy="164592"/>
           </a:xfrm>
           <a:prstGeom prst="rect">
             <a:avLst/>
@@ -2993,14 +2993,14 @@
               <a:buNone/>
             </a:pPr>
             <a:r>
-              <a:rPr lang="en-US" sz="850" dirty="0">
-                <a:solidFill>
-                  <a:srgbClr val="70B8E8"/>
-                </a:solidFill>
-              </a:rPr>
-              <a:t>CharXiv-R</a:t>
-            </a:r>
-            <a:endParaRPr lang="en-US" sz="850" dirty="0"/>
+              <a:rPr lang="en-US" sz="700" b="1" dirty="0">
+                <a:solidFill>
+                  <a:srgbClr val="F0A500"/>
+                </a:solidFill>
+              </a:rPr>
+              <a:t>4</a:t>
+            </a:r>
+            <a:endParaRPr lang="en-US" sz="700" dirty="0"/>
           </a:p>
         </p:txBody>
       </p:sp>
@@ -3012,8 +3012,8 @@
         </p:nvSpPr>
         <p:spPr>
           <a:xfrm>
-            <a:off x="6791445" y="4335145"/>
-            <a:ext cx="106070" cy="106070"/>
+            <a:off x="6791703" y="4359099"/>
+            <a:ext cx="102413" cy="102413"/>
           </a:xfrm>
           <a:prstGeom prst="ellipse">
             <a:avLst/>
@@ -3037,8 +3037,8 @@
         </p:nvSpPr>
         <p:spPr>
           <a:xfrm>
-            <a:off x="6387274" y="4351617"/>
-            <a:ext cx="1188720" cy="219456"/>
+            <a:off x="6844302" y="4384814"/>
+            <a:ext cx="237744" cy="164592"/>
           </a:xfrm>
           <a:prstGeom prst="rect">
             <a:avLst/>
@@ -3054,14 +3054,14 @@
               <a:buNone/>
             </a:pPr>
             <a:r>
-              <a:rPr lang="en-US" sz="850" dirty="0">
-                <a:solidFill>
-                  <a:srgbClr val="70B8E8"/>
-                </a:solidFill>
-              </a:rPr>
-              <a:t>DocVQA</a:t>
-            </a:r>
-            <a:endParaRPr lang="en-US" sz="850" dirty="0"/>
+              <a:rPr lang="en-US" sz="700" b="1" dirty="0">
+                <a:solidFill>
+                  <a:srgbClr val="F0A500"/>
+                </a:solidFill>
+              </a:rPr>
+              <a:t>5</a:t>
+            </a:r>
+            <a:endParaRPr lang="en-US" sz="700" dirty="0"/>
           </a:p>
         </p:txBody>
       </p:sp>
@@ -3073,8 +3073,8 @@
         </p:nvSpPr>
         <p:spPr>
           <a:xfrm>
-            <a:off x="6614326" y="4604094"/>
-            <a:ext cx="106070" cy="106070"/>
+            <a:off x="6635860" y="4595740"/>
+            <a:ext cx="102413" cy="102413"/>
           </a:xfrm>
           <a:prstGeom prst="ellipse">
             <a:avLst/>
@@ -3098,8 +3098,8 @@
         </p:nvSpPr>
         <p:spPr>
           <a:xfrm>
-            <a:off x="6194390" y="4644503"/>
-            <a:ext cx="1188720" cy="219456"/>
+            <a:off x="6676284" y="4639943"/>
+            <a:ext cx="237744" cy="164592"/>
           </a:xfrm>
           <a:prstGeom prst="rect">
             <a:avLst/>
@@ -3115,14 +3115,14 @@
               <a:buNone/>
             </a:pPr>
             <a:r>
-              <a:rPr lang="en-US" sz="850" dirty="0">
-                <a:solidFill>
-                  <a:srgbClr val="70B8E8"/>
-                </a:solidFill>
-              </a:rPr>
-              <a:t>MathVision</a:t>
-            </a:r>
-            <a:endParaRPr lang="en-US" sz="850" dirty="0"/>
+              <a:rPr lang="en-US" sz="700" b="1" dirty="0">
+                <a:solidFill>
+                  <a:srgbClr val="F0A500"/>
+                </a:solidFill>
+              </a:rPr>
+              <a:t>6</a:t>
+            </a:r>
+            <a:endParaRPr lang="en-US" sz="700" dirty="0"/>
           </a:p>
         </p:txBody>
       </p:sp>
@@ -3134,8 +3134,8 @@
         </p:nvSpPr>
         <p:spPr>
           <a:xfrm>
-            <a:off x="6390839" y="4835951"/>
-            <a:ext cx="106070" cy="106070"/>
+            <a:off x="6443980" y="4804229"/>
+            <a:ext cx="102413" cy="102413"/>
           </a:xfrm>
           <a:prstGeom prst="ellipse">
             <a:avLst/>
@@ -3159,8 +3159,8 @@
         </p:nvSpPr>
         <p:spPr>
           <a:xfrm>
-            <a:off x="5951011" y="4896997"/>
-            <a:ext cx="1188720" cy="219456"/>
+            <a:off x="6469413" y="4864720"/>
+            <a:ext cx="237744" cy="164592"/>
           </a:xfrm>
           <a:prstGeom prst="rect">
             <a:avLst/>
@@ -3176,14 +3176,14 @@
               <a:buNone/>
             </a:pPr>
             <a:r>
-              <a:rPr lang="en-US" sz="850" dirty="0">
-                <a:solidFill>
-                  <a:srgbClr val="70B8E8"/>
-                </a:solidFill>
-              </a:rPr>
-              <a:t>MMVU</a:t>
-            </a:r>
-            <a:endParaRPr lang="en-US" sz="850" dirty="0"/>
+              <a:rPr lang="en-US" sz="700" b="1" dirty="0">
+                <a:solidFill>
+                  <a:srgbClr val="F0A500"/>
+                </a:solidFill>
+              </a:rPr>
+              <a:t>7</a:t>
+            </a:r>
+            <a:endParaRPr lang="en-US" sz="700" dirty="0"/>
           </a:p>
         </p:txBody>
       </p:sp>
@@ -3195,8 +3195,8 @@
         </p:nvSpPr>
         <p:spPr>
           <a:xfrm>
-            <a:off x="6128581" y="5022834"/>
-            <a:ext cx="106070" cy="106070"/>
+            <a:off x="6221060" y="4979136"/>
+            <a:ext cx="102413" cy="102413"/>
           </a:xfrm>
           <a:prstGeom prst="ellipse">
             <a:avLst/>
@@ -3220,8 +3220,8 @@
         </p:nvSpPr>
         <p:spPr>
           <a:xfrm>
-            <a:off x="5665411" y="5100514"/>
-            <a:ext cx="1188720" cy="219456"/>
+            <a:off x="6229078" y="5053292"/>
+            <a:ext cx="237744" cy="164592"/>
           </a:xfrm>
           <a:prstGeom prst="rect">
             <a:avLst/>
@@ -3237,14 +3237,14 @@
               <a:buNone/>
             </a:pPr>
             <a:r>
-              <a:rPr lang="en-US" sz="850" dirty="0">
-                <a:solidFill>
-                  <a:srgbClr val="70B8E8"/>
-                </a:solidFill>
-              </a:rPr>
-              <a:t>Chartography</a:t>
-            </a:r>
-            <a:endParaRPr lang="en-US" sz="850" dirty="0"/>
+              <a:rPr lang="en-US" sz="700" b="1" dirty="0">
+                <a:solidFill>
+                  <a:srgbClr val="F0A500"/>
+                </a:solidFill>
+              </a:rPr>
+              <a:t>8</a:t>
+            </a:r>
+            <a:endParaRPr lang="en-US" sz="700" dirty="0"/>
           </a:p>
         </p:txBody>
       </p:sp>
@@ -3256,8 +3256,8 @@
         </p:nvSpPr>
         <p:spPr>
           <a:xfrm>
-            <a:off x="5345453" y="3904092"/>
-            <a:ext cx="106070" cy="106070"/>
+            <a:off x="5360934" y="3911838"/>
+            <a:ext cx="102413" cy="102413"/>
           </a:xfrm>
           <a:prstGeom prst="ellipse">
             <a:avLst/>
@@ -3281,8 +3281,8 @@
         </p:nvSpPr>
         <p:spPr>
           <a:xfrm>
-            <a:off x="4851612" y="4042883"/>
-            <a:ext cx="1188720" cy="219456"/>
+            <a:off x="5329476" y="4003899"/>
+            <a:ext cx="237744" cy="164592"/>
           </a:xfrm>
           <a:prstGeom prst="rect">
             <a:avLst/>
@@ -3298,14 +3298,14 @@
               <a:buNone/>
             </a:pPr>
             <a:r>
-              <a:rPr lang="en-US" sz="850" b="1" dirty="0">
-                <a:solidFill>
-                  <a:srgbClr val="FF9088"/>
-                </a:solidFill>
-              </a:rPr>
-              <a:t>MCP Atlas</a:t>
-            </a:r>
-            <a:endParaRPr lang="en-US" sz="850" dirty="0"/>
+              <a:rPr lang="en-US" sz="700" b="1" dirty="0">
+                <a:solidFill>
+                  <a:srgbClr val="3DAA6E"/>
+                </a:solidFill>
+              </a:rPr>
+              <a:t>1</a:t>
+            </a:r>
+            <a:endParaRPr lang="en-US" sz="700" dirty="0"/>
           </a:p>
         </p:txBody>
       </p:sp>
@@ -3317,15 +3317,15 @@
         </p:nvSpPr>
         <p:spPr>
           <a:xfrm>
-            <a:off x="5175013" y="3866942"/>
-            <a:ext cx="201168" cy="201168"/>
+            <a:off x="5156091" y="3857776"/>
+            <a:ext cx="237744" cy="237744"/>
           </a:xfrm>
           <a:prstGeom prst="ellipse">
             <a:avLst/>
           </a:prstGeom>
           <a:solidFill>
             <a:srgbClr val="00E5A0">
-              <a:alpha val="45000"/>
+              <a:alpha val="40000"/>
             </a:srgbClr>
           </a:solidFill>
           <a:ln w="12700">
@@ -3344,8 +3344,8 @@
         </p:nvSpPr>
         <p:spPr>
           <a:xfrm>
-            <a:off x="5222562" y="3914491"/>
-            <a:ext cx="106070" cy="106070"/>
+            <a:off x="5209126" y="3910811"/>
+            <a:ext cx="131674" cy="131674"/>
           </a:xfrm>
           <a:prstGeom prst="ellipse">
             <a:avLst/>
@@ -3369,8 +3369,8 @@
         </p:nvSpPr>
         <p:spPr>
           <a:xfrm>
-            <a:off x="4667276" y="4058481"/>
-            <a:ext cx="1188720" cy="219456"/>
+            <a:off x="5146572" y="4022037"/>
+            <a:ext cx="237744" cy="164592"/>
           </a:xfrm>
           <a:prstGeom prst="rect">
             <a:avLst/>
@@ -3386,14 +3386,14 @@
               <a:buNone/>
             </a:pPr>
             <a:r>
-              <a:rPr lang="en-US" sz="850" b="1" dirty="0">
+              <a:rPr lang="en-US" sz="700" b="1" dirty="0">
                 <a:solidFill>
                   <a:srgbClr val="00E5A0"/>
                 </a:solidFill>
               </a:rPr>
-              <a:t>tau2-bench ✓</a:t>
-            </a:r>
-            <a:endParaRPr lang="en-US" sz="850" dirty="0"/>
+              <a:t>2</a:t>
+            </a:r>
+            <a:endParaRPr lang="en-US" sz="700" dirty="0"/>
           </a:p>
         </p:txBody>
       </p:sp>
@@ -3405,8 +3405,8 @@
         </p:nvSpPr>
         <p:spPr>
           <a:xfrm>
-            <a:off x="5102295" y="3887176"/>
-            <a:ext cx="106070" cy="106070"/>
+            <a:off x="5089783" y="3892974"/>
+            <a:ext cx="102413" cy="102413"/>
           </a:xfrm>
           <a:prstGeom prst="ellipse">
             <a:avLst/>
@@ -3430,8 +3430,8 @@
         </p:nvSpPr>
         <p:spPr>
           <a:xfrm>
-            <a:off x="4486875" y="4017508"/>
-            <a:ext cx="1188720" cy="219456"/>
+            <a:off x="4967941" y="3978748"/>
+            <a:ext cx="237744" cy="164592"/>
           </a:xfrm>
           <a:prstGeom prst="rect">
             <a:avLst/>
@@ -3447,14 +3447,14 @@
               <a:buNone/>
             </a:pPr>
             <a:r>
-              <a:rPr lang="en-US" sz="850" b="1" dirty="0">
-                <a:solidFill>
-                  <a:srgbClr val="FF9088"/>
-                </a:solidFill>
-              </a:rPr>
-              <a:t>Agents Last Exam</a:t>
-            </a:r>
-            <a:endParaRPr lang="en-US" sz="850" dirty="0"/>
+              <a:rPr lang="en-US" sz="700" b="1" dirty="0">
+                <a:solidFill>
+                  <a:srgbClr val="3DAA6E"/>
+                </a:solidFill>
+              </a:rPr>
+              <a:t>3</a:t>
+            </a:r>
+            <a:endParaRPr lang="en-US" sz="700" dirty="0"/>
           </a:p>
         </p:txBody>
       </p:sp>
@@ -3466,8 +3466,8 @@
         </p:nvSpPr>
         <p:spPr>
           <a:xfrm>
-            <a:off x="5590678" y="4556337"/>
-            <a:ext cx="106070" cy="106070"/>
+            <a:off x="5544383" y="4582132"/>
+            <a:ext cx="102413" cy="102413"/>
           </a:xfrm>
           <a:prstGeom prst="ellipse">
             <a:avLst/>
@@ -3491,8 +3491,8 @@
         </p:nvSpPr>
         <p:spPr>
           <a:xfrm>
-            <a:off x="5103217" y="4664820"/>
-            <a:ext cx="1188720" cy="219456"/>
+            <a:off x="5512924" y="4674193"/>
+            <a:ext cx="237744" cy="164592"/>
           </a:xfrm>
           <a:prstGeom prst="rect">
             <a:avLst/>
@@ -3508,14 +3508,14 @@
               <a:buNone/>
             </a:pPr>
             <a:r>
-              <a:rPr lang="en-US" sz="850" dirty="0">
-                <a:solidFill>
-                  <a:srgbClr val="FFD060"/>
-                </a:solidFill>
-              </a:rPr>
-              <a:t>BrowseComp</a:t>
-            </a:r>
-            <a:endParaRPr lang="en-US" sz="850" dirty="0"/>
+              <a:rPr lang="en-US" sz="700" b="1" dirty="0">
+                <a:solidFill>
+                  <a:srgbClr val="3DAA6E"/>
+                </a:solidFill>
+              </a:rPr>
+              <a:t>4</a:t>
+            </a:r>
+            <a:endParaRPr lang="en-US" sz="700" dirty="0"/>
           </a:p>
         </p:txBody>
       </p:sp>
@@ -3527,8 +3527,8 @@
         </p:nvSpPr>
         <p:spPr>
           <a:xfrm>
-            <a:off x="5314936" y="4608510"/>
-            <a:ext cx="106070" cy="106070"/>
+            <a:off x="5299591" y="4620367"/>
+            <a:ext cx="102413" cy="102413"/>
           </a:xfrm>
           <a:prstGeom prst="ellipse">
             <a:avLst/>
@@ -3552,8 +3552,8 @@
         </p:nvSpPr>
         <p:spPr>
           <a:xfrm>
-            <a:off x="4783816" y="4725254"/>
-            <a:ext cx="1188720" cy="219456"/>
+            <a:off x="5237786" y="4717168"/>
+            <a:ext cx="237744" cy="164592"/>
           </a:xfrm>
           <a:prstGeom prst="rect">
             <a:avLst/>
@@ -3569,14 +3569,14 @@
               <a:buNone/>
             </a:pPr>
             <a:r>
-              <a:rPr lang="en-US" sz="850" dirty="0">
-                <a:solidFill>
-                  <a:srgbClr val="FFD060"/>
-                </a:solidFill>
-              </a:rPr>
-              <a:t>OSWorld 2.0</a:t>
-            </a:r>
-            <a:endParaRPr lang="en-US" sz="850" dirty="0"/>
+              <a:rPr lang="en-US" sz="700" b="1" dirty="0">
+                <a:solidFill>
+                  <a:srgbClr val="3DAA6E"/>
+                </a:solidFill>
+              </a:rPr>
+              <a:t>5</a:t>
+            </a:r>
+            <a:endParaRPr lang="en-US" sz="700" dirty="0"/>
           </a:p>
         </p:txBody>
       </p:sp>
@@ -3588,8 +3588,8 @@
         </p:nvSpPr>
         <p:spPr>
           <a:xfrm>
-            <a:off x="5034979" y="4589034"/>
-            <a:ext cx="106070" cy="106070"/>
+            <a:off x="5052428" y="4603172"/>
+            <a:ext cx="102413" cy="102413"/>
           </a:xfrm>
           <a:prstGeom prst="ellipse">
             <a:avLst/>
@@ -3613,8 +3613,8 @@
         </p:nvSpPr>
         <p:spPr>
           <a:xfrm>
-            <a:off x="4459532" y="4702693"/>
-            <a:ext cx="1188720" cy="219456"/>
+            <a:off x="4959983" y="4697842"/>
+            <a:ext cx="237744" cy="164592"/>
           </a:xfrm>
           <a:prstGeom prst="rect">
             <a:avLst/>
@@ -3630,14 +3630,14 @@
               <a:buNone/>
             </a:pPr>
             <a:r>
-              <a:rPr lang="en-US" sz="850" dirty="0">
-                <a:solidFill>
-                  <a:srgbClr val="FFD060"/>
-                </a:solidFill>
-              </a:rPr>
-              <a:t>BFCL v4</a:t>
-            </a:r>
-            <a:endParaRPr lang="en-US" sz="850" dirty="0"/>
+              <a:rPr lang="en-US" sz="700" b="1" dirty="0">
+                <a:solidFill>
+                  <a:srgbClr val="3DAA6E"/>
+                </a:solidFill>
+              </a:rPr>
+              <a:t>6</a:t>
+            </a:r>
+            <a:endParaRPr lang="en-US" sz="700" dirty="0"/>
           </a:p>
         </p:txBody>
       </p:sp>
@@ -3649,8 +3649,8 @@
         </p:nvSpPr>
         <p:spPr>
           <a:xfrm>
-            <a:off x="4769118" y="4499182"/>
-            <a:ext cx="106070" cy="106070"/>
+            <a:off x="4815288" y="4531410"/>
+            <a:ext cx="102413" cy="102413"/>
           </a:xfrm>
           <a:prstGeom prst="ellipse">
             <a:avLst/>
@@ -3674,8 +3674,8 @@
         </p:nvSpPr>
         <p:spPr>
           <a:xfrm>
-            <a:off x="4151576" y="4598615"/>
-            <a:ext cx="1188720" cy="219456"/>
+            <a:off x="4693446" y="4617183"/>
+            <a:ext cx="237744" cy="164592"/>
           </a:xfrm>
           <a:prstGeom prst="rect">
             <a:avLst/>
@@ -3691,14 +3691,14 @@
               <a:buNone/>
             </a:pPr>
             <a:r>
-              <a:rPr lang="en-US" sz="850" dirty="0">
-                <a:solidFill>
-                  <a:srgbClr val="FFD060"/>
-                </a:solidFill>
-              </a:rPr>
-              <a:t>Toolathlon</a:t>
-            </a:r>
-            <a:endParaRPr lang="en-US" sz="850" dirty="0"/>
+              <a:rPr lang="en-US" sz="700" b="1" dirty="0">
+                <a:solidFill>
+                  <a:srgbClr val="3DAA6E"/>
+                </a:solidFill>
+              </a:rPr>
+              <a:t>7</a:t>
+            </a:r>
+            <a:endParaRPr lang="en-US" sz="700" dirty="0"/>
           </a:p>
         </p:txBody>
       </p:sp>
@@ -3710,8 +3710,8 @@
         </p:nvSpPr>
         <p:spPr>
           <a:xfrm>
-            <a:off x="5129275" y="5255418"/>
-            <a:ext cx="106070" cy="106070"/>
+            <a:off x="5130470" y="5266368"/>
+            <a:ext cx="102413" cy="102413"/>
           </a:xfrm>
           <a:prstGeom prst="ellipse">
             <a:avLst/>
@@ -3735,8 +3735,8 @@
         </p:nvSpPr>
         <p:spPr>
           <a:xfrm>
-            <a:off x="4577162" y="5353798"/>
-            <a:ext cx="1188720" cy="219456"/>
+            <a:off x="5053285" y="5362964"/>
+            <a:ext cx="237744" cy="164592"/>
           </a:xfrm>
           <a:prstGeom prst="rect">
             <a:avLst/>
@@ -3752,14 +3752,14 @@
               <a:buNone/>
             </a:pPr>
             <a:r>
-              <a:rPr lang="en-US" sz="850" dirty="0">
-                <a:solidFill>
-                  <a:srgbClr val="70B8E8"/>
-                </a:solidFill>
-              </a:rPr>
-              <a:t>APEX-Agents</a:t>
-            </a:r>
-            <a:endParaRPr lang="en-US" sz="850" dirty="0"/>
+              <a:rPr lang="en-US" sz="700" b="1" dirty="0">
+                <a:solidFill>
+                  <a:srgbClr val="3DAA6E"/>
+                </a:solidFill>
+              </a:rPr>
+              <a:t>8</a:t>
+            </a:r>
+            <a:endParaRPr lang="en-US" sz="700" dirty="0"/>
           </a:p>
         </p:txBody>
       </p:sp>
@@ -3771,15 +3771,15 @@
         </p:nvSpPr>
         <p:spPr>
           <a:xfrm>
-            <a:off x="4947207" y="3776183"/>
-            <a:ext cx="201168" cy="201168"/>
+            <a:off x="4930508" y="3770906"/>
+            <a:ext cx="237744" cy="237744"/>
           </a:xfrm>
           <a:prstGeom prst="ellipse">
             <a:avLst/>
           </a:prstGeom>
           <a:solidFill>
             <a:srgbClr val="00E5A0">
-              <a:alpha val="45000"/>
+              <a:alpha val="40000"/>
             </a:srgbClr>
           </a:solidFill>
           <a:ln w="12700">
@@ -3798,8 +3798,8 @@
         </p:nvSpPr>
         <p:spPr>
           <a:xfrm>
-            <a:off x="4994756" y="3823732"/>
-            <a:ext cx="106070" cy="106070"/>
+            <a:off x="4983543" y="3823941"/>
+            <a:ext cx="131674" cy="131674"/>
           </a:xfrm>
           <a:prstGeom prst="ellipse">
             <a:avLst/>
@@ -3823,8 +3823,8 @@
         </p:nvSpPr>
         <p:spPr>
           <a:xfrm>
-            <a:off x="4325566" y="3922343"/>
-            <a:ext cx="1188720" cy="219456"/>
+            <a:off x="4845795" y="3906211"/>
+            <a:ext cx="237744" cy="164592"/>
           </a:xfrm>
           <a:prstGeom prst="rect">
             <a:avLst/>
@@ -3840,14 +3840,14 @@
               <a:buNone/>
             </a:pPr>
             <a:r>
-              <a:rPr lang="en-US" sz="850" b="1" dirty="0">
+              <a:rPr lang="en-US" sz="700" b="1" dirty="0">
                 <a:solidFill>
                   <a:srgbClr val="00E5A0"/>
                 </a:solidFill>
               </a:rPr>
-              <a:t>TMMLU+ ✓</a:t>
-            </a:r>
-            <a:endParaRPr lang="en-US" sz="850" dirty="0"/>
+              <a:t>1</a:t>
+            </a:r>
+            <a:endParaRPr lang="en-US" sz="700" dirty="0"/>
           </a:p>
         </p:txBody>
       </p:sp>
@@ -3859,8 +3859,8 @@
         </p:nvSpPr>
         <p:spPr>
           <a:xfrm>
-            <a:off x="4926766" y="3752040"/>
-            <a:ext cx="106070" cy="106070"/>
+            <a:off x="4921238" y="3759299"/>
+            <a:ext cx="102413" cy="102413"/>
           </a:xfrm>
           <a:prstGeom prst="ellipse">
             <a:avLst/>
@@ -3884,8 +3884,8 @@
         </p:nvSpPr>
         <p:spPr>
           <a:xfrm>
-            <a:off x="4223582" y="3814805"/>
-            <a:ext cx="1188720" cy="219456"/>
+            <a:off x="4743213" y="3800514"/>
+            <a:ext cx="237744" cy="164592"/>
           </a:xfrm>
           <a:prstGeom prst="rect">
             <a:avLst/>
@@ -3901,14 +3901,14 @@
               <a:buNone/>
             </a:pPr>
             <a:r>
-              <a:rPr lang="en-US" sz="850" b="1" dirty="0">
-                <a:solidFill>
-                  <a:srgbClr val="FF9088"/>
-                </a:solidFill>
-              </a:rPr>
-              <a:t>TW-LegalBench</a:t>
-            </a:r>
-            <a:endParaRPr lang="en-US" sz="850" dirty="0"/>
+              <a:rPr lang="en-US" sz="700" b="1" dirty="0">
+                <a:solidFill>
+                  <a:srgbClr val="9B59B6"/>
+                </a:solidFill>
+              </a:rPr>
+              <a:t>2</a:t>
+            </a:r>
+            <a:endParaRPr lang="en-US" sz="700" dirty="0"/>
           </a:p>
         </p:txBody>
       </p:sp>
@@ -3920,15 +3920,15 @@
         </p:nvSpPr>
         <p:spPr>
           <a:xfrm>
-            <a:off x="4830751" y="3618391"/>
-            <a:ext cx="201168" cy="201168"/>
+            <a:off x="4800498" y="3594749"/>
+            <a:ext cx="237744" cy="237744"/>
           </a:xfrm>
           <a:prstGeom prst="ellipse">
             <a:avLst/>
           </a:prstGeom>
           <a:solidFill>
             <a:srgbClr val="00E5A0">
-              <a:alpha val="45000"/>
+              <a:alpha val="40000"/>
             </a:srgbClr>
           </a:solidFill>
           <a:ln w="12700">
@@ -3947,8 +3947,8 @@
         </p:nvSpPr>
         <p:spPr>
           <a:xfrm>
-            <a:off x="4878299" y="3665940"/>
-            <a:ext cx="106070" cy="106070"/>
+            <a:off x="4853534" y="3647784"/>
+            <a:ext cx="131674" cy="131674"/>
           </a:xfrm>
           <a:prstGeom prst="ellipse">
             <a:avLst/>
@@ -3972,8 +3972,8 @@
         </p:nvSpPr>
         <p:spPr>
           <a:xfrm>
-            <a:off x="4150882" y="3685654"/>
-            <a:ext cx="1188720" cy="219456"/>
+            <a:off x="4672448" y="3671335"/>
+            <a:ext cx="237744" cy="164592"/>
           </a:xfrm>
           <a:prstGeom prst="rect">
             <a:avLst/>
@@ -3989,14 +3989,14 @@
               <a:buNone/>
             </a:pPr>
             <a:r>
-              <a:rPr lang="en-US" sz="850" b="1" dirty="0">
+              <a:rPr lang="en-US" sz="700" b="1" dirty="0">
                 <a:solidFill>
                   <a:srgbClr val="00E5A0"/>
                 </a:solidFill>
               </a:rPr>
-              <a:t>AIEC ✓</a:t>
-            </a:r>
-            <a:endParaRPr lang="en-US" sz="850" dirty="0"/>
+              <a:t>3</a:t>
+            </a:r>
+            <a:endParaRPr lang="en-US" sz="700" dirty="0"/>
           </a:p>
         </p:txBody>
       </p:sp>
@@ -4008,8 +4008,8 @@
         </p:nvSpPr>
         <p:spPr>
           <a:xfrm>
-            <a:off x="4606469" y="4401532"/>
-            <a:ext cx="106070" cy="106070"/>
+            <a:off x="4568959" y="4385126"/>
+            <a:ext cx="102413" cy="102413"/>
           </a:xfrm>
           <a:prstGeom prst="ellipse">
             <a:avLst/>
@@ -4033,8 +4033,8 @@
         </p:nvSpPr>
         <p:spPr>
           <a:xfrm>
-            <a:off x="3963175" y="4485503"/>
-            <a:ext cx="1188720" cy="219456"/>
+            <a:off x="4416580" y="4452766"/>
+            <a:ext cx="237744" cy="164592"/>
           </a:xfrm>
           <a:prstGeom prst="rect">
             <a:avLst/>
@@ -4050,14 +4050,14 @@
               <a:buNone/>
             </a:pPr>
             <a:r>
-              <a:rPr lang="en-US" sz="850" dirty="0">
-                <a:solidFill>
-                  <a:srgbClr val="FFD060"/>
-                </a:solidFill>
-              </a:rPr>
-              <a:t>MMMLU</a:t>
-            </a:r>
-            <a:endParaRPr lang="en-US" sz="850" dirty="0"/>
+              <a:rPr lang="en-US" sz="700" b="1" dirty="0">
+                <a:solidFill>
+                  <a:srgbClr val="9B59B6"/>
+                </a:solidFill>
+              </a:rPr>
+              <a:t>4</a:t>
+            </a:r>
+            <a:endParaRPr lang="en-US" sz="700" dirty="0"/>
           </a:p>
         </p:txBody>
       </p:sp>
@@ -4069,8 +4069,8 @@
         </p:nvSpPr>
         <p:spPr>
           <a:xfrm>
-            <a:off x="4367616" y="4164712"/>
-            <a:ext cx="106070" cy="106070"/>
+            <a:off x="4362087" y="4171971"/>
+            <a:ext cx="102413" cy="102413"/>
           </a:xfrm>
           <a:prstGeom prst="ellipse">
             <a:avLst/>
@@ -4094,8 +4094,8 @@
         </p:nvSpPr>
         <p:spPr>
           <a:xfrm>
-            <a:off x="3686503" y="4211187"/>
-            <a:ext cx="1188720" cy="219456"/>
+            <a:off x="4184063" y="4213185"/>
+            <a:ext cx="237744" cy="164592"/>
           </a:xfrm>
           <a:prstGeom prst="rect">
             <a:avLst/>
@@ -4111,14 +4111,14 @@
               <a:buNone/>
             </a:pPr>
             <a:r>
-              <a:rPr lang="en-US" sz="850" dirty="0">
-                <a:solidFill>
-                  <a:srgbClr val="FFD060"/>
-                </a:solidFill>
-              </a:rPr>
-              <a:t>GDPval-AA</a:t>
-            </a:r>
-            <a:endParaRPr lang="en-US" sz="850" dirty="0"/>
+              <a:rPr lang="en-US" sz="700" b="1" dirty="0">
+                <a:solidFill>
+                  <a:srgbClr val="9B59B6"/>
+                </a:solidFill>
+              </a:rPr>
+              <a:t>5</a:t>
+            </a:r>
+            <a:endParaRPr lang="en-US" sz="700" dirty="0"/>
           </a:p>
         </p:txBody>
       </p:sp>
@@ -4130,8 +4130,8 @@
         </p:nvSpPr>
         <p:spPr>
           <a:xfrm>
-            <a:off x="4211720" y="3866667"/>
-            <a:ext cx="106070" cy="106070"/>
+            <a:off x="4219378" y="3911461"/>
+            <a:ext cx="102413" cy="102413"/>
           </a:xfrm>
           <a:prstGeom prst="ellipse">
             <a:avLst/>
@@ -4155,8 +4155,8 @@
         </p:nvSpPr>
         <p:spPr>
           <a:xfrm>
-            <a:off x="3505924" y="3865951"/>
-            <a:ext cx="1188720" cy="219456"/>
+            <a:off x="4023662" y="3920381"/>
+            <a:ext cx="237744" cy="164592"/>
           </a:xfrm>
           <a:prstGeom prst="rect">
             <a:avLst/>
@@ -4172,14 +4172,14 @@
               <a:buNone/>
             </a:pPr>
             <a:r>
-              <a:rPr lang="en-US" sz="850" dirty="0">
-                <a:solidFill>
-                  <a:srgbClr val="FFD060"/>
-                </a:solidFill>
-              </a:rPr>
-              <a:t>IFEval</a:t>
-            </a:r>
-            <a:endParaRPr lang="en-US" sz="850" dirty="0"/>
+              <a:rPr lang="en-US" sz="700" b="1" dirty="0">
+                <a:solidFill>
+                  <a:srgbClr val="9B59B6"/>
+                </a:solidFill>
+              </a:rPr>
+              <a:t>6</a:t>
+            </a:r>
+            <a:endParaRPr lang="en-US" sz="700" dirty="0"/>
           </a:p>
         </p:txBody>
       </p:sp>
@@ -4191,8 +4191,8 @@
         </p:nvSpPr>
         <p:spPr>
           <a:xfrm>
-            <a:off x="4225426" y="4927172"/>
-            <a:ext cx="106070" cy="106070"/>
+            <a:off x="4167983" y="4895724"/>
+            <a:ext cx="102413" cy="102413"/>
           </a:xfrm>
           <a:prstGeom prst="ellipse">
             <a:avLst/>
@@ -4216,8 +4216,8 @@
         </p:nvSpPr>
         <p:spPr>
           <a:xfrm>
-            <a:off x="3592866" y="4996337"/>
-            <a:ext cx="1188720" cy="219456"/>
+            <a:off x="4015604" y="4963363"/>
+            <a:ext cx="237744" cy="164592"/>
           </a:xfrm>
           <a:prstGeom prst="rect">
             <a:avLst/>
@@ -4233,14 +4233,14 @@
               <a:buNone/>
             </a:pPr>
             <a:r>
-              <a:rPr lang="en-US" sz="850" dirty="0">
-                <a:solidFill>
-                  <a:srgbClr val="70B8E8"/>
-                </a:solidFill>
-              </a:rPr>
-              <a:t>SimpleQA</a:t>
-            </a:r>
-            <a:endParaRPr lang="en-US" sz="850" dirty="0"/>
+              <a:rPr lang="en-US" sz="700" b="1" dirty="0">
+                <a:solidFill>
+                  <a:srgbClr val="9B59B6"/>
+                </a:solidFill>
+              </a:rPr>
+              <a:t>7</a:t>
+            </a:r>
+            <a:endParaRPr lang="en-US" sz="700" dirty="0"/>
           </a:p>
         </p:txBody>
       </p:sp>
@@ -4252,8 +4252,8 @@
         </p:nvSpPr>
         <p:spPr>
           <a:xfrm>
-            <a:off x="3597118" y="4075845"/>
-            <a:ext cx="106070" cy="106070"/>
+            <a:off x="3613275" y="4144122"/>
+            <a:ext cx="102413" cy="102413"/>
           </a:xfrm>
           <a:prstGeom prst="ellipse">
             <a:avLst/>
@@ -4277,8 +4277,8 @@
         </p:nvSpPr>
         <p:spPr>
           <a:xfrm>
-            <a:off x="2908635" y="4069238"/>
-            <a:ext cx="1188720" cy="219456"/>
+            <a:off x="3417560" y="4153042"/>
+            <a:ext cx="237744" cy="164592"/>
           </a:xfrm>
           <a:prstGeom prst="rect">
             <a:avLst/>
@@ -4294,14 +4294,14 @@
               <a:buNone/>
             </a:pPr>
             <a:r>
-              <a:rPr lang="en-US" sz="850" dirty="0">
-                <a:solidFill>
-                  <a:srgbClr val="70B8E8"/>
-                </a:solidFill>
-              </a:rPr>
-              <a:t>DRCD</a:t>
-            </a:r>
-            <a:endParaRPr lang="en-US" sz="850" dirty="0"/>
+              <a:rPr lang="en-US" sz="700" b="1" dirty="0">
+                <a:solidFill>
+                  <a:srgbClr val="9B59B6"/>
+                </a:solidFill>
+              </a:rPr>
+              <a:t>8</a:t>
+            </a:r>
+            <a:endParaRPr lang="en-US" sz="700" dirty="0"/>
           </a:p>
         </p:txBody>
       </p:sp>
@@ -4313,8 +4313,8 @@
         </p:nvSpPr>
         <p:spPr>
           <a:xfrm>
-            <a:off x="4175039" y="3730930"/>
-            <a:ext cx="106070" cy="106070"/>
+            <a:off x="4162630" y="3706694"/>
+            <a:ext cx="102413" cy="102413"/>
           </a:xfrm>
           <a:prstGeom prst="ellipse">
             <a:avLst/>
@@ -4338,8 +4338,8 @@
         </p:nvSpPr>
         <p:spPr>
           <a:xfrm>
-            <a:off x="3463435" y="3708723"/>
-            <a:ext cx="1188720" cy="219456"/>
+            <a:off x="3959880" y="3690230"/>
+            <a:ext cx="237744" cy="164592"/>
           </a:xfrm>
           <a:prstGeom prst="rect">
             <a:avLst/>
@@ -4355,14 +4355,14 @@
               <a:buNone/>
             </a:pPr>
             <a:r>
-              <a:rPr lang="en-US" sz="850" dirty="0">
-                <a:solidFill>
-                  <a:srgbClr val="FFD060"/>
-                </a:solidFill>
-              </a:rPr>
-              <a:t>MLE-Bench</a:t>
-            </a:r>
-            <a:endParaRPr lang="en-US" sz="850" dirty="0"/>
+              <a:rPr lang="en-US" sz="700" b="1" dirty="0">
+                <a:solidFill>
+                  <a:srgbClr val="E8A020"/>
+                </a:solidFill>
+              </a:rPr>
+              <a:t>1</a:t>
+            </a:r>
+            <a:endParaRPr lang="en-US" sz="700" dirty="0"/>
           </a:p>
         </p:txBody>
       </p:sp>
@@ -4374,8 +4374,8 @@
         </p:nvSpPr>
         <p:spPr>
           <a:xfrm>
-            <a:off x="4177427" y="3283841"/>
-            <a:ext cx="106070" cy="106070"/>
+            <a:off x="4164741" y="3311580"/>
+            <a:ext cx="102413" cy="102413"/>
           </a:xfrm>
           <a:prstGeom prst="ellipse">
             <a:avLst/>
@@ -4399,8 +4399,8 @@
         </p:nvSpPr>
         <p:spPr>
           <a:xfrm>
-            <a:off x="3466202" y="3190845"/>
-            <a:ext cx="1188720" cy="219456"/>
+            <a:off x="3962253" y="3246135"/>
+            <a:ext cx="237744" cy="164592"/>
           </a:xfrm>
           <a:prstGeom prst="rect">
             <a:avLst/>
@@ -4416,14 +4416,14 @@
               <a:buNone/>
             </a:pPr>
             <a:r>
-              <a:rPr lang="en-US" sz="850" dirty="0">
-                <a:solidFill>
-                  <a:srgbClr val="FFD060"/>
-                </a:solidFill>
-              </a:rPr>
-              <a:t>DSBench</a:t>
-            </a:r>
-            <a:endParaRPr lang="en-US" sz="850" dirty="0"/>
+              <a:rPr lang="en-US" sz="700" b="1" dirty="0">
+                <a:solidFill>
+                  <a:srgbClr val="E8A020"/>
+                </a:solidFill>
+              </a:rPr>
+              <a:t>2</a:t>
+            </a:r>
+            <a:endParaRPr lang="en-US" sz="700" dirty="0"/>
           </a:p>
         </p:txBody>
       </p:sp>
@@ -4435,8 +4435,8 @@
         </p:nvSpPr>
         <p:spPr>
           <a:xfrm>
-            <a:off x="3504006" y="3503794"/>
-            <a:ext cx="106070" cy="106070"/>
+            <a:off x="3496691" y="3505573"/>
+            <a:ext cx="102413" cy="102413"/>
           </a:xfrm>
           <a:prstGeom prst="ellipse">
             <a:avLst/>
@@ -4460,8 +4460,8 @@
         </p:nvSpPr>
         <p:spPr>
           <a:xfrm>
-            <a:off x="2807235" y="3446270"/>
-            <a:ext cx="1188720" cy="219456"/>
+            <a:off x="3291867" y="3464607"/>
+            <a:ext cx="237744" cy="164592"/>
           </a:xfrm>
           <a:prstGeom prst="rect">
             <a:avLst/>
@@ -4477,14 +4477,14 @@
               <a:buNone/>
             </a:pPr>
             <a:r>
-              <a:rPr lang="en-US" sz="850" dirty="0">
-                <a:solidFill>
-                  <a:srgbClr val="70B8E8"/>
-                </a:solidFill>
-              </a:rPr>
-              <a:t>SpreadsheetBench</a:t>
-            </a:r>
-            <a:endParaRPr lang="en-US" sz="850" dirty="0"/>
+              <a:rPr lang="en-US" sz="700" b="1" dirty="0">
+                <a:solidFill>
+                  <a:srgbClr val="E8A020"/>
+                </a:solidFill>
+              </a:rPr>
+              <a:t>3</a:t>
+            </a:r>
+            <a:endParaRPr lang="en-US" sz="700" dirty="0"/>
           </a:p>
         </p:txBody>
       </p:sp>
@@ -4496,8 +4496,30 @@
         </p:nvSpPr>
         <p:spPr>
           <a:xfrm>
-            <a:off x="9189720" y="1143000"/>
-            <a:ext cx="164592" cy="310896"/>
+            <a:off x="8979408" y="1042416"/>
+            <a:ext cx="1554480" cy="201168"/>
+          </a:xfrm>
+          <a:prstGeom prst="rect">
+            <a:avLst/>
+          </a:prstGeom>
+          <a:solidFill>
+            <a:srgbClr val="E85D4A">
+              <a:alpha val="15000"/>
+            </a:srgbClr>
+          </a:solidFill>
+          <a:ln/>
+        </p:spPr>
+      </p:sp>
+      <p:sp>
+        <p:nvSpPr>
+          <p:cNvPr id="121" name="Shape 119"/>
+          <p:cNvSpPr/>
+          <p:nvPr/>
+        </p:nvSpPr>
+        <p:spPr>
+          <a:xfrm>
+            <a:off x="8979408" y="1042416"/>
+            <a:ext cx="54864" cy="201168"/>
           </a:xfrm>
           <a:prstGeom prst="rect">
             <a:avLst/>
@@ -4510,86 +4532,360 @@
       </p:sp>
       <p:sp>
         <p:nvSpPr>
-          <p:cNvPr id="121" name="Text 119"/>
-          <p:cNvSpPr txBox="1"/>
-          <p:nvPr/>
-        </p:nvSpPr>
-        <p:spPr>
-          <a:xfrm>
-            <a:off x="9427464" y="1133856"/>
-            <a:ext cx="2743200" cy="274320"/>
-          </a:xfrm>
-          <a:prstGeom prst="rect">
-            <a:avLst/>
-          </a:prstGeom>
-          <a:noFill/>
-          <a:ln/>
-        </p:spPr>
-        <p:txBody>
-          <a:bodyPr wrap="square" lIns="0" tIns="0" rIns="0" bIns="0" rtlCol="0" anchor="ctr"/>
-          <a:lstStyle/>
-          <a:p>
-            <a:pPr indent="0" marL="0">
-              <a:buNone/>
-            </a:pPr>
-            <a:r>
-              <a:rPr lang="en-US" sz="1000" b="1" dirty="0">
+          <p:cNvPr id="122" name="Text 120"/>
+          <p:cNvSpPr txBox="1"/>
+          <p:nvPr/>
+        </p:nvSpPr>
+        <p:spPr>
+          <a:xfrm>
+            <a:off x="9070848" y="1069848"/>
+            <a:ext cx="1444752" cy="164592"/>
+          </a:xfrm>
+          <a:prstGeom prst="rect">
+            <a:avLst/>
+          </a:prstGeom>
+          <a:noFill/>
+          <a:ln/>
+        </p:spPr>
+        <p:txBody>
+          <a:bodyPr wrap="square" lIns="0" tIns="0" rIns="0" bIns="0" rtlCol="0" anchor="ctr"/>
+          <a:lstStyle/>
+          <a:p>
+            <a:pPr indent="0" marL="0">
+              <a:buNone/>
+            </a:pPr>
+            <a:r>
+              <a:rPr lang="en-US" sz="750" b="1" dirty="0">
                 <a:solidFill>
                   <a:srgbClr val="E85D4A"/>
                 </a:solidFill>
               </a:rPr>
               <a:t>Reasoning &amp; Math</a:t>
             </a:r>
-            <a:endParaRPr lang="en-US" sz="1000" dirty="0"/>
-          </a:p>
-        </p:txBody>
-      </p:sp>
-      <p:sp>
-        <p:nvSpPr>
-          <p:cNvPr id="122" name="Text 120"/>
-          <p:cNvSpPr txBox="1"/>
-          <p:nvPr/>
-        </p:nvSpPr>
-        <p:spPr>
-          <a:xfrm>
-            <a:off x="9427464" y="1426464"/>
-            <a:ext cx="2743200" cy="420624"/>
-          </a:xfrm>
-          <a:prstGeom prst="rect">
-            <a:avLst/>
-          </a:prstGeom>
-          <a:noFill/>
-          <a:ln/>
-        </p:spPr>
-        <p:txBody>
-          <a:bodyPr wrap="square" lIns="0" tIns="0" rIns="0" bIns="0" rtlCol="0" anchor="ctr"/>
-          <a:lstStyle/>
-          <a:p>
-            <a:pPr indent="0" marL="0">
-              <a:buNone/>
-            </a:pPr>
-            <a:r>
-              <a:rPr lang="en-US" sz="750" dirty="0">
-                <a:solidFill>
-                  <a:srgbClr val="6A8CA8"/>
-                </a:solidFill>
-              </a:rPr>
-              <a:t>HLE✓  ·  FrontierMath  ·  AIME 2025  ·  AIME 2026  ·  ARC-AGI-2  ·  MATH-500  ·  GPQA Diamond  ·  MMLU-Pro</a:t>
-            </a:r>
             <a:endParaRPr lang="en-US" sz="750" dirty="0"/>
           </a:p>
         </p:txBody>
       </p:sp>
       <p:sp>
         <p:nvSpPr>
-          <p:cNvPr id="123" name="Shape 121"/>
-          <p:cNvSpPr/>
-          <p:nvPr/>
-        </p:nvSpPr>
-        <p:spPr>
-          <a:xfrm>
-            <a:off x="9189720" y="1947672"/>
-            <a:ext cx="164592" cy="310896"/>
+          <p:cNvPr id="123" name="Text 121"/>
+          <p:cNvSpPr txBox="1"/>
+          <p:nvPr/>
+        </p:nvSpPr>
+        <p:spPr>
+          <a:xfrm>
+            <a:off x="9034272" y="1261872"/>
+            <a:ext cx="1481328" cy="148133"/>
+          </a:xfrm>
+          <a:prstGeom prst="rect">
+            <a:avLst/>
+          </a:prstGeom>
+          <a:noFill/>
+          <a:ln/>
+        </p:spPr>
+        <p:txBody>
+          <a:bodyPr wrap="square" lIns="0" tIns="0" rIns="0" bIns="0" rtlCol="0" anchor="ctr"/>
+          <a:lstStyle/>
+          <a:p>
+            <a:pPr indent="0" marL="0">
+              <a:buNone/>
+            </a:pPr>
+            <a:r>
+              <a:rPr lang="en-US" sz="650" b="1" dirty="0">
+                <a:solidFill>
+                  <a:srgbClr val="00E5A0"/>
+                </a:solidFill>
+              </a:rPr>
+              <a:t>1. HLE ✓</a:t>
+            </a:r>
+            <a:endParaRPr lang="en-US" sz="650" dirty="0"/>
+          </a:p>
+        </p:txBody>
+      </p:sp>
+      <p:sp>
+        <p:nvSpPr>
+          <p:cNvPr id="124" name="Text 122"/>
+          <p:cNvSpPr txBox="1"/>
+          <p:nvPr/>
+        </p:nvSpPr>
+        <p:spPr>
+          <a:xfrm>
+            <a:off x="9034272" y="1410005"/>
+            <a:ext cx="1481328" cy="148133"/>
+          </a:xfrm>
+          <a:prstGeom prst="rect">
+            <a:avLst/>
+          </a:prstGeom>
+          <a:noFill/>
+          <a:ln/>
+        </p:spPr>
+        <p:txBody>
+          <a:bodyPr wrap="square" lIns="0" tIns="0" rIns="0" bIns="0" rtlCol="0" anchor="ctr"/>
+          <a:lstStyle/>
+          <a:p>
+            <a:pPr indent="0" marL="0">
+              <a:buNone/>
+            </a:pPr>
+            <a:r>
+              <a:rPr lang="en-US" sz="650" dirty="0">
+                <a:solidFill>
+                  <a:srgbClr val="8AB0C8"/>
+                </a:solidFill>
+              </a:rPr>
+              <a:t>2. FrontierMath</a:t>
+            </a:r>
+            <a:endParaRPr lang="en-US" sz="650" dirty="0"/>
+          </a:p>
+        </p:txBody>
+      </p:sp>
+      <p:sp>
+        <p:nvSpPr>
+          <p:cNvPr id="125" name="Text 123"/>
+          <p:cNvSpPr txBox="1"/>
+          <p:nvPr/>
+        </p:nvSpPr>
+        <p:spPr>
+          <a:xfrm>
+            <a:off x="9034272" y="1558138"/>
+            <a:ext cx="1481328" cy="148133"/>
+          </a:xfrm>
+          <a:prstGeom prst="rect">
+            <a:avLst/>
+          </a:prstGeom>
+          <a:noFill/>
+          <a:ln/>
+        </p:spPr>
+        <p:txBody>
+          <a:bodyPr wrap="square" lIns="0" tIns="0" rIns="0" bIns="0" rtlCol="0" anchor="ctr"/>
+          <a:lstStyle/>
+          <a:p>
+            <a:pPr indent="0" marL="0">
+              <a:buNone/>
+            </a:pPr>
+            <a:r>
+              <a:rPr lang="en-US" sz="650" dirty="0">
+                <a:solidFill>
+                  <a:srgbClr val="8AB0C8"/>
+                </a:solidFill>
+              </a:rPr>
+              <a:t>3. AIME 2025</a:t>
+            </a:r>
+            <a:endParaRPr lang="en-US" sz="650" dirty="0"/>
+          </a:p>
+        </p:txBody>
+      </p:sp>
+      <p:sp>
+        <p:nvSpPr>
+          <p:cNvPr id="126" name="Text 124"/>
+          <p:cNvSpPr txBox="1"/>
+          <p:nvPr/>
+        </p:nvSpPr>
+        <p:spPr>
+          <a:xfrm>
+            <a:off x="9034272" y="1706270"/>
+            <a:ext cx="1481328" cy="148133"/>
+          </a:xfrm>
+          <a:prstGeom prst="rect">
+            <a:avLst/>
+          </a:prstGeom>
+          <a:noFill/>
+          <a:ln/>
+        </p:spPr>
+        <p:txBody>
+          <a:bodyPr wrap="square" lIns="0" tIns="0" rIns="0" bIns="0" rtlCol="0" anchor="ctr"/>
+          <a:lstStyle/>
+          <a:p>
+            <a:pPr indent="0" marL="0">
+              <a:buNone/>
+            </a:pPr>
+            <a:r>
+              <a:rPr lang="en-US" sz="650" dirty="0">
+                <a:solidFill>
+                  <a:srgbClr val="8AB0C8"/>
+                </a:solidFill>
+              </a:rPr>
+              <a:t>4. AIME 2026</a:t>
+            </a:r>
+            <a:endParaRPr lang="en-US" sz="650" dirty="0"/>
+          </a:p>
+        </p:txBody>
+      </p:sp>
+      <p:sp>
+        <p:nvSpPr>
+          <p:cNvPr id="127" name="Text 125"/>
+          <p:cNvSpPr txBox="1"/>
+          <p:nvPr/>
+        </p:nvSpPr>
+        <p:spPr>
+          <a:xfrm>
+            <a:off x="9034272" y="1854403"/>
+            <a:ext cx="1481328" cy="148133"/>
+          </a:xfrm>
+          <a:prstGeom prst="rect">
+            <a:avLst/>
+          </a:prstGeom>
+          <a:noFill/>
+          <a:ln/>
+        </p:spPr>
+        <p:txBody>
+          <a:bodyPr wrap="square" lIns="0" tIns="0" rIns="0" bIns="0" rtlCol="0" anchor="ctr"/>
+          <a:lstStyle/>
+          <a:p>
+            <a:pPr indent="0" marL="0">
+              <a:buNone/>
+            </a:pPr>
+            <a:r>
+              <a:rPr lang="en-US" sz="650" dirty="0">
+                <a:solidFill>
+                  <a:srgbClr val="8AB0C8"/>
+                </a:solidFill>
+              </a:rPr>
+              <a:t>5. ARC-AGI-2</a:t>
+            </a:r>
+            <a:endParaRPr lang="en-US" sz="650" dirty="0"/>
+          </a:p>
+        </p:txBody>
+      </p:sp>
+      <p:sp>
+        <p:nvSpPr>
+          <p:cNvPr id="128" name="Text 126"/>
+          <p:cNvSpPr txBox="1"/>
+          <p:nvPr/>
+        </p:nvSpPr>
+        <p:spPr>
+          <a:xfrm>
+            <a:off x="9034272" y="2002536"/>
+            <a:ext cx="1481328" cy="148133"/>
+          </a:xfrm>
+          <a:prstGeom prst="rect">
+            <a:avLst/>
+          </a:prstGeom>
+          <a:noFill/>
+          <a:ln/>
+        </p:spPr>
+        <p:txBody>
+          <a:bodyPr wrap="square" lIns="0" tIns="0" rIns="0" bIns="0" rtlCol="0" anchor="ctr"/>
+          <a:lstStyle/>
+          <a:p>
+            <a:pPr indent="0" marL="0">
+              <a:buNone/>
+            </a:pPr>
+            <a:r>
+              <a:rPr lang="en-US" sz="650" dirty="0">
+                <a:solidFill>
+                  <a:srgbClr val="8AB0C8"/>
+                </a:solidFill>
+              </a:rPr>
+              <a:t>6. MATH-500</a:t>
+            </a:r>
+            <a:endParaRPr lang="en-US" sz="650" dirty="0"/>
+          </a:p>
+        </p:txBody>
+      </p:sp>
+      <p:sp>
+        <p:nvSpPr>
+          <p:cNvPr id="129" name="Text 127"/>
+          <p:cNvSpPr txBox="1"/>
+          <p:nvPr/>
+        </p:nvSpPr>
+        <p:spPr>
+          <a:xfrm>
+            <a:off x="9034272" y="2150669"/>
+            <a:ext cx="1481328" cy="148133"/>
+          </a:xfrm>
+          <a:prstGeom prst="rect">
+            <a:avLst/>
+          </a:prstGeom>
+          <a:noFill/>
+          <a:ln/>
+        </p:spPr>
+        <p:txBody>
+          <a:bodyPr wrap="square" lIns="0" tIns="0" rIns="0" bIns="0" rtlCol="0" anchor="ctr"/>
+          <a:lstStyle/>
+          <a:p>
+            <a:pPr indent="0" marL="0">
+              <a:buNone/>
+            </a:pPr>
+            <a:r>
+              <a:rPr lang="en-US" sz="650" dirty="0">
+                <a:solidFill>
+                  <a:srgbClr val="8AB0C8"/>
+                </a:solidFill>
+              </a:rPr>
+              <a:t>7. GPQA Diamond</a:t>
+            </a:r>
+            <a:endParaRPr lang="en-US" sz="650" dirty="0"/>
+          </a:p>
+        </p:txBody>
+      </p:sp>
+      <p:sp>
+        <p:nvSpPr>
+          <p:cNvPr id="130" name="Text 128"/>
+          <p:cNvSpPr txBox="1"/>
+          <p:nvPr/>
+        </p:nvSpPr>
+        <p:spPr>
+          <a:xfrm>
+            <a:off x="9034272" y="2298802"/>
+            <a:ext cx="1481328" cy="148133"/>
+          </a:xfrm>
+          <a:prstGeom prst="rect">
+            <a:avLst/>
+          </a:prstGeom>
+          <a:noFill/>
+          <a:ln/>
+        </p:spPr>
+        <p:txBody>
+          <a:bodyPr wrap="square" lIns="0" tIns="0" rIns="0" bIns="0" rtlCol="0" anchor="ctr"/>
+          <a:lstStyle/>
+          <a:p>
+            <a:pPr indent="0" marL="0">
+              <a:buNone/>
+            </a:pPr>
+            <a:r>
+              <a:rPr lang="en-US" sz="650" dirty="0">
+                <a:solidFill>
+                  <a:srgbClr val="8AB0C8"/>
+                </a:solidFill>
+              </a:rPr>
+              <a:t>8. MMLU-Pro</a:t>
+            </a:r>
+            <a:endParaRPr lang="en-US" sz="650" dirty="0"/>
+          </a:p>
+        </p:txBody>
+      </p:sp>
+      <p:sp>
+        <p:nvSpPr>
+          <p:cNvPr id="131" name="Shape 129"/>
+          <p:cNvSpPr/>
+          <p:nvPr/>
+        </p:nvSpPr>
+        <p:spPr>
+          <a:xfrm>
+            <a:off x="8979408" y="2520086"/>
+            <a:ext cx="1554480" cy="201168"/>
+          </a:xfrm>
+          <a:prstGeom prst="rect">
+            <a:avLst/>
+          </a:prstGeom>
+          <a:solidFill>
+            <a:srgbClr val="4A90D9">
+              <a:alpha val="15000"/>
+            </a:srgbClr>
+          </a:solidFill>
+          <a:ln/>
+        </p:spPr>
+      </p:sp>
+      <p:sp>
+        <p:nvSpPr>
+          <p:cNvPr id="132" name="Shape 130"/>
+          <p:cNvSpPr/>
+          <p:nvPr/>
+        </p:nvSpPr>
+        <p:spPr>
+          <a:xfrm>
+            <a:off x="8979408" y="2520086"/>
+            <a:ext cx="54864" cy="201168"/>
           </a:xfrm>
           <a:prstGeom prst="rect">
             <a:avLst/>
@@ -4602,86 +4898,360 @@
       </p:sp>
       <p:sp>
         <p:nvSpPr>
-          <p:cNvPr id="124" name="Text 122"/>
-          <p:cNvSpPr txBox="1"/>
-          <p:nvPr/>
-        </p:nvSpPr>
-        <p:spPr>
-          <a:xfrm>
-            <a:off x="9427464" y="1938528"/>
-            <a:ext cx="2743200" cy="274320"/>
-          </a:xfrm>
-          <a:prstGeom prst="rect">
-            <a:avLst/>
-          </a:prstGeom>
-          <a:noFill/>
-          <a:ln/>
-        </p:spPr>
-        <p:txBody>
-          <a:bodyPr wrap="square" lIns="0" tIns="0" rIns="0" bIns="0" rtlCol="0" anchor="ctr"/>
-          <a:lstStyle/>
-          <a:p>
-            <a:pPr indent="0" marL="0">
-              <a:buNone/>
-            </a:pPr>
-            <a:r>
-              <a:rPr lang="en-US" sz="1000" b="1" dirty="0">
+          <p:cNvPr id="133" name="Text 131"/>
+          <p:cNvSpPr txBox="1"/>
+          <p:nvPr/>
+        </p:nvSpPr>
+        <p:spPr>
+          <a:xfrm>
+            <a:off x="9070848" y="2547518"/>
+            <a:ext cx="1444752" cy="164592"/>
+          </a:xfrm>
+          <a:prstGeom prst="rect">
+            <a:avLst/>
+          </a:prstGeom>
+          <a:noFill/>
+          <a:ln/>
+        </p:spPr>
+        <p:txBody>
+          <a:bodyPr wrap="square" lIns="0" tIns="0" rIns="0" bIns="0" rtlCol="0" anchor="ctr"/>
+          <a:lstStyle/>
+          <a:p>
+            <a:pPr indent="0" marL="0">
+              <a:buNone/>
+            </a:pPr>
+            <a:r>
+              <a:rPr lang="en-US" sz="750" b="1" dirty="0">
                 <a:solidFill>
                   <a:srgbClr val="4A90D9"/>
                 </a:solidFill>
               </a:rPr>
               <a:t>Coding &amp; SWE</a:t>
             </a:r>
-            <a:endParaRPr lang="en-US" sz="1000" dirty="0"/>
-          </a:p>
-        </p:txBody>
-      </p:sp>
-      <p:sp>
-        <p:nvSpPr>
-          <p:cNvPr id="125" name="Text 123"/>
-          <p:cNvSpPr txBox="1"/>
-          <p:nvPr/>
-        </p:nvSpPr>
-        <p:spPr>
-          <a:xfrm>
-            <a:off x="9427464" y="2231136"/>
-            <a:ext cx="2743200" cy="420624"/>
-          </a:xfrm>
-          <a:prstGeom prst="rect">
-            <a:avLst/>
-          </a:prstGeom>
-          <a:noFill/>
-          <a:ln/>
-        </p:spPr>
-        <p:txBody>
-          <a:bodyPr wrap="square" lIns="0" tIns="0" rIns="0" bIns="0" rtlCol="0" anchor="ctr"/>
-          <a:lstStyle/>
-          <a:p>
-            <a:pPr indent="0" marL="0">
-              <a:buNone/>
-            </a:pPr>
-            <a:r>
-              <a:rPr lang="en-US" sz="750" dirty="0">
-                <a:solidFill>
-                  <a:srgbClr val="6A8CA8"/>
-                </a:solidFill>
-              </a:rPr>
-              <a:t>SWE-Bench Pro  ·  Terminal-Bench 4.0  ·  FrontierCode Diamond  ·  LiveCodeBench v6  ·  DeepSWE v1.1  ·  SWE-Bench Multilingual  ·  BigCodeBench  ·  SciCode</a:t>
-            </a:r>
             <a:endParaRPr lang="en-US" sz="750" dirty="0"/>
           </a:p>
         </p:txBody>
       </p:sp>
       <p:sp>
         <p:nvSpPr>
-          <p:cNvPr id="126" name="Shape 124"/>
-          <p:cNvSpPr/>
-          <p:nvPr/>
-        </p:nvSpPr>
-        <p:spPr>
-          <a:xfrm>
-            <a:off x="9189720" y="2752344"/>
-            <a:ext cx="164592" cy="310896"/>
+          <p:cNvPr id="134" name="Text 132"/>
+          <p:cNvSpPr txBox="1"/>
+          <p:nvPr/>
+        </p:nvSpPr>
+        <p:spPr>
+          <a:xfrm>
+            <a:off x="9034272" y="2739542"/>
+            <a:ext cx="1481328" cy="148133"/>
+          </a:xfrm>
+          <a:prstGeom prst="rect">
+            <a:avLst/>
+          </a:prstGeom>
+          <a:noFill/>
+          <a:ln/>
+        </p:spPr>
+        <p:txBody>
+          <a:bodyPr wrap="square" lIns="0" tIns="0" rIns="0" bIns="0" rtlCol="0" anchor="ctr"/>
+          <a:lstStyle/>
+          <a:p>
+            <a:pPr indent="0" marL="0">
+              <a:buNone/>
+            </a:pPr>
+            <a:r>
+              <a:rPr lang="en-US" sz="650" dirty="0">
+                <a:solidFill>
+                  <a:srgbClr val="8AB0C8"/>
+                </a:solidFill>
+              </a:rPr>
+              <a:t>1. SWE-Bench Pro</a:t>
+            </a:r>
+            <a:endParaRPr lang="en-US" sz="650" dirty="0"/>
+          </a:p>
+        </p:txBody>
+      </p:sp>
+      <p:sp>
+        <p:nvSpPr>
+          <p:cNvPr id="135" name="Text 133"/>
+          <p:cNvSpPr txBox="1"/>
+          <p:nvPr/>
+        </p:nvSpPr>
+        <p:spPr>
+          <a:xfrm>
+            <a:off x="9034272" y="2887675"/>
+            <a:ext cx="1481328" cy="148133"/>
+          </a:xfrm>
+          <a:prstGeom prst="rect">
+            <a:avLst/>
+          </a:prstGeom>
+          <a:noFill/>
+          <a:ln/>
+        </p:spPr>
+        <p:txBody>
+          <a:bodyPr wrap="square" lIns="0" tIns="0" rIns="0" bIns="0" rtlCol="0" anchor="ctr"/>
+          <a:lstStyle/>
+          <a:p>
+            <a:pPr indent="0" marL="0">
+              <a:buNone/>
+            </a:pPr>
+            <a:r>
+              <a:rPr lang="en-US" sz="650" dirty="0">
+                <a:solidFill>
+                  <a:srgbClr val="8AB0C8"/>
+                </a:solidFill>
+              </a:rPr>
+              <a:t>2. Terminal-Bench 4.0</a:t>
+            </a:r>
+            <a:endParaRPr lang="en-US" sz="650" dirty="0"/>
+          </a:p>
+        </p:txBody>
+      </p:sp>
+      <p:sp>
+        <p:nvSpPr>
+          <p:cNvPr id="136" name="Text 134"/>
+          <p:cNvSpPr txBox="1"/>
+          <p:nvPr/>
+        </p:nvSpPr>
+        <p:spPr>
+          <a:xfrm>
+            <a:off x="9034272" y="3035808"/>
+            <a:ext cx="1481328" cy="148133"/>
+          </a:xfrm>
+          <a:prstGeom prst="rect">
+            <a:avLst/>
+          </a:prstGeom>
+          <a:noFill/>
+          <a:ln/>
+        </p:spPr>
+        <p:txBody>
+          <a:bodyPr wrap="square" lIns="0" tIns="0" rIns="0" bIns="0" rtlCol="0" anchor="ctr"/>
+          <a:lstStyle/>
+          <a:p>
+            <a:pPr indent="0" marL="0">
+              <a:buNone/>
+            </a:pPr>
+            <a:r>
+              <a:rPr lang="en-US" sz="650" dirty="0">
+                <a:solidFill>
+                  <a:srgbClr val="8AB0C8"/>
+                </a:solidFill>
+              </a:rPr>
+              <a:t>3. FrontierCode Diamond</a:t>
+            </a:r>
+            <a:endParaRPr lang="en-US" sz="650" dirty="0"/>
+          </a:p>
+        </p:txBody>
+      </p:sp>
+      <p:sp>
+        <p:nvSpPr>
+          <p:cNvPr id="137" name="Text 135"/>
+          <p:cNvSpPr txBox="1"/>
+          <p:nvPr/>
+        </p:nvSpPr>
+        <p:spPr>
+          <a:xfrm>
+            <a:off x="9034272" y="3183941"/>
+            <a:ext cx="1481328" cy="148133"/>
+          </a:xfrm>
+          <a:prstGeom prst="rect">
+            <a:avLst/>
+          </a:prstGeom>
+          <a:noFill/>
+          <a:ln/>
+        </p:spPr>
+        <p:txBody>
+          <a:bodyPr wrap="square" lIns="0" tIns="0" rIns="0" bIns="0" rtlCol="0" anchor="ctr"/>
+          <a:lstStyle/>
+          <a:p>
+            <a:pPr indent="0" marL="0">
+              <a:buNone/>
+            </a:pPr>
+            <a:r>
+              <a:rPr lang="en-US" sz="650" dirty="0">
+                <a:solidFill>
+                  <a:srgbClr val="8AB0C8"/>
+                </a:solidFill>
+              </a:rPr>
+              <a:t>4. LiveCodeBench v6</a:t>
+            </a:r>
+            <a:endParaRPr lang="en-US" sz="650" dirty="0"/>
+          </a:p>
+        </p:txBody>
+      </p:sp>
+      <p:sp>
+        <p:nvSpPr>
+          <p:cNvPr id="138" name="Text 136"/>
+          <p:cNvSpPr txBox="1"/>
+          <p:nvPr/>
+        </p:nvSpPr>
+        <p:spPr>
+          <a:xfrm>
+            <a:off x="9034272" y="3332074"/>
+            <a:ext cx="1481328" cy="148133"/>
+          </a:xfrm>
+          <a:prstGeom prst="rect">
+            <a:avLst/>
+          </a:prstGeom>
+          <a:noFill/>
+          <a:ln/>
+        </p:spPr>
+        <p:txBody>
+          <a:bodyPr wrap="square" lIns="0" tIns="0" rIns="0" bIns="0" rtlCol="0" anchor="ctr"/>
+          <a:lstStyle/>
+          <a:p>
+            <a:pPr indent="0" marL="0">
+              <a:buNone/>
+            </a:pPr>
+            <a:r>
+              <a:rPr lang="en-US" sz="650" dirty="0">
+                <a:solidFill>
+                  <a:srgbClr val="8AB0C8"/>
+                </a:solidFill>
+              </a:rPr>
+              <a:t>5. DeepSWE v1.1</a:t>
+            </a:r>
+            <a:endParaRPr lang="en-US" sz="650" dirty="0"/>
+          </a:p>
+        </p:txBody>
+      </p:sp>
+      <p:sp>
+        <p:nvSpPr>
+          <p:cNvPr id="139" name="Text 137"/>
+          <p:cNvSpPr txBox="1"/>
+          <p:nvPr/>
+        </p:nvSpPr>
+        <p:spPr>
+          <a:xfrm>
+            <a:off x="9034272" y="3480206"/>
+            <a:ext cx="1481328" cy="148133"/>
+          </a:xfrm>
+          <a:prstGeom prst="rect">
+            <a:avLst/>
+          </a:prstGeom>
+          <a:noFill/>
+          <a:ln/>
+        </p:spPr>
+        <p:txBody>
+          <a:bodyPr wrap="square" lIns="0" tIns="0" rIns="0" bIns="0" rtlCol="0" anchor="ctr"/>
+          <a:lstStyle/>
+          <a:p>
+            <a:pPr indent="0" marL="0">
+              <a:buNone/>
+            </a:pPr>
+            <a:r>
+              <a:rPr lang="en-US" sz="650" dirty="0">
+                <a:solidFill>
+                  <a:srgbClr val="8AB0C8"/>
+                </a:solidFill>
+              </a:rPr>
+              <a:t>6. SWE-Bench Multilingual</a:t>
+            </a:r>
+            <a:endParaRPr lang="en-US" sz="650" dirty="0"/>
+          </a:p>
+        </p:txBody>
+      </p:sp>
+      <p:sp>
+        <p:nvSpPr>
+          <p:cNvPr id="140" name="Text 138"/>
+          <p:cNvSpPr txBox="1"/>
+          <p:nvPr/>
+        </p:nvSpPr>
+        <p:spPr>
+          <a:xfrm>
+            <a:off x="9034272" y="3628339"/>
+            <a:ext cx="1481328" cy="148133"/>
+          </a:xfrm>
+          <a:prstGeom prst="rect">
+            <a:avLst/>
+          </a:prstGeom>
+          <a:noFill/>
+          <a:ln/>
+        </p:spPr>
+        <p:txBody>
+          <a:bodyPr wrap="square" lIns="0" tIns="0" rIns="0" bIns="0" rtlCol="0" anchor="ctr"/>
+          <a:lstStyle/>
+          <a:p>
+            <a:pPr indent="0" marL="0">
+              <a:buNone/>
+            </a:pPr>
+            <a:r>
+              <a:rPr lang="en-US" sz="650" dirty="0">
+                <a:solidFill>
+                  <a:srgbClr val="8AB0C8"/>
+                </a:solidFill>
+              </a:rPr>
+              <a:t>7. BigCodeBench</a:t>
+            </a:r>
+            <a:endParaRPr lang="en-US" sz="650" dirty="0"/>
+          </a:p>
+        </p:txBody>
+      </p:sp>
+      <p:sp>
+        <p:nvSpPr>
+          <p:cNvPr id="141" name="Text 139"/>
+          <p:cNvSpPr txBox="1"/>
+          <p:nvPr/>
+        </p:nvSpPr>
+        <p:spPr>
+          <a:xfrm>
+            <a:off x="9034272" y="3776472"/>
+            <a:ext cx="1481328" cy="148133"/>
+          </a:xfrm>
+          <a:prstGeom prst="rect">
+            <a:avLst/>
+          </a:prstGeom>
+          <a:noFill/>
+          <a:ln/>
+        </p:spPr>
+        <p:txBody>
+          <a:bodyPr wrap="square" lIns="0" tIns="0" rIns="0" bIns="0" rtlCol="0" anchor="ctr"/>
+          <a:lstStyle/>
+          <a:p>
+            <a:pPr indent="0" marL="0">
+              <a:buNone/>
+            </a:pPr>
+            <a:r>
+              <a:rPr lang="en-US" sz="650" dirty="0">
+                <a:solidFill>
+                  <a:srgbClr val="8AB0C8"/>
+                </a:solidFill>
+              </a:rPr>
+              <a:t>8. SciCode</a:t>
+            </a:r>
+            <a:endParaRPr lang="en-US" sz="650" dirty="0"/>
+          </a:p>
+        </p:txBody>
+      </p:sp>
+      <p:sp>
+        <p:nvSpPr>
+          <p:cNvPr id="142" name="Shape 140"/>
+          <p:cNvSpPr/>
+          <p:nvPr/>
+        </p:nvSpPr>
+        <p:spPr>
+          <a:xfrm>
+            <a:off x="8979408" y="3997757"/>
+            <a:ext cx="1554480" cy="201168"/>
+          </a:xfrm>
+          <a:prstGeom prst="rect">
+            <a:avLst/>
+          </a:prstGeom>
+          <a:solidFill>
+            <a:srgbClr val="7B68EE">
+              <a:alpha val="15000"/>
+            </a:srgbClr>
+          </a:solidFill>
+          <a:ln/>
+        </p:spPr>
+      </p:sp>
+      <p:sp>
+        <p:nvSpPr>
+          <p:cNvPr id="143" name="Shape 141"/>
+          <p:cNvSpPr/>
+          <p:nvPr/>
+        </p:nvSpPr>
+        <p:spPr>
+          <a:xfrm>
+            <a:off x="8979408" y="3997757"/>
+            <a:ext cx="54864" cy="201168"/>
           </a:xfrm>
           <a:prstGeom prst="rect">
             <a:avLst/>
@@ -4694,86 +5264,252 @@
       </p:sp>
       <p:sp>
         <p:nvSpPr>
-          <p:cNvPr id="127" name="Text 125"/>
-          <p:cNvSpPr txBox="1"/>
-          <p:nvPr/>
-        </p:nvSpPr>
-        <p:spPr>
-          <a:xfrm>
-            <a:off x="9427464" y="2743200"/>
-            <a:ext cx="2743200" cy="274320"/>
-          </a:xfrm>
-          <a:prstGeom prst="rect">
-            <a:avLst/>
-          </a:prstGeom>
-          <a:noFill/>
-          <a:ln/>
-        </p:spPr>
-        <p:txBody>
-          <a:bodyPr wrap="square" lIns="0" tIns="0" rIns="0" bIns="0" rtlCol="0" anchor="ctr"/>
-          <a:lstStyle/>
-          <a:p>
-            <a:pPr indent="0" marL="0">
-              <a:buNone/>
-            </a:pPr>
-            <a:r>
-              <a:rPr lang="en-US" sz="1000" b="1" dirty="0">
+          <p:cNvPr id="144" name="Text 142"/>
+          <p:cNvSpPr txBox="1"/>
+          <p:nvPr/>
+        </p:nvSpPr>
+        <p:spPr>
+          <a:xfrm>
+            <a:off x="9070848" y="4025189"/>
+            <a:ext cx="1444752" cy="164592"/>
+          </a:xfrm>
+          <a:prstGeom prst="rect">
+            <a:avLst/>
+          </a:prstGeom>
+          <a:noFill/>
+          <a:ln/>
+        </p:spPr>
+        <p:txBody>
+          <a:bodyPr wrap="square" lIns="0" tIns="0" rIns="0" bIns="0" rtlCol="0" anchor="ctr"/>
+          <a:lstStyle/>
+          <a:p>
+            <a:pPr indent="0" marL="0">
+              <a:buNone/>
+            </a:pPr>
+            <a:r>
+              <a:rPr lang="en-US" sz="750" b="1" dirty="0">
                 <a:solidFill>
                   <a:srgbClr val="7B68EE"/>
                 </a:solidFill>
               </a:rPr>
               <a:t>Long Context</a:t>
             </a:r>
-            <a:endParaRPr lang="en-US" sz="1000" dirty="0"/>
-          </a:p>
-        </p:txBody>
-      </p:sp>
-      <p:sp>
-        <p:nvSpPr>
-          <p:cNvPr id="128" name="Text 126"/>
-          <p:cNvSpPr txBox="1"/>
-          <p:nvPr/>
-        </p:nvSpPr>
-        <p:spPr>
-          <a:xfrm>
-            <a:off x="9427464" y="3035808"/>
-            <a:ext cx="2743200" cy="420624"/>
-          </a:xfrm>
-          <a:prstGeom prst="rect">
-            <a:avLst/>
-          </a:prstGeom>
-          <a:noFill/>
-          <a:ln/>
-        </p:spPr>
-        <p:txBody>
-          <a:bodyPr wrap="square" lIns="0" tIns="0" rIns="0" bIns="0" rtlCol="0" anchor="ctr"/>
-          <a:lstStyle/>
-          <a:p>
-            <a:pPr indent="0" marL="0">
-              <a:buNone/>
-            </a:pPr>
-            <a:r>
-              <a:rPr lang="en-US" sz="750" dirty="0">
-                <a:solidFill>
-                  <a:srgbClr val="6A8CA8"/>
-                </a:solidFill>
-              </a:rPr>
-              <a:t>MRCR v2✓  ·  GraphWalks BFS  ·  NoLiMa  ·  RULER  ·  LongBench v2</a:t>
-            </a:r>
             <a:endParaRPr lang="en-US" sz="750" dirty="0"/>
           </a:p>
         </p:txBody>
       </p:sp>
       <p:sp>
         <p:nvSpPr>
-          <p:cNvPr id="129" name="Shape 127"/>
-          <p:cNvSpPr/>
-          <p:nvPr/>
-        </p:nvSpPr>
-        <p:spPr>
-          <a:xfrm>
-            <a:off x="9189720" y="3557016"/>
-            <a:ext cx="164592" cy="310896"/>
+          <p:cNvPr id="145" name="Text 143"/>
+          <p:cNvSpPr txBox="1"/>
+          <p:nvPr/>
+        </p:nvSpPr>
+        <p:spPr>
+          <a:xfrm>
+            <a:off x="9034272" y="4217213"/>
+            <a:ext cx="1481328" cy="148133"/>
+          </a:xfrm>
+          <a:prstGeom prst="rect">
+            <a:avLst/>
+          </a:prstGeom>
+          <a:noFill/>
+          <a:ln/>
+        </p:spPr>
+        <p:txBody>
+          <a:bodyPr wrap="square" lIns="0" tIns="0" rIns="0" bIns="0" rtlCol="0" anchor="ctr"/>
+          <a:lstStyle/>
+          <a:p>
+            <a:pPr indent="0" marL="0">
+              <a:buNone/>
+            </a:pPr>
+            <a:r>
+              <a:rPr lang="en-US" sz="650" b="1" dirty="0">
+                <a:solidFill>
+                  <a:srgbClr val="00E5A0"/>
+                </a:solidFill>
+              </a:rPr>
+              <a:t>1. MRCR v2 ✓</a:t>
+            </a:r>
+            <a:endParaRPr lang="en-US" sz="650" dirty="0"/>
+          </a:p>
+        </p:txBody>
+      </p:sp>
+      <p:sp>
+        <p:nvSpPr>
+          <p:cNvPr id="146" name="Text 144"/>
+          <p:cNvSpPr txBox="1"/>
+          <p:nvPr/>
+        </p:nvSpPr>
+        <p:spPr>
+          <a:xfrm>
+            <a:off x="9034272" y="4365346"/>
+            <a:ext cx="1481328" cy="148133"/>
+          </a:xfrm>
+          <a:prstGeom prst="rect">
+            <a:avLst/>
+          </a:prstGeom>
+          <a:noFill/>
+          <a:ln/>
+        </p:spPr>
+        <p:txBody>
+          <a:bodyPr wrap="square" lIns="0" tIns="0" rIns="0" bIns="0" rtlCol="0" anchor="ctr"/>
+          <a:lstStyle/>
+          <a:p>
+            <a:pPr indent="0" marL="0">
+              <a:buNone/>
+            </a:pPr>
+            <a:r>
+              <a:rPr lang="en-US" sz="650" dirty="0">
+                <a:solidFill>
+                  <a:srgbClr val="8AB0C8"/>
+                </a:solidFill>
+              </a:rPr>
+              <a:t>2. GraphWalks BFS</a:t>
+            </a:r>
+            <a:endParaRPr lang="en-US" sz="650" dirty="0"/>
+          </a:p>
+        </p:txBody>
+      </p:sp>
+      <p:sp>
+        <p:nvSpPr>
+          <p:cNvPr id="147" name="Text 145"/>
+          <p:cNvSpPr txBox="1"/>
+          <p:nvPr/>
+        </p:nvSpPr>
+        <p:spPr>
+          <a:xfrm>
+            <a:off x="9034272" y="4513478"/>
+            <a:ext cx="1481328" cy="148133"/>
+          </a:xfrm>
+          <a:prstGeom prst="rect">
+            <a:avLst/>
+          </a:prstGeom>
+          <a:noFill/>
+          <a:ln/>
+        </p:spPr>
+        <p:txBody>
+          <a:bodyPr wrap="square" lIns="0" tIns="0" rIns="0" bIns="0" rtlCol="0" anchor="ctr"/>
+          <a:lstStyle/>
+          <a:p>
+            <a:pPr indent="0" marL="0">
+              <a:buNone/>
+            </a:pPr>
+            <a:r>
+              <a:rPr lang="en-US" sz="650" dirty="0">
+                <a:solidFill>
+                  <a:srgbClr val="8AB0C8"/>
+                </a:solidFill>
+              </a:rPr>
+              <a:t>3. NoLiMa</a:t>
+            </a:r>
+            <a:endParaRPr lang="en-US" sz="650" dirty="0"/>
+          </a:p>
+        </p:txBody>
+      </p:sp>
+      <p:sp>
+        <p:nvSpPr>
+          <p:cNvPr id="148" name="Text 146"/>
+          <p:cNvSpPr txBox="1"/>
+          <p:nvPr/>
+        </p:nvSpPr>
+        <p:spPr>
+          <a:xfrm>
+            <a:off x="9034272" y="4661611"/>
+            <a:ext cx="1481328" cy="148133"/>
+          </a:xfrm>
+          <a:prstGeom prst="rect">
+            <a:avLst/>
+          </a:prstGeom>
+          <a:noFill/>
+          <a:ln/>
+        </p:spPr>
+        <p:txBody>
+          <a:bodyPr wrap="square" lIns="0" tIns="0" rIns="0" bIns="0" rtlCol="0" anchor="ctr"/>
+          <a:lstStyle/>
+          <a:p>
+            <a:pPr indent="0" marL="0">
+              <a:buNone/>
+            </a:pPr>
+            <a:r>
+              <a:rPr lang="en-US" sz="650" dirty="0">
+                <a:solidFill>
+                  <a:srgbClr val="8AB0C8"/>
+                </a:solidFill>
+              </a:rPr>
+              <a:t>4. RULER</a:t>
+            </a:r>
+            <a:endParaRPr lang="en-US" sz="650" dirty="0"/>
+          </a:p>
+        </p:txBody>
+      </p:sp>
+      <p:sp>
+        <p:nvSpPr>
+          <p:cNvPr id="149" name="Text 147"/>
+          <p:cNvSpPr txBox="1"/>
+          <p:nvPr/>
+        </p:nvSpPr>
+        <p:spPr>
+          <a:xfrm>
+            <a:off x="9034272" y="4809744"/>
+            <a:ext cx="1481328" cy="148133"/>
+          </a:xfrm>
+          <a:prstGeom prst="rect">
+            <a:avLst/>
+          </a:prstGeom>
+          <a:noFill/>
+          <a:ln/>
+        </p:spPr>
+        <p:txBody>
+          <a:bodyPr wrap="square" lIns="0" tIns="0" rIns="0" bIns="0" rtlCol="0" anchor="ctr"/>
+          <a:lstStyle/>
+          <a:p>
+            <a:pPr indent="0" marL="0">
+              <a:buNone/>
+            </a:pPr>
+            <a:r>
+              <a:rPr lang="en-US" sz="650" dirty="0">
+                <a:solidFill>
+                  <a:srgbClr val="8AB0C8"/>
+                </a:solidFill>
+              </a:rPr>
+              <a:t>5. LongBench v2</a:t>
+            </a:r>
+            <a:endParaRPr lang="en-US" sz="650" dirty="0"/>
+          </a:p>
+        </p:txBody>
+      </p:sp>
+      <p:sp>
+        <p:nvSpPr>
+          <p:cNvPr id="150" name="Shape 148"/>
+          <p:cNvSpPr/>
+          <p:nvPr/>
+        </p:nvSpPr>
+        <p:spPr>
+          <a:xfrm>
+            <a:off x="8979408" y="5031029"/>
+            <a:ext cx="1554480" cy="201168"/>
+          </a:xfrm>
+          <a:prstGeom prst="rect">
+            <a:avLst/>
+          </a:prstGeom>
+          <a:solidFill>
+            <a:srgbClr val="F0A500">
+              <a:alpha val="15000"/>
+            </a:srgbClr>
+          </a:solidFill>
+          <a:ln/>
+        </p:spPr>
+      </p:sp>
+      <p:sp>
+        <p:nvSpPr>
+          <p:cNvPr id="151" name="Shape 149"/>
+          <p:cNvSpPr/>
+          <p:nvPr/>
+        </p:nvSpPr>
+        <p:spPr>
+          <a:xfrm>
+            <a:off x="8979408" y="5031029"/>
+            <a:ext cx="54864" cy="201168"/>
           </a:xfrm>
           <a:prstGeom prst="rect">
             <a:avLst/>
@@ -4786,86 +5522,360 @@
       </p:sp>
       <p:sp>
         <p:nvSpPr>
-          <p:cNvPr id="130" name="Text 128"/>
-          <p:cNvSpPr txBox="1"/>
-          <p:nvPr/>
-        </p:nvSpPr>
-        <p:spPr>
-          <a:xfrm>
-            <a:off x="9427464" y="3547872"/>
-            <a:ext cx="2743200" cy="274320"/>
-          </a:xfrm>
-          <a:prstGeom prst="rect">
-            <a:avLst/>
-          </a:prstGeom>
-          <a:noFill/>
-          <a:ln/>
-        </p:spPr>
-        <p:txBody>
-          <a:bodyPr wrap="square" lIns="0" tIns="0" rIns="0" bIns="0" rtlCol="0" anchor="ctr"/>
-          <a:lstStyle/>
-          <a:p>
-            <a:pPr indent="0" marL="0">
-              <a:buNone/>
-            </a:pPr>
-            <a:r>
-              <a:rPr lang="en-US" sz="1000" b="1" dirty="0">
+          <p:cNvPr id="152" name="Text 150"/>
+          <p:cNvSpPr txBox="1"/>
+          <p:nvPr/>
+        </p:nvSpPr>
+        <p:spPr>
+          <a:xfrm>
+            <a:off x="9070848" y="5058461"/>
+            <a:ext cx="1444752" cy="164592"/>
+          </a:xfrm>
+          <a:prstGeom prst="rect">
+            <a:avLst/>
+          </a:prstGeom>
+          <a:noFill/>
+          <a:ln/>
+        </p:spPr>
+        <p:txBody>
+          <a:bodyPr wrap="square" lIns="0" tIns="0" rIns="0" bIns="0" rtlCol="0" anchor="ctr"/>
+          <a:lstStyle/>
+          <a:p>
+            <a:pPr indent="0" marL="0">
+              <a:buNone/>
+            </a:pPr>
+            <a:r>
+              <a:rPr lang="en-US" sz="750" b="1" dirty="0">
                 <a:solidFill>
                   <a:srgbClr val="F0A500"/>
                 </a:solidFill>
               </a:rPr>
               <a:t>Multimodal</a:t>
             </a:r>
-            <a:endParaRPr lang="en-US" sz="1000" dirty="0"/>
-          </a:p>
-        </p:txBody>
-      </p:sp>
-      <p:sp>
-        <p:nvSpPr>
-          <p:cNvPr id="131" name="Text 129"/>
-          <p:cNvSpPr txBox="1"/>
-          <p:nvPr/>
-        </p:nvSpPr>
-        <p:spPr>
-          <a:xfrm>
-            <a:off x="9427464" y="3840480"/>
-            <a:ext cx="2743200" cy="420624"/>
-          </a:xfrm>
-          <a:prstGeom prst="rect">
-            <a:avLst/>
-          </a:prstGeom>
-          <a:noFill/>
-          <a:ln/>
-        </p:spPr>
-        <p:txBody>
-          <a:bodyPr wrap="square" lIns="0" tIns="0" rIns="0" bIns="0" rtlCol="0" anchor="ctr"/>
-          <a:lstStyle/>
-          <a:p>
-            <a:pPr indent="0" marL="0">
-              <a:buNone/>
-            </a:pPr>
-            <a:r>
-              <a:rPr lang="en-US" sz="750" dirty="0">
-                <a:solidFill>
-                  <a:srgbClr val="6A8CA8"/>
-                </a:solidFill>
-              </a:rPr>
-              <a:t>MathVista✓  ·  MMMU-Pro  ·  CharXiv  ·  CharXiv-R  ·  DocVQA  ·  MathVision  ·  MMVU  ·  Chartography</a:t>
-            </a:r>
             <a:endParaRPr lang="en-US" sz="750" dirty="0"/>
           </a:p>
         </p:txBody>
       </p:sp>
       <p:sp>
         <p:nvSpPr>
-          <p:cNvPr id="132" name="Shape 130"/>
-          <p:cNvSpPr/>
-          <p:nvPr/>
-        </p:nvSpPr>
-        <p:spPr>
-          <a:xfrm>
-            <a:off x="9189720" y="4361688"/>
-            <a:ext cx="164592" cy="310896"/>
+          <p:cNvPr id="153" name="Text 151"/>
+          <p:cNvSpPr txBox="1"/>
+          <p:nvPr/>
+        </p:nvSpPr>
+        <p:spPr>
+          <a:xfrm>
+            <a:off x="9034272" y="5250485"/>
+            <a:ext cx="1481328" cy="148133"/>
+          </a:xfrm>
+          <a:prstGeom prst="rect">
+            <a:avLst/>
+          </a:prstGeom>
+          <a:noFill/>
+          <a:ln/>
+        </p:spPr>
+        <p:txBody>
+          <a:bodyPr wrap="square" lIns="0" tIns="0" rIns="0" bIns="0" rtlCol="0" anchor="ctr"/>
+          <a:lstStyle/>
+          <a:p>
+            <a:pPr indent="0" marL="0">
+              <a:buNone/>
+            </a:pPr>
+            <a:r>
+              <a:rPr lang="en-US" sz="650" b="1" dirty="0">
+                <a:solidFill>
+                  <a:srgbClr val="00E5A0"/>
+                </a:solidFill>
+              </a:rPr>
+              <a:t>1. MathVista ✓</a:t>
+            </a:r>
+            <a:endParaRPr lang="en-US" sz="650" dirty="0"/>
+          </a:p>
+        </p:txBody>
+      </p:sp>
+      <p:sp>
+        <p:nvSpPr>
+          <p:cNvPr id="154" name="Text 152"/>
+          <p:cNvSpPr txBox="1"/>
+          <p:nvPr/>
+        </p:nvSpPr>
+        <p:spPr>
+          <a:xfrm>
+            <a:off x="9034272" y="5398618"/>
+            <a:ext cx="1481328" cy="148133"/>
+          </a:xfrm>
+          <a:prstGeom prst="rect">
+            <a:avLst/>
+          </a:prstGeom>
+          <a:noFill/>
+          <a:ln/>
+        </p:spPr>
+        <p:txBody>
+          <a:bodyPr wrap="square" lIns="0" tIns="0" rIns="0" bIns="0" rtlCol="0" anchor="ctr"/>
+          <a:lstStyle/>
+          <a:p>
+            <a:pPr indent="0" marL="0">
+              <a:buNone/>
+            </a:pPr>
+            <a:r>
+              <a:rPr lang="en-US" sz="650" dirty="0">
+                <a:solidFill>
+                  <a:srgbClr val="8AB0C8"/>
+                </a:solidFill>
+              </a:rPr>
+              <a:t>2. MMMU-Pro</a:t>
+            </a:r>
+            <a:endParaRPr lang="en-US" sz="650" dirty="0"/>
+          </a:p>
+        </p:txBody>
+      </p:sp>
+      <p:sp>
+        <p:nvSpPr>
+          <p:cNvPr id="155" name="Text 153"/>
+          <p:cNvSpPr txBox="1"/>
+          <p:nvPr/>
+        </p:nvSpPr>
+        <p:spPr>
+          <a:xfrm>
+            <a:off x="9034272" y="5546750"/>
+            <a:ext cx="1481328" cy="148133"/>
+          </a:xfrm>
+          <a:prstGeom prst="rect">
+            <a:avLst/>
+          </a:prstGeom>
+          <a:noFill/>
+          <a:ln/>
+        </p:spPr>
+        <p:txBody>
+          <a:bodyPr wrap="square" lIns="0" tIns="0" rIns="0" bIns="0" rtlCol="0" anchor="ctr"/>
+          <a:lstStyle/>
+          <a:p>
+            <a:pPr indent="0" marL="0">
+              <a:buNone/>
+            </a:pPr>
+            <a:r>
+              <a:rPr lang="en-US" sz="650" dirty="0">
+                <a:solidFill>
+                  <a:srgbClr val="8AB0C8"/>
+                </a:solidFill>
+              </a:rPr>
+              <a:t>3. CharXiv</a:t>
+            </a:r>
+            <a:endParaRPr lang="en-US" sz="650" dirty="0"/>
+          </a:p>
+        </p:txBody>
+      </p:sp>
+      <p:sp>
+        <p:nvSpPr>
+          <p:cNvPr id="156" name="Text 154"/>
+          <p:cNvSpPr txBox="1"/>
+          <p:nvPr/>
+        </p:nvSpPr>
+        <p:spPr>
+          <a:xfrm>
+            <a:off x="9034272" y="5694883"/>
+            <a:ext cx="1481328" cy="148133"/>
+          </a:xfrm>
+          <a:prstGeom prst="rect">
+            <a:avLst/>
+          </a:prstGeom>
+          <a:noFill/>
+          <a:ln/>
+        </p:spPr>
+        <p:txBody>
+          <a:bodyPr wrap="square" lIns="0" tIns="0" rIns="0" bIns="0" rtlCol="0" anchor="ctr"/>
+          <a:lstStyle/>
+          <a:p>
+            <a:pPr indent="0" marL="0">
+              <a:buNone/>
+            </a:pPr>
+            <a:r>
+              <a:rPr lang="en-US" sz="650" dirty="0">
+                <a:solidFill>
+                  <a:srgbClr val="8AB0C8"/>
+                </a:solidFill>
+              </a:rPr>
+              <a:t>4. CharXiv-R</a:t>
+            </a:r>
+            <a:endParaRPr lang="en-US" sz="650" dirty="0"/>
+          </a:p>
+        </p:txBody>
+      </p:sp>
+      <p:sp>
+        <p:nvSpPr>
+          <p:cNvPr id="157" name="Text 155"/>
+          <p:cNvSpPr txBox="1"/>
+          <p:nvPr/>
+        </p:nvSpPr>
+        <p:spPr>
+          <a:xfrm>
+            <a:off x="9034272" y="5843016"/>
+            <a:ext cx="1481328" cy="148133"/>
+          </a:xfrm>
+          <a:prstGeom prst="rect">
+            <a:avLst/>
+          </a:prstGeom>
+          <a:noFill/>
+          <a:ln/>
+        </p:spPr>
+        <p:txBody>
+          <a:bodyPr wrap="square" lIns="0" tIns="0" rIns="0" bIns="0" rtlCol="0" anchor="ctr"/>
+          <a:lstStyle/>
+          <a:p>
+            <a:pPr indent="0" marL="0">
+              <a:buNone/>
+            </a:pPr>
+            <a:r>
+              <a:rPr lang="en-US" sz="650" dirty="0">
+                <a:solidFill>
+                  <a:srgbClr val="8AB0C8"/>
+                </a:solidFill>
+              </a:rPr>
+              <a:t>5. DocVQA</a:t>
+            </a:r>
+            <a:endParaRPr lang="en-US" sz="650" dirty="0"/>
+          </a:p>
+        </p:txBody>
+      </p:sp>
+      <p:sp>
+        <p:nvSpPr>
+          <p:cNvPr id="158" name="Text 156"/>
+          <p:cNvSpPr txBox="1"/>
+          <p:nvPr/>
+        </p:nvSpPr>
+        <p:spPr>
+          <a:xfrm>
+            <a:off x="9034272" y="5991149"/>
+            <a:ext cx="1481328" cy="148133"/>
+          </a:xfrm>
+          <a:prstGeom prst="rect">
+            <a:avLst/>
+          </a:prstGeom>
+          <a:noFill/>
+          <a:ln/>
+        </p:spPr>
+        <p:txBody>
+          <a:bodyPr wrap="square" lIns="0" tIns="0" rIns="0" bIns="0" rtlCol="0" anchor="ctr"/>
+          <a:lstStyle/>
+          <a:p>
+            <a:pPr indent="0" marL="0">
+              <a:buNone/>
+            </a:pPr>
+            <a:r>
+              <a:rPr lang="en-US" sz="650" dirty="0">
+                <a:solidFill>
+                  <a:srgbClr val="8AB0C8"/>
+                </a:solidFill>
+              </a:rPr>
+              <a:t>6. MathVision</a:t>
+            </a:r>
+            <a:endParaRPr lang="en-US" sz="650" dirty="0"/>
+          </a:p>
+        </p:txBody>
+      </p:sp>
+      <p:sp>
+        <p:nvSpPr>
+          <p:cNvPr id="159" name="Text 157"/>
+          <p:cNvSpPr txBox="1"/>
+          <p:nvPr/>
+        </p:nvSpPr>
+        <p:spPr>
+          <a:xfrm>
+            <a:off x="9034272" y="6139282"/>
+            <a:ext cx="1481328" cy="148133"/>
+          </a:xfrm>
+          <a:prstGeom prst="rect">
+            <a:avLst/>
+          </a:prstGeom>
+          <a:noFill/>
+          <a:ln/>
+        </p:spPr>
+        <p:txBody>
+          <a:bodyPr wrap="square" lIns="0" tIns="0" rIns="0" bIns="0" rtlCol="0" anchor="ctr"/>
+          <a:lstStyle/>
+          <a:p>
+            <a:pPr indent="0" marL="0">
+              <a:buNone/>
+            </a:pPr>
+            <a:r>
+              <a:rPr lang="en-US" sz="650" dirty="0">
+                <a:solidFill>
+                  <a:srgbClr val="8AB0C8"/>
+                </a:solidFill>
+              </a:rPr>
+              <a:t>7. MMVU</a:t>
+            </a:r>
+            <a:endParaRPr lang="en-US" sz="650" dirty="0"/>
+          </a:p>
+        </p:txBody>
+      </p:sp>
+      <p:sp>
+        <p:nvSpPr>
+          <p:cNvPr id="160" name="Text 158"/>
+          <p:cNvSpPr txBox="1"/>
+          <p:nvPr/>
+        </p:nvSpPr>
+        <p:spPr>
+          <a:xfrm>
+            <a:off x="9034272" y="6287414"/>
+            <a:ext cx="1481328" cy="148133"/>
+          </a:xfrm>
+          <a:prstGeom prst="rect">
+            <a:avLst/>
+          </a:prstGeom>
+          <a:noFill/>
+          <a:ln/>
+        </p:spPr>
+        <p:txBody>
+          <a:bodyPr wrap="square" lIns="0" tIns="0" rIns="0" bIns="0" rtlCol="0" anchor="ctr"/>
+          <a:lstStyle/>
+          <a:p>
+            <a:pPr indent="0" marL="0">
+              <a:buNone/>
+            </a:pPr>
+            <a:r>
+              <a:rPr lang="en-US" sz="650" dirty="0">
+                <a:solidFill>
+                  <a:srgbClr val="8AB0C8"/>
+                </a:solidFill>
+              </a:rPr>
+              <a:t>8. Chartography</a:t>
+            </a:r>
+            <a:endParaRPr lang="en-US" sz="650" dirty="0"/>
+          </a:p>
+        </p:txBody>
+      </p:sp>
+      <p:sp>
+        <p:nvSpPr>
+          <p:cNvPr id="161" name="Shape 159"/>
+          <p:cNvSpPr/>
+          <p:nvPr/>
+        </p:nvSpPr>
+        <p:spPr>
+          <a:xfrm>
+            <a:off x="10607040" y="1042416"/>
+            <a:ext cx="1554480" cy="201168"/>
+          </a:xfrm>
+          <a:prstGeom prst="rect">
+            <a:avLst/>
+          </a:prstGeom>
+          <a:solidFill>
+            <a:srgbClr val="3DAA6E">
+              <a:alpha val="15000"/>
+            </a:srgbClr>
+          </a:solidFill>
+          <a:ln/>
+        </p:spPr>
+      </p:sp>
+      <p:sp>
+        <p:nvSpPr>
+          <p:cNvPr id="162" name="Shape 160"/>
+          <p:cNvSpPr/>
+          <p:nvPr/>
+        </p:nvSpPr>
+        <p:spPr>
+          <a:xfrm>
+            <a:off x="10607040" y="1042416"/>
+            <a:ext cx="54864" cy="201168"/>
           </a:xfrm>
           <a:prstGeom prst="rect">
             <a:avLst/>
@@ -4878,86 +5888,360 @@
       </p:sp>
       <p:sp>
         <p:nvSpPr>
-          <p:cNvPr id="133" name="Text 131"/>
-          <p:cNvSpPr txBox="1"/>
-          <p:nvPr/>
-        </p:nvSpPr>
-        <p:spPr>
-          <a:xfrm>
-            <a:off x="9427464" y="4352544"/>
-            <a:ext cx="2743200" cy="274320"/>
-          </a:xfrm>
-          <a:prstGeom prst="rect">
-            <a:avLst/>
-          </a:prstGeom>
-          <a:noFill/>
-          <a:ln/>
-        </p:spPr>
-        <p:txBody>
-          <a:bodyPr wrap="square" lIns="0" tIns="0" rIns="0" bIns="0" rtlCol="0" anchor="ctr"/>
-          <a:lstStyle/>
-          <a:p>
-            <a:pPr indent="0" marL="0">
-              <a:buNone/>
-            </a:pPr>
-            <a:r>
-              <a:rPr lang="en-US" sz="1000" b="1" dirty="0">
+          <p:cNvPr id="163" name="Text 161"/>
+          <p:cNvSpPr txBox="1"/>
+          <p:nvPr/>
+        </p:nvSpPr>
+        <p:spPr>
+          <a:xfrm>
+            <a:off x="10698480" y="1069848"/>
+            <a:ext cx="1444752" cy="164592"/>
+          </a:xfrm>
+          <a:prstGeom prst="rect">
+            <a:avLst/>
+          </a:prstGeom>
+          <a:noFill/>
+          <a:ln/>
+        </p:spPr>
+        <p:txBody>
+          <a:bodyPr wrap="square" lIns="0" tIns="0" rIns="0" bIns="0" rtlCol="0" anchor="ctr"/>
+          <a:lstStyle/>
+          <a:p>
+            <a:pPr indent="0" marL="0">
+              <a:buNone/>
+            </a:pPr>
+            <a:r>
+              <a:rPr lang="en-US" sz="750" b="1" dirty="0">
                 <a:solidFill>
                   <a:srgbClr val="3DAA6E"/>
                 </a:solidFill>
               </a:rPr>
               <a:t>Agents &amp; Tools</a:t>
             </a:r>
-            <a:endParaRPr lang="en-US" sz="1000" dirty="0"/>
-          </a:p>
-        </p:txBody>
-      </p:sp>
-      <p:sp>
-        <p:nvSpPr>
-          <p:cNvPr id="134" name="Text 132"/>
-          <p:cNvSpPr txBox="1"/>
-          <p:nvPr/>
-        </p:nvSpPr>
-        <p:spPr>
-          <a:xfrm>
-            <a:off x="9427464" y="4645152"/>
-            <a:ext cx="2743200" cy="420624"/>
-          </a:xfrm>
-          <a:prstGeom prst="rect">
-            <a:avLst/>
-          </a:prstGeom>
-          <a:noFill/>
-          <a:ln/>
-        </p:spPr>
-        <p:txBody>
-          <a:bodyPr wrap="square" lIns="0" tIns="0" rIns="0" bIns="0" rtlCol="0" anchor="ctr"/>
-          <a:lstStyle/>
-          <a:p>
-            <a:pPr indent="0" marL="0">
-              <a:buNone/>
-            </a:pPr>
-            <a:r>
-              <a:rPr lang="en-US" sz="750" dirty="0">
-                <a:solidFill>
-                  <a:srgbClr val="6A8CA8"/>
-                </a:solidFill>
-              </a:rPr>
-              <a:t>MCP Atlas  ·  tau2-bench✓  ·  Agents Last Exam  ·  BrowseComp  ·  OSWorld 2.0  ·  BFCL v4  ·  Toolathlon  ·  APEX-Agents</a:t>
-            </a:r>
             <a:endParaRPr lang="en-US" sz="750" dirty="0"/>
           </a:p>
         </p:txBody>
       </p:sp>
       <p:sp>
         <p:nvSpPr>
-          <p:cNvPr id="135" name="Shape 133"/>
-          <p:cNvSpPr/>
-          <p:nvPr/>
-        </p:nvSpPr>
-        <p:spPr>
-          <a:xfrm>
-            <a:off x="9189720" y="5166360"/>
-            <a:ext cx="164592" cy="310896"/>
+          <p:cNvPr id="164" name="Text 162"/>
+          <p:cNvSpPr txBox="1"/>
+          <p:nvPr/>
+        </p:nvSpPr>
+        <p:spPr>
+          <a:xfrm>
+            <a:off x="10661904" y="1261872"/>
+            <a:ext cx="1481328" cy="148133"/>
+          </a:xfrm>
+          <a:prstGeom prst="rect">
+            <a:avLst/>
+          </a:prstGeom>
+          <a:noFill/>
+          <a:ln/>
+        </p:spPr>
+        <p:txBody>
+          <a:bodyPr wrap="square" lIns="0" tIns="0" rIns="0" bIns="0" rtlCol="0" anchor="ctr"/>
+          <a:lstStyle/>
+          <a:p>
+            <a:pPr indent="0" marL="0">
+              <a:buNone/>
+            </a:pPr>
+            <a:r>
+              <a:rPr lang="en-US" sz="650" dirty="0">
+                <a:solidFill>
+                  <a:srgbClr val="8AB0C8"/>
+                </a:solidFill>
+              </a:rPr>
+              <a:t>1. MCP Atlas</a:t>
+            </a:r>
+            <a:endParaRPr lang="en-US" sz="650" dirty="0"/>
+          </a:p>
+        </p:txBody>
+      </p:sp>
+      <p:sp>
+        <p:nvSpPr>
+          <p:cNvPr id="165" name="Text 163"/>
+          <p:cNvSpPr txBox="1"/>
+          <p:nvPr/>
+        </p:nvSpPr>
+        <p:spPr>
+          <a:xfrm>
+            <a:off x="10661904" y="1410005"/>
+            <a:ext cx="1481328" cy="148133"/>
+          </a:xfrm>
+          <a:prstGeom prst="rect">
+            <a:avLst/>
+          </a:prstGeom>
+          <a:noFill/>
+          <a:ln/>
+        </p:spPr>
+        <p:txBody>
+          <a:bodyPr wrap="square" lIns="0" tIns="0" rIns="0" bIns="0" rtlCol="0" anchor="ctr"/>
+          <a:lstStyle/>
+          <a:p>
+            <a:pPr indent="0" marL="0">
+              <a:buNone/>
+            </a:pPr>
+            <a:r>
+              <a:rPr lang="en-US" sz="650" b="1" dirty="0">
+                <a:solidFill>
+                  <a:srgbClr val="00E5A0"/>
+                </a:solidFill>
+              </a:rPr>
+              <a:t>2. tau2-bench ✓</a:t>
+            </a:r>
+            <a:endParaRPr lang="en-US" sz="650" dirty="0"/>
+          </a:p>
+        </p:txBody>
+      </p:sp>
+      <p:sp>
+        <p:nvSpPr>
+          <p:cNvPr id="166" name="Text 164"/>
+          <p:cNvSpPr txBox="1"/>
+          <p:nvPr/>
+        </p:nvSpPr>
+        <p:spPr>
+          <a:xfrm>
+            <a:off x="10661904" y="1558138"/>
+            <a:ext cx="1481328" cy="148133"/>
+          </a:xfrm>
+          <a:prstGeom prst="rect">
+            <a:avLst/>
+          </a:prstGeom>
+          <a:noFill/>
+          <a:ln/>
+        </p:spPr>
+        <p:txBody>
+          <a:bodyPr wrap="square" lIns="0" tIns="0" rIns="0" bIns="0" rtlCol="0" anchor="ctr"/>
+          <a:lstStyle/>
+          <a:p>
+            <a:pPr indent="0" marL="0">
+              <a:buNone/>
+            </a:pPr>
+            <a:r>
+              <a:rPr lang="en-US" sz="650" dirty="0">
+                <a:solidFill>
+                  <a:srgbClr val="8AB0C8"/>
+                </a:solidFill>
+              </a:rPr>
+              <a:t>3. Agents Last Exam</a:t>
+            </a:r>
+            <a:endParaRPr lang="en-US" sz="650" dirty="0"/>
+          </a:p>
+        </p:txBody>
+      </p:sp>
+      <p:sp>
+        <p:nvSpPr>
+          <p:cNvPr id="167" name="Text 165"/>
+          <p:cNvSpPr txBox="1"/>
+          <p:nvPr/>
+        </p:nvSpPr>
+        <p:spPr>
+          <a:xfrm>
+            <a:off x="10661904" y="1706270"/>
+            <a:ext cx="1481328" cy="148133"/>
+          </a:xfrm>
+          <a:prstGeom prst="rect">
+            <a:avLst/>
+          </a:prstGeom>
+          <a:noFill/>
+          <a:ln/>
+        </p:spPr>
+        <p:txBody>
+          <a:bodyPr wrap="square" lIns="0" tIns="0" rIns="0" bIns="0" rtlCol="0" anchor="ctr"/>
+          <a:lstStyle/>
+          <a:p>
+            <a:pPr indent="0" marL="0">
+              <a:buNone/>
+            </a:pPr>
+            <a:r>
+              <a:rPr lang="en-US" sz="650" dirty="0">
+                <a:solidFill>
+                  <a:srgbClr val="8AB0C8"/>
+                </a:solidFill>
+              </a:rPr>
+              <a:t>4. BrowseComp</a:t>
+            </a:r>
+            <a:endParaRPr lang="en-US" sz="650" dirty="0"/>
+          </a:p>
+        </p:txBody>
+      </p:sp>
+      <p:sp>
+        <p:nvSpPr>
+          <p:cNvPr id="168" name="Text 166"/>
+          <p:cNvSpPr txBox="1"/>
+          <p:nvPr/>
+        </p:nvSpPr>
+        <p:spPr>
+          <a:xfrm>
+            <a:off x="10661904" y="1854403"/>
+            <a:ext cx="1481328" cy="148133"/>
+          </a:xfrm>
+          <a:prstGeom prst="rect">
+            <a:avLst/>
+          </a:prstGeom>
+          <a:noFill/>
+          <a:ln/>
+        </p:spPr>
+        <p:txBody>
+          <a:bodyPr wrap="square" lIns="0" tIns="0" rIns="0" bIns="0" rtlCol="0" anchor="ctr"/>
+          <a:lstStyle/>
+          <a:p>
+            <a:pPr indent="0" marL="0">
+              <a:buNone/>
+            </a:pPr>
+            <a:r>
+              <a:rPr lang="en-US" sz="650" dirty="0">
+                <a:solidFill>
+                  <a:srgbClr val="8AB0C8"/>
+                </a:solidFill>
+              </a:rPr>
+              <a:t>5. OSWorld 2.0</a:t>
+            </a:r>
+            <a:endParaRPr lang="en-US" sz="650" dirty="0"/>
+          </a:p>
+        </p:txBody>
+      </p:sp>
+      <p:sp>
+        <p:nvSpPr>
+          <p:cNvPr id="169" name="Text 167"/>
+          <p:cNvSpPr txBox="1"/>
+          <p:nvPr/>
+        </p:nvSpPr>
+        <p:spPr>
+          <a:xfrm>
+            <a:off x="10661904" y="2002536"/>
+            <a:ext cx="1481328" cy="148133"/>
+          </a:xfrm>
+          <a:prstGeom prst="rect">
+            <a:avLst/>
+          </a:prstGeom>
+          <a:noFill/>
+          <a:ln/>
+        </p:spPr>
+        <p:txBody>
+          <a:bodyPr wrap="square" lIns="0" tIns="0" rIns="0" bIns="0" rtlCol="0" anchor="ctr"/>
+          <a:lstStyle/>
+          <a:p>
+            <a:pPr indent="0" marL="0">
+              <a:buNone/>
+            </a:pPr>
+            <a:r>
+              <a:rPr lang="en-US" sz="650" dirty="0">
+                <a:solidFill>
+                  <a:srgbClr val="8AB0C8"/>
+                </a:solidFill>
+              </a:rPr>
+              <a:t>6. BFCL v4</a:t>
+            </a:r>
+            <a:endParaRPr lang="en-US" sz="650" dirty="0"/>
+          </a:p>
+        </p:txBody>
+      </p:sp>
+      <p:sp>
+        <p:nvSpPr>
+          <p:cNvPr id="170" name="Text 168"/>
+          <p:cNvSpPr txBox="1"/>
+          <p:nvPr/>
+        </p:nvSpPr>
+        <p:spPr>
+          <a:xfrm>
+            <a:off x="10661904" y="2150669"/>
+            <a:ext cx="1481328" cy="148133"/>
+          </a:xfrm>
+          <a:prstGeom prst="rect">
+            <a:avLst/>
+          </a:prstGeom>
+          <a:noFill/>
+          <a:ln/>
+        </p:spPr>
+        <p:txBody>
+          <a:bodyPr wrap="square" lIns="0" tIns="0" rIns="0" bIns="0" rtlCol="0" anchor="ctr"/>
+          <a:lstStyle/>
+          <a:p>
+            <a:pPr indent="0" marL="0">
+              <a:buNone/>
+            </a:pPr>
+            <a:r>
+              <a:rPr lang="en-US" sz="650" dirty="0">
+                <a:solidFill>
+                  <a:srgbClr val="8AB0C8"/>
+                </a:solidFill>
+              </a:rPr>
+              <a:t>7. Toolathlon</a:t>
+            </a:r>
+            <a:endParaRPr lang="en-US" sz="650" dirty="0"/>
+          </a:p>
+        </p:txBody>
+      </p:sp>
+      <p:sp>
+        <p:nvSpPr>
+          <p:cNvPr id="171" name="Text 169"/>
+          <p:cNvSpPr txBox="1"/>
+          <p:nvPr/>
+        </p:nvSpPr>
+        <p:spPr>
+          <a:xfrm>
+            <a:off x="10661904" y="2298802"/>
+            <a:ext cx="1481328" cy="148133"/>
+          </a:xfrm>
+          <a:prstGeom prst="rect">
+            <a:avLst/>
+          </a:prstGeom>
+          <a:noFill/>
+          <a:ln/>
+        </p:spPr>
+        <p:txBody>
+          <a:bodyPr wrap="square" lIns="0" tIns="0" rIns="0" bIns="0" rtlCol="0" anchor="ctr"/>
+          <a:lstStyle/>
+          <a:p>
+            <a:pPr indent="0" marL="0">
+              <a:buNone/>
+            </a:pPr>
+            <a:r>
+              <a:rPr lang="en-US" sz="650" dirty="0">
+                <a:solidFill>
+                  <a:srgbClr val="8AB0C8"/>
+                </a:solidFill>
+              </a:rPr>
+              <a:t>8. APEX-Agents</a:t>
+            </a:r>
+            <a:endParaRPr lang="en-US" sz="650" dirty="0"/>
+          </a:p>
+        </p:txBody>
+      </p:sp>
+      <p:sp>
+        <p:nvSpPr>
+          <p:cNvPr id="172" name="Shape 170"/>
+          <p:cNvSpPr/>
+          <p:nvPr/>
+        </p:nvSpPr>
+        <p:spPr>
+          <a:xfrm>
+            <a:off x="10607040" y="2520086"/>
+            <a:ext cx="1554480" cy="201168"/>
+          </a:xfrm>
+          <a:prstGeom prst="rect">
+            <a:avLst/>
+          </a:prstGeom>
+          <a:solidFill>
+            <a:srgbClr val="9B59B6">
+              <a:alpha val="15000"/>
+            </a:srgbClr>
+          </a:solidFill>
+          <a:ln/>
+        </p:spPr>
+      </p:sp>
+      <p:sp>
+        <p:nvSpPr>
+          <p:cNvPr id="173" name="Shape 171"/>
+          <p:cNvSpPr/>
+          <p:nvPr/>
+        </p:nvSpPr>
+        <p:spPr>
+          <a:xfrm>
+            <a:off x="10607040" y="2520086"/>
+            <a:ext cx="54864" cy="201168"/>
           </a:xfrm>
           <a:prstGeom prst="rect">
             <a:avLst/>
@@ -4970,86 +6254,360 @@
       </p:sp>
       <p:sp>
         <p:nvSpPr>
-          <p:cNvPr id="136" name="Text 134"/>
-          <p:cNvSpPr txBox="1"/>
-          <p:nvPr/>
-        </p:nvSpPr>
-        <p:spPr>
-          <a:xfrm>
-            <a:off x="9427464" y="5157216"/>
-            <a:ext cx="2743200" cy="274320"/>
-          </a:xfrm>
-          <a:prstGeom prst="rect">
-            <a:avLst/>
-          </a:prstGeom>
-          <a:noFill/>
-          <a:ln/>
-        </p:spPr>
-        <p:txBody>
-          <a:bodyPr wrap="square" lIns="0" tIns="0" rIns="0" bIns="0" rtlCol="0" anchor="ctr"/>
-          <a:lstStyle/>
-          <a:p>
-            <a:pPr indent="0" marL="0">
-              <a:buNone/>
-            </a:pPr>
-            <a:r>
-              <a:rPr lang="en-US" sz="1000" b="1" dirty="0">
+          <p:cNvPr id="174" name="Text 172"/>
+          <p:cNvSpPr txBox="1"/>
+          <p:nvPr/>
+        </p:nvSpPr>
+        <p:spPr>
+          <a:xfrm>
+            <a:off x="10698480" y="2547518"/>
+            <a:ext cx="1444752" cy="164592"/>
+          </a:xfrm>
+          <a:prstGeom prst="rect">
+            <a:avLst/>
+          </a:prstGeom>
+          <a:noFill/>
+          <a:ln/>
+        </p:spPr>
+        <p:txBody>
+          <a:bodyPr wrap="square" lIns="0" tIns="0" rIns="0" bIns="0" rtlCol="0" anchor="ctr"/>
+          <a:lstStyle/>
+          <a:p>
+            <a:pPr indent="0" marL="0">
+              <a:buNone/>
+            </a:pPr>
+            <a:r>
+              <a:rPr lang="en-US" sz="750" b="1" dirty="0">
                 <a:solidFill>
                   <a:srgbClr val="9B59B6"/>
                 </a:solidFill>
               </a:rPr>
               <a:t>Knowledge &amp; Language</a:t>
             </a:r>
-            <a:endParaRPr lang="en-US" sz="1000" dirty="0"/>
-          </a:p>
-        </p:txBody>
-      </p:sp>
-      <p:sp>
-        <p:nvSpPr>
-          <p:cNvPr id="137" name="Text 135"/>
-          <p:cNvSpPr txBox="1"/>
-          <p:nvPr/>
-        </p:nvSpPr>
-        <p:spPr>
-          <a:xfrm>
-            <a:off x="9427464" y="5449824"/>
-            <a:ext cx="2743200" cy="420624"/>
-          </a:xfrm>
-          <a:prstGeom prst="rect">
-            <a:avLst/>
-          </a:prstGeom>
-          <a:noFill/>
-          <a:ln/>
-        </p:spPr>
-        <p:txBody>
-          <a:bodyPr wrap="square" lIns="0" tIns="0" rIns="0" bIns="0" rtlCol="0" anchor="ctr"/>
-          <a:lstStyle/>
-          <a:p>
-            <a:pPr indent="0" marL="0">
-              <a:buNone/>
-            </a:pPr>
-            <a:r>
-              <a:rPr lang="en-US" sz="750" dirty="0">
-                <a:solidFill>
-                  <a:srgbClr val="6A8CA8"/>
-                </a:solidFill>
-              </a:rPr>
-              <a:t>TMMLU+✓  ·  TW-LegalBench  ·  AIEC✓  ·  MMMLU  ·  GDPval-AA  ·  IFEval  ·  SimpleQA  ·  DRCD</a:t>
-            </a:r>
             <a:endParaRPr lang="en-US" sz="750" dirty="0"/>
           </a:p>
         </p:txBody>
       </p:sp>
       <p:sp>
         <p:nvSpPr>
-          <p:cNvPr id="138" name="Shape 136"/>
-          <p:cNvSpPr/>
-          <p:nvPr/>
-        </p:nvSpPr>
-        <p:spPr>
-          <a:xfrm>
-            <a:off x="9189720" y="5971032"/>
-            <a:ext cx="164592" cy="310896"/>
+          <p:cNvPr id="175" name="Text 173"/>
+          <p:cNvSpPr txBox="1"/>
+          <p:nvPr/>
+        </p:nvSpPr>
+        <p:spPr>
+          <a:xfrm>
+            <a:off x="10661904" y="2739542"/>
+            <a:ext cx="1481328" cy="148133"/>
+          </a:xfrm>
+          <a:prstGeom prst="rect">
+            <a:avLst/>
+          </a:prstGeom>
+          <a:noFill/>
+          <a:ln/>
+        </p:spPr>
+        <p:txBody>
+          <a:bodyPr wrap="square" lIns="0" tIns="0" rIns="0" bIns="0" rtlCol="0" anchor="ctr"/>
+          <a:lstStyle/>
+          <a:p>
+            <a:pPr indent="0" marL="0">
+              <a:buNone/>
+            </a:pPr>
+            <a:r>
+              <a:rPr lang="en-US" sz="650" b="1" dirty="0">
+                <a:solidFill>
+                  <a:srgbClr val="00E5A0"/>
+                </a:solidFill>
+              </a:rPr>
+              <a:t>1. TMMLU+ ✓</a:t>
+            </a:r>
+            <a:endParaRPr lang="en-US" sz="650" dirty="0"/>
+          </a:p>
+        </p:txBody>
+      </p:sp>
+      <p:sp>
+        <p:nvSpPr>
+          <p:cNvPr id="176" name="Text 174"/>
+          <p:cNvSpPr txBox="1"/>
+          <p:nvPr/>
+        </p:nvSpPr>
+        <p:spPr>
+          <a:xfrm>
+            <a:off x="10661904" y="2887675"/>
+            <a:ext cx="1481328" cy="148133"/>
+          </a:xfrm>
+          <a:prstGeom prst="rect">
+            <a:avLst/>
+          </a:prstGeom>
+          <a:noFill/>
+          <a:ln/>
+        </p:spPr>
+        <p:txBody>
+          <a:bodyPr wrap="square" lIns="0" tIns="0" rIns="0" bIns="0" rtlCol="0" anchor="ctr"/>
+          <a:lstStyle/>
+          <a:p>
+            <a:pPr indent="0" marL="0">
+              <a:buNone/>
+            </a:pPr>
+            <a:r>
+              <a:rPr lang="en-US" sz="650" dirty="0">
+                <a:solidFill>
+                  <a:srgbClr val="8AB0C8"/>
+                </a:solidFill>
+              </a:rPr>
+              <a:t>2. TW-LegalBench</a:t>
+            </a:r>
+            <a:endParaRPr lang="en-US" sz="650" dirty="0"/>
+          </a:p>
+        </p:txBody>
+      </p:sp>
+      <p:sp>
+        <p:nvSpPr>
+          <p:cNvPr id="177" name="Text 175"/>
+          <p:cNvSpPr txBox="1"/>
+          <p:nvPr/>
+        </p:nvSpPr>
+        <p:spPr>
+          <a:xfrm>
+            <a:off x="10661904" y="3035808"/>
+            <a:ext cx="1481328" cy="148133"/>
+          </a:xfrm>
+          <a:prstGeom prst="rect">
+            <a:avLst/>
+          </a:prstGeom>
+          <a:noFill/>
+          <a:ln/>
+        </p:spPr>
+        <p:txBody>
+          <a:bodyPr wrap="square" lIns="0" tIns="0" rIns="0" bIns="0" rtlCol="0" anchor="ctr"/>
+          <a:lstStyle/>
+          <a:p>
+            <a:pPr indent="0" marL="0">
+              <a:buNone/>
+            </a:pPr>
+            <a:r>
+              <a:rPr lang="en-US" sz="650" b="1" dirty="0">
+                <a:solidFill>
+                  <a:srgbClr val="00E5A0"/>
+                </a:solidFill>
+              </a:rPr>
+              <a:t>3. AIEC ✓</a:t>
+            </a:r>
+            <a:endParaRPr lang="en-US" sz="650" dirty="0"/>
+          </a:p>
+        </p:txBody>
+      </p:sp>
+      <p:sp>
+        <p:nvSpPr>
+          <p:cNvPr id="178" name="Text 176"/>
+          <p:cNvSpPr txBox="1"/>
+          <p:nvPr/>
+        </p:nvSpPr>
+        <p:spPr>
+          <a:xfrm>
+            <a:off x="10661904" y="3183941"/>
+            <a:ext cx="1481328" cy="148133"/>
+          </a:xfrm>
+          <a:prstGeom prst="rect">
+            <a:avLst/>
+          </a:prstGeom>
+          <a:noFill/>
+          <a:ln/>
+        </p:spPr>
+        <p:txBody>
+          <a:bodyPr wrap="square" lIns="0" tIns="0" rIns="0" bIns="0" rtlCol="0" anchor="ctr"/>
+          <a:lstStyle/>
+          <a:p>
+            <a:pPr indent="0" marL="0">
+              <a:buNone/>
+            </a:pPr>
+            <a:r>
+              <a:rPr lang="en-US" sz="650" dirty="0">
+                <a:solidFill>
+                  <a:srgbClr val="8AB0C8"/>
+                </a:solidFill>
+              </a:rPr>
+              <a:t>4. MMMLU</a:t>
+            </a:r>
+            <a:endParaRPr lang="en-US" sz="650" dirty="0"/>
+          </a:p>
+        </p:txBody>
+      </p:sp>
+      <p:sp>
+        <p:nvSpPr>
+          <p:cNvPr id="179" name="Text 177"/>
+          <p:cNvSpPr txBox="1"/>
+          <p:nvPr/>
+        </p:nvSpPr>
+        <p:spPr>
+          <a:xfrm>
+            <a:off x="10661904" y="3332074"/>
+            <a:ext cx="1481328" cy="148133"/>
+          </a:xfrm>
+          <a:prstGeom prst="rect">
+            <a:avLst/>
+          </a:prstGeom>
+          <a:noFill/>
+          <a:ln/>
+        </p:spPr>
+        <p:txBody>
+          <a:bodyPr wrap="square" lIns="0" tIns="0" rIns="0" bIns="0" rtlCol="0" anchor="ctr"/>
+          <a:lstStyle/>
+          <a:p>
+            <a:pPr indent="0" marL="0">
+              <a:buNone/>
+            </a:pPr>
+            <a:r>
+              <a:rPr lang="en-US" sz="650" dirty="0">
+                <a:solidFill>
+                  <a:srgbClr val="8AB0C8"/>
+                </a:solidFill>
+              </a:rPr>
+              <a:t>5. GDPval-AA</a:t>
+            </a:r>
+            <a:endParaRPr lang="en-US" sz="650" dirty="0"/>
+          </a:p>
+        </p:txBody>
+      </p:sp>
+      <p:sp>
+        <p:nvSpPr>
+          <p:cNvPr id="180" name="Text 178"/>
+          <p:cNvSpPr txBox="1"/>
+          <p:nvPr/>
+        </p:nvSpPr>
+        <p:spPr>
+          <a:xfrm>
+            <a:off x="10661904" y="3480206"/>
+            <a:ext cx="1481328" cy="148133"/>
+          </a:xfrm>
+          <a:prstGeom prst="rect">
+            <a:avLst/>
+          </a:prstGeom>
+          <a:noFill/>
+          <a:ln/>
+        </p:spPr>
+        <p:txBody>
+          <a:bodyPr wrap="square" lIns="0" tIns="0" rIns="0" bIns="0" rtlCol="0" anchor="ctr"/>
+          <a:lstStyle/>
+          <a:p>
+            <a:pPr indent="0" marL="0">
+              <a:buNone/>
+            </a:pPr>
+            <a:r>
+              <a:rPr lang="en-US" sz="650" dirty="0">
+                <a:solidFill>
+                  <a:srgbClr val="8AB0C8"/>
+                </a:solidFill>
+              </a:rPr>
+              <a:t>6. IFEval</a:t>
+            </a:r>
+            <a:endParaRPr lang="en-US" sz="650" dirty="0"/>
+          </a:p>
+        </p:txBody>
+      </p:sp>
+      <p:sp>
+        <p:nvSpPr>
+          <p:cNvPr id="181" name="Text 179"/>
+          <p:cNvSpPr txBox="1"/>
+          <p:nvPr/>
+        </p:nvSpPr>
+        <p:spPr>
+          <a:xfrm>
+            <a:off x="10661904" y="3628339"/>
+            <a:ext cx="1481328" cy="148133"/>
+          </a:xfrm>
+          <a:prstGeom prst="rect">
+            <a:avLst/>
+          </a:prstGeom>
+          <a:noFill/>
+          <a:ln/>
+        </p:spPr>
+        <p:txBody>
+          <a:bodyPr wrap="square" lIns="0" tIns="0" rIns="0" bIns="0" rtlCol="0" anchor="ctr"/>
+          <a:lstStyle/>
+          <a:p>
+            <a:pPr indent="0" marL="0">
+              <a:buNone/>
+            </a:pPr>
+            <a:r>
+              <a:rPr lang="en-US" sz="650" dirty="0">
+                <a:solidFill>
+                  <a:srgbClr val="8AB0C8"/>
+                </a:solidFill>
+              </a:rPr>
+              <a:t>7. SimpleQA</a:t>
+            </a:r>
+            <a:endParaRPr lang="en-US" sz="650" dirty="0"/>
+          </a:p>
+        </p:txBody>
+      </p:sp>
+      <p:sp>
+        <p:nvSpPr>
+          <p:cNvPr id="182" name="Text 180"/>
+          <p:cNvSpPr txBox="1"/>
+          <p:nvPr/>
+        </p:nvSpPr>
+        <p:spPr>
+          <a:xfrm>
+            <a:off x="10661904" y="3776472"/>
+            <a:ext cx="1481328" cy="148133"/>
+          </a:xfrm>
+          <a:prstGeom prst="rect">
+            <a:avLst/>
+          </a:prstGeom>
+          <a:noFill/>
+          <a:ln/>
+        </p:spPr>
+        <p:txBody>
+          <a:bodyPr wrap="square" lIns="0" tIns="0" rIns="0" bIns="0" rtlCol="0" anchor="ctr"/>
+          <a:lstStyle/>
+          <a:p>
+            <a:pPr indent="0" marL="0">
+              <a:buNone/>
+            </a:pPr>
+            <a:r>
+              <a:rPr lang="en-US" sz="650" dirty="0">
+                <a:solidFill>
+                  <a:srgbClr val="8AB0C8"/>
+                </a:solidFill>
+              </a:rPr>
+              <a:t>8. DRCD</a:t>
+            </a:r>
+            <a:endParaRPr lang="en-US" sz="650" dirty="0"/>
+          </a:p>
+        </p:txBody>
+      </p:sp>
+      <p:sp>
+        <p:nvSpPr>
+          <p:cNvPr id="183" name="Shape 181"/>
+          <p:cNvSpPr/>
+          <p:nvPr/>
+        </p:nvSpPr>
+        <p:spPr>
+          <a:xfrm>
+            <a:off x="10607040" y="3997757"/>
+            <a:ext cx="1554480" cy="201168"/>
+          </a:xfrm>
+          <a:prstGeom prst="rect">
+            <a:avLst/>
+          </a:prstGeom>
+          <a:solidFill>
+            <a:srgbClr val="E8A020">
+              <a:alpha val="15000"/>
+            </a:srgbClr>
+          </a:solidFill>
+          <a:ln/>
+        </p:spPr>
+      </p:sp>
+      <p:sp>
+        <p:nvSpPr>
+          <p:cNvPr id="184" name="Shape 182"/>
+          <p:cNvSpPr/>
+          <p:nvPr/>
+        </p:nvSpPr>
+        <p:spPr>
+          <a:xfrm>
+            <a:off x="10607040" y="3997757"/>
+            <a:ext cx="54864" cy="201168"/>
           </a:xfrm>
           <a:prstGeom prst="rect">
             <a:avLst/>
@@ -5062,555 +6620,487 @@
       </p:sp>
       <p:sp>
         <p:nvSpPr>
-          <p:cNvPr id="139" name="Text 137"/>
-          <p:cNvSpPr txBox="1"/>
-          <p:nvPr/>
-        </p:nvSpPr>
-        <p:spPr>
-          <a:xfrm>
-            <a:off x="9427464" y="5961888"/>
-            <a:ext cx="2743200" cy="274320"/>
-          </a:xfrm>
-          <a:prstGeom prst="rect">
-            <a:avLst/>
-          </a:prstGeom>
-          <a:noFill/>
-          <a:ln/>
-        </p:spPr>
-        <p:txBody>
-          <a:bodyPr wrap="square" lIns="0" tIns="0" rIns="0" bIns="0" rtlCol="0" anchor="ctr"/>
-          <a:lstStyle/>
-          <a:p>
-            <a:pPr indent="0" marL="0">
-              <a:buNone/>
-            </a:pPr>
-            <a:r>
-              <a:rPr lang="en-US" sz="1000" b="1" dirty="0">
+          <p:cNvPr id="185" name="Text 183"/>
+          <p:cNvSpPr txBox="1"/>
+          <p:nvPr/>
+        </p:nvSpPr>
+        <p:spPr>
+          <a:xfrm>
+            <a:off x="10698480" y="4025189"/>
+            <a:ext cx="1444752" cy="164592"/>
+          </a:xfrm>
+          <a:prstGeom prst="rect">
+            <a:avLst/>
+          </a:prstGeom>
+          <a:noFill/>
+          <a:ln/>
+        </p:spPr>
+        <p:txBody>
+          <a:bodyPr wrap="square" lIns="0" tIns="0" rIns="0" bIns="0" rtlCol="0" anchor="ctr"/>
+          <a:lstStyle/>
+          <a:p>
+            <a:pPr indent="0" marL="0">
+              <a:buNone/>
+            </a:pPr>
+            <a:r>
+              <a:rPr lang="en-US" sz="750" b="1" dirty="0">
                 <a:solidFill>
                   <a:srgbClr val="E8A020"/>
                 </a:solidFill>
               </a:rPr>
               <a:t>Data &amp; ML</a:t>
             </a:r>
-            <a:endParaRPr lang="en-US" sz="1000" dirty="0"/>
-          </a:p>
-        </p:txBody>
-      </p:sp>
-      <p:sp>
-        <p:nvSpPr>
-          <p:cNvPr id="140" name="Text 138"/>
-          <p:cNvSpPr txBox="1"/>
-          <p:nvPr/>
-        </p:nvSpPr>
-        <p:spPr>
-          <a:xfrm>
-            <a:off x="9427464" y="6254496"/>
-            <a:ext cx="2743200" cy="420624"/>
-          </a:xfrm>
-          <a:prstGeom prst="rect">
-            <a:avLst/>
-          </a:prstGeom>
-          <a:noFill/>
-          <a:ln/>
-        </p:spPr>
-        <p:txBody>
-          <a:bodyPr wrap="square" lIns="0" tIns="0" rIns="0" bIns="0" rtlCol="0" anchor="ctr"/>
-          <a:lstStyle/>
-          <a:p>
-            <a:pPr indent="0" marL="0">
-              <a:buNone/>
-            </a:pPr>
-            <a:r>
-              <a:rPr lang="en-US" sz="750" dirty="0">
-                <a:solidFill>
-                  <a:srgbClr val="6A8CA8"/>
-                </a:solidFill>
-              </a:rPr>
-              <a:t>MLE-Bench  ·  DSBench  ·  SpreadsheetBench</a:t>
-            </a:r>
             <a:endParaRPr lang="en-US" sz="750" dirty="0"/>
           </a:p>
         </p:txBody>
       </p:sp>
       <p:sp>
         <p:nvSpPr>
-          <p:cNvPr id="141" name="Shape 139"/>
-          <p:cNvSpPr/>
-          <p:nvPr/>
-        </p:nvSpPr>
-        <p:spPr>
-          <a:xfrm>
-            <a:off x="3283907" y="1325560"/>
-            <a:ext cx="128016" cy="128016"/>
-          </a:xfrm>
-          <a:prstGeom prst="ellipse">
-            <a:avLst/>
-          </a:prstGeom>
-          <a:solidFill>
-            <a:srgbClr val="E85D4A"/>
-          </a:solidFill>
-          <a:ln/>
-        </p:spPr>
-      </p:sp>
-      <p:sp>
-        <p:nvSpPr>
-          <p:cNvPr id="142" name="Text 140"/>
-          <p:cNvSpPr txBox="1"/>
-          <p:nvPr/>
-        </p:nvSpPr>
-        <p:spPr>
-          <a:xfrm>
-            <a:off x="1939739" y="1224976"/>
-            <a:ext cx="1371600" cy="384048"/>
-          </a:xfrm>
-          <a:prstGeom prst="rect">
-            <a:avLst/>
-          </a:prstGeom>
-          <a:noFill/>
-          <a:ln/>
-        </p:spPr>
-        <p:txBody>
-          <a:bodyPr wrap="square" lIns="0" tIns="0" rIns="0" bIns="0" rtlCol="0" anchor="ctr"/>
-          <a:lstStyle/>
-          <a:p>
-            <a:pPr algn="r" indent="0" marL="0">
-              <a:buNone/>
-            </a:pPr>
-            <a:r>
-              <a:rPr lang="en-US" sz="900" b="1" dirty="0">
+          <p:cNvPr id="186" name="Text 184"/>
+          <p:cNvSpPr txBox="1"/>
+          <p:nvPr/>
+        </p:nvSpPr>
+        <p:spPr>
+          <a:xfrm>
+            <a:off x="10661904" y="4217213"/>
+            <a:ext cx="1481328" cy="148133"/>
+          </a:xfrm>
+          <a:prstGeom prst="rect">
+            <a:avLst/>
+          </a:prstGeom>
+          <a:noFill/>
+          <a:ln/>
+        </p:spPr>
+        <p:txBody>
+          <a:bodyPr wrap="square" lIns="0" tIns="0" rIns="0" bIns="0" rtlCol="0" anchor="ctr"/>
+          <a:lstStyle/>
+          <a:p>
+            <a:pPr indent="0" marL="0">
+              <a:buNone/>
+            </a:pPr>
+            <a:r>
+              <a:rPr lang="en-US" sz="650" dirty="0">
+                <a:solidFill>
+                  <a:srgbClr val="8AB0C8"/>
+                </a:solidFill>
+              </a:rPr>
+              <a:t>1. MLE-Bench</a:t>
+            </a:r>
+            <a:endParaRPr lang="en-US" sz="650" dirty="0"/>
+          </a:p>
+        </p:txBody>
+      </p:sp>
+      <p:sp>
+        <p:nvSpPr>
+          <p:cNvPr id="187" name="Text 185"/>
+          <p:cNvSpPr txBox="1"/>
+          <p:nvPr/>
+        </p:nvSpPr>
+        <p:spPr>
+          <a:xfrm>
+            <a:off x="10661904" y="4365346"/>
+            <a:ext cx="1481328" cy="148133"/>
+          </a:xfrm>
+          <a:prstGeom prst="rect">
+            <a:avLst/>
+          </a:prstGeom>
+          <a:noFill/>
+          <a:ln/>
+        </p:spPr>
+        <p:txBody>
+          <a:bodyPr wrap="square" lIns="0" tIns="0" rIns="0" bIns="0" rtlCol="0" anchor="ctr"/>
+          <a:lstStyle/>
+          <a:p>
+            <a:pPr indent="0" marL="0">
+              <a:buNone/>
+            </a:pPr>
+            <a:r>
+              <a:rPr lang="en-US" sz="650" dirty="0">
+                <a:solidFill>
+                  <a:srgbClr val="8AB0C8"/>
+                </a:solidFill>
+              </a:rPr>
+              <a:t>2. DSBench</a:t>
+            </a:r>
+            <a:endParaRPr lang="en-US" sz="650" dirty="0"/>
+          </a:p>
+        </p:txBody>
+      </p:sp>
+      <p:sp>
+        <p:nvSpPr>
+          <p:cNvPr id="188" name="Text 186"/>
+          <p:cNvSpPr txBox="1"/>
+          <p:nvPr/>
+        </p:nvSpPr>
+        <p:spPr>
+          <a:xfrm>
+            <a:off x="10661904" y="4513478"/>
+            <a:ext cx="1481328" cy="148133"/>
+          </a:xfrm>
+          <a:prstGeom prst="rect">
+            <a:avLst/>
+          </a:prstGeom>
+          <a:noFill/>
+          <a:ln/>
+        </p:spPr>
+        <p:txBody>
+          <a:bodyPr wrap="square" lIns="0" tIns="0" rIns="0" bIns="0" rtlCol="0" anchor="ctr"/>
+          <a:lstStyle/>
+          <a:p>
+            <a:pPr indent="0" marL="0">
+              <a:buNone/>
+            </a:pPr>
+            <a:r>
+              <a:rPr lang="en-US" sz="650" dirty="0">
+                <a:solidFill>
+                  <a:srgbClr val="8AB0C8"/>
+                </a:solidFill>
+              </a:rPr>
+              <a:t>3. SpreadsheetBench</a:t>
+            </a:r>
+            <a:endParaRPr lang="en-US" sz="650" dirty="0"/>
+          </a:p>
+        </p:txBody>
+      </p:sp>
+      <p:sp>
+        <p:nvSpPr>
+          <p:cNvPr id="189" name="Text 187"/>
+          <p:cNvSpPr txBox="1"/>
+          <p:nvPr/>
+        </p:nvSpPr>
+        <p:spPr>
+          <a:xfrm>
+            <a:off x="2802445" y="1315967"/>
+            <a:ext cx="1188720" cy="347472"/>
+          </a:xfrm>
+          <a:prstGeom prst="rect">
+            <a:avLst/>
+          </a:prstGeom>
+          <a:noFill/>
+          <a:ln/>
+        </p:spPr>
+        <p:txBody>
+          <a:bodyPr wrap="square" lIns="0" tIns="0" rIns="0" bIns="0" rtlCol="0" anchor="ctr"/>
+          <a:lstStyle/>
+          <a:p>
+            <a:pPr algn="ctr" indent="0" marL="0">
+              <a:buNone/>
+            </a:pPr>
+            <a:r>
+              <a:rPr lang="en-US" sz="800" b="1" dirty="0">
                 <a:solidFill>
                   <a:srgbClr val="E85D4A"/>
                 </a:solidFill>
               </a:rPr>
               <a:t>Reasoning</a:t>
             </a:r>
-            <a:endParaRPr lang="en-US" sz="900" dirty="0"/>
-          </a:p>
-          <a:p>
-            <a:pPr algn="r" indent="0" marL="0">
-              <a:buNone/>
-            </a:pPr>
-            <a:r>
-              <a:rPr lang="en-US" sz="900" b="1" dirty="0">
+            <a:endParaRPr lang="en-US" sz="800" dirty="0"/>
+          </a:p>
+          <a:p>
+            <a:pPr algn="ctr" indent="0" marL="0">
+              <a:buNone/>
+            </a:pPr>
+            <a:r>
+              <a:rPr lang="en-US" sz="800" b="1" dirty="0">
                 <a:solidFill>
                   <a:srgbClr val="E85D4A"/>
                 </a:solidFill>
               </a:rPr>
               <a:t>&amp; Math</a:t>
             </a:r>
-            <a:endParaRPr lang="en-US" sz="900" dirty="0"/>
-          </a:p>
-        </p:txBody>
-      </p:sp>
-      <p:sp>
-        <p:nvSpPr>
-          <p:cNvPr id="143" name="Shape 141"/>
-          <p:cNvSpPr/>
-          <p:nvPr/>
-        </p:nvSpPr>
-        <p:spPr>
-          <a:xfrm>
-            <a:off x="6438219" y="832874"/>
-            <a:ext cx="128016" cy="128016"/>
-          </a:xfrm>
-          <a:prstGeom prst="ellipse">
-            <a:avLst/>
-          </a:prstGeom>
-          <a:solidFill>
-            <a:srgbClr val="4A90D9"/>
-          </a:solidFill>
-          <a:ln/>
-        </p:spPr>
-      </p:sp>
-      <p:sp>
-        <p:nvSpPr>
-          <p:cNvPr id="144" name="Text 142"/>
-          <p:cNvSpPr txBox="1"/>
-          <p:nvPr/>
-        </p:nvSpPr>
-        <p:spPr>
-          <a:xfrm>
-            <a:off x="6611955" y="732290"/>
-            <a:ext cx="1371600" cy="384048"/>
-          </a:xfrm>
-          <a:prstGeom prst="rect">
-            <a:avLst/>
-          </a:prstGeom>
-          <a:noFill/>
-          <a:ln/>
-        </p:spPr>
-        <p:txBody>
-          <a:bodyPr wrap="square" lIns="0" tIns="0" rIns="0" bIns="0" rtlCol="0" anchor="ctr"/>
-          <a:lstStyle/>
-          <a:p>
-            <a:pPr algn="l" indent="0" marL="0">
-              <a:buNone/>
-            </a:pPr>
-            <a:r>
-              <a:rPr lang="en-US" sz="900" b="1" dirty="0">
+            <a:endParaRPr lang="en-US" sz="800" dirty="0"/>
+          </a:p>
+        </p:txBody>
+      </p:sp>
+      <p:sp>
+        <p:nvSpPr>
+          <p:cNvPr id="190" name="Text 188"/>
+          <p:cNvSpPr txBox="1"/>
+          <p:nvPr/>
+        </p:nvSpPr>
+        <p:spPr>
+          <a:xfrm>
+            <a:off x="5877899" y="835598"/>
+            <a:ext cx="1188720" cy="347472"/>
+          </a:xfrm>
+          <a:prstGeom prst="rect">
+            <a:avLst/>
+          </a:prstGeom>
+          <a:noFill/>
+          <a:ln/>
+        </p:spPr>
+        <p:txBody>
+          <a:bodyPr wrap="square" lIns="0" tIns="0" rIns="0" bIns="0" rtlCol="0" anchor="ctr"/>
+          <a:lstStyle/>
+          <a:p>
+            <a:pPr algn="ctr" indent="0" marL="0">
+              <a:buNone/>
+            </a:pPr>
+            <a:r>
+              <a:rPr lang="en-US" sz="800" b="1" dirty="0">
                 <a:solidFill>
                   <a:srgbClr val="4A90D9"/>
                 </a:solidFill>
               </a:rPr>
               <a:t>Coding</a:t>
             </a:r>
-            <a:endParaRPr lang="en-US" sz="900" dirty="0"/>
-          </a:p>
-          <a:p>
-            <a:pPr algn="l" indent="0" marL="0">
-              <a:buNone/>
-            </a:pPr>
-            <a:r>
-              <a:rPr lang="en-US" sz="900" b="1" dirty="0">
+            <a:endParaRPr lang="en-US" sz="800" dirty="0"/>
+          </a:p>
+          <a:p>
+            <a:pPr algn="ctr" indent="0" marL="0">
+              <a:buNone/>
+            </a:pPr>
+            <a:r>
+              <a:rPr lang="en-US" sz="800" b="1" dirty="0">
                 <a:solidFill>
                   <a:srgbClr val="4A90D9"/>
                 </a:solidFill>
               </a:rPr>
               <a:t>&amp; SWE</a:t>
             </a:r>
-            <a:endParaRPr lang="en-US" sz="900" dirty="0"/>
-          </a:p>
-        </p:txBody>
-      </p:sp>
-      <p:sp>
-        <p:nvSpPr>
-          <p:cNvPr id="145" name="Shape 143"/>
-          <p:cNvSpPr/>
-          <p:nvPr/>
-        </p:nvSpPr>
-        <p:spPr>
-          <a:xfrm>
-            <a:off x="8049059" y="2684601"/>
-            <a:ext cx="128016" cy="128016"/>
-          </a:xfrm>
-          <a:prstGeom prst="ellipse">
-            <a:avLst/>
-          </a:prstGeom>
-          <a:solidFill>
-            <a:srgbClr val="7B68EE"/>
-          </a:solidFill>
-          <a:ln/>
-        </p:spPr>
-      </p:sp>
-      <p:sp>
-        <p:nvSpPr>
-          <p:cNvPr id="146" name="Text 144"/>
-          <p:cNvSpPr txBox="1"/>
-          <p:nvPr/>
-        </p:nvSpPr>
-        <p:spPr>
-          <a:xfrm>
-            <a:off x="8222795" y="2584017"/>
-            <a:ext cx="1371600" cy="384048"/>
-          </a:xfrm>
-          <a:prstGeom prst="rect">
-            <a:avLst/>
-          </a:prstGeom>
-          <a:noFill/>
-          <a:ln/>
-        </p:spPr>
-        <p:txBody>
-          <a:bodyPr wrap="square" lIns="0" tIns="0" rIns="0" bIns="0" rtlCol="0" anchor="ctr"/>
-          <a:lstStyle/>
-          <a:p>
-            <a:pPr algn="l" indent="0" marL="0">
-              <a:buNone/>
-            </a:pPr>
-            <a:r>
-              <a:rPr lang="en-US" sz="900" b="1" dirty="0">
+            <a:endParaRPr lang="en-US" sz="800" dirty="0"/>
+          </a:p>
+        </p:txBody>
+      </p:sp>
+      <p:sp>
+        <p:nvSpPr>
+          <p:cNvPr id="191" name="Text 189"/>
+          <p:cNvSpPr txBox="1"/>
+          <p:nvPr/>
+        </p:nvSpPr>
+        <p:spPr>
+          <a:xfrm>
+            <a:off x="7104888" y="2641032"/>
+            <a:ext cx="1188720" cy="347472"/>
+          </a:xfrm>
+          <a:prstGeom prst="rect">
+            <a:avLst/>
+          </a:prstGeom>
+          <a:noFill/>
+          <a:ln/>
+        </p:spPr>
+        <p:txBody>
+          <a:bodyPr wrap="square" lIns="0" tIns="0" rIns="0" bIns="0" rtlCol="0" anchor="ctr"/>
+          <a:lstStyle/>
+          <a:p>
+            <a:pPr algn="ctr" indent="0" marL="0">
+              <a:buNone/>
+            </a:pPr>
+            <a:r>
+              <a:rPr lang="en-US" sz="800" b="1" dirty="0">
                 <a:solidFill>
                   <a:srgbClr val="7B68EE"/>
                 </a:solidFill>
               </a:rPr>
               <a:t>Long</a:t>
             </a:r>
-            <a:endParaRPr lang="en-US" sz="900" dirty="0"/>
-          </a:p>
-          <a:p>
-            <a:pPr algn="l" indent="0" marL="0">
-              <a:buNone/>
-            </a:pPr>
-            <a:r>
-              <a:rPr lang="en-US" sz="900" b="1" dirty="0">
+            <a:endParaRPr lang="en-US" sz="800" dirty="0"/>
+          </a:p>
+          <a:p>
+            <a:pPr algn="ctr" indent="0" marL="0">
+              <a:buNone/>
+            </a:pPr>
+            <a:r>
+              <a:rPr lang="en-US" sz="800" b="1" dirty="0">
                 <a:solidFill>
                   <a:srgbClr val="7B68EE"/>
                 </a:solidFill>
               </a:rPr>
               <a:t>Context</a:t>
             </a:r>
-            <a:endParaRPr lang="en-US" sz="900" dirty="0"/>
-          </a:p>
-        </p:txBody>
-      </p:sp>
-      <p:sp>
-        <p:nvSpPr>
-          <p:cNvPr id="147" name="Shape 145"/>
-          <p:cNvSpPr/>
-          <p:nvPr/>
-        </p:nvSpPr>
-        <p:spPr>
-          <a:xfrm>
-            <a:off x="7683261" y="5111510"/>
-            <a:ext cx="128016" cy="128016"/>
-          </a:xfrm>
-          <a:prstGeom prst="ellipse">
-            <a:avLst/>
-          </a:prstGeom>
-          <a:solidFill>
-            <a:srgbClr val="F0A500"/>
-          </a:solidFill>
-          <a:ln/>
-        </p:spPr>
-      </p:sp>
-      <p:sp>
-        <p:nvSpPr>
-          <p:cNvPr id="148" name="Text 146"/>
-          <p:cNvSpPr txBox="1"/>
-          <p:nvPr/>
-        </p:nvSpPr>
-        <p:spPr>
-          <a:xfrm>
-            <a:off x="7856997" y="5010926"/>
-            <a:ext cx="1371600" cy="237744"/>
-          </a:xfrm>
-          <a:prstGeom prst="rect">
-            <a:avLst/>
-          </a:prstGeom>
-          <a:noFill/>
-          <a:ln/>
-        </p:spPr>
-        <p:txBody>
-          <a:bodyPr wrap="square" lIns="0" tIns="0" rIns="0" bIns="0" rtlCol="0" anchor="ctr"/>
-          <a:lstStyle/>
-          <a:p>
-            <a:pPr algn="l" indent="0" marL="0">
-              <a:buNone/>
-            </a:pPr>
-            <a:r>
-              <a:rPr lang="en-US" sz="900" b="1" dirty="0">
+            <a:endParaRPr lang="en-US" sz="800" dirty="0"/>
+          </a:p>
+        </p:txBody>
+      </p:sp>
+      <p:sp>
+        <p:nvSpPr>
+          <p:cNvPr id="192" name="Text 190"/>
+          <p:cNvSpPr txBox="1"/>
+          <p:nvPr/>
+        </p:nvSpPr>
+        <p:spPr>
+          <a:xfrm>
+            <a:off x="7091815" y="5007268"/>
+            <a:ext cx="1188720" cy="347472"/>
+          </a:xfrm>
+          <a:prstGeom prst="rect">
+            <a:avLst/>
+          </a:prstGeom>
+          <a:noFill/>
+          <a:ln/>
+        </p:spPr>
+        <p:txBody>
+          <a:bodyPr wrap="square" lIns="0" tIns="0" rIns="0" bIns="0" rtlCol="0" anchor="ctr"/>
+          <a:lstStyle/>
+          <a:p>
+            <a:pPr algn="ctr" indent="0" marL="0">
+              <a:buNone/>
+            </a:pPr>
+            <a:r>
+              <a:rPr lang="en-US" sz="800" b="1" dirty="0">
                 <a:solidFill>
                   <a:srgbClr val="F0A500"/>
                 </a:solidFill>
               </a:rPr>
               <a:t>Multimodal</a:t>
             </a:r>
-            <a:endParaRPr lang="en-US" sz="900" dirty="0"/>
-          </a:p>
-        </p:txBody>
-      </p:sp>
-      <p:sp>
-        <p:nvSpPr>
-          <p:cNvPr id="149" name="Shape 147"/>
-          <p:cNvSpPr/>
-          <p:nvPr/>
-        </p:nvSpPr>
-        <p:spPr>
-          <a:xfrm>
-            <a:off x="5036439" y="6421177"/>
-            <a:ext cx="128016" cy="128016"/>
-          </a:xfrm>
-          <a:prstGeom prst="ellipse">
-            <a:avLst/>
-          </a:prstGeom>
-          <a:solidFill>
-            <a:srgbClr val="3DAA6E"/>
-          </a:solidFill>
-          <a:ln/>
-        </p:spPr>
-      </p:sp>
-      <p:sp>
-        <p:nvSpPr>
-          <p:cNvPr id="150" name="Text 148"/>
-          <p:cNvSpPr txBox="1"/>
-          <p:nvPr/>
-        </p:nvSpPr>
-        <p:spPr>
-          <a:xfrm>
-            <a:off x="3692271" y="6320593"/>
-            <a:ext cx="1371600" cy="384048"/>
-          </a:xfrm>
-          <a:prstGeom prst="rect">
-            <a:avLst/>
-          </a:prstGeom>
-          <a:noFill/>
-          <a:ln/>
-        </p:spPr>
-        <p:txBody>
-          <a:bodyPr wrap="square" lIns="0" tIns="0" rIns="0" bIns="0" rtlCol="0" anchor="ctr"/>
-          <a:lstStyle/>
-          <a:p>
-            <a:pPr algn="r" indent="0" marL="0">
-              <a:buNone/>
-            </a:pPr>
-            <a:r>
-              <a:rPr lang="en-US" sz="900" b="1" dirty="0">
+            <a:endParaRPr lang="en-US" sz="800" dirty="0"/>
+          </a:p>
+        </p:txBody>
+      </p:sp>
+      <p:sp>
+        <p:nvSpPr>
+          <p:cNvPr id="193" name="Text 191"/>
+          <p:cNvSpPr txBox="1"/>
+          <p:nvPr/>
+        </p:nvSpPr>
+        <p:spPr>
+          <a:xfrm>
+            <a:off x="4511164" y="6284193"/>
+            <a:ext cx="1188720" cy="347472"/>
+          </a:xfrm>
+          <a:prstGeom prst="rect">
+            <a:avLst/>
+          </a:prstGeom>
+          <a:noFill/>
+          <a:ln/>
+        </p:spPr>
+        <p:txBody>
+          <a:bodyPr wrap="square" lIns="0" tIns="0" rIns="0" bIns="0" rtlCol="0" anchor="ctr"/>
+          <a:lstStyle/>
+          <a:p>
+            <a:pPr algn="ctr" indent="0" marL="0">
+              <a:buNone/>
+            </a:pPr>
+            <a:r>
+              <a:rPr lang="en-US" sz="800" b="1" dirty="0">
                 <a:solidFill>
                   <a:srgbClr val="3DAA6E"/>
                 </a:solidFill>
               </a:rPr>
               <a:t>Agents</a:t>
             </a:r>
-            <a:endParaRPr lang="en-US" sz="900" dirty="0"/>
-          </a:p>
-          <a:p>
-            <a:pPr algn="r" indent="0" marL="0">
-              <a:buNone/>
-            </a:pPr>
-            <a:r>
-              <a:rPr lang="en-US" sz="900" b="1" dirty="0">
+            <a:endParaRPr lang="en-US" sz="800" dirty="0"/>
+          </a:p>
+          <a:p>
+            <a:pPr algn="ctr" indent="0" marL="0">
+              <a:buNone/>
+            </a:pPr>
+            <a:r>
+              <a:rPr lang="en-US" sz="800" b="1" dirty="0">
                 <a:solidFill>
                   <a:srgbClr val="3DAA6E"/>
                 </a:solidFill>
               </a:rPr>
               <a:t>&amp; Tools</a:t>
             </a:r>
-            <a:endParaRPr lang="en-US" sz="900" dirty="0"/>
-          </a:p>
-        </p:txBody>
-      </p:sp>
-      <p:sp>
-        <p:nvSpPr>
-          <p:cNvPr id="151" name="Shape 149"/>
-          <p:cNvSpPr/>
-          <p:nvPr/>
-        </p:nvSpPr>
-        <p:spPr>
-          <a:xfrm>
-            <a:off x="2885195" y="5239717"/>
-            <a:ext cx="128016" cy="128016"/>
-          </a:xfrm>
-          <a:prstGeom prst="ellipse">
-            <a:avLst/>
-          </a:prstGeom>
-          <a:solidFill>
-            <a:srgbClr val="9B59B6"/>
-          </a:solidFill>
-          <a:ln/>
-        </p:spPr>
-      </p:sp>
-      <p:sp>
-        <p:nvSpPr>
-          <p:cNvPr id="152" name="Text 150"/>
-          <p:cNvSpPr txBox="1"/>
-          <p:nvPr/>
-        </p:nvSpPr>
-        <p:spPr>
-          <a:xfrm>
-            <a:off x="1541027" y="5139133"/>
-            <a:ext cx="1371600" cy="384048"/>
-          </a:xfrm>
-          <a:prstGeom prst="rect">
-            <a:avLst/>
-          </a:prstGeom>
-          <a:noFill/>
-          <a:ln/>
-        </p:spPr>
-        <p:txBody>
-          <a:bodyPr wrap="square" lIns="0" tIns="0" rIns="0" bIns="0" rtlCol="0" anchor="ctr"/>
-          <a:lstStyle/>
-          <a:p>
-            <a:pPr algn="r" indent="0" marL="0">
-              <a:buNone/>
-            </a:pPr>
-            <a:r>
-              <a:rPr lang="en-US" sz="900" b="1" dirty="0">
+            <a:endParaRPr lang="en-US" sz="800" dirty="0"/>
+          </a:p>
+        </p:txBody>
+      </p:sp>
+      <p:sp>
+        <p:nvSpPr>
+          <p:cNvPr id="194" name="Text 192"/>
+          <p:cNvSpPr txBox="1"/>
+          <p:nvPr/>
+        </p:nvSpPr>
+        <p:spPr>
+          <a:xfrm>
+            <a:off x="2413700" y="5132270"/>
+            <a:ext cx="1188720" cy="347472"/>
+          </a:xfrm>
+          <a:prstGeom prst="rect">
+            <a:avLst/>
+          </a:prstGeom>
+          <a:noFill/>
+          <a:ln/>
+        </p:spPr>
+        <p:txBody>
+          <a:bodyPr wrap="square" lIns="0" tIns="0" rIns="0" bIns="0" rtlCol="0" anchor="ctr"/>
+          <a:lstStyle/>
+          <a:p>
+            <a:pPr algn="ctr" indent="0" marL="0">
+              <a:buNone/>
+            </a:pPr>
+            <a:r>
+              <a:rPr lang="en-US" sz="800" b="1" dirty="0">
                 <a:solidFill>
                   <a:srgbClr val="9B59B6"/>
                 </a:solidFill>
               </a:rPr>
               <a:t>Knowledge</a:t>
             </a:r>
-            <a:endParaRPr lang="en-US" sz="900" dirty="0"/>
-          </a:p>
-          <a:p>
-            <a:pPr algn="r" indent="0" marL="0">
-              <a:buNone/>
-            </a:pPr>
-            <a:r>
-              <a:rPr lang="en-US" sz="900" b="1" dirty="0">
+            <a:endParaRPr lang="en-US" sz="800" dirty="0"/>
+          </a:p>
+          <a:p>
+            <a:pPr algn="ctr" indent="0" marL="0">
+              <a:buNone/>
+            </a:pPr>
+            <a:r>
+              <a:rPr lang="en-US" sz="800" b="1" dirty="0">
                 <a:solidFill>
                   <a:srgbClr val="9B59B6"/>
                 </a:solidFill>
               </a:rPr>
               <a:t>&amp; Language</a:t>
             </a:r>
-            <a:endParaRPr lang="en-US" sz="900" dirty="0"/>
-          </a:p>
-        </p:txBody>
-      </p:sp>
-      <p:sp>
-        <p:nvSpPr>
-          <p:cNvPr id="153" name="Shape 151"/>
-          <p:cNvSpPr/>
-          <p:nvPr/>
-        </p:nvSpPr>
-        <p:spPr>
-          <a:xfrm>
-            <a:off x="2313474" y="3486518"/>
-            <a:ext cx="128016" cy="128016"/>
-          </a:xfrm>
-          <a:prstGeom prst="ellipse">
-            <a:avLst/>
-          </a:prstGeom>
-          <a:solidFill>
-            <a:srgbClr val="E8A020"/>
-          </a:solidFill>
-          <a:ln/>
-        </p:spPr>
-      </p:sp>
-      <p:sp>
-        <p:nvSpPr>
-          <p:cNvPr id="154" name="Text 152"/>
-          <p:cNvSpPr txBox="1"/>
-          <p:nvPr/>
-        </p:nvSpPr>
-        <p:spPr>
-          <a:xfrm>
-            <a:off x="969306" y="3385934"/>
-            <a:ext cx="1371600" cy="384048"/>
-          </a:xfrm>
-          <a:prstGeom prst="rect">
-            <a:avLst/>
-          </a:prstGeom>
-          <a:noFill/>
-          <a:ln/>
-        </p:spPr>
-        <p:txBody>
-          <a:bodyPr wrap="square" lIns="0" tIns="0" rIns="0" bIns="0" rtlCol="0" anchor="ctr"/>
-          <a:lstStyle/>
-          <a:p>
-            <a:pPr algn="r" indent="0" marL="0">
-              <a:buNone/>
-            </a:pPr>
-            <a:r>
-              <a:rPr lang="en-US" sz="900" b="1" dirty="0">
+            <a:endParaRPr lang="en-US" sz="800" dirty="0"/>
+          </a:p>
+        </p:txBody>
+      </p:sp>
+      <p:sp>
+        <p:nvSpPr>
+          <p:cNvPr id="195" name="Text 193"/>
+          <p:cNvSpPr txBox="1"/>
+          <p:nvPr/>
+        </p:nvSpPr>
+        <p:spPr>
+          <a:xfrm>
+            <a:off x="1856273" y="3422901"/>
+            <a:ext cx="1188720" cy="347472"/>
+          </a:xfrm>
+          <a:prstGeom prst="rect">
+            <a:avLst/>
+          </a:prstGeom>
+          <a:noFill/>
+          <a:ln/>
+        </p:spPr>
+        <p:txBody>
+          <a:bodyPr wrap="square" lIns="0" tIns="0" rIns="0" bIns="0" rtlCol="0" anchor="ctr"/>
+          <a:lstStyle/>
+          <a:p>
+            <a:pPr algn="ctr" indent="0" marL="0">
+              <a:buNone/>
+            </a:pPr>
+            <a:r>
+              <a:rPr lang="en-US" sz="800" b="1" dirty="0">
                 <a:solidFill>
                   <a:srgbClr val="E8A020"/>
                 </a:solidFill>
               </a:rPr>
               <a:t>Data</a:t>
             </a:r>
-            <a:endParaRPr lang="en-US" sz="900" dirty="0"/>
-          </a:p>
-          <a:p>
-            <a:pPr algn="r" indent="0" marL="0">
-              <a:buNone/>
-            </a:pPr>
-            <a:r>
-              <a:rPr lang="en-US" sz="900" b="1" dirty="0">
+            <a:endParaRPr lang="en-US" sz="800" dirty="0"/>
+          </a:p>
+          <a:p>
+            <a:pPr algn="ctr" indent="0" marL="0">
+              <a:buNone/>
+            </a:pPr>
+            <a:r>
+              <a:rPr lang="en-US" sz="800" b="1" dirty="0">
                 <a:solidFill>
                   <a:srgbClr val="E8A020"/>
                 </a:solidFill>
               </a:rPr>
               <a:t>&amp; ML</a:t>
             </a:r>
-            <a:endParaRPr lang="en-US" sz="900" dirty="0"/>
-          </a:p>
-        </p:txBody>
-      </p:sp>
-      <p:sp>
-        <p:nvSpPr>
-          <p:cNvPr id="155" name="Text 153"/>
+            <a:endParaRPr lang="en-US" sz="800" dirty="0"/>
+          </a:p>
+        </p:txBody>
+      </p:sp>
+      <p:sp>
+        <p:nvSpPr>
+          <p:cNvPr id="196" name="Text 194"/>
           <p:cNvSpPr txBox="1"/>
           <p:nvPr/>
         </p:nvSpPr>
@@ -5649,7 +7139,7 @@
       </p:sp>
       <p:sp>
         <p:nvSpPr>
-          <p:cNvPr id="156" name="Text 154"/>
+          <p:cNvPr id="197" name="Text 195"/>
           <p:cNvSpPr txBox="1"/>
           <p:nvPr/>
         </p:nvSpPr>
@@ -5685,7 +7175,7 @@
       </p:sp>
       <p:sp>
         <p:nvSpPr>
-          <p:cNvPr id="157" name="Shape 155"/>
+          <p:cNvPr id="198" name="Shape 196"/>
           <p:cNvSpPr/>
           <p:nvPr/>
         </p:nvSpPr>
@@ -5707,7 +7197,7 @@
       </p:sp>
       <p:sp>
         <p:nvSpPr>
-          <p:cNvPr id="158" name="Text 156"/>
+          <p:cNvPr id="199" name="Text 197"/>
           <p:cNvSpPr txBox="1"/>
           <p:nvPr/>
         </p:nvSpPr>
@@ -5746,7 +7236,7 @@
       </p:sp>
       <p:sp>
         <p:nvSpPr>
-          <p:cNvPr id="159" name="Text 157"/>
+          <p:cNvPr id="200" name="Text 198"/>
           <p:cNvSpPr txBox="1"/>
           <p:nvPr/>
         </p:nvSpPr>
@@ -5782,50 +7272,50 @@
       </p:sp>
       <p:sp>
         <p:nvSpPr>
-          <p:cNvPr id="160" name="Text 158"/>
-          <p:cNvSpPr txBox="1"/>
-          <p:nvPr/>
-        </p:nvSpPr>
-        <p:spPr>
-          <a:xfrm>
-            <a:off x="9189720" y="749808"/>
-            <a:ext cx="2926080" cy="237744"/>
-          </a:xfrm>
-          <a:prstGeom prst="rect">
-            <a:avLst/>
-          </a:prstGeom>
-          <a:noFill/>
-          <a:ln/>
-        </p:spPr>
-        <p:txBody>
-          <a:bodyPr wrap="square" lIns="0" tIns="0" rIns="0" bIns="0" rtlCol="0" anchor="ctr"/>
-          <a:lstStyle/>
-          <a:p>
-            <a:pPr indent="0" marL="0">
-              <a:buNone/>
-            </a:pPr>
-            <a:r>
-              <a:rPr lang="en-US" sz="800" b="1" dirty="0">
+          <p:cNvPr id="201" name="Text 199"/>
+          <p:cNvSpPr txBox="1"/>
+          <p:nvPr/>
+        </p:nvSpPr>
+        <p:spPr>
+          <a:xfrm>
+            <a:off x="8979408" y="749808"/>
+            <a:ext cx="3108960" cy="219456"/>
+          </a:xfrm>
+          <a:prstGeom prst="rect">
+            <a:avLst/>
+          </a:prstGeom>
+          <a:noFill/>
+          <a:ln/>
+        </p:spPr>
+        <p:txBody>
+          <a:bodyPr wrap="square" lIns="0" tIns="0" rIns="0" bIns="0" rtlCol="0" anchor="ctr"/>
+          <a:lstStyle/>
+          <a:p>
+            <a:pPr indent="0" marL="0">
+              <a:buNone/>
+            </a:pPr>
+            <a:r>
+              <a:rPr lang="en-US" sz="750" b="1" dirty="0">
                 <a:solidFill>
                   <a:srgbClr val="2A4A64"/>
                 </a:solidFill>
               </a:rPr>
-              <a:t>DOMAINS</a:t>
-            </a:r>
-            <a:endParaRPr lang="en-US" sz="800" dirty="0"/>
-          </a:p>
-        </p:txBody>
-      </p:sp>
-      <p:sp>
-        <p:nvSpPr>
-          <p:cNvPr id="161" name="Shape 159"/>
-          <p:cNvSpPr/>
-          <p:nvPr/>
-        </p:nvSpPr>
-        <p:spPr>
-          <a:xfrm>
-            <a:off x="9189720" y="1024128"/>
-            <a:ext cx="2743200" cy="0"/>
+              <a:t>BENCHMARKS BY DOMAIN</a:t>
+            </a:r>
+            <a:endParaRPr lang="en-US" sz="750" dirty="0"/>
+          </a:p>
+        </p:txBody>
+      </p:sp>
+      <p:sp>
+        <p:nvSpPr>
+          <p:cNvPr id="202" name="Shape 200"/>
+          <p:cNvSpPr/>
+          <p:nvPr/>
+        </p:nvSpPr>
+        <p:spPr>
+          <a:xfrm>
+            <a:off x="8979408" y="1005840"/>
+            <a:ext cx="3063240" cy="0"/>
           </a:xfrm>
           <a:prstGeom prst="line">
             <a:avLst/>
@@ -5841,7 +7331,7 @@
       </p:sp>
       <p:sp>
         <p:nvSpPr>
-          <p:cNvPr id="162" name="Shape 160"/>
+          <p:cNvPr id="203" name="Shape 201"/>
           <p:cNvSpPr/>
           <p:nvPr/>
         </p:nvSpPr>
@@ -5861,7 +7351,7 @@
       </p:sp>
       <p:sp>
         <p:nvSpPr>
-          <p:cNvPr id="163" name="Text 161"/>
+          <p:cNvPr id="204" name="Text 202"/>
           <p:cNvSpPr txBox="1"/>
           <p:nvPr/>
         </p:nvSpPr>
@@ -5897,7 +7387,7 @@
       </p:sp>
       <p:sp>
         <p:nvSpPr>
-          <p:cNvPr id="164" name="Shape 162"/>
+          <p:cNvPr id="205" name="Shape 203"/>
           <p:cNvSpPr/>
           <p:nvPr/>
         </p:nvSpPr>
@@ -5917,7 +7407,7 @@
       </p:sp>
       <p:sp>
         <p:nvSpPr>
-          <p:cNvPr id="165" name="Text 163"/>
+          <p:cNvPr id="206" name="Text 204"/>
           <p:cNvSpPr txBox="1"/>
           <p:nvPr/>
         </p:nvSpPr>
@@ -5953,7 +7443,7 @@
       </p:sp>
       <p:sp>
         <p:nvSpPr>
-          <p:cNvPr id="166" name="Shape 164"/>
+          <p:cNvPr id="207" name="Shape 205"/>
           <p:cNvSpPr/>
           <p:nvPr/>
         </p:nvSpPr>
@@ -5973,7 +7463,7 @@
       </p:sp>
       <p:sp>
         <p:nvSpPr>
-          <p:cNvPr id="167" name="Text 165"/>
+          <p:cNvPr id="208" name="Text 206"/>
           <p:cNvSpPr txBox="1"/>
           <p:nvPr/>
         </p:nvSpPr>
@@ -6009,7 +7499,7 @@
       </p:sp>
       <p:sp>
         <p:nvSpPr>
-          <p:cNvPr id="168" name="Shape 166"/>
+          <p:cNvPr id="209" name="Shape 207"/>
           <p:cNvSpPr/>
           <p:nvPr/>
         </p:nvSpPr>
@@ -6029,7 +7519,7 @@
       </p:sp>
       <p:sp>
         <p:nvSpPr>
-          <p:cNvPr id="169" name="Text 167"/>
+          <p:cNvPr id="210" name="Text 208"/>
           <p:cNvSpPr txBox="1"/>
           <p:nvPr/>
         </p:nvSpPr>
@@ -6065,7 +7555,7 @@
       </p:sp>
       <p:sp>
         <p:nvSpPr>
-          <p:cNvPr id="170" name="Shape 168"/>
+          <p:cNvPr id="211" name="Shape 209"/>
           <p:cNvSpPr/>
           <p:nvPr/>
         </p:nvSpPr>
@@ -6085,7 +7575,7 @@
       </p:sp>
       <p:sp>
         <p:nvSpPr>
-          <p:cNvPr id="171" name="Text 169"/>
+          <p:cNvPr id="212" name="Text 210"/>
           <p:cNvSpPr txBox="1"/>
           <p:nvPr/>
         </p:nvSpPr>
@@ -6121,7 +7611,7 @@
       </p:sp>
       <p:sp>
         <p:nvSpPr>
-          <p:cNvPr id="172" name="Text 170"/>
+          <p:cNvPr id="213" name="Text 211"/>
           <p:cNvSpPr txBox="1"/>
           <p:nvPr/>
         </p:nvSpPr>

--- a/FoxBrain_Benchmark_Priority_Radar.pptx
+++ b/FoxBrain_Benchmark_Priority_Radar.pptx
@@ -7,9 +7,10 @@
   <p:sldIdLst>
     <p:sldId id="256" r:id="rId2"/>
     <p:sldId id="257" r:id="rId3"/>
+    <p:sldId id="258" r:id="rId4"/>
   </p:sldIdLst>
   <p:notesMasterIdLst>
-    <p:notesMasterId r:id="rId4"/>
+    <p:notesMasterId r:id="rId5"/>
   </p:notesMasterIdLst>
   <p:sldSz cx="12192000" cy="6858000"/>
   <p:notesSz cx="6858000" cy="12192000"/>
@@ -633,6 +634,94 @@
 </p:notes>
 </file>
 
+<file path=ppt/notesSlides/notesSlide3.xml><?xml version="1.0" encoding="utf-8"?>
+<p:notes xmlns:a="http://schemas.openxmlformats.org/drawingml/2006/main" xmlns:r="http://schemas.openxmlformats.org/officeDocument/2006/relationships" xmlns:p="http://schemas.openxmlformats.org/presentationml/2006/main">
+  <p:cSld>
+    <p:spTree>
+      <p:nvGrpSpPr>
+        <p:cNvPr id="1" name=""/>
+        <p:cNvGrpSpPr/>
+        <p:nvPr/>
+      </p:nvGrpSpPr>
+      <p:grpSpPr>
+        <a:xfrm>
+          <a:off x="0" y="0"/>
+          <a:ext cx="0" cy="0"/>
+          <a:chOff x="0" y="0"/>
+          <a:chExt cx="0" cy="0"/>
+        </a:xfrm>
+      </p:grpSpPr>
+      <p:sp>
+        <p:nvSpPr>
+          <p:cNvPr id="2" name="Slide Image Placeholder 1"/>
+          <p:cNvSpPr>
+            <a:spLocks noGrp="1" noRot="1" noChangeAspect="1"/>
+          </p:cNvSpPr>
+          <p:nvPr>
+            <p:ph type="sldImg"/>
+          </p:nvPr>
+        </p:nvSpPr>
+        <p:spPr/>
+      </p:sp>
+      <p:sp>
+        <p:nvSpPr>
+          <p:cNvPr id="3" name="Notes Placeholder 2"/>
+          <p:cNvSpPr>
+            <a:spLocks noGrp="1"/>
+          </p:cNvSpPr>
+          <p:nvPr>
+            <p:ph type="body" idx="1"/>
+          </p:nvPr>
+        </p:nvSpPr>
+        <p:spPr/>
+        <p:txBody>
+          <a:bodyPr/>
+          <a:lstStyle/>
+          <a:p>
+            <a:r>
+              <a:rPr lang="en-US" dirty="0"/>
+              <a:t/>
+            </a:r>
+            <a:endParaRPr lang="en-US" dirty="0"/>
+          </a:p>
+        </p:txBody>
+      </p:sp>
+      <p:sp>
+        <p:nvSpPr>
+          <p:cNvPr id="4" name="Slide Number Placeholder 3"/>
+          <p:cNvSpPr>
+            <a:spLocks noGrp="1"/>
+          </p:cNvSpPr>
+          <p:nvPr>
+            <p:ph type="sldNum" sz="quarter" idx="10"/>
+          </p:nvPr>
+        </p:nvSpPr>
+        <p:spPr/>
+        <p:txBody>
+          <a:bodyPr/>
+          <a:lstStyle/>
+          <a:p>
+            <a:fld id="{F7021451-1387-4CA6-816F-3879F97B5CBC}" type="slidenum">
+              <a:rPr lang="en-US"/>
+              <a:t>3</a:t>
+            </a:fld>
+            <a:endParaRPr lang="en-US"/>
+          </a:p>
+        </p:txBody>
+      </p:sp>
+    </p:spTree>
+    <p:extLst>
+      <p:ext uri="{BB962C8B-B14F-4D97-AF65-F5344CB8AC3E}">
+        <p14:creationId xmlns:p14="http://schemas.microsoft.com/office/powerpoint/2010/main" val="1024086991"/>
+      </p:ext>
+    </p:extLst>
+  </p:cSld>
+  <p:clrMapOvr>
+    <a:masterClrMapping/>
+  </p:clrMapOvr>
+</p:notes>
+</file>
+
 <file path=ppt/slideLayouts/slideLayout1.xml><?xml version="1.0" encoding="utf-8"?>
 <p:sldLayout xmlns:a="http://schemas.openxmlformats.org/drawingml/2006/main" xmlns:r="http://schemas.openxmlformats.org/officeDocument/2006/relationships" xmlns:p="http://schemas.openxmlformats.org/presentationml/2006/main" preserve="1">
   <p:cSld name="DEFAULT">
@@ -985,8 +1074,8 @@
         </p:nvSpPr>
         <p:spPr>
           <a:xfrm>
-            <a:off x="5303520" y="3566160"/>
-            <a:ext cx="-2702722" cy="-724192"/>
+            <a:off x="5120640" y="3611880"/>
+            <a:ext cx="-1519177" cy="-407062"/>
           </a:xfrm>
           <a:prstGeom prst="line">
             <a:avLst/>
@@ -1008,8 +1097,8 @@
         </p:nvSpPr>
         <p:spPr>
           <a:xfrm>
-            <a:off x="5303520" y="3566160"/>
-            <a:ext cx="-431806" cy="-2764544"/>
+            <a:off x="5120640" y="3611880"/>
+            <a:ext cx="-242715" cy="-1553927"/>
           </a:xfrm>
           <a:prstGeom prst="line">
             <a:avLst/>
@@ -1031,8 +1120,8 @@
         </p:nvSpPr>
         <p:spPr>
           <a:xfrm>
-            <a:off x="5303520" y="3566160"/>
-            <a:ext cx="2353146" cy="-1513891"/>
+            <a:off x="5120640" y="3611880"/>
+            <a:ext cx="1322683" cy="-850945"/>
           </a:xfrm>
           <a:prstGeom prst="line">
             <a:avLst/>
@@ -1054,8 +1143,8 @@
         </p:nvSpPr>
         <p:spPr>
           <a:xfrm>
-            <a:off x="5303520" y="3566160"/>
-            <a:ext cx="2798024" cy="14950"/>
+            <a:off x="5120640" y="3611880"/>
+            <a:ext cx="1572746" cy="8403"/>
           </a:xfrm>
           <a:prstGeom prst="line">
             <a:avLst/>
@@ -1077,8 +1166,8 @@
         </p:nvSpPr>
         <p:spPr>
           <a:xfrm>
-            <a:off x="5303520" y="3566160"/>
-            <a:ext cx="1118923" cy="2564600"/>
+            <a:off x="5120640" y="3611880"/>
+            <a:ext cx="628937" cy="1441540"/>
           </a:xfrm>
           <a:prstGeom prst="line">
             <a:avLst/>
@@ -1100,8 +1189,8 @@
         </p:nvSpPr>
         <p:spPr>
           <a:xfrm>
-            <a:off x="5303520" y="3566160"/>
-            <a:ext cx="-1463259" cy="2384960"/>
+            <a:off x="5120640" y="3611880"/>
+            <a:ext cx="-822485" cy="1340566"/>
           </a:xfrm>
           <a:prstGeom prst="line">
             <a:avLst/>
@@ -1123,8 +1212,8 @@
         </p:nvSpPr>
         <p:spPr>
           <a:xfrm>
-            <a:off x="5303520" y="3566160"/>
-            <a:ext cx="-2710306" cy="695271"/>
+            <a:off x="5120640" y="3611880"/>
+            <a:ext cx="-1523440" cy="390806"/>
           </a:xfrm>
           <a:prstGeom prst="line">
             <a:avLst/>
@@ -1146,65 +1235,7 @@
         </p:nvSpPr>
         <p:spPr>
           <a:xfrm>
-            <a:off x="2670048" y="932688"/>
-            <a:ext cx="5266944" cy="5266944"/>
-          </a:xfrm>
-          <a:prstGeom prst="ellipse">
-            <a:avLst/>
-          </a:prstGeom>
-          <a:solidFill>
-            <a:srgbClr val="111A28">
-              <a:alpha val="35000"/>
-            </a:srgbClr>
-          </a:solidFill>
-          <a:ln w="19050">
-            <a:solidFill>
-              <a:srgbClr val="111A28">
-                <a:alpha val="45000"/>
-              </a:srgbClr>
-            </a:solidFill>
-            <a:prstDash val="solid"/>
-          </a:ln>
-        </p:spPr>
-      </p:sp>
-      <p:sp>
-        <p:nvSpPr>
-          <p:cNvPr id="11" name="Shape 9"/>
-          <p:cNvSpPr/>
-          <p:nvPr/>
-        </p:nvSpPr>
-        <p:spPr>
-          <a:xfrm>
-            <a:off x="3273552" y="1536192"/>
-            <a:ext cx="4059936" cy="4059936"/>
-          </a:xfrm>
-          <a:prstGeom prst="ellipse">
-            <a:avLst/>
-          </a:prstGeom>
-          <a:solidFill>
-            <a:srgbClr val="1A3E5A">
-              <a:alpha val="22000"/>
-            </a:srgbClr>
-          </a:solidFill>
-          <a:ln w="19050">
-            <a:solidFill>
-              <a:srgbClr val="1A3E5A">
-                <a:alpha val="45000"/>
-              </a:srgbClr>
-            </a:solidFill>
-            <a:prstDash val="solid"/>
-          </a:ln>
-        </p:spPr>
-      </p:sp>
-      <p:sp>
-        <p:nvSpPr>
-          <p:cNvPr id="12" name="Shape 10"/>
-          <p:cNvSpPr/>
-          <p:nvPr/>
-        </p:nvSpPr>
-        <p:spPr>
-          <a:xfrm>
-            <a:off x="3913632" y="2176272"/>
+            <a:off x="3730752" y="2221992"/>
             <a:ext cx="2779776" cy="2779776"/>
           </a:xfrm>
           <a:prstGeom prst="ellipse">
@@ -1227,13 +1258,13 @@
       </p:sp>
       <p:sp>
         <p:nvSpPr>
-          <p:cNvPr id="13" name="Shape 11"/>
-          <p:cNvSpPr/>
-          <p:nvPr/>
-        </p:nvSpPr>
-        <p:spPr>
-          <a:xfrm>
-            <a:off x="4572000" y="2834640"/>
+          <p:cNvPr id="11" name="Shape 9"/>
+          <p:cNvSpPr/>
+          <p:nvPr/>
+        </p:nvSpPr>
+        <p:spPr>
+          <a:xfrm>
+            <a:off x="4389120" y="2880360"/>
             <a:ext cx="1463040" cy="1463040"/>
           </a:xfrm>
           <a:prstGeom prst="ellipse">
@@ -1256,14 +1287,14 @@
       </p:sp>
       <p:sp>
         <p:nvSpPr>
-          <p:cNvPr id="14" name="Text 12"/>
-          <p:cNvSpPr txBox="1"/>
-          <p:nvPr/>
-        </p:nvSpPr>
-        <p:spPr>
-          <a:xfrm>
-            <a:off x="4831188" y="4169138"/>
-            <a:ext cx="786384" cy="219456"/>
+          <p:cNvPr id="12" name="Text 10"/>
+          <p:cNvSpPr txBox="1"/>
+          <p:nvPr/>
+        </p:nvSpPr>
+        <p:spPr>
+          <a:xfrm>
+            <a:off x="4607868" y="4197427"/>
+            <a:ext cx="822960" cy="219456"/>
           </a:xfrm>
           <a:prstGeom prst="rect">
             <a:avLst/>
@@ -1292,14 +1323,14 @@
       </p:sp>
       <p:sp>
         <p:nvSpPr>
-          <p:cNvPr id="15" name="Text 13"/>
-          <p:cNvSpPr txBox="1"/>
-          <p:nvPr/>
-        </p:nvSpPr>
-        <p:spPr>
-          <a:xfrm>
-            <a:off x="5109427" y="4765822"/>
-            <a:ext cx="786384" cy="219456"/>
+          <p:cNvPr id="13" name="Text 11"/>
+          <p:cNvSpPr txBox="1"/>
+          <p:nvPr/>
+        </p:nvSpPr>
+        <p:spPr>
+          <a:xfrm>
+            <a:off x="4886106" y="4794111"/>
+            <a:ext cx="822960" cy="219456"/>
           </a:xfrm>
           <a:prstGeom prst="rect">
             <a:avLst/>
@@ -1328,93 +1359,21 @@
       </p:sp>
       <p:sp>
         <p:nvSpPr>
-          <p:cNvPr id="16" name="Text 14"/>
-          <p:cNvSpPr txBox="1"/>
-          <p:nvPr/>
-        </p:nvSpPr>
-        <p:spPr>
-          <a:xfrm>
-            <a:off x="5379936" y="5345931"/>
-            <a:ext cx="786384" cy="219456"/>
-          </a:xfrm>
-          <a:prstGeom prst="rect">
-            <a:avLst/>
-          </a:prstGeom>
-          <a:noFill/>
-          <a:ln/>
-        </p:spPr>
-        <p:txBody>
-          <a:bodyPr wrap="square" lIns="0" tIns="0" rIns="0" bIns="0" rtlCol="0" anchor="ctr"/>
-          <a:lstStyle/>
-          <a:p>
-            <a:pPr algn="r" indent="0" marL="0">
-              <a:buNone/>
-            </a:pPr>
-            <a:r>
-              <a:rPr lang="en-US" sz="750" b="1" dirty="0">
-                <a:solidFill>
-                  <a:srgbClr val="70B8E8"/>
-                </a:solidFill>
-              </a:rPr>
-              <a:t>MEDIUM</a:t>
-            </a:r>
-            <a:endParaRPr lang="en-US" sz="750" dirty="0"/>
-          </a:p>
-        </p:txBody>
-      </p:sp>
-      <p:sp>
-        <p:nvSpPr>
-          <p:cNvPr id="17" name="Text 15"/>
-          <p:cNvSpPr txBox="1"/>
-          <p:nvPr/>
-        </p:nvSpPr>
-        <p:spPr>
-          <a:xfrm>
-            <a:off x="5634988" y="5892892"/>
-            <a:ext cx="786384" cy="219456"/>
-          </a:xfrm>
-          <a:prstGeom prst="rect">
-            <a:avLst/>
-          </a:prstGeom>
-          <a:noFill/>
-          <a:ln/>
-        </p:spPr>
-        <p:txBody>
-          <a:bodyPr wrap="square" lIns="0" tIns="0" rIns="0" bIns="0" rtlCol="0" anchor="ctr"/>
-          <a:lstStyle/>
-          <a:p>
-            <a:pPr algn="r" indent="0" marL="0">
-              <a:buNone/>
-            </a:pPr>
-            <a:r>
-              <a:rPr lang="en-US" sz="750" b="1" dirty="0">
-                <a:solidFill>
-                  <a:srgbClr val="A8A8E8"/>
-                </a:solidFill>
-              </a:rPr>
-              <a:t>MONITOR</a:t>
-            </a:r>
-            <a:endParaRPr lang="en-US" sz="750" dirty="0"/>
-          </a:p>
-        </p:txBody>
-      </p:sp>
-      <p:sp>
-        <p:nvSpPr>
-          <p:cNvPr id="18" name="Shape 16"/>
-          <p:cNvSpPr/>
-          <p:nvPr/>
-        </p:nvSpPr>
-        <p:spPr>
-          <a:xfrm>
-            <a:off x="4811473" y="3273921"/>
-            <a:ext cx="237744" cy="237744"/>
+          <p:cNvPr id="14" name="Shape 12"/>
+          <p:cNvSpPr/>
+          <p:nvPr/>
+        </p:nvSpPr>
+        <p:spPr>
+          <a:xfrm>
+            <a:off x="4619449" y="3310497"/>
+            <a:ext cx="256032" cy="256032"/>
           </a:xfrm>
           <a:prstGeom prst="ellipse">
             <a:avLst/>
           </a:prstGeom>
           <a:solidFill>
             <a:srgbClr val="00E5A0">
-              <a:alpha val="40000"/>
+              <a:alpha val="38000"/>
             </a:srgbClr>
           </a:solidFill>
           <a:ln w="12700">
@@ -1427,14 +1386,14 @@
       </p:sp>
       <p:sp>
         <p:nvSpPr>
-          <p:cNvPr id="19" name="Shape 17"/>
-          <p:cNvSpPr/>
-          <p:nvPr/>
-        </p:nvSpPr>
-        <p:spPr>
-          <a:xfrm>
-            <a:off x="4864508" y="3326956"/>
-            <a:ext cx="131674" cy="131674"/>
+          <p:cNvPr id="15" name="Shape 13"/>
+          <p:cNvSpPr/>
+          <p:nvPr/>
+        </p:nvSpPr>
+        <p:spPr>
+          <a:xfrm>
+            <a:off x="4678885" y="3369933"/>
+            <a:ext cx="137160" cy="137160"/>
           </a:xfrm>
           <a:prstGeom prst="ellipse">
             <a:avLst/>
@@ -1452,14 +1411,14 @@
       </p:sp>
       <p:sp>
         <p:nvSpPr>
-          <p:cNvPr id="20" name="Text 18"/>
-          <p:cNvSpPr txBox="1"/>
-          <p:nvPr/>
-        </p:nvSpPr>
-        <p:spPr>
-          <a:xfrm>
-            <a:off x="4687081" y="3243563"/>
-            <a:ext cx="237744" cy="164592"/>
+          <p:cNvPr id="16" name="Text 14"/>
+          <p:cNvSpPr txBox="1"/>
+          <p:nvPr/>
+        </p:nvSpPr>
+        <p:spPr>
+          <a:xfrm>
+            <a:off x="4486765" y="3285431"/>
+            <a:ext cx="256032" cy="173736"/>
           </a:xfrm>
           <a:prstGeom prst="rect">
             <a:avLst/>
@@ -1488,14 +1447,14 @@
       </p:sp>
       <p:sp>
         <p:nvSpPr>
-          <p:cNvPr id="21" name="Shape 19"/>
-          <p:cNvSpPr/>
-          <p:nvPr/>
-        </p:nvSpPr>
-        <p:spPr>
-          <a:xfrm>
-            <a:off x="5119735" y="3125417"/>
-            <a:ext cx="102413" cy="102413"/>
+          <p:cNvPr id="17" name="Shape 15"/>
+          <p:cNvSpPr/>
+          <p:nvPr/>
+        </p:nvSpPr>
+        <p:spPr>
+          <a:xfrm>
+            <a:off x="4935027" y="3169308"/>
+            <a:ext cx="106070" cy="106070"/>
           </a:xfrm>
           <a:prstGeom prst="ellipse">
             <a:avLst/>
@@ -1513,14 +1472,14 @@
       </p:sp>
       <p:sp>
         <p:nvSpPr>
-          <p:cNvPr id="22" name="Text 20"/>
-          <p:cNvSpPr txBox="1"/>
-          <p:nvPr/>
-        </p:nvSpPr>
-        <p:spPr>
-          <a:xfrm>
-            <a:off x="5007877" y="2955338"/>
-            <a:ext cx="237744" cy="164592"/>
+          <p:cNvPr id="18" name="Text 16"/>
+          <p:cNvSpPr txBox="1"/>
+          <p:nvPr/>
+        </p:nvSpPr>
+        <p:spPr>
+          <a:xfrm>
+            <a:off x="4812907" y="2992401"/>
+            <a:ext cx="256032" cy="173736"/>
           </a:xfrm>
           <a:prstGeom prst="rect">
             <a:avLst/>
@@ -1549,14 +1508,14 @@
       </p:sp>
       <p:sp>
         <p:nvSpPr>
-          <p:cNvPr id="23" name="Shape 21"/>
-          <p:cNvSpPr/>
-          <p:nvPr/>
-        </p:nvSpPr>
-        <p:spPr>
-          <a:xfrm>
-            <a:off x="4248888" y="3048788"/>
-            <a:ext cx="102413" cy="102413"/>
+          <p:cNvPr id="19" name="Shape 17"/>
+          <p:cNvSpPr/>
+          <p:nvPr/>
+        </p:nvSpPr>
+        <p:spPr>
+          <a:xfrm>
+            <a:off x="4064179" y="3092679"/>
+            <a:ext cx="106070" cy="106070"/>
           </a:xfrm>
           <a:prstGeom prst="ellipse">
             <a:avLst/>
@@ -1574,14 +1533,14 @@
       </p:sp>
       <p:sp>
         <p:nvSpPr>
-          <p:cNvPr id="24" name="Text 22"/>
-          <p:cNvSpPr txBox="1"/>
-          <p:nvPr/>
-        </p:nvSpPr>
-        <p:spPr>
-          <a:xfrm>
-            <a:off x="4056830" y="2950765"/>
-            <a:ext cx="237744" cy="164592"/>
+          <p:cNvPr id="20" name="Text 18"/>
+          <p:cNvSpPr txBox="1"/>
+          <p:nvPr/>
+        </p:nvSpPr>
+        <p:spPr>
+          <a:xfrm>
+            <a:off x="3856514" y="2992632"/>
+            <a:ext cx="256032" cy="173736"/>
           </a:xfrm>
           <a:prstGeom prst="rect">
             <a:avLst/>
@@ -1610,14 +1569,14 @@
       </p:sp>
       <p:sp>
         <p:nvSpPr>
-          <p:cNvPr id="25" name="Shape 23"/>
-          <p:cNvSpPr/>
-          <p:nvPr/>
-        </p:nvSpPr>
-        <p:spPr>
-          <a:xfrm>
-            <a:off x="4512850" y="2691930"/>
-            <a:ext cx="102413" cy="102413"/>
+          <p:cNvPr id="21" name="Shape 19"/>
+          <p:cNvSpPr/>
+          <p:nvPr/>
+        </p:nvSpPr>
+        <p:spPr>
+          <a:xfrm>
+            <a:off x="4328142" y="2735821"/>
+            <a:ext cx="106070" cy="106070"/>
           </a:xfrm>
           <a:prstGeom prst="ellipse">
             <a:avLst/>
@@ -1635,14 +1594,14 @@
       </p:sp>
       <p:sp>
         <p:nvSpPr>
-          <p:cNvPr id="26" name="Text 24"/>
-          <p:cNvSpPr txBox="1"/>
-          <p:nvPr/>
-        </p:nvSpPr>
-        <p:spPr>
-          <a:xfrm>
-            <a:off x="4353516" y="2549668"/>
-            <a:ext cx="237744" cy="164592"/>
+          <p:cNvPr id="22" name="Text 20"/>
+          <p:cNvSpPr txBox="1"/>
+          <p:nvPr/>
+        </p:nvSpPr>
+        <p:spPr>
+          <a:xfrm>
+            <a:off x="4155381" y="2588586"/>
+            <a:ext cx="256032" cy="173736"/>
           </a:xfrm>
           <a:prstGeom prst="rect">
             <a:avLst/>
@@ -1671,14 +1630,14 @@
       </p:sp>
       <p:sp>
         <p:nvSpPr>
-          <p:cNvPr id="27" name="Shape 25"/>
-          <p:cNvSpPr/>
-          <p:nvPr/>
-        </p:nvSpPr>
-        <p:spPr>
-          <a:xfrm>
-            <a:off x="4895826" y="2467533"/>
-            <a:ext cx="102413" cy="102413"/>
+          <p:cNvPr id="23" name="Shape 21"/>
+          <p:cNvSpPr/>
+          <p:nvPr/>
+        </p:nvSpPr>
+        <p:spPr>
+          <a:xfrm>
+            <a:off x="4711117" y="2511424"/>
+            <a:ext cx="106070" cy="106070"/>
           </a:xfrm>
           <a:prstGeom prst="ellipse">
             <a:avLst/>
@@ -1696,14 +1655,14 @@
       </p:sp>
       <p:sp>
         <p:nvSpPr>
-          <p:cNvPr id="28" name="Text 26"/>
-          <p:cNvSpPr txBox="1"/>
-          <p:nvPr/>
-        </p:nvSpPr>
-        <p:spPr>
-          <a:xfrm>
-            <a:off x="4783967" y="2297454"/>
-            <a:ext cx="237744" cy="164592"/>
+          <p:cNvPr id="24" name="Text 22"/>
+          <p:cNvSpPr txBox="1"/>
+          <p:nvPr/>
+        </p:nvSpPr>
+        <p:spPr>
+          <a:xfrm>
+            <a:off x="4588997" y="2334517"/>
+            <a:ext cx="256032" cy="173736"/>
           </a:xfrm>
           <a:prstGeom prst="rect">
             <a:avLst/>
@@ -1732,20 +1691,20 @@
       </p:sp>
       <p:sp>
         <p:nvSpPr>
-          <p:cNvPr id="29" name="Shape 27"/>
-          <p:cNvSpPr/>
-          <p:nvPr/>
-        </p:nvSpPr>
-        <p:spPr>
-          <a:xfrm>
-            <a:off x="4078951" y="2208998"/>
-            <a:ext cx="102413" cy="102413"/>
+          <p:cNvPr id="25" name="Shape 23"/>
+          <p:cNvSpPr/>
+          <p:nvPr/>
+        </p:nvSpPr>
+        <p:spPr>
+          <a:xfrm>
+            <a:off x="5075079" y="3147433"/>
+            <a:ext cx="106070" cy="106070"/>
           </a:xfrm>
           <a:prstGeom prst="ellipse">
             <a:avLst/>
           </a:prstGeom>
           <a:solidFill>
-            <a:srgbClr val="E85D4A"/>
+            <a:srgbClr val="4A90D9"/>
           </a:solidFill>
           <a:ln w="6350">
             <a:solidFill>
@@ -1757,14 +1716,14 @@
       </p:sp>
       <p:sp>
         <p:nvSpPr>
-          <p:cNvPr id="30" name="Text 28"/>
-          <p:cNvSpPr txBox="1"/>
-          <p:nvPr/>
-        </p:nvSpPr>
-        <p:spPr>
-          <a:xfrm>
-            <a:off x="3919616" y="2066737"/>
-            <a:ext cx="237744" cy="164592"/>
+          <p:cNvPr id="26" name="Text 24"/>
+          <p:cNvSpPr txBox="1"/>
+          <p:nvPr/>
+        </p:nvSpPr>
+        <p:spPr>
+          <a:xfrm>
+            <a:off x="5002756" y="2962748"/>
+            <a:ext cx="256032" cy="173736"/>
           </a:xfrm>
           <a:prstGeom prst="rect">
             <a:avLst/>
@@ -1782,10 +1741,10 @@
             <a:r>
               <a:rPr lang="en-US" sz="700" b="1" dirty="0">
                 <a:solidFill>
-                  <a:srgbClr val="E85D4A"/>
-                </a:solidFill>
-              </a:rPr>
-              <a:t>6</a:t>
+                  <a:srgbClr val="4A90D9"/>
+                </a:solidFill>
+              </a:rPr>
+              <a:t>1</a:t>
             </a:r>
             <a:endParaRPr lang="en-US" sz="700" dirty="0"/>
           </a:p>
@@ -1793,20 +1752,20 @@
       </p:sp>
       <p:sp>
         <p:nvSpPr>
-          <p:cNvPr id="31" name="Shape 29"/>
-          <p:cNvSpPr/>
-          <p:nvPr/>
-        </p:nvSpPr>
-        <p:spPr>
-          <a:xfrm>
-            <a:off x="3096192" y="2513275"/>
-            <a:ext cx="102413" cy="102413"/>
+          <p:cNvPr id="27" name="Shape 25"/>
+          <p:cNvSpPr/>
+          <p:nvPr/>
+        </p:nvSpPr>
+        <p:spPr>
+          <a:xfrm>
+            <a:off x="5236173" y="3183478"/>
+            <a:ext cx="106070" cy="106070"/>
           </a:xfrm>
           <a:prstGeom prst="ellipse">
             <a:avLst/>
           </a:prstGeom>
           <a:solidFill>
-            <a:srgbClr val="8888CC"/>
+            <a:srgbClr val="4A90D9"/>
           </a:solidFill>
           <a:ln w="6350">
             <a:solidFill>
@@ -1818,14 +1777,14 @@
       </p:sp>
       <p:sp>
         <p:nvSpPr>
-          <p:cNvPr id="32" name="Text 30"/>
-          <p:cNvSpPr txBox="1"/>
-          <p:nvPr/>
-        </p:nvSpPr>
-        <p:spPr>
-          <a:xfrm>
-            <a:off x="2904135" y="2415252"/>
-            <a:ext cx="237744" cy="164592"/>
+          <p:cNvPr id="28" name="Text 26"/>
+          <p:cNvSpPr txBox="1"/>
+          <p:nvPr/>
+        </p:nvSpPr>
+        <p:spPr>
+          <a:xfrm>
+            <a:off x="5221128" y="3011609"/>
+            <a:ext cx="256032" cy="173736"/>
           </a:xfrm>
           <a:prstGeom prst="rect">
             <a:avLst/>
@@ -1843,10 +1802,10 @@
             <a:r>
               <a:rPr lang="en-US" sz="700" b="1" dirty="0">
                 <a:solidFill>
-                  <a:srgbClr val="8888CC"/>
-                </a:solidFill>
-              </a:rPr>
-              <a:t>7</a:t>
+                  <a:srgbClr val="4A90D9"/>
+                </a:solidFill>
+              </a:rPr>
+              <a:t>2</a:t>
             </a:r>
             <a:endParaRPr lang="en-US" sz="700" dirty="0"/>
           </a:p>
@@ -1854,20 +1813,20 @@
       </p:sp>
       <p:sp>
         <p:nvSpPr>
-          <p:cNvPr id="33" name="Shape 31"/>
-          <p:cNvSpPr/>
-          <p:nvPr/>
-        </p:nvSpPr>
-        <p:spPr>
-          <a:xfrm>
-            <a:off x="4486307" y="1264297"/>
-            <a:ext cx="102413" cy="102413"/>
+          <p:cNvPr id="29" name="Shape 27"/>
+          <p:cNvSpPr/>
+          <p:nvPr/>
+        </p:nvSpPr>
+        <p:spPr>
+          <a:xfrm>
+            <a:off x="5370137" y="3279936"/>
+            <a:ext cx="106070" cy="106070"/>
           </a:xfrm>
           <a:prstGeom prst="ellipse">
             <a:avLst/>
           </a:prstGeom>
           <a:solidFill>
-            <a:srgbClr val="8888CC"/>
+            <a:srgbClr val="4A90D9"/>
           </a:solidFill>
           <a:ln w="6350">
             <a:solidFill>
@@ -1879,14 +1838,14 @@
       </p:sp>
       <p:sp>
         <p:nvSpPr>
-          <p:cNvPr id="34" name="Text 32"/>
-          <p:cNvSpPr txBox="1"/>
-          <p:nvPr/>
-        </p:nvSpPr>
-        <p:spPr>
-          <a:xfrm>
-            <a:off x="4374448" y="1094218"/>
-            <a:ext cx="237744" cy="164592"/>
+          <p:cNvPr id="30" name="Text 28"/>
+          <p:cNvSpPr txBox="1"/>
+          <p:nvPr/>
+        </p:nvSpPr>
+        <p:spPr>
+          <a:xfrm>
+            <a:off x="5402723" y="3142363"/>
+            <a:ext cx="256032" cy="173736"/>
           </a:xfrm>
           <a:prstGeom prst="rect">
             <a:avLst/>
@@ -1904,10 +1863,10 @@
             <a:r>
               <a:rPr lang="en-US" sz="700" b="1" dirty="0">
                 <a:solidFill>
-                  <a:srgbClr val="8888CC"/>
-                </a:solidFill>
-              </a:rPr>
-              <a:t>8</a:t>
+                  <a:srgbClr val="4A90D9"/>
+                </a:solidFill>
+              </a:rPr>
+              <a:t>3</a:t>
             </a:r>
             <a:endParaRPr lang="en-US" sz="700" dirty="0"/>
           </a:p>
@@ -1915,14 +1874,14 @@
       </p:sp>
       <p:sp>
         <p:nvSpPr>
-          <p:cNvPr id="35" name="Shape 33"/>
-          <p:cNvSpPr/>
-          <p:nvPr/>
-        </p:nvSpPr>
-        <p:spPr>
-          <a:xfrm>
-            <a:off x="5259788" y="3103541"/>
-            <a:ext cx="102413" cy="102413"/>
+          <p:cNvPr id="31" name="Shape 29"/>
+          <p:cNvSpPr/>
+          <p:nvPr/>
+        </p:nvSpPr>
+        <p:spPr>
+          <a:xfrm>
+            <a:off x="5087703" y="2452603"/>
+            <a:ext cx="106070" cy="106070"/>
           </a:xfrm>
           <a:prstGeom prst="ellipse">
             <a:avLst/>
@@ -1940,14 +1899,14 @@
       </p:sp>
       <p:sp>
         <p:nvSpPr>
-          <p:cNvPr id="36" name="Text 34"/>
-          <p:cNvSpPr txBox="1"/>
-          <p:nvPr/>
-        </p:nvSpPr>
-        <p:spPr>
-          <a:xfrm>
-            <a:off x="5194614" y="2926171"/>
-            <a:ext cx="237744" cy="164592"/>
+          <p:cNvPr id="32" name="Text 30"/>
+          <p:cNvSpPr txBox="1"/>
+          <p:nvPr/>
+        </p:nvSpPr>
+        <p:spPr>
+          <a:xfrm>
+            <a:off x="5015379" y="2267919"/>
+            <a:ext cx="256032" cy="173736"/>
           </a:xfrm>
           <a:prstGeom prst="rect">
             <a:avLst/>
@@ -1968,7 +1927,7 @@
                   <a:srgbClr val="4A90D9"/>
                 </a:solidFill>
               </a:rPr>
-              <a:t>1</a:t>
+              <a:t>4</a:t>
             </a:r>
             <a:endParaRPr lang="en-US" sz="700" dirty="0"/>
           </a:p>
@@ -1976,14 +1935,14 @@
       </p:sp>
       <p:sp>
         <p:nvSpPr>
-          <p:cNvPr id="37" name="Shape 35"/>
-          <p:cNvSpPr/>
-          <p:nvPr/>
-        </p:nvSpPr>
-        <p:spPr>
-          <a:xfrm>
-            <a:off x="5420882" y="3139586"/>
-            <a:ext cx="102413" cy="102413"/>
+          <p:cNvPr id="33" name="Shape 31"/>
+          <p:cNvSpPr/>
+          <p:nvPr/>
+        </p:nvSpPr>
+        <p:spPr>
+          <a:xfrm>
+            <a:off x="5520866" y="2549524"/>
+            <a:ext cx="106070" cy="106070"/>
           </a:xfrm>
           <a:prstGeom prst="ellipse">
             <a:avLst/>
@@ -2001,14 +1960,14 @@
       </p:sp>
       <p:sp>
         <p:nvSpPr>
-          <p:cNvPr id="38" name="Text 36"/>
-          <p:cNvSpPr txBox="1"/>
-          <p:nvPr/>
-        </p:nvSpPr>
-        <p:spPr>
-          <a:xfrm>
-            <a:off x="5409406" y="2974230"/>
-            <a:ext cx="237744" cy="164592"/>
+          <p:cNvPr id="34" name="Text 32"/>
+          <p:cNvSpPr txBox="1"/>
+          <p:nvPr/>
+        </p:nvSpPr>
+        <p:spPr>
+          <a:xfrm>
+            <a:off x="5505820" y="2377655"/>
+            <a:ext cx="256032" cy="173736"/>
           </a:xfrm>
           <a:prstGeom prst="rect">
             <a:avLst/>
@@ -2029,7 +1988,7 @@
                   <a:srgbClr val="4A90D9"/>
                 </a:solidFill>
               </a:rPr>
-              <a:t>2</a:t>
+              <a:t>5</a:t>
             </a:r>
             <a:endParaRPr lang="en-US" sz="700" dirty="0"/>
           </a:p>
@@ -2037,14 +1996,14 @@
       </p:sp>
       <p:sp>
         <p:nvSpPr>
-          <p:cNvPr id="39" name="Shape 37"/>
-          <p:cNvSpPr/>
-          <p:nvPr/>
-        </p:nvSpPr>
-        <p:spPr>
-          <a:xfrm>
-            <a:off x="5554845" y="3236045"/>
-            <a:ext cx="102413" cy="102413"/>
+          <p:cNvPr id="35" name="Shape 33"/>
+          <p:cNvSpPr/>
+          <p:nvPr/>
+        </p:nvSpPr>
+        <p:spPr>
+          <a:xfrm>
+            <a:off x="5881079" y="2808889"/>
+            <a:ext cx="106070" cy="106070"/>
           </a:xfrm>
           <a:prstGeom prst="ellipse">
             <a:avLst/>
@@ -2062,14 +2021,14 @@
       </p:sp>
       <p:sp>
         <p:nvSpPr>
-          <p:cNvPr id="40" name="Text 38"/>
-          <p:cNvSpPr txBox="1"/>
-          <p:nvPr/>
-        </p:nvSpPr>
-        <p:spPr>
-          <a:xfrm>
-            <a:off x="5588024" y="3102841"/>
-            <a:ext cx="237744" cy="164592"/>
+          <p:cNvPr id="36" name="Text 34"/>
+          <p:cNvSpPr txBox="1"/>
+          <p:nvPr/>
+        </p:nvSpPr>
+        <p:spPr>
+          <a:xfrm>
+            <a:off x="5913665" y="2671317"/>
+            <a:ext cx="256032" cy="173736"/>
           </a:xfrm>
           <a:prstGeom prst="rect">
             <a:avLst/>
@@ -2090,7 +2049,7 @@
                   <a:srgbClr val="4A90D9"/>
                 </a:solidFill>
               </a:rPr>
-              <a:t>3</a:t>
+              <a:t>6</a:t>
             </a:r>
             <a:endParaRPr lang="en-US" sz="700" dirty="0"/>
           </a:p>
@@ -2098,20 +2057,47 @@
       </p:sp>
       <p:sp>
         <p:nvSpPr>
-          <p:cNvPr id="41" name="Shape 39"/>
-          <p:cNvSpPr/>
-          <p:nvPr/>
-        </p:nvSpPr>
-        <p:spPr>
-          <a:xfrm>
-            <a:off x="5272411" y="2408712"/>
-            <a:ext cx="102413" cy="102413"/>
+          <p:cNvPr id="37" name="Shape 35"/>
+          <p:cNvSpPr/>
+          <p:nvPr/>
+        </p:nvSpPr>
+        <p:spPr>
+          <a:xfrm>
+            <a:off x="5387717" y="3368896"/>
+            <a:ext cx="256032" cy="256032"/>
           </a:xfrm>
           <a:prstGeom prst="ellipse">
             <a:avLst/>
           </a:prstGeom>
           <a:solidFill>
-            <a:srgbClr val="4A90D9"/>
+            <a:srgbClr val="00E5A0">
+              <a:alpha val="38000"/>
+            </a:srgbClr>
+          </a:solidFill>
+          <a:ln w="12700">
+            <a:solidFill>
+              <a:srgbClr val="00E5A0"/>
+            </a:solidFill>
+            <a:prstDash val="solid"/>
+          </a:ln>
+        </p:spPr>
+      </p:sp>
+      <p:sp>
+        <p:nvSpPr>
+          <p:cNvPr id="38" name="Shape 36"/>
+          <p:cNvSpPr/>
+          <p:nvPr/>
+        </p:nvSpPr>
+        <p:spPr>
+          <a:xfrm>
+            <a:off x="5447153" y="3428332"/>
+            <a:ext cx="137160" cy="137160"/>
+          </a:xfrm>
+          <a:prstGeom prst="ellipse">
+            <a:avLst/>
+          </a:prstGeom>
+          <a:solidFill>
+            <a:srgbClr val="00E5A0"/>
           </a:solidFill>
           <a:ln w="6350">
             <a:solidFill>
@@ -2123,14 +2109,14 @@
       </p:sp>
       <p:sp>
         <p:nvSpPr>
-          <p:cNvPr id="42" name="Text 40"/>
-          <p:cNvSpPr txBox="1"/>
-          <p:nvPr/>
-        </p:nvSpPr>
-        <p:spPr>
-          <a:xfrm>
-            <a:off x="5207237" y="2231341"/>
-            <a:ext cx="237744" cy="164592"/>
+          <p:cNvPr id="39" name="Text 37"/>
+          <p:cNvSpPr txBox="1"/>
+          <p:nvPr/>
+        </p:nvSpPr>
+        <p:spPr>
+          <a:xfrm>
+            <a:off x="5528194" y="3364594"/>
+            <a:ext cx="256032" cy="173736"/>
           </a:xfrm>
           <a:prstGeom prst="rect">
             <a:avLst/>
@@ -2148,10 +2134,10 @@
             <a:r>
               <a:rPr lang="en-US" sz="700" b="1" dirty="0">
                 <a:solidFill>
-                  <a:srgbClr val="4A90D9"/>
-                </a:solidFill>
-              </a:rPr>
-              <a:t>4</a:t>
+                  <a:srgbClr val="00E5A0"/>
+                </a:solidFill>
+              </a:rPr>
+              <a:t>1</a:t>
             </a:r>
             <a:endParaRPr lang="en-US" sz="700" dirty="0"/>
           </a:p>
@@ -2159,20 +2145,20 @@
       </p:sp>
       <p:sp>
         <p:nvSpPr>
-          <p:cNvPr id="43" name="Shape 41"/>
-          <p:cNvSpPr/>
-          <p:nvPr/>
-        </p:nvSpPr>
-        <p:spPr>
-          <a:xfrm>
-            <a:off x="5705575" y="2505633"/>
-            <a:ext cx="102413" cy="102413"/>
+          <p:cNvPr id="40" name="Shape 38"/>
+          <p:cNvSpPr/>
+          <p:nvPr/>
+        </p:nvSpPr>
+        <p:spPr>
+          <a:xfrm>
+            <a:off x="6046363" y="3042893"/>
+            <a:ext cx="106070" cy="106070"/>
           </a:xfrm>
           <a:prstGeom prst="ellipse">
             <a:avLst/>
           </a:prstGeom>
           <a:solidFill>
-            <a:srgbClr val="4A90D9"/>
+            <a:srgbClr val="7B68EE"/>
           </a:solidFill>
           <a:ln w="6350">
             <a:solidFill>
@@ -2184,14 +2170,14 @@
       </p:sp>
       <p:sp>
         <p:nvSpPr>
-          <p:cNvPr id="44" name="Text 42"/>
-          <p:cNvSpPr txBox="1"/>
-          <p:nvPr/>
-        </p:nvSpPr>
-        <p:spPr>
-          <a:xfrm>
-            <a:off x="5694098" y="2340277"/>
-            <a:ext cx="237744" cy="164592"/>
+          <p:cNvPr id="41" name="Text 39"/>
+          <p:cNvSpPr txBox="1"/>
+          <p:nvPr/>
+        </p:nvSpPr>
+        <p:spPr>
+          <a:xfrm>
+            <a:off x="6100805" y="2936263"/>
+            <a:ext cx="256032" cy="173736"/>
           </a:xfrm>
           <a:prstGeom prst="rect">
             <a:avLst/>
@@ -2209,10 +2195,10 @@
             <a:r>
               <a:rPr lang="en-US" sz="700" b="1" dirty="0">
                 <a:solidFill>
-                  <a:srgbClr val="4A90D9"/>
-                </a:solidFill>
-              </a:rPr>
-              <a:t>5</a:t>
+                  <a:srgbClr val="7B68EE"/>
+                </a:solidFill>
+              </a:rPr>
+              <a:t>2</a:t>
             </a:r>
             <a:endParaRPr lang="en-US" sz="700" dirty="0"/>
           </a:p>
@@ -2220,20 +2206,20 @@
       </p:sp>
       <p:sp>
         <p:nvSpPr>
-          <p:cNvPr id="45" name="Shape 43"/>
-          <p:cNvSpPr/>
-          <p:nvPr/>
-        </p:nvSpPr>
-        <p:spPr>
-          <a:xfrm>
-            <a:off x="6065788" y="2764998"/>
-            <a:ext cx="102413" cy="102413"/>
+          <p:cNvPr id="42" name="Shape 40"/>
+          <p:cNvSpPr/>
+          <p:nvPr/>
+        </p:nvSpPr>
+        <p:spPr>
+          <a:xfrm>
+            <a:off x="6129965" y="3249708"/>
+            <a:ext cx="106070" cy="106070"/>
           </a:xfrm>
           <a:prstGeom prst="ellipse">
             <a:avLst/>
           </a:prstGeom>
           <a:solidFill>
-            <a:srgbClr val="4A90D9"/>
+            <a:srgbClr val="7B68EE"/>
           </a:solidFill>
           <a:ln w="6350">
             <a:solidFill>
@@ -2245,14 +2231,14 @@
       </p:sp>
       <p:sp>
         <p:nvSpPr>
-          <p:cNvPr id="46" name="Text 44"/>
-          <p:cNvSpPr txBox="1"/>
-          <p:nvPr/>
-        </p:nvSpPr>
-        <p:spPr>
-          <a:xfrm>
-            <a:off x="6098966" y="2631795"/>
-            <a:ext cx="237744" cy="164592"/>
+          <p:cNvPr id="43" name="Text 41"/>
+          <p:cNvSpPr txBox="1"/>
+          <p:nvPr/>
+        </p:nvSpPr>
+        <p:spPr>
+          <a:xfrm>
+            <a:off x="6195461" y="3170426"/>
+            <a:ext cx="256032" cy="173736"/>
           </a:xfrm>
           <a:prstGeom prst="rect">
             <a:avLst/>
@@ -2270,10 +2256,10 @@
             <a:r>
               <a:rPr lang="en-US" sz="700" b="1" dirty="0">
                 <a:solidFill>
-                  <a:srgbClr val="4A90D9"/>
-                </a:solidFill>
-              </a:rPr>
-              <a:t>6</a:t>
+                  <a:srgbClr val="7B68EE"/>
+                </a:solidFill>
+              </a:rPr>
+              <a:t>3</a:t>
             </a:r>
             <a:endParaRPr lang="en-US" sz="700" dirty="0"/>
           </a:p>
@@ -2281,20 +2267,20 @@
       </p:sp>
       <p:sp>
         <p:nvSpPr>
-          <p:cNvPr id="47" name="Shape 45"/>
-          <p:cNvSpPr/>
-          <p:nvPr/>
-        </p:nvSpPr>
-        <p:spPr>
-          <a:xfrm>
-            <a:off x="5284204" y="1759595"/>
-            <a:ext cx="102413" cy="102413"/>
+          <p:cNvPr id="44" name="Shape 42"/>
+          <p:cNvSpPr/>
+          <p:nvPr/>
+        </p:nvSpPr>
+        <p:spPr>
+          <a:xfrm>
+            <a:off x="6170382" y="3469089"/>
+            <a:ext cx="106070" cy="106070"/>
           </a:xfrm>
           <a:prstGeom prst="ellipse">
             <a:avLst/>
           </a:prstGeom>
           <a:solidFill>
-            <a:srgbClr val="4A90D9"/>
+            <a:srgbClr val="7B68EE"/>
           </a:solidFill>
           <a:ln w="6350">
             <a:solidFill>
@@ -2306,14 +2292,14 @@
       </p:sp>
       <p:sp>
         <p:nvSpPr>
-          <p:cNvPr id="48" name="Text 46"/>
-          <p:cNvSpPr txBox="1"/>
-          <p:nvPr/>
-        </p:nvSpPr>
-        <p:spPr>
-          <a:xfrm>
-            <a:off x="5219030" y="1582224"/>
-            <a:ext cx="237744" cy="164592"/>
+          <p:cNvPr id="45" name="Text 43"/>
+          <p:cNvSpPr txBox="1"/>
+          <p:nvPr/>
+        </p:nvSpPr>
+        <p:spPr>
+          <a:xfrm>
+            <a:off x="6241223" y="3418816"/>
+            <a:ext cx="256032" cy="173736"/>
           </a:xfrm>
           <a:prstGeom prst="rect">
             <a:avLst/>
@@ -2331,10 +2317,10 @@
             <a:r>
               <a:rPr lang="en-US" sz="700" b="1" dirty="0">
                 <a:solidFill>
-                  <a:srgbClr val="4A90D9"/>
-                </a:solidFill>
-              </a:rPr>
-              <a:t>7</a:t>
+                  <a:srgbClr val="7B68EE"/>
+                </a:solidFill>
+              </a:rPr>
+              <a:t>4</a:t>
             </a:r>
             <a:endParaRPr lang="en-US" sz="700" dirty="0"/>
           </a:p>
@@ -2342,20 +2328,47 @@
       </p:sp>
       <p:sp>
         <p:nvSpPr>
-          <p:cNvPr id="49" name="Shape 47"/>
-          <p:cNvSpPr/>
-          <p:nvPr/>
-        </p:nvSpPr>
-        <p:spPr>
-          <a:xfrm>
-            <a:off x="6543116" y="2324942"/>
-            <a:ext cx="102413" cy="102413"/>
+          <p:cNvPr id="46" name="Shape 44"/>
+          <p:cNvSpPr/>
+          <p:nvPr/>
+        </p:nvSpPr>
+        <p:spPr>
+          <a:xfrm>
+            <a:off x="6081478" y="3680260"/>
+            <a:ext cx="256032" cy="256032"/>
           </a:xfrm>
           <a:prstGeom prst="ellipse">
             <a:avLst/>
           </a:prstGeom>
           <a:solidFill>
-            <a:srgbClr val="4A90D9"/>
+            <a:srgbClr val="00E5A0">
+              <a:alpha val="38000"/>
+            </a:srgbClr>
+          </a:solidFill>
+          <a:ln w="12700">
+            <a:solidFill>
+              <a:srgbClr val="00E5A0"/>
+            </a:solidFill>
+            <a:prstDash val="solid"/>
+          </a:ln>
+        </p:spPr>
+      </p:sp>
+      <p:sp>
+        <p:nvSpPr>
+          <p:cNvPr id="47" name="Shape 45"/>
+          <p:cNvSpPr/>
+          <p:nvPr/>
+        </p:nvSpPr>
+        <p:spPr>
+          <a:xfrm>
+            <a:off x="6140914" y="3739696"/>
+            <a:ext cx="137160" cy="137160"/>
+          </a:xfrm>
+          <a:prstGeom prst="ellipse">
+            <a:avLst/>
+          </a:prstGeom>
+          <a:solidFill>
+            <a:srgbClr val="00E5A0"/>
           </a:solidFill>
           <a:ln w="6350">
             <a:solidFill>
@@ -2367,14 +2380,75 @@
       </p:sp>
       <p:sp>
         <p:nvSpPr>
+          <p:cNvPr id="48" name="Text 46"/>
+          <p:cNvSpPr txBox="1"/>
+          <p:nvPr/>
+        </p:nvSpPr>
+        <p:spPr>
+          <a:xfrm>
+            <a:off x="6225458" y="3742806"/>
+            <a:ext cx="256032" cy="173736"/>
+          </a:xfrm>
+          <a:prstGeom prst="rect">
+            <a:avLst/>
+          </a:prstGeom>
+          <a:noFill/>
+          <a:ln/>
+        </p:spPr>
+        <p:txBody>
+          <a:bodyPr wrap="square" lIns="0" tIns="0" rIns="0" bIns="0" rtlCol="0" anchor="ctr"/>
+          <a:lstStyle/>
+          <a:p>
+            <a:pPr algn="ctr" indent="0" marL="0">
+              <a:buNone/>
+            </a:pPr>
+            <a:r>
+              <a:rPr lang="en-US" sz="700" b="1" dirty="0">
+                <a:solidFill>
+                  <a:srgbClr val="00E5A0"/>
+                </a:solidFill>
+              </a:rPr>
+              <a:t>1</a:t>
+            </a:r>
+            <a:endParaRPr lang="en-US" sz="700" dirty="0"/>
+          </a:p>
+        </p:txBody>
+      </p:sp>
+      <p:sp>
+        <p:nvSpPr>
+          <p:cNvPr id="49" name="Shape 47"/>
+          <p:cNvSpPr/>
+          <p:nvPr/>
+        </p:nvSpPr>
+        <p:spPr>
+          <a:xfrm>
+            <a:off x="5678117" y="4481585"/>
+            <a:ext cx="106070" cy="106070"/>
+          </a:xfrm>
+          <a:prstGeom prst="ellipse">
+            <a:avLst/>
+          </a:prstGeom>
+          <a:solidFill>
+            <a:srgbClr val="F0A500"/>
+          </a:solidFill>
+          <a:ln w="6350">
+            <a:solidFill>
+              <a:srgbClr val="0D1B2A"/>
+            </a:solidFill>
+            <a:prstDash val="solid"/>
+          </a:ln>
+        </p:spPr>
+      </p:sp>
+      <p:sp>
+        <p:nvSpPr>
           <p:cNvPr id="50" name="Text 48"/>
           <p:cNvSpPr txBox="1"/>
           <p:nvPr/>
         </p:nvSpPr>
         <p:spPr>
           <a:xfrm>
-            <a:off x="6576294" y="2191738"/>
-            <a:ext cx="237744" cy="164592"/>
+            <a:off x="5683865" y="4565195"/>
+            <a:ext cx="256032" cy="173736"/>
           </a:xfrm>
           <a:prstGeom prst="rect">
             <a:avLst/>
@@ -2392,10 +2466,10 @@
             <a:r>
               <a:rPr lang="en-US" sz="700" b="1" dirty="0">
                 <a:solidFill>
-                  <a:srgbClr val="4A90D9"/>
-                </a:solidFill>
-              </a:rPr>
-              <a:t>8</a:t>
+                  <a:srgbClr val="F0A500"/>
+                </a:solidFill>
+              </a:rPr>
+              <a:t>2</a:t>
             </a:r>
             <a:endParaRPr lang="en-US" sz="700" dirty="0"/>
           </a:p>
@@ -2409,15 +2483,76 @@
         </p:nvSpPr>
         <p:spPr>
           <a:xfrm>
-            <a:off x="5579741" y="3332320"/>
-            <a:ext cx="237744" cy="237744"/>
+            <a:off x="5176226" y="3955729"/>
+            <a:ext cx="106070" cy="106070"/>
           </a:xfrm>
           <a:prstGeom prst="ellipse">
             <a:avLst/>
           </a:prstGeom>
           <a:solidFill>
+            <a:srgbClr val="3DAA6E"/>
+          </a:solidFill>
+          <a:ln w="6350">
+            <a:solidFill>
+              <a:srgbClr val="0D1B2A"/>
+            </a:solidFill>
+            <a:prstDash val="solid"/>
+          </a:ln>
+        </p:spPr>
+      </p:sp>
+      <p:sp>
+        <p:nvSpPr>
+          <p:cNvPr id="52" name="Text 50"/>
+          <p:cNvSpPr txBox="1"/>
+          <p:nvPr/>
+        </p:nvSpPr>
+        <p:spPr>
+          <a:xfrm>
+            <a:off x="5139866" y="4058439"/>
+            <a:ext cx="256032" cy="173736"/>
+          </a:xfrm>
+          <a:prstGeom prst="rect">
+            <a:avLst/>
+          </a:prstGeom>
+          <a:noFill/>
+          <a:ln/>
+        </p:spPr>
+        <p:txBody>
+          <a:bodyPr wrap="square" lIns="0" tIns="0" rIns="0" bIns="0" rtlCol="0" anchor="ctr"/>
+          <a:lstStyle/>
+          <a:p>
+            <a:pPr algn="ctr" indent="0" marL="0">
+              <a:buNone/>
+            </a:pPr>
+            <a:r>
+              <a:rPr lang="en-US" sz="700" b="1" dirty="0">
+                <a:solidFill>
+                  <a:srgbClr val="3DAA6E"/>
+                </a:solidFill>
+              </a:rPr>
+              <a:t>1</a:t>
+            </a:r>
+            <a:endParaRPr lang="en-US" sz="700" dirty="0"/>
+          </a:p>
+        </p:txBody>
+      </p:sp>
+      <p:sp>
+        <p:nvSpPr>
+          <p:cNvPr id="53" name="Shape 51"/>
+          <p:cNvSpPr/>
+          <p:nvPr/>
+        </p:nvSpPr>
+        <p:spPr>
+          <a:xfrm>
+            <a:off x="4964067" y="3894352"/>
+            <a:ext cx="256032" cy="256032"/>
+          </a:xfrm>
+          <a:prstGeom prst="ellipse">
+            <a:avLst/>
+          </a:prstGeom>
+          <a:solidFill>
             <a:srgbClr val="00E5A0">
-              <a:alpha val="40000"/>
+              <a:alpha val="38000"/>
             </a:srgbClr>
           </a:solidFill>
           <a:ln w="12700">
@@ -2430,14 +2565,14 @@
       </p:sp>
       <p:sp>
         <p:nvSpPr>
-          <p:cNvPr id="52" name="Shape 50"/>
-          <p:cNvSpPr/>
-          <p:nvPr/>
-        </p:nvSpPr>
-        <p:spPr>
-          <a:xfrm>
-            <a:off x="5632776" y="3385355"/>
-            <a:ext cx="131674" cy="131674"/>
+          <p:cNvPr id="54" name="Shape 52"/>
+          <p:cNvSpPr/>
+          <p:nvPr/>
+        </p:nvSpPr>
+        <p:spPr>
+          <a:xfrm>
+            <a:off x="5023503" y="3953788"/>
+            <a:ext cx="137160" cy="137160"/>
           </a:xfrm>
           <a:prstGeom prst="ellipse">
             <a:avLst/>
@@ -2455,14 +2590,14 @@
       </p:sp>
       <p:sp>
         <p:nvSpPr>
-          <p:cNvPr id="53" name="Text 51"/>
-          <p:cNvSpPr txBox="1"/>
-          <p:nvPr/>
-        </p:nvSpPr>
-        <p:spPr>
-          <a:xfrm>
-            <a:off x="5711438" y="3321429"/>
-            <a:ext cx="237744" cy="164592"/>
+          <p:cNvPr id="55" name="Text 53"/>
+          <p:cNvSpPr txBox="1"/>
+          <p:nvPr/>
+        </p:nvSpPr>
+        <p:spPr>
+          <a:xfrm>
+            <a:off x="4953913" y="4076879"/>
+            <a:ext cx="256032" cy="173736"/>
           </a:xfrm>
           <a:prstGeom prst="rect">
             <a:avLst/>
@@ -2483,7 +2618,7 @@
                   <a:srgbClr val="00E5A0"/>
                 </a:solidFill>
               </a:rPr>
-              <a:t>1</a:t>
+              <a:t>2</a:t>
             </a:r>
             <a:endParaRPr lang="en-US" sz="700" dirty="0"/>
           </a:p>
@@ -2491,20 +2626,20 @@
       </p:sp>
       <p:sp>
         <p:nvSpPr>
-          <p:cNvPr id="54" name="Shape 52"/>
-          <p:cNvSpPr/>
-          <p:nvPr/>
-        </p:nvSpPr>
-        <p:spPr>
-          <a:xfrm>
-            <a:off x="6231072" y="2999002"/>
-            <a:ext cx="102413" cy="102413"/>
+          <p:cNvPr id="56" name="Shape 54"/>
+          <p:cNvSpPr/>
+          <p:nvPr/>
+        </p:nvSpPr>
+        <p:spPr>
+          <a:xfrm>
+            <a:off x="4905075" y="3936866"/>
+            <a:ext cx="106070" cy="106070"/>
           </a:xfrm>
           <a:prstGeom prst="ellipse">
             <a:avLst/>
           </a:prstGeom>
           <a:solidFill>
-            <a:srgbClr val="7B68EE"/>
+            <a:srgbClr val="3DAA6E"/>
           </a:solidFill>
           <a:ln w="6350">
             <a:solidFill>
@@ -2516,14 +2651,14 @@
       </p:sp>
       <p:sp>
         <p:nvSpPr>
-          <p:cNvPr id="55" name="Text 53"/>
-          <p:cNvSpPr txBox="1"/>
-          <p:nvPr/>
-        </p:nvSpPr>
-        <p:spPr>
-          <a:xfrm>
-            <a:off x="6284740" y="2894807"/>
-            <a:ext cx="237744" cy="164592"/>
+          <p:cNvPr id="57" name="Text 55"/>
+          <p:cNvSpPr txBox="1"/>
+          <p:nvPr/>
+        </p:nvSpPr>
+        <p:spPr>
+          <a:xfrm>
+            <a:off x="4772305" y="4032868"/>
+            <a:ext cx="256032" cy="173736"/>
           </a:xfrm>
           <a:prstGeom prst="rect">
             <a:avLst/>
@@ -2541,10 +2676,10 @@
             <a:r>
               <a:rPr lang="en-US" sz="700" b="1" dirty="0">
                 <a:solidFill>
-                  <a:srgbClr val="7B68EE"/>
-                </a:solidFill>
-              </a:rPr>
-              <a:t>2</a:t>
+                  <a:srgbClr val="3DAA6E"/>
+                </a:solidFill>
+              </a:rPr>
+              <a:t>3</a:t>
             </a:r>
             <a:endParaRPr lang="en-US" sz="700" dirty="0"/>
           </a:p>
@@ -2552,20 +2687,20 @@
       </p:sp>
       <p:sp>
         <p:nvSpPr>
-          <p:cNvPr id="56" name="Shape 54"/>
-          <p:cNvSpPr/>
-          <p:nvPr/>
-        </p:nvSpPr>
-        <p:spPr>
-          <a:xfrm>
-            <a:off x="6314674" y="3205817"/>
-            <a:ext cx="102413" cy="102413"/>
+          <p:cNvPr id="58" name="Shape 56"/>
+          <p:cNvSpPr/>
+          <p:nvPr/>
+        </p:nvSpPr>
+        <p:spPr>
+          <a:xfrm>
+            <a:off x="5359674" y="4626023"/>
+            <a:ext cx="106070" cy="106070"/>
           </a:xfrm>
           <a:prstGeom prst="ellipse">
             <a:avLst/>
           </a:prstGeom>
           <a:solidFill>
-            <a:srgbClr val="7B68EE"/>
+            <a:srgbClr val="3DAA6E"/>
           </a:solidFill>
           <a:ln w="6350">
             <a:solidFill>
@@ -2577,14 +2712,14 @@
       </p:sp>
       <p:sp>
         <p:nvSpPr>
-          <p:cNvPr id="57" name="Text 55"/>
-          <p:cNvSpPr txBox="1"/>
-          <p:nvPr/>
-        </p:nvSpPr>
-        <p:spPr>
-          <a:xfrm>
-            <a:off x="6378705" y="3127261"/>
-            <a:ext cx="237744" cy="164592"/>
+          <p:cNvPr id="59" name="Text 57"/>
+          <p:cNvSpPr txBox="1"/>
+          <p:nvPr/>
+        </p:nvSpPr>
+        <p:spPr>
+          <a:xfrm>
+            <a:off x="5323314" y="4728733"/>
+            <a:ext cx="256032" cy="173736"/>
           </a:xfrm>
           <a:prstGeom prst="rect">
             <a:avLst/>
@@ -2602,10 +2737,10 @@
             <a:r>
               <a:rPr lang="en-US" sz="700" b="1" dirty="0">
                 <a:solidFill>
-                  <a:srgbClr val="7B68EE"/>
-                </a:solidFill>
-              </a:rPr>
-              <a:t>3</a:t>
+                  <a:srgbClr val="3DAA6E"/>
+                </a:solidFill>
+              </a:rPr>
+              <a:t>4</a:t>
             </a:r>
             <a:endParaRPr lang="en-US" sz="700" dirty="0"/>
           </a:p>
@@ -2613,20 +2748,20 @@
       </p:sp>
       <p:sp>
         <p:nvSpPr>
-          <p:cNvPr id="58" name="Shape 56"/>
-          <p:cNvSpPr/>
-          <p:nvPr/>
-        </p:nvSpPr>
-        <p:spPr>
-          <a:xfrm>
-            <a:off x="6355091" y="3425198"/>
-            <a:ext cx="102413" cy="102413"/>
+          <p:cNvPr id="60" name="Shape 58"/>
+          <p:cNvSpPr/>
+          <p:nvPr/>
+        </p:nvSpPr>
+        <p:spPr>
+          <a:xfrm>
+            <a:off x="5114882" y="4664258"/>
+            <a:ext cx="106070" cy="106070"/>
           </a:xfrm>
           <a:prstGeom prst="ellipse">
             <a:avLst/>
           </a:prstGeom>
           <a:solidFill>
-            <a:srgbClr val="7B68EE"/>
+            <a:srgbClr val="3DAA6E"/>
           </a:solidFill>
           <a:ln w="6350">
             <a:solidFill>
@@ -2638,14 +2773,14 @@
       </p:sp>
       <p:sp>
         <p:nvSpPr>
-          <p:cNvPr id="59" name="Text 57"/>
-          <p:cNvSpPr txBox="1"/>
-          <p:nvPr/>
-        </p:nvSpPr>
-        <p:spPr>
-          <a:xfrm>
-            <a:off x="6424133" y="3373838"/>
-            <a:ext cx="237744" cy="164592"/>
+          <p:cNvPr id="61" name="Text 59"/>
+          <p:cNvSpPr txBox="1"/>
+          <p:nvPr/>
+        </p:nvSpPr>
+        <p:spPr>
+          <a:xfrm>
+            <a:off x="5046153" y="4772024"/>
+            <a:ext cx="256032" cy="173736"/>
           </a:xfrm>
           <a:prstGeom prst="rect">
             <a:avLst/>
@@ -2663,10 +2798,10 @@
             <a:r>
               <a:rPr lang="en-US" sz="700" b="1" dirty="0">
                 <a:solidFill>
-                  <a:srgbClr val="7B68EE"/>
-                </a:solidFill>
-              </a:rPr>
-              <a:t>4</a:t>
+                  <a:srgbClr val="3DAA6E"/>
+                </a:solidFill>
+              </a:rPr>
+              <a:t>5</a:t>
             </a:r>
             <a:endParaRPr lang="en-US" sz="700" dirty="0"/>
           </a:p>
@@ -2674,20 +2809,20 @@
       </p:sp>
       <p:sp>
         <p:nvSpPr>
-          <p:cNvPr id="60" name="Shape 58"/>
-          <p:cNvSpPr/>
-          <p:nvPr/>
-        </p:nvSpPr>
-        <p:spPr>
-          <a:xfrm>
-            <a:off x="6938042" y="3024423"/>
-            <a:ext cx="102413" cy="102413"/>
+          <p:cNvPr id="62" name="Shape 60"/>
+          <p:cNvSpPr/>
+          <p:nvPr/>
+        </p:nvSpPr>
+        <p:spPr>
+          <a:xfrm>
+            <a:off x="4867719" y="4647063"/>
+            <a:ext cx="106070" cy="106070"/>
           </a:xfrm>
           <a:prstGeom prst="ellipse">
             <a:avLst/>
           </a:prstGeom>
           <a:solidFill>
-            <a:srgbClr val="7B68EE"/>
+            <a:srgbClr val="3DAA6E"/>
           </a:solidFill>
           <a:ln w="6350">
             <a:solidFill>
@@ -2699,14 +2834,14 @@
       </p:sp>
       <p:sp>
         <p:nvSpPr>
-          <p:cNvPr id="61" name="Text 59"/>
-          <p:cNvSpPr txBox="1"/>
-          <p:nvPr/>
-        </p:nvSpPr>
-        <p:spPr>
-          <a:xfrm>
-            <a:off x="7002074" y="2945867"/>
-            <a:ext cx="237744" cy="164592"/>
+          <p:cNvPr id="63" name="Text 61"/>
+          <p:cNvSpPr txBox="1"/>
+          <p:nvPr/>
+        </p:nvSpPr>
+        <p:spPr>
+          <a:xfrm>
+            <a:off x="4766307" y="4752555"/>
+            <a:ext cx="256032" cy="173736"/>
           </a:xfrm>
           <a:prstGeom prst="rect">
             <a:avLst/>
@@ -2724,10 +2859,10 @@
             <a:r>
               <a:rPr lang="en-US" sz="700" b="1" dirty="0">
                 <a:solidFill>
-                  <a:srgbClr val="7B68EE"/>
-                </a:solidFill>
-              </a:rPr>
-              <a:t>5</a:t>
+                  <a:srgbClr val="3DAA6E"/>
+                </a:solidFill>
+              </a:rPr>
+              <a:t>6</a:t>
             </a:r>
             <a:endParaRPr lang="en-US" sz="700" dirty="0"/>
           </a:p>
@@ -2735,21 +2870,82 @@
       </p:sp>
       <p:sp>
         <p:nvSpPr>
-          <p:cNvPr id="62" name="Shape 60"/>
-          <p:cNvSpPr/>
-          <p:nvPr/>
-        </p:nvSpPr>
-        <p:spPr>
-          <a:xfrm>
-            <a:off x="6273502" y="3643684"/>
-            <a:ext cx="237744" cy="237744"/>
+          <p:cNvPr id="64" name="Shape 62"/>
+          <p:cNvSpPr/>
+          <p:nvPr/>
+        </p:nvSpPr>
+        <p:spPr>
+          <a:xfrm>
+            <a:off x="4630579" y="4575301"/>
+            <a:ext cx="106070" cy="106070"/>
           </a:xfrm>
           <a:prstGeom prst="ellipse">
             <a:avLst/>
           </a:prstGeom>
           <a:solidFill>
+            <a:srgbClr val="3DAA6E"/>
+          </a:solidFill>
+          <a:ln w="6350">
+            <a:solidFill>
+              <a:srgbClr val="0D1B2A"/>
+            </a:solidFill>
+            <a:prstDash val="solid"/>
+          </a:ln>
+        </p:spPr>
+      </p:sp>
+      <p:sp>
+        <p:nvSpPr>
+          <p:cNvPr id="65" name="Text 63"/>
+          <p:cNvSpPr txBox="1"/>
+          <p:nvPr/>
+        </p:nvSpPr>
+        <p:spPr>
+          <a:xfrm>
+            <a:off x="4497810" y="4671303"/>
+            <a:ext cx="256032" cy="173736"/>
+          </a:xfrm>
+          <a:prstGeom prst="rect">
+            <a:avLst/>
+          </a:prstGeom>
+          <a:noFill/>
+          <a:ln/>
+        </p:spPr>
+        <p:txBody>
+          <a:bodyPr wrap="square" lIns="0" tIns="0" rIns="0" bIns="0" rtlCol="0" anchor="ctr"/>
+          <a:lstStyle/>
+          <a:p>
+            <a:pPr algn="ctr" indent="0" marL="0">
+              <a:buNone/>
+            </a:pPr>
+            <a:r>
+              <a:rPr lang="en-US" sz="700" b="1" dirty="0">
+                <a:solidFill>
+                  <a:srgbClr val="3DAA6E"/>
+                </a:solidFill>
+              </a:rPr>
+              <a:t>7</a:t>
+            </a:r>
+            <a:endParaRPr lang="en-US" sz="700" dirty="0"/>
+          </a:p>
+        </p:txBody>
+      </p:sp>
+      <p:sp>
+        <p:nvSpPr>
+          <p:cNvPr id="66" name="Shape 64"/>
+          <p:cNvSpPr/>
+          <p:nvPr/>
+        </p:nvSpPr>
+        <p:spPr>
+          <a:xfrm>
+            <a:off x="4738484" y="3807482"/>
+            <a:ext cx="256032" cy="256032"/>
+          </a:xfrm>
+          <a:prstGeom prst="ellipse">
+            <a:avLst/>
+          </a:prstGeom>
+          <a:solidFill>
             <a:srgbClr val="00E5A0">
-              <a:alpha val="40000"/>
+              <a:alpha val="38000"/>
             </a:srgbClr>
           </a:solidFill>
           <a:ln w="12700">
@@ -2762,14 +2958,14 @@
       </p:sp>
       <p:sp>
         <p:nvSpPr>
-          <p:cNvPr id="63" name="Shape 61"/>
-          <p:cNvSpPr/>
-          <p:nvPr/>
-        </p:nvSpPr>
-        <p:spPr>
-          <a:xfrm>
-            <a:off x="6326537" y="3696719"/>
-            <a:ext cx="131674" cy="131674"/>
+          <p:cNvPr id="67" name="Shape 65"/>
+          <p:cNvSpPr/>
+          <p:nvPr/>
+        </p:nvSpPr>
+        <p:spPr>
+          <a:xfrm>
+            <a:off x="4797920" y="3866918"/>
+            <a:ext cx="137160" cy="137160"/>
           </a:xfrm>
           <a:prstGeom prst="ellipse">
             <a:avLst/>
@@ -2787,14 +2983,14 @@
       </p:sp>
       <p:sp>
         <p:nvSpPr>
-          <p:cNvPr id="64" name="Text 62"/>
-          <p:cNvSpPr txBox="1"/>
-          <p:nvPr/>
-        </p:nvSpPr>
-        <p:spPr>
-          <a:xfrm>
-            <a:off x="6408484" y="3695463"/>
-            <a:ext cx="237744" cy="164592"/>
+          <p:cNvPr id="68" name="Text 66"/>
+          <p:cNvSpPr txBox="1"/>
+          <p:nvPr/>
+        </p:nvSpPr>
+        <p:spPr>
+          <a:xfrm>
+            <a:off x="4648123" y="3959122"/>
+            <a:ext cx="256032" cy="173736"/>
           </a:xfrm>
           <a:prstGeom prst="rect">
             <a:avLst/>
@@ -2823,20 +3019,20 @@
       </p:sp>
       <p:sp>
         <p:nvSpPr>
-          <p:cNvPr id="65" name="Shape 63"/>
-          <p:cNvSpPr/>
-          <p:nvPr/>
-        </p:nvSpPr>
-        <p:spPr>
-          <a:xfrm>
-            <a:off x="5862826" y="4437694"/>
-            <a:ext cx="102413" cy="102413"/>
+          <p:cNvPr id="69" name="Shape 67"/>
+          <p:cNvSpPr/>
+          <p:nvPr/>
+        </p:nvSpPr>
+        <p:spPr>
+          <a:xfrm>
+            <a:off x="4736529" y="3803190"/>
+            <a:ext cx="106070" cy="106070"/>
           </a:xfrm>
           <a:prstGeom prst="ellipse">
             <a:avLst/>
           </a:prstGeom>
           <a:solidFill>
-            <a:srgbClr val="F0A500"/>
+            <a:srgbClr val="9B59B6"/>
           </a:solidFill>
           <a:ln w="6350">
             <a:solidFill>
@@ -2848,14 +3044,14 @@
       </p:sp>
       <p:sp>
         <p:nvSpPr>
-          <p:cNvPr id="66" name="Text 64"/>
-          <p:cNvSpPr txBox="1"/>
-          <p:nvPr/>
-        </p:nvSpPr>
-        <p:spPr>
-          <a:xfrm>
-            <a:off x="5870843" y="4511849"/>
-            <a:ext cx="237744" cy="164592"/>
+          <p:cNvPr id="70" name="Text 68"/>
+          <p:cNvSpPr txBox="1"/>
+          <p:nvPr/>
+        </p:nvSpPr>
+        <p:spPr>
+          <a:xfrm>
+            <a:off x="4543832" y="3851663"/>
+            <a:ext cx="256032" cy="173736"/>
           </a:xfrm>
           <a:prstGeom prst="rect">
             <a:avLst/>
@@ -2873,7 +3069,7 @@
             <a:r>
               <a:rPr lang="en-US" sz="700" b="1" dirty="0">
                 <a:solidFill>
-                  <a:srgbClr val="F0A500"/>
+                  <a:srgbClr val="9B59B6"/>
                 </a:solidFill>
               </a:rPr>
               <a:t>2</a:t>
@@ -2884,20 +3080,47 @@
       </p:sp>
       <p:sp>
         <p:nvSpPr>
-          <p:cNvPr id="67" name="Shape 65"/>
-          <p:cNvSpPr/>
-          <p:nvPr/>
-        </p:nvSpPr>
-        <p:spPr>
-          <a:xfrm>
-            <a:off x="6980082" y="3826591"/>
-            <a:ext cx="102413" cy="102413"/>
+          <p:cNvPr id="71" name="Shape 69"/>
+          <p:cNvSpPr/>
+          <p:nvPr/>
+        </p:nvSpPr>
+        <p:spPr>
+          <a:xfrm>
+            <a:off x="4608474" y="3631325"/>
+            <a:ext cx="256032" cy="256032"/>
           </a:xfrm>
           <a:prstGeom prst="ellipse">
             <a:avLst/>
           </a:prstGeom>
           <a:solidFill>
-            <a:srgbClr val="F0A500"/>
+            <a:srgbClr val="00E5A0">
+              <a:alpha val="38000"/>
+            </a:srgbClr>
+          </a:solidFill>
+          <a:ln w="12700">
+            <a:solidFill>
+              <a:srgbClr val="00E5A0"/>
+            </a:solidFill>
+            <a:prstDash val="solid"/>
+          </a:ln>
+        </p:spPr>
+      </p:sp>
+      <p:sp>
+        <p:nvSpPr>
+          <p:cNvPr id="72" name="Shape 70"/>
+          <p:cNvSpPr/>
+          <p:nvPr/>
+        </p:nvSpPr>
+        <p:spPr>
+          <a:xfrm>
+            <a:off x="4667910" y="3690761"/>
+            <a:ext cx="137160" cy="137160"/>
+          </a:xfrm>
+          <a:prstGeom prst="ellipse">
+            <a:avLst/>
+          </a:prstGeom>
+          <a:solidFill>
+            <a:srgbClr val="00E5A0"/>
           </a:solidFill>
           <a:ln w="6350">
             <a:solidFill>
@@ -2909,14 +3132,14 @@
       </p:sp>
       <p:sp>
         <p:nvSpPr>
-          <p:cNvPr id="68" name="Text 66"/>
-          <p:cNvSpPr txBox="1"/>
-          <p:nvPr/>
-        </p:nvSpPr>
-        <p:spPr>
-          <a:xfrm>
-            <a:off x="7047398" y="3810704"/>
-            <a:ext cx="237744" cy="164592"/>
+          <p:cNvPr id="73" name="Text 71"/>
+          <p:cNvSpPr txBox="1"/>
+          <p:nvPr/>
+        </p:nvSpPr>
+        <p:spPr>
+          <a:xfrm>
+            <a:off x="4471888" y="3720332"/>
+            <a:ext cx="256032" cy="173736"/>
           </a:xfrm>
           <a:prstGeom prst="rect">
             <a:avLst/>
@@ -2934,7 +3157,7 @@
             <a:r>
               <a:rPr lang="en-US" sz="700" b="1" dirty="0">
                 <a:solidFill>
-                  <a:srgbClr val="F0A500"/>
+                  <a:srgbClr val="00E5A0"/>
                 </a:solidFill>
               </a:rPr>
               <a:t>3</a:t>
@@ -2945,20 +3168,20 @@
       </p:sp>
       <p:sp>
         <p:nvSpPr>
-          <p:cNvPr id="69" name="Shape 67"/>
-          <p:cNvSpPr/>
-          <p:nvPr/>
-        </p:nvSpPr>
-        <p:spPr>
-          <a:xfrm>
-            <a:off x="6907448" y="4100470"/>
-            <a:ext cx="102413" cy="102413"/>
+          <p:cNvPr id="74" name="Shape 72"/>
+          <p:cNvSpPr/>
+          <p:nvPr/>
+        </p:nvSpPr>
+        <p:spPr>
+          <a:xfrm>
+            <a:off x="4384250" y="4429018"/>
+            <a:ext cx="106070" cy="106070"/>
           </a:xfrm>
           <a:prstGeom prst="ellipse">
             <a:avLst/>
           </a:prstGeom>
           <a:solidFill>
-            <a:srgbClr val="F0A500"/>
+            <a:srgbClr val="9B59B6"/>
           </a:solidFill>
           <a:ln w="6350">
             <a:solidFill>
@@ -2970,14 +3193,14 @@
       </p:sp>
       <p:sp>
         <p:nvSpPr>
-          <p:cNvPr id="70" name="Text 68"/>
-          <p:cNvSpPr txBox="1"/>
-          <p:nvPr/>
-        </p:nvSpPr>
-        <p:spPr>
-          <a:xfrm>
-            <a:off x="6969090" y="4105980"/>
-            <a:ext cx="237744" cy="164592"/>
+          <p:cNvPr id="75" name="Text 73"/>
+          <p:cNvSpPr txBox="1"/>
+          <p:nvPr/>
+        </p:nvSpPr>
+        <p:spPr>
+          <a:xfrm>
+            <a:off x="4218909" y="4505677"/>
+            <a:ext cx="256032" cy="173736"/>
           </a:xfrm>
           <a:prstGeom prst="rect">
             <a:avLst/>
@@ -2995,7 +3218,7 @@
             <a:r>
               <a:rPr lang="en-US" sz="700" b="1" dirty="0">
                 <a:solidFill>
-                  <a:srgbClr val="F0A500"/>
+                  <a:srgbClr val="9B59B6"/>
                 </a:solidFill>
               </a:rPr>
               <a:t>4</a:t>
@@ -3006,20 +3229,20 @@
       </p:sp>
       <p:sp>
         <p:nvSpPr>
-          <p:cNvPr id="71" name="Shape 69"/>
-          <p:cNvSpPr/>
-          <p:nvPr/>
-        </p:nvSpPr>
-        <p:spPr>
-          <a:xfrm>
-            <a:off x="6791703" y="4359099"/>
-            <a:ext cx="102413" cy="102413"/>
+          <p:cNvPr id="76" name="Shape 74"/>
+          <p:cNvSpPr/>
+          <p:nvPr/>
+        </p:nvSpPr>
+        <p:spPr>
+          <a:xfrm>
+            <a:off x="4177379" y="4215862"/>
+            <a:ext cx="106070" cy="106070"/>
           </a:xfrm>
           <a:prstGeom prst="ellipse">
             <a:avLst/>
           </a:prstGeom>
           <a:solidFill>
-            <a:srgbClr val="F0A500"/>
+            <a:srgbClr val="9B59B6"/>
           </a:solidFill>
           <a:ln w="6350">
             <a:solidFill>
@@ -3031,14 +3254,14 @@
       </p:sp>
       <p:sp>
         <p:nvSpPr>
-          <p:cNvPr id="72" name="Text 70"/>
-          <p:cNvSpPr txBox="1"/>
-          <p:nvPr/>
-        </p:nvSpPr>
-        <p:spPr>
-          <a:xfrm>
-            <a:off x="6844302" y="4384814"/>
-            <a:ext cx="237744" cy="164592"/>
+          <p:cNvPr id="77" name="Text 75"/>
+          <p:cNvSpPr txBox="1"/>
+          <p:nvPr/>
+        </p:nvSpPr>
+        <p:spPr>
+          <a:xfrm>
+            <a:off x="3984682" y="4264335"/>
+            <a:ext cx="256032" cy="173736"/>
           </a:xfrm>
           <a:prstGeom prst="rect">
             <a:avLst/>
@@ -3056,7 +3279,7 @@
             <a:r>
               <a:rPr lang="en-US" sz="700" b="1" dirty="0">
                 <a:solidFill>
-                  <a:srgbClr val="F0A500"/>
+                  <a:srgbClr val="9B59B6"/>
                 </a:solidFill>
               </a:rPr>
               <a:t>5</a:t>
@@ -3067,20 +3290,20 @@
       </p:sp>
       <p:sp>
         <p:nvSpPr>
-          <p:cNvPr id="73" name="Shape 71"/>
-          <p:cNvSpPr/>
-          <p:nvPr/>
-        </p:nvSpPr>
-        <p:spPr>
-          <a:xfrm>
-            <a:off x="6635860" y="4595740"/>
-            <a:ext cx="102413" cy="102413"/>
+          <p:cNvPr id="78" name="Shape 76"/>
+          <p:cNvSpPr/>
+          <p:nvPr/>
+        </p:nvSpPr>
+        <p:spPr>
+          <a:xfrm>
+            <a:off x="4034669" y="3955352"/>
+            <a:ext cx="106070" cy="106070"/>
           </a:xfrm>
           <a:prstGeom prst="ellipse">
             <a:avLst/>
           </a:prstGeom>
           <a:solidFill>
-            <a:srgbClr val="F0A500"/>
+            <a:srgbClr val="9B59B6"/>
           </a:solidFill>
           <a:ln w="6350">
             <a:solidFill>
@@ -3092,14 +3315,14 @@
       </p:sp>
       <p:sp>
         <p:nvSpPr>
-          <p:cNvPr id="74" name="Text 72"/>
-          <p:cNvSpPr txBox="1"/>
-          <p:nvPr/>
-        </p:nvSpPr>
-        <p:spPr>
-          <a:xfrm>
-            <a:off x="6676284" y="4639943"/>
-            <a:ext cx="237744" cy="164592"/>
+          <p:cNvPr id="79" name="Text 77"/>
+          <p:cNvSpPr txBox="1"/>
+          <p:nvPr/>
+        </p:nvSpPr>
+        <p:spPr>
+          <a:xfrm>
+            <a:off x="3823102" y="3969378"/>
+            <a:ext cx="256032" cy="173736"/>
           </a:xfrm>
           <a:prstGeom prst="rect">
             <a:avLst/>
@@ -3117,7 +3340,7 @@
             <a:r>
               <a:rPr lang="en-US" sz="700" b="1" dirty="0">
                 <a:solidFill>
-                  <a:srgbClr val="F0A500"/>
+                  <a:srgbClr val="9B59B6"/>
                 </a:solidFill>
               </a:rPr>
               <a:t>6</a:t>
@@ -3128,20 +3351,20 @@
       </p:sp>
       <p:sp>
         <p:nvSpPr>
-          <p:cNvPr id="75" name="Shape 73"/>
-          <p:cNvSpPr/>
-          <p:nvPr/>
-        </p:nvSpPr>
-        <p:spPr>
-          <a:xfrm>
-            <a:off x="6443980" y="4804229"/>
-            <a:ext cx="102413" cy="102413"/>
+          <p:cNvPr id="80" name="Shape 78"/>
+          <p:cNvSpPr/>
+          <p:nvPr/>
+        </p:nvSpPr>
+        <p:spPr>
+          <a:xfrm>
+            <a:off x="3977922" y="3750585"/>
+            <a:ext cx="106070" cy="106070"/>
           </a:xfrm>
           <a:prstGeom prst="ellipse">
             <a:avLst/>
           </a:prstGeom>
           <a:solidFill>
-            <a:srgbClr val="F0A500"/>
+            <a:srgbClr val="E8A020"/>
           </a:solidFill>
           <a:ln w="6350">
             <a:solidFill>
@@ -3153,14 +3376,14 @@
       </p:sp>
       <p:sp>
         <p:nvSpPr>
-          <p:cNvPr id="76" name="Text 74"/>
-          <p:cNvSpPr txBox="1"/>
-          <p:nvPr/>
-        </p:nvSpPr>
-        <p:spPr>
-          <a:xfrm>
-            <a:off x="6469413" y="4864720"/>
-            <a:ext cx="237744" cy="164592"/>
+          <p:cNvPr id="81" name="Text 79"/>
+          <p:cNvSpPr txBox="1"/>
+          <p:nvPr/>
+        </p:nvSpPr>
+        <p:spPr>
+          <a:xfrm>
+            <a:off x="3758850" y="3737534"/>
+            <a:ext cx="256032" cy="173736"/>
           </a:xfrm>
           <a:prstGeom prst="rect">
             <a:avLst/>
@@ -3178,10 +3401,10 @@
             <a:r>
               <a:rPr lang="en-US" sz="700" b="1" dirty="0">
                 <a:solidFill>
-                  <a:srgbClr val="F0A500"/>
-                </a:solidFill>
-              </a:rPr>
-              <a:t>7</a:t>
+                  <a:srgbClr val="E8A020"/>
+                </a:solidFill>
+              </a:rPr>
+              <a:t>1</a:t>
             </a:r>
             <a:endParaRPr lang="en-US" sz="700" dirty="0"/>
           </a:p>
@@ -3189,20 +3412,20 @@
       </p:sp>
       <p:sp>
         <p:nvSpPr>
-          <p:cNvPr id="77" name="Shape 75"/>
-          <p:cNvSpPr/>
-          <p:nvPr/>
-        </p:nvSpPr>
-        <p:spPr>
-          <a:xfrm>
-            <a:off x="6221060" y="4979136"/>
-            <a:ext cx="102413" cy="102413"/>
+          <p:cNvPr id="82" name="Shape 80"/>
+          <p:cNvSpPr/>
+          <p:nvPr/>
+        </p:nvSpPr>
+        <p:spPr>
+          <a:xfrm>
+            <a:off x="3980033" y="3355472"/>
+            <a:ext cx="106070" cy="106070"/>
           </a:xfrm>
           <a:prstGeom prst="ellipse">
             <a:avLst/>
           </a:prstGeom>
           <a:solidFill>
-            <a:srgbClr val="F0A500"/>
+            <a:srgbClr val="E8A020"/>
           </a:solidFill>
           <a:ln w="6350">
             <a:solidFill>
@@ -3214,14 +3437,14 @@
       </p:sp>
       <p:sp>
         <p:nvSpPr>
-          <p:cNvPr id="78" name="Text 76"/>
-          <p:cNvSpPr txBox="1"/>
-          <p:nvPr/>
-        </p:nvSpPr>
-        <p:spPr>
-          <a:xfrm>
-            <a:off x="6229078" y="5053292"/>
-            <a:ext cx="237744" cy="164592"/>
+          <p:cNvPr id="83" name="Text 81"/>
+          <p:cNvSpPr txBox="1"/>
+          <p:nvPr/>
+        </p:nvSpPr>
+        <p:spPr>
+          <a:xfrm>
+            <a:off x="3761241" y="3290174"/>
+            <a:ext cx="256032" cy="173736"/>
           </a:xfrm>
           <a:prstGeom prst="rect">
             <a:avLst/>
@@ -3239,50 +3462,211 @@
             <a:r>
               <a:rPr lang="en-US" sz="700" b="1" dirty="0">
                 <a:solidFill>
+                  <a:srgbClr val="E8A020"/>
+                </a:solidFill>
+              </a:rPr>
+              <a:t>2</a:t>
+            </a:r>
+            <a:endParaRPr lang="en-US" sz="700" dirty="0"/>
+          </a:p>
+        </p:txBody>
+      </p:sp>
+      <p:sp>
+        <p:nvSpPr>
+          <p:cNvPr id="84" name="Text 82"/>
+          <p:cNvSpPr txBox="1"/>
+          <p:nvPr/>
+        </p:nvSpPr>
+        <p:spPr>
+          <a:xfrm>
+            <a:off x="3438475" y="2254847"/>
+            <a:ext cx="1188720" cy="365760"/>
+          </a:xfrm>
+          <a:prstGeom prst="rect">
+            <a:avLst/>
+          </a:prstGeom>
+          <a:noFill/>
+          <a:ln/>
+        </p:spPr>
+        <p:txBody>
+          <a:bodyPr wrap="square" lIns="0" tIns="0" rIns="0" bIns="0" rtlCol="0" anchor="ctr"/>
+          <a:lstStyle/>
+          <a:p>
+            <a:pPr algn="ctr" indent="0" marL="0">
+              <a:buNone/>
+            </a:pPr>
+            <a:r>
+              <a:rPr lang="en-US" sz="800" b="1" dirty="0">
+                <a:solidFill>
+                  <a:srgbClr val="E85D4A"/>
+                </a:solidFill>
+              </a:rPr>
+              <a:t>Reasoning</a:t>
+            </a:r>
+            <a:endParaRPr lang="en-US" sz="800" dirty="0"/>
+          </a:p>
+          <a:p>
+            <a:pPr algn="ctr" indent="0" marL="0">
+              <a:buNone/>
+            </a:pPr>
+            <a:r>
+              <a:rPr lang="en-US" sz="800" b="1" dirty="0">
+                <a:solidFill>
+                  <a:srgbClr val="E85D4A"/>
+                </a:solidFill>
+              </a:rPr>
+              <a:t>&amp; Math</a:t>
+            </a:r>
+            <a:endParaRPr lang="en-US" sz="800" dirty="0"/>
+          </a:p>
+        </p:txBody>
+      </p:sp>
+      <p:sp>
+        <p:nvSpPr>
+          <p:cNvPr id="85" name="Text 83"/>
+          <p:cNvSpPr txBox="1"/>
+          <p:nvPr/>
+        </p:nvSpPr>
+        <p:spPr>
+          <a:xfrm>
+            <a:off x="5193061" y="1980790"/>
+            <a:ext cx="1188720" cy="365760"/>
+          </a:xfrm>
+          <a:prstGeom prst="rect">
+            <a:avLst/>
+          </a:prstGeom>
+          <a:noFill/>
+          <a:ln/>
+        </p:spPr>
+        <p:txBody>
+          <a:bodyPr wrap="square" lIns="0" tIns="0" rIns="0" bIns="0" rtlCol="0" anchor="ctr"/>
+          <a:lstStyle/>
+          <a:p>
+            <a:pPr algn="ctr" indent="0" marL="0">
+              <a:buNone/>
+            </a:pPr>
+            <a:r>
+              <a:rPr lang="en-US" sz="800" b="1" dirty="0">
+                <a:solidFill>
+                  <a:srgbClr val="4A90D9"/>
+                </a:solidFill>
+              </a:rPr>
+              <a:t>Coding</a:t>
+            </a:r>
+            <a:endParaRPr lang="en-US" sz="800" dirty="0"/>
+          </a:p>
+          <a:p>
+            <a:pPr algn="ctr" indent="0" marL="0">
+              <a:buNone/>
+            </a:pPr>
+            <a:r>
+              <a:rPr lang="en-US" sz="800" b="1" dirty="0">
+                <a:solidFill>
+                  <a:srgbClr val="4A90D9"/>
+                </a:solidFill>
+              </a:rPr>
+              <a:t>&amp; SWE</a:t>
+            </a:r>
+            <a:endParaRPr lang="en-US" sz="800" dirty="0"/>
+          </a:p>
+        </p:txBody>
+      </p:sp>
+      <p:sp>
+        <p:nvSpPr>
+          <p:cNvPr id="86" name="Text 84"/>
+          <p:cNvSpPr txBox="1"/>
+          <p:nvPr/>
+        </p:nvSpPr>
+        <p:spPr>
+          <a:xfrm>
+            <a:off x="6089090" y="3010813"/>
+            <a:ext cx="1188720" cy="365760"/>
+          </a:xfrm>
+          <a:prstGeom prst="rect">
+            <a:avLst/>
+          </a:prstGeom>
+          <a:noFill/>
+          <a:ln/>
+        </p:spPr>
+        <p:txBody>
+          <a:bodyPr wrap="square" lIns="0" tIns="0" rIns="0" bIns="0" rtlCol="0" anchor="ctr"/>
+          <a:lstStyle/>
+          <a:p>
+            <a:pPr algn="ctr" indent="0" marL="0">
+              <a:buNone/>
+            </a:pPr>
+            <a:r>
+              <a:rPr lang="en-US" sz="800" b="1" dirty="0">
+                <a:solidFill>
+                  <a:srgbClr val="7B68EE"/>
+                </a:solidFill>
+              </a:rPr>
+              <a:t>Long</a:t>
+            </a:r>
+            <a:endParaRPr lang="en-US" sz="800" dirty="0"/>
+          </a:p>
+          <a:p>
+            <a:pPr algn="ctr" indent="0" marL="0">
+              <a:buNone/>
+            </a:pPr>
+            <a:r>
+              <a:rPr lang="en-US" sz="800" b="1" dirty="0">
+                <a:solidFill>
+                  <a:srgbClr val="7B68EE"/>
+                </a:solidFill>
+              </a:rPr>
+              <a:t>Context</a:t>
+            </a:r>
+            <a:endParaRPr lang="en-US" sz="800" dirty="0"/>
+          </a:p>
+        </p:txBody>
+      </p:sp>
+      <p:sp>
+        <p:nvSpPr>
+          <p:cNvPr id="87" name="Text 85"/>
+          <p:cNvSpPr txBox="1"/>
+          <p:nvPr/>
+        </p:nvSpPr>
+        <p:spPr>
+          <a:xfrm>
+            <a:off x="5885615" y="4360782"/>
+            <a:ext cx="1188720" cy="365760"/>
+          </a:xfrm>
+          <a:prstGeom prst="rect">
+            <a:avLst/>
+          </a:prstGeom>
+          <a:noFill/>
+          <a:ln/>
+        </p:spPr>
+        <p:txBody>
+          <a:bodyPr wrap="square" lIns="0" tIns="0" rIns="0" bIns="0" rtlCol="0" anchor="ctr"/>
+          <a:lstStyle/>
+          <a:p>
+            <a:pPr algn="ctr" indent="0" marL="0">
+              <a:buNone/>
+            </a:pPr>
+            <a:r>
+              <a:rPr lang="en-US" sz="800" b="1" dirty="0">
+                <a:solidFill>
                   <a:srgbClr val="F0A500"/>
                 </a:solidFill>
               </a:rPr>
-              <a:t>8</a:t>
-            </a:r>
-            <a:endParaRPr lang="en-US" sz="700" dirty="0"/>
-          </a:p>
-        </p:txBody>
-      </p:sp>
-      <p:sp>
-        <p:nvSpPr>
-          <p:cNvPr id="79" name="Shape 77"/>
-          <p:cNvSpPr/>
-          <p:nvPr/>
-        </p:nvSpPr>
-        <p:spPr>
-          <a:xfrm>
-            <a:off x="5360934" y="3911838"/>
-            <a:ext cx="102413" cy="102413"/>
-          </a:xfrm>
-          <a:prstGeom prst="ellipse">
-            <a:avLst/>
-          </a:prstGeom>
-          <a:solidFill>
-            <a:srgbClr val="3DAA6E"/>
-          </a:solidFill>
-          <a:ln w="6350">
-            <a:solidFill>
-              <a:srgbClr val="0D1B2A"/>
-            </a:solidFill>
-            <a:prstDash val="solid"/>
-          </a:ln>
-        </p:spPr>
-      </p:sp>
-      <p:sp>
-        <p:nvSpPr>
-          <p:cNvPr id="80" name="Text 78"/>
-          <p:cNvSpPr txBox="1"/>
-          <p:nvPr/>
-        </p:nvSpPr>
-        <p:spPr>
-          <a:xfrm>
-            <a:off x="5329476" y="4003899"/>
-            <a:ext cx="237744" cy="164592"/>
+              <a:t>Multimodal</a:t>
+            </a:r>
+            <a:endParaRPr lang="en-US" sz="800" dirty="0"/>
+          </a:p>
+        </p:txBody>
+      </p:sp>
+      <p:sp>
+        <p:nvSpPr>
+          <p:cNvPr id="88" name="Text 86"/>
+          <p:cNvSpPr txBox="1"/>
+          <p:nvPr/>
+        </p:nvSpPr>
+        <p:spPr>
+          <a:xfrm>
+            <a:off x="4413320" y="5089284"/>
+            <a:ext cx="1188720" cy="365760"/>
           </a:xfrm>
           <a:prstGeom prst="rect">
             <a:avLst/>
@@ -3298,140 +3682,41 @@
               <a:buNone/>
             </a:pPr>
             <a:r>
-              <a:rPr lang="en-US" sz="700" b="1" dirty="0">
+              <a:rPr lang="en-US" sz="800" b="1" dirty="0">
                 <a:solidFill>
                   <a:srgbClr val="3DAA6E"/>
                 </a:solidFill>
               </a:rPr>
-              <a:t>1</a:t>
-            </a:r>
-            <a:endParaRPr lang="en-US" sz="700" dirty="0"/>
-          </a:p>
-        </p:txBody>
-      </p:sp>
-      <p:sp>
-        <p:nvSpPr>
-          <p:cNvPr id="81" name="Shape 79"/>
-          <p:cNvSpPr/>
-          <p:nvPr/>
-        </p:nvSpPr>
-        <p:spPr>
-          <a:xfrm>
-            <a:off x="5156091" y="3857776"/>
-            <a:ext cx="237744" cy="237744"/>
-          </a:xfrm>
-          <a:prstGeom prst="ellipse">
-            <a:avLst/>
-          </a:prstGeom>
-          <a:solidFill>
-            <a:srgbClr val="00E5A0">
-              <a:alpha val="40000"/>
-            </a:srgbClr>
-          </a:solidFill>
-          <a:ln w="12700">
-            <a:solidFill>
-              <a:srgbClr val="00E5A0"/>
-            </a:solidFill>
-            <a:prstDash val="solid"/>
-          </a:ln>
-        </p:spPr>
-      </p:sp>
-      <p:sp>
-        <p:nvSpPr>
-          <p:cNvPr id="82" name="Shape 80"/>
-          <p:cNvSpPr/>
-          <p:nvPr/>
-        </p:nvSpPr>
-        <p:spPr>
-          <a:xfrm>
-            <a:off x="5209126" y="3910811"/>
-            <a:ext cx="131674" cy="131674"/>
-          </a:xfrm>
-          <a:prstGeom prst="ellipse">
-            <a:avLst/>
-          </a:prstGeom>
-          <a:solidFill>
-            <a:srgbClr val="00E5A0"/>
-          </a:solidFill>
-          <a:ln w="6350">
-            <a:solidFill>
-              <a:srgbClr val="0D1B2A"/>
-            </a:solidFill>
-            <a:prstDash val="solid"/>
-          </a:ln>
-        </p:spPr>
-      </p:sp>
-      <p:sp>
-        <p:nvSpPr>
-          <p:cNvPr id="83" name="Text 81"/>
-          <p:cNvSpPr txBox="1"/>
-          <p:nvPr/>
-        </p:nvSpPr>
-        <p:spPr>
-          <a:xfrm>
-            <a:off x="5146572" y="4022037"/>
-            <a:ext cx="237744" cy="164592"/>
-          </a:xfrm>
-          <a:prstGeom prst="rect">
-            <a:avLst/>
-          </a:prstGeom>
-          <a:noFill/>
-          <a:ln/>
-        </p:spPr>
-        <p:txBody>
-          <a:bodyPr wrap="square" lIns="0" tIns="0" rIns="0" bIns="0" rtlCol="0" anchor="ctr"/>
-          <a:lstStyle/>
+              <a:t>Agents</a:t>
+            </a:r>
+            <a:endParaRPr lang="en-US" sz="800" dirty="0"/>
+          </a:p>
           <a:p>
             <a:pPr algn="ctr" indent="0" marL="0">
               <a:buNone/>
             </a:pPr>
             <a:r>
-              <a:rPr lang="en-US" sz="700" b="1" dirty="0">
-                <a:solidFill>
-                  <a:srgbClr val="00E5A0"/>
-                </a:solidFill>
-              </a:rPr>
-              <a:t>2</a:t>
-            </a:r>
-            <a:endParaRPr lang="en-US" sz="700" dirty="0"/>
-          </a:p>
-        </p:txBody>
-      </p:sp>
-      <p:sp>
-        <p:nvSpPr>
-          <p:cNvPr id="84" name="Shape 82"/>
-          <p:cNvSpPr/>
-          <p:nvPr/>
-        </p:nvSpPr>
-        <p:spPr>
-          <a:xfrm>
-            <a:off x="5089783" y="3892974"/>
-            <a:ext cx="102413" cy="102413"/>
-          </a:xfrm>
-          <a:prstGeom prst="ellipse">
-            <a:avLst/>
-          </a:prstGeom>
-          <a:solidFill>
-            <a:srgbClr val="3DAA6E"/>
-          </a:solidFill>
-          <a:ln w="6350">
-            <a:solidFill>
-              <a:srgbClr val="0D1B2A"/>
-            </a:solidFill>
-            <a:prstDash val="solid"/>
-          </a:ln>
-        </p:spPr>
-      </p:sp>
-      <p:sp>
-        <p:nvSpPr>
-          <p:cNvPr id="85" name="Text 83"/>
-          <p:cNvSpPr txBox="1"/>
-          <p:nvPr/>
-        </p:nvSpPr>
-        <p:spPr>
-          <a:xfrm>
-            <a:off x="4967941" y="3978748"/>
-            <a:ext cx="237744" cy="164592"/>
+              <a:rPr lang="en-US" sz="800" b="1" dirty="0">
+                <a:solidFill>
+                  <a:srgbClr val="3DAA6E"/>
+                </a:solidFill>
+              </a:rPr>
+              <a:t>&amp; Tools</a:t>
+            </a:r>
+            <a:endParaRPr lang="en-US" sz="800" dirty="0"/>
+          </a:p>
+        </p:txBody>
+      </p:sp>
+      <p:sp>
+        <p:nvSpPr>
+          <p:cNvPr id="89" name="Text 87"/>
+          <p:cNvSpPr txBox="1"/>
+          <p:nvPr/>
+        </p:nvSpPr>
+        <p:spPr>
+          <a:xfrm>
+            <a:off x="3216691" y="4432097"/>
+            <a:ext cx="1188720" cy="365760"/>
           </a:xfrm>
           <a:prstGeom prst="rect">
             <a:avLst/>
@@ -3447,113 +3732,41 @@
               <a:buNone/>
             </a:pPr>
             <a:r>
-              <a:rPr lang="en-US" sz="700" b="1" dirty="0">
-                <a:solidFill>
-                  <a:srgbClr val="3DAA6E"/>
-                </a:solidFill>
-              </a:rPr>
-              <a:t>3</a:t>
-            </a:r>
-            <a:endParaRPr lang="en-US" sz="700" dirty="0"/>
-          </a:p>
-        </p:txBody>
-      </p:sp>
-      <p:sp>
-        <p:nvSpPr>
-          <p:cNvPr id="86" name="Shape 84"/>
-          <p:cNvSpPr/>
-          <p:nvPr/>
-        </p:nvSpPr>
-        <p:spPr>
-          <a:xfrm>
-            <a:off x="5544383" y="4582132"/>
-            <a:ext cx="102413" cy="102413"/>
-          </a:xfrm>
-          <a:prstGeom prst="ellipse">
-            <a:avLst/>
-          </a:prstGeom>
-          <a:solidFill>
-            <a:srgbClr val="3DAA6E"/>
-          </a:solidFill>
-          <a:ln w="6350">
-            <a:solidFill>
-              <a:srgbClr val="0D1B2A"/>
-            </a:solidFill>
-            <a:prstDash val="solid"/>
-          </a:ln>
-        </p:spPr>
-      </p:sp>
-      <p:sp>
-        <p:nvSpPr>
-          <p:cNvPr id="87" name="Text 85"/>
-          <p:cNvSpPr txBox="1"/>
-          <p:nvPr/>
-        </p:nvSpPr>
-        <p:spPr>
-          <a:xfrm>
-            <a:off x="5512924" y="4674193"/>
-            <a:ext cx="237744" cy="164592"/>
-          </a:xfrm>
-          <a:prstGeom prst="rect">
-            <a:avLst/>
-          </a:prstGeom>
-          <a:noFill/>
-          <a:ln/>
-        </p:spPr>
-        <p:txBody>
-          <a:bodyPr wrap="square" lIns="0" tIns="0" rIns="0" bIns="0" rtlCol="0" anchor="ctr"/>
-          <a:lstStyle/>
+              <a:rPr lang="en-US" sz="800" b="1" dirty="0">
+                <a:solidFill>
+                  <a:srgbClr val="9B59B6"/>
+                </a:solidFill>
+              </a:rPr>
+              <a:t>Knowledge</a:t>
+            </a:r>
+            <a:endParaRPr lang="en-US" sz="800" dirty="0"/>
+          </a:p>
           <a:p>
             <a:pPr algn="ctr" indent="0" marL="0">
               <a:buNone/>
             </a:pPr>
             <a:r>
-              <a:rPr lang="en-US" sz="700" b="1" dirty="0">
-                <a:solidFill>
-                  <a:srgbClr val="3DAA6E"/>
-                </a:solidFill>
-              </a:rPr>
-              <a:t>4</a:t>
-            </a:r>
-            <a:endParaRPr lang="en-US" sz="700" dirty="0"/>
-          </a:p>
-        </p:txBody>
-      </p:sp>
-      <p:sp>
-        <p:nvSpPr>
-          <p:cNvPr id="88" name="Shape 86"/>
-          <p:cNvSpPr/>
-          <p:nvPr/>
-        </p:nvSpPr>
-        <p:spPr>
-          <a:xfrm>
-            <a:off x="5299591" y="4620367"/>
-            <a:ext cx="102413" cy="102413"/>
-          </a:xfrm>
-          <a:prstGeom prst="ellipse">
-            <a:avLst/>
-          </a:prstGeom>
-          <a:solidFill>
-            <a:srgbClr val="3DAA6E"/>
-          </a:solidFill>
-          <a:ln w="6350">
-            <a:solidFill>
-              <a:srgbClr val="0D1B2A"/>
-            </a:solidFill>
-            <a:prstDash val="solid"/>
-          </a:ln>
-        </p:spPr>
-      </p:sp>
-      <p:sp>
-        <p:nvSpPr>
-          <p:cNvPr id="89" name="Text 87"/>
-          <p:cNvSpPr txBox="1"/>
-          <p:nvPr/>
-        </p:nvSpPr>
-        <p:spPr>
-          <a:xfrm>
-            <a:off x="5237786" y="4717168"/>
-            <a:ext cx="237744" cy="164592"/>
+              <a:rPr lang="en-US" sz="800" b="1" dirty="0">
+                <a:solidFill>
+                  <a:srgbClr val="9B59B6"/>
+                </a:solidFill>
+              </a:rPr>
+              <a:t>&amp; Language</a:t>
+            </a:r>
+            <a:endParaRPr lang="en-US" sz="800" dirty="0"/>
+          </a:p>
+        </p:txBody>
+      </p:sp>
+      <p:sp>
+        <p:nvSpPr>
+          <p:cNvPr id="90" name="Text 88"/>
+          <p:cNvSpPr txBox="1"/>
+          <p:nvPr/>
+        </p:nvSpPr>
+        <p:spPr>
+          <a:xfrm>
+            <a:off x="2898671" y="3456880"/>
+            <a:ext cx="1188720" cy="365760"/>
           </a:xfrm>
           <a:prstGeom prst="rect">
             <a:avLst/>
@@ -3569,935 +3782,41 @@
               <a:buNone/>
             </a:pPr>
             <a:r>
-              <a:rPr lang="en-US" sz="700" b="1" dirty="0">
-                <a:solidFill>
-                  <a:srgbClr val="3DAA6E"/>
-                </a:solidFill>
-              </a:rPr>
-              <a:t>5</a:t>
-            </a:r>
-            <a:endParaRPr lang="en-US" sz="700" dirty="0"/>
-          </a:p>
-        </p:txBody>
-      </p:sp>
-      <p:sp>
-        <p:nvSpPr>
-          <p:cNvPr id="90" name="Shape 88"/>
-          <p:cNvSpPr/>
-          <p:nvPr/>
-        </p:nvSpPr>
-        <p:spPr>
-          <a:xfrm>
-            <a:off x="5052428" y="4603172"/>
-            <a:ext cx="102413" cy="102413"/>
-          </a:xfrm>
-          <a:prstGeom prst="ellipse">
-            <a:avLst/>
-          </a:prstGeom>
-          <a:solidFill>
-            <a:srgbClr val="3DAA6E"/>
-          </a:solidFill>
-          <a:ln w="6350">
-            <a:solidFill>
-              <a:srgbClr val="0D1B2A"/>
-            </a:solidFill>
-            <a:prstDash val="solid"/>
-          </a:ln>
-        </p:spPr>
-      </p:sp>
-      <p:sp>
-        <p:nvSpPr>
-          <p:cNvPr id="91" name="Text 89"/>
-          <p:cNvSpPr txBox="1"/>
-          <p:nvPr/>
-        </p:nvSpPr>
-        <p:spPr>
-          <a:xfrm>
-            <a:off x="4959983" y="4697842"/>
-            <a:ext cx="237744" cy="164592"/>
-          </a:xfrm>
-          <a:prstGeom prst="rect">
-            <a:avLst/>
-          </a:prstGeom>
-          <a:noFill/>
-          <a:ln/>
-        </p:spPr>
-        <p:txBody>
-          <a:bodyPr wrap="square" lIns="0" tIns="0" rIns="0" bIns="0" rtlCol="0" anchor="ctr"/>
-          <a:lstStyle/>
+              <a:rPr lang="en-US" sz="800" b="1" dirty="0">
+                <a:solidFill>
+                  <a:srgbClr val="E8A020"/>
+                </a:solidFill>
+              </a:rPr>
+              <a:t>Data</a:t>
+            </a:r>
+            <a:endParaRPr lang="en-US" sz="800" dirty="0"/>
+          </a:p>
           <a:p>
             <a:pPr algn="ctr" indent="0" marL="0">
               <a:buNone/>
             </a:pPr>
             <a:r>
-              <a:rPr lang="en-US" sz="700" b="1" dirty="0">
-                <a:solidFill>
-                  <a:srgbClr val="3DAA6E"/>
-                </a:solidFill>
-              </a:rPr>
-              <a:t>6</a:t>
-            </a:r>
-            <a:endParaRPr lang="en-US" sz="700" dirty="0"/>
-          </a:p>
-        </p:txBody>
-      </p:sp>
-      <p:sp>
-        <p:nvSpPr>
-          <p:cNvPr id="92" name="Shape 90"/>
-          <p:cNvSpPr/>
-          <p:nvPr/>
-        </p:nvSpPr>
-        <p:spPr>
-          <a:xfrm>
-            <a:off x="4815288" y="4531410"/>
-            <a:ext cx="102413" cy="102413"/>
-          </a:xfrm>
-          <a:prstGeom prst="ellipse">
-            <a:avLst/>
-          </a:prstGeom>
-          <a:solidFill>
-            <a:srgbClr val="3DAA6E"/>
-          </a:solidFill>
-          <a:ln w="6350">
-            <a:solidFill>
-              <a:srgbClr val="0D1B2A"/>
-            </a:solidFill>
-            <a:prstDash val="solid"/>
-          </a:ln>
-        </p:spPr>
-      </p:sp>
-      <p:sp>
-        <p:nvSpPr>
-          <p:cNvPr id="93" name="Text 91"/>
-          <p:cNvSpPr txBox="1"/>
-          <p:nvPr/>
-        </p:nvSpPr>
-        <p:spPr>
-          <a:xfrm>
-            <a:off x="4693446" y="4617183"/>
-            <a:ext cx="237744" cy="164592"/>
-          </a:xfrm>
-          <a:prstGeom prst="rect">
-            <a:avLst/>
-          </a:prstGeom>
-          <a:noFill/>
-          <a:ln/>
-        </p:spPr>
-        <p:txBody>
-          <a:bodyPr wrap="square" lIns="0" tIns="0" rIns="0" bIns="0" rtlCol="0" anchor="ctr"/>
-          <a:lstStyle/>
-          <a:p>
-            <a:pPr algn="ctr" indent="0" marL="0">
-              <a:buNone/>
-            </a:pPr>
-            <a:r>
-              <a:rPr lang="en-US" sz="700" b="1" dirty="0">
-                <a:solidFill>
-                  <a:srgbClr val="3DAA6E"/>
-                </a:solidFill>
-              </a:rPr>
-              <a:t>7</a:t>
-            </a:r>
-            <a:endParaRPr lang="en-US" sz="700" dirty="0"/>
-          </a:p>
-        </p:txBody>
-      </p:sp>
-      <p:sp>
-        <p:nvSpPr>
-          <p:cNvPr id="94" name="Shape 92"/>
-          <p:cNvSpPr/>
-          <p:nvPr/>
-        </p:nvSpPr>
-        <p:spPr>
-          <a:xfrm>
-            <a:off x="5130470" y="5266368"/>
-            <a:ext cx="102413" cy="102413"/>
-          </a:xfrm>
-          <a:prstGeom prst="ellipse">
-            <a:avLst/>
-          </a:prstGeom>
-          <a:solidFill>
-            <a:srgbClr val="3DAA6E"/>
-          </a:solidFill>
-          <a:ln w="6350">
-            <a:solidFill>
-              <a:srgbClr val="0D1B2A"/>
-            </a:solidFill>
-            <a:prstDash val="solid"/>
-          </a:ln>
-        </p:spPr>
-      </p:sp>
-      <p:sp>
-        <p:nvSpPr>
-          <p:cNvPr id="95" name="Text 93"/>
-          <p:cNvSpPr txBox="1"/>
-          <p:nvPr/>
-        </p:nvSpPr>
-        <p:spPr>
-          <a:xfrm>
-            <a:off x="5053285" y="5362964"/>
-            <a:ext cx="237744" cy="164592"/>
-          </a:xfrm>
-          <a:prstGeom prst="rect">
-            <a:avLst/>
-          </a:prstGeom>
-          <a:noFill/>
-          <a:ln/>
-        </p:spPr>
-        <p:txBody>
-          <a:bodyPr wrap="square" lIns="0" tIns="0" rIns="0" bIns="0" rtlCol="0" anchor="ctr"/>
-          <a:lstStyle/>
-          <a:p>
-            <a:pPr algn="ctr" indent="0" marL="0">
-              <a:buNone/>
-            </a:pPr>
-            <a:r>
-              <a:rPr lang="en-US" sz="700" b="1" dirty="0">
-                <a:solidFill>
-                  <a:srgbClr val="3DAA6E"/>
-                </a:solidFill>
-              </a:rPr>
-              <a:t>8</a:t>
-            </a:r>
-            <a:endParaRPr lang="en-US" sz="700" dirty="0"/>
-          </a:p>
-        </p:txBody>
-      </p:sp>
-      <p:sp>
-        <p:nvSpPr>
-          <p:cNvPr id="96" name="Shape 94"/>
-          <p:cNvSpPr/>
-          <p:nvPr/>
-        </p:nvSpPr>
-        <p:spPr>
-          <a:xfrm>
-            <a:off x="4930508" y="3770906"/>
-            <a:ext cx="237744" cy="237744"/>
-          </a:xfrm>
-          <a:prstGeom prst="ellipse">
-            <a:avLst/>
-          </a:prstGeom>
-          <a:solidFill>
-            <a:srgbClr val="00E5A0">
-              <a:alpha val="40000"/>
-            </a:srgbClr>
-          </a:solidFill>
-          <a:ln w="12700">
-            <a:solidFill>
-              <a:srgbClr val="00E5A0"/>
-            </a:solidFill>
-            <a:prstDash val="solid"/>
-          </a:ln>
-        </p:spPr>
-      </p:sp>
-      <p:sp>
-        <p:nvSpPr>
-          <p:cNvPr id="97" name="Shape 95"/>
-          <p:cNvSpPr/>
-          <p:nvPr/>
-        </p:nvSpPr>
-        <p:spPr>
-          <a:xfrm>
-            <a:off x="4983543" y="3823941"/>
-            <a:ext cx="131674" cy="131674"/>
-          </a:xfrm>
-          <a:prstGeom prst="ellipse">
-            <a:avLst/>
-          </a:prstGeom>
-          <a:solidFill>
-            <a:srgbClr val="00E5A0"/>
-          </a:solidFill>
-          <a:ln w="6350">
-            <a:solidFill>
-              <a:srgbClr val="0D1B2A"/>
-            </a:solidFill>
-            <a:prstDash val="solid"/>
-          </a:ln>
-        </p:spPr>
-      </p:sp>
-      <p:sp>
-        <p:nvSpPr>
-          <p:cNvPr id="98" name="Text 96"/>
-          <p:cNvSpPr txBox="1"/>
-          <p:nvPr/>
-        </p:nvSpPr>
-        <p:spPr>
-          <a:xfrm>
-            <a:off x="4845795" y="3906211"/>
-            <a:ext cx="237744" cy="164592"/>
-          </a:xfrm>
-          <a:prstGeom prst="rect">
-            <a:avLst/>
-          </a:prstGeom>
-          <a:noFill/>
-          <a:ln/>
-        </p:spPr>
-        <p:txBody>
-          <a:bodyPr wrap="square" lIns="0" tIns="0" rIns="0" bIns="0" rtlCol="0" anchor="ctr"/>
-          <a:lstStyle/>
-          <a:p>
-            <a:pPr algn="ctr" indent="0" marL="0">
-              <a:buNone/>
-            </a:pPr>
-            <a:r>
-              <a:rPr lang="en-US" sz="700" b="1" dirty="0">
-                <a:solidFill>
-                  <a:srgbClr val="00E5A0"/>
-                </a:solidFill>
-              </a:rPr>
-              <a:t>1</a:t>
-            </a:r>
-            <a:endParaRPr lang="en-US" sz="700" dirty="0"/>
-          </a:p>
-        </p:txBody>
-      </p:sp>
-      <p:sp>
-        <p:nvSpPr>
-          <p:cNvPr id="99" name="Shape 97"/>
-          <p:cNvSpPr/>
-          <p:nvPr/>
-        </p:nvSpPr>
-        <p:spPr>
-          <a:xfrm>
-            <a:off x="4921238" y="3759299"/>
-            <a:ext cx="102413" cy="102413"/>
-          </a:xfrm>
-          <a:prstGeom prst="ellipse">
-            <a:avLst/>
-          </a:prstGeom>
-          <a:solidFill>
-            <a:srgbClr val="9B59B6"/>
-          </a:solidFill>
-          <a:ln w="6350">
-            <a:solidFill>
-              <a:srgbClr val="0D1B2A"/>
-            </a:solidFill>
-            <a:prstDash val="solid"/>
-          </a:ln>
-        </p:spPr>
-      </p:sp>
-      <p:sp>
-        <p:nvSpPr>
-          <p:cNvPr id="100" name="Text 98"/>
-          <p:cNvSpPr txBox="1"/>
-          <p:nvPr/>
-        </p:nvSpPr>
-        <p:spPr>
-          <a:xfrm>
-            <a:off x="4743213" y="3800514"/>
-            <a:ext cx="237744" cy="164592"/>
-          </a:xfrm>
-          <a:prstGeom prst="rect">
-            <a:avLst/>
-          </a:prstGeom>
-          <a:noFill/>
-          <a:ln/>
-        </p:spPr>
-        <p:txBody>
-          <a:bodyPr wrap="square" lIns="0" tIns="0" rIns="0" bIns="0" rtlCol="0" anchor="ctr"/>
-          <a:lstStyle/>
-          <a:p>
-            <a:pPr algn="ctr" indent="0" marL="0">
-              <a:buNone/>
-            </a:pPr>
-            <a:r>
-              <a:rPr lang="en-US" sz="700" b="1" dirty="0">
-                <a:solidFill>
-                  <a:srgbClr val="9B59B6"/>
-                </a:solidFill>
-              </a:rPr>
-              <a:t>2</a:t>
-            </a:r>
-            <a:endParaRPr lang="en-US" sz="700" dirty="0"/>
-          </a:p>
-        </p:txBody>
-      </p:sp>
-      <p:sp>
-        <p:nvSpPr>
-          <p:cNvPr id="101" name="Shape 99"/>
-          <p:cNvSpPr/>
-          <p:nvPr/>
-        </p:nvSpPr>
-        <p:spPr>
-          <a:xfrm>
-            <a:off x="4800498" y="3594749"/>
-            <a:ext cx="237744" cy="237744"/>
-          </a:xfrm>
-          <a:prstGeom prst="ellipse">
-            <a:avLst/>
-          </a:prstGeom>
-          <a:solidFill>
-            <a:srgbClr val="00E5A0">
-              <a:alpha val="40000"/>
-            </a:srgbClr>
-          </a:solidFill>
-          <a:ln w="12700">
-            <a:solidFill>
-              <a:srgbClr val="00E5A0"/>
-            </a:solidFill>
-            <a:prstDash val="solid"/>
-          </a:ln>
-        </p:spPr>
-      </p:sp>
-      <p:sp>
-        <p:nvSpPr>
-          <p:cNvPr id="102" name="Shape 100"/>
-          <p:cNvSpPr/>
-          <p:nvPr/>
-        </p:nvSpPr>
-        <p:spPr>
-          <a:xfrm>
-            <a:off x="4853534" y="3647784"/>
-            <a:ext cx="131674" cy="131674"/>
-          </a:xfrm>
-          <a:prstGeom prst="ellipse">
-            <a:avLst/>
-          </a:prstGeom>
-          <a:solidFill>
-            <a:srgbClr val="00E5A0"/>
-          </a:solidFill>
-          <a:ln w="6350">
-            <a:solidFill>
-              <a:srgbClr val="0D1B2A"/>
-            </a:solidFill>
-            <a:prstDash val="solid"/>
-          </a:ln>
-        </p:spPr>
-      </p:sp>
-      <p:sp>
-        <p:nvSpPr>
-          <p:cNvPr id="103" name="Text 101"/>
-          <p:cNvSpPr txBox="1"/>
-          <p:nvPr/>
-        </p:nvSpPr>
-        <p:spPr>
-          <a:xfrm>
-            <a:off x="4672448" y="3671335"/>
-            <a:ext cx="237744" cy="164592"/>
-          </a:xfrm>
-          <a:prstGeom prst="rect">
-            <a:avLst/>
-          </a:prstGeom>
-          <a:noFill/>
-          <a:ln/>
-        </p:spPr>
-        <p:txBody>
-          <a:bodyPr wrap="square" lIns="0" tIns="0" rIns="0" bIns="0" rtlCol="0" anchor="ctr"/>
-          <a:lstStyle/>
-          <a:p>
-            <a:pPr algn="ctr" indent="0" marL="0">
-              <a:buNone/>
-            </a:pPr>
-            <a:r>
-              <a:rPr lang="en-US" sz="700" b="1" dirty="0">
-                <a:solidFill>
-                  <a:srgbClr val="00E5A0"/>
-                </a:solidFill>
-              </a:rPr>
-              <a:t>3</a:t>
-            </a:r>
-            <a:endParaRPr lang="en-US" sz="700" dirty="0"/>
-          </a:p>
-        </p:txBody>
-      </p:sp>
-      <p:sp>
-        <p:nvSpPr>
-          <p:cNvPr id="104" name="Shape 102"/>
-          <p:cNvSpPr/>
-          <p:nvPr/>
-        </p:nvSpPr>
-        <p:spPr>
-          <a:xfrm>
-            <a:off x="4568959" y="4385126"/>
-            <a:ext cx="102413" cy="102413"/>
-          </a:xfrm>
-          <a:prstGeom prst="ellipse">
-            <a:avLst/>
-          </a:prstGeom>
-          <a:solidFill>
-            <a:srgbClr val="9B59B6"/>
-          </a:solidFill>
-          <a:ln w="6350">
-            <a:solidFill>
-              <a:srgbClr val="0D1B2A"/>
-            </a:solidFill>
-            <a:prstDash val="solid"/>
-          </a:ln>
-        </p:spPr>
-      </p:sp>
-      <p:sp>
-        <p:nvSpPr>
-          <p:cNvPr id="105" name="Text 103"/>
-          <p:cNvSpPr txBox="1"/>
-          <p:nvPr/>
-        </p:nvSpPr>
-        <p:spPr>
-          <a:xfrm>
-            <a:off x="4416580" y="4452766"/>
-            <a:ext cx="237744" cy="164592"/>
-          </a:xfrm>
-          <a:prstGeom prst="rect">
-            <a:avLst/>
-          </a:prstGeom>
-          <a:noFill/>
-          <a:ln/>
-        </p:spPr>
-        <p:txBody>
-          <a:bodyPr wrap="square" lIns="0" tIns="0" rIns="0" bIns="0" rtlCol="0" anchor="ctr"/>
-          <a:lstStyle/>
-          <a:p>
-            <a:pPr algn="ctr" indent="0" marL="0">
-              <a:buNone/>
-            </a:pPr>
-            <a:r>
-              <a:rPr lang="en-US" sz="700" b="1" dirty="0">
-                <a:solidFill>
-                  <a:srgbClr val="9B59B6"/>
-                </a:solidFill>
-              </a:rPr>
-              <a:t>4</a:t>
-            </a:r>
-            <a:endParaRPr lang="en-US" sz="700" dirty="0"/>
-          </a:p>
-        </p:txBody>
-      </p:sp>
-      <p:sp>
-        <p:nvSpPr>
-          <p:cNvPr id="106" name="Shape 104"/>
-          <p:cNvSpPr/>
-          <p:nvPr/>
-        </p:nvSpPr>
-        <p:spPr>
-          <a:xfrm>
-            <a:off x="4362087" y="4171971"/>
-            <a:ext cx="102413" cy="102413"/>
-          </a:xfrm>
-          <a:prstGeom prst="ellipse">
-            <a:avLst/>
-          </a:prstGeom>
-          <a:solidFill>
-            <a:srgbClr val="9B59B6"/>
-          </a:solidFill>
-          <a:ln w="6350">
-            <a:solidFill>
-              <a:srgbClr val="0D1B2A"/>
-            </a:solidFill>
-            <a:prstDash val="solid"/>
-          </a:ln>
-        </p:spPr>
-      </p:sp>
-      <p:sp>
-        <p:nvSpPr>
-          <p:cNvPr id="107" name="Text 105"/>
-          <p:cNvSpPr txBox="1"/>
-          <p:nvPr/>
-        </p:nvSpPr>
-        <p:spPr>
-          <a:xfrm>
-            <a:off x="4184063" y="4213185"/>
-            <a:ext cx="237744" cy="164592"/>
-          </a:xfrm>
-          <a:prstGeom prst="rect">
-            <a:avLst/>
-          </a:prstGeom>
-          <a:noFill/>
-          <a:ln/>
-        </p:spPr>
-        <p:txBody>
-          <a:bodyPr wrap="square" lIns="0" tIns="0" rIns="0" bIns="0" rtlCol="0" anchor="ctr"/>
-          <a:lstStyle/>
-          <a:p>
-            <a:pPr algn="ctr" indent="0" marL="0">
-              <a:buNone/>
-            </a:pPr>
-            <a:r>
-              <a:rPr lang="en-US" sz="700" b="1" dirty="0">
-                <a:solidFill>
-                  <a:srgbClr val="9B59B6"/>
-                </a:solidFill>
-              </a:rPr>
-              <a:t>5</a:t>
-            </a:r>
-            <a:endParaRPr lang="en-US" sz="700" dirty="0"/>
-          </a:p>
-        </p:txBody>
-      </p:sp>
-      <p:sp>
-        <p:nvSpPr>
-          <p:cNvPr id="108" name="Shape 106"/>
-          <p:cNvSpPr/>
-          <p:nvPr/>
-        </p:nvSpPr>
-        <p:spPr>
-          <a:xfrm>
-            <a:off x="4219378" y="3911461"/>
-            <a:ext cx="102413" cy="102413"/>
-          </a:xfrm>
-          <a:prstGeom prst="ellipse">
-            <a:avLst/>
-          </a:prstGeom>
-          <a:solidFill>
-            <a:srgbClr val="9B59B6"/>
-          </a:solidFill>
-          <a:ln w="6350">
-            <a:solidFill>
-              <a:srgbClr val="0D1B2A"/>
-            </a:solidFill>
-            <a:prstDash val="solid"/>
-          </a:ln>
-        </p:spPr>
-      </p:sp>
-      <p:sp>
-        <p:nvSpPr>
-          <p:cNvPr id="109" name="Text 107"/>
-          <p:cNvSpPr txBox="1"/>
-          <p:nvPr/>
-        </p:nvSpPr>
-        <p:spPr>
-          <a:xfrm>
-            <a:off x="4023662" y="3920381"/>
-            <a:ext cx="237744" cy="164592"/>
-          </a:xfrm>
-          <a:prstGeom prst="rect">
-            <a:avLst/>
-          </a:prstGeom>
-          <a:noFill/>
-          <a:ln/>
-        </p:spPr>
-        <p:txBody>
-          <a:bodyPr wrap="square" lIns="0" tIns="0" rIns="0" bIns="0" rtlCol="0" anchor="ctr"/>
-          <a:lstStyle/>
-          <a:p>
-            <a:pPr algn="ctr" indent="0" marL="0">
-              <a:buNone/>
-            </a:pPr>
-            <a:r>
-              <a:rPr lang="en-US" sz="700" b="1" dirty="0">
-                <a:solidFill>
-                  <a:srgbClr val="9B59B6"/>
-                </a:solidFill>
-              </a:rPr>
-              <a:t>6</a:t>
-            </a:r>
-            <a:endParaRPr lang="en-US" sz="700" dirty="0"/>
-          </a:p>
-        </p:txBody>
-      </p:sp>
-      <p:sp>
-        <p:nvSpPr>
-          <p:cNvPr id="110" name="Shape 108"/>
-          <p:cNvSpPr/>
-          <p:nvPr/>
-        </p:nvSpPr>
-        <p:spPr>
-          <a:xfrm>
-            <a:off x="4167983" y="4895724"/>
-            <a:ext cx="102413" cy="102413"/>
-          </a:xfrm>
-          <a:prstGeom prst="ellipse">
-            <a:avLst/>
-          </a:prstGeom>
-          <a:solidFill>
-            <a:srgbClr val="9B59B6"/>
-          </a:solidFill>
-          <a:ln w="6350">
-            <a:solidFill>
-              <a:srgbClr val="0D1B2A"/>
-            </a:solidFill>
-            <a:prstDash val="solid"/>
-          </a:ln>
-        </p:spPr>
-      </p:sp>
-      <p:sp>
-        <p:nvSpPr>
-          <p:cNvPr id="111" name="Text 109"/>
-          <p:cNvSpPr txBox="1"/>
-          <p:nvPr/>
-        </p:nvSpPr>
-        <p:spPr>
-          <a:xfrm>
-            <a:off x="4015604" y="4963363"/>
-            <a:ext cx="237744" cy="164592"/>
-          </a:xfrm>
-          <a:prstGeom prst="rect">
-            <a:avLst/>
-          </a:prstGeom>
-          <a:noFill/>
-          <a:ln/>
-        </p:spPr>
-        <p:txBody>
-          <a:bodyPr wrap="square" lIns="0" tIns="0" rIns="0" bIns="0" rtlCol="0" anchor="ctr"/>
-          <a:lstStyle/>
-          <a:p>
-            <a:pPr algn="ctr" indent="0" marL="0">
-              <a:buNone/>
-            </a:pPr>
-            <a:r>
-              <a:rPr lang="en-US" sz="700" b="1" dirty="0">
-                <a:solidFill>
-                  <a:srgbClr val="9B59B6"/>
-                </a:solidFill>
-              </a:rPr>
-              <a:t>7</a:t>
-            </a:r>
-            <a:endParaRPr lang="en-US" sz="700" dirty="0"/>
-          </a:p>
-        </p:txBody>
-      </p:sp>
-      <p:sp>
-        <p:nvSpPr>
-          <p:cNvPr id="112" name="Shape 110"/>
-          <p:cNvSpPr/>
-          <p:nvPr/>
-        </p:nvSpPr>
-        <p:spPr>
-          <a:xfrm>
-            <a:off x="3613275" y="4144122"/>
-            <a:ext cx="102413" cy="102413"/>
-          </a:xfrm>
-          <a:prstGeom prst="ellipse">
-            <a:avLst/>
-          </a:prstGeom>
-          <a:solidFill>
-            <a:srgbClr val="9B59B6"/>
-          </a:solidFill>
-          <a:ln w="6350">
-            <a:solidFill>
-              <a:srgbClr val="0D1B2A"/>
-            </a:solidFill>
-            <a:prstDash val="solid"/>
-          </a:ln>
-        </p:spPr>
-      </p:sp>
-      <p:sp>
-        <p:nvSpPr>
-          <p:cNvPr id="113" name="Text 111"/>
-          <p:cNvSpPr txBox="1"/>
-          <p:nvPr/>
-        </p:nvSpPr>
-        <p:spPr>
-          <a:xfrm>
-            <a:off x="3417560" y="4153042"/>
-            <a:ext cx="237744" cy="164592"/>
-          </a:xfrm>
-          <a:prstGeom prst="rect">
-            <a:avLst/>
-          </a:prstGeom>
-          <a:noFill/>
-          <a:ln/>
-        </p:spPr>
-        <p:txBody>
-          <a:bodyPr wrap="square" lIns="0" tIns="0" rIns="0" bIns="0" rtlCol="0" anchor="ctr"/>
-          <a:lstStyle/>
-          <a:p>
-            <a:pPr algn="ctr" indent="0" marL="0">
-              <a:buNone/>
-            </a:pPr>
-            <a:r>
-              <a:rPr lang="en-US" sz="700" b="1" dirty="0">
-                <a:solidFill>
-                  <a:srgbClr val="9B59B6"/>
-                </a:solidFill>
-              </a:rPr>
-              <a:t>8</a:t>
-            </a:r>
-            <a:endParaRPr lang="en-US" sz="700" dirty="0"/>
-          </a:p>
-        </p:txBody>
-      </p:sp>
-      <p:sp>
-        <p:nvSpPr>
-          <p:cNvPr id="114" name="Shape 112"/>
-          <p:cNvSpPr/>
-          <p:nvPr/>
-        </p:nvSpPr>
-        <p:spPr>
-          <a:xfrm>
-            <a:off x="4162630" y="3706694"/>
-            <a:ext cx="102413" cy="102413"/>
-          </a:xfrm>
-          <a:prstGeom prst="ellipse">
-            <a:avLst/>
-          </a:prstGeom>
-          <a:solidFill>
-            <a:srgbClr val="E8A020"/>
-          </a:solidFill>
-          <a:ln w="6350">
-            <a:solidFill>
-              <a:srgbClr val="0D1B2A"/>
-            </a:solidFill>
-            <a:prstDash val="solid"/>
-          </a:ln>
-        </p:spPr>
-      </p:sp>
-      <p:sp>
-        <p:nvSpPr>
-          <p:cNvPr id="115" name="Text 113"/>
-          <p:cNvSpPr txBox="1"/>
-          <p:nvPr/>
-        </p:nvSpPr>
-        <p:spPr>
-          <a:xfrm>
-            <a:off x="3959880" y="3690230"/>
-            <a:ext cx="237744" cy="164592"/>
-          </a:xfrm>
-          <a:prstGeom prst="rect">
-            <a:avLst/>
-          </a:prstGeom>
-          <a:noFill/>
-          <a:ln/>
-        </p:spPr>
-        <p:txBody>
-          <a:bodyPr wrap="square" lIns="0" tIns="0" rIns="0" bIns="0" rtlCol="0" anchor="ctr"/>
-          <a:lstStyle/>
-          <a:p>
-            <a:pPr algn="ctr" indent="0" marL="0">
-              <a:buNone/>
-            </a:pPr>
-            <a:r>
-              <a:rPr lang="en-US" sz="700" b="1" dirty="0">
+              <a:rPr lang="en-US" sz="800" b="1" dirty="0">
                 <a:solidFill>
                   <a:srgbClr val="E8A020"/>
                 </a:solidFill>
               </a:rPr>
-              <a:t>1</a:t>
-            </a:r>
-            <a:endParaRPr lang="en-US" sz="700" dirty="0"/>
-          </a:p>
-        </p:txBody>
-      </p:sp>
-      <p:sp>
-        <p:nvSpPr>
-          <p:cNvPr id="116" name="Shape 114"/>
-          <p:cNvSpPr/>
-          <p:nvPr/>
-        </p:nvSpPr>
-        <p:spPr>
-          <a:xfrm>
-            <a:off x="4164741" y="3311580"/>
-            <a:ext cx="102413" cy="102413"/>
-          </a:xfrm>
-          <a:prstGeom prst="ellipse">
-            <a:avLst/>
-          </a:prstGeom>
-          <a:solidFill>
-            <a:srgbClr val="E8A020"/>
-          </a:solidFill>
-          <a:ln w="6350">
-            <a:solidFill>
-              <a:srgbClr val="0D1B2A"/>
-            </a:solidFill>
-            <a:prstDash val="solid"/>
-          </a:ln>
-        </p:spPr>
-      </p:sp>
-      <p:sp>
-        <p:nvSpPr>
-          <p:cNvPr id="117" name="Text 115"/>
-          <p:cNvSpPr txBox="1"/>
-          <p:nvPr/>
-        </p:nvSpPr>
-        <p:spPr>
-          <a:xfrm>
-            <a:off x="3962253" y="3246135"/>
-            <a:ext cx="237744" cy="164592"/>
-          </a:xfrm>
-          <a:prstGeom prst="rect">
-            <a:avLst/>
-          </a:prstGeom>
-          <a:noFill/>
-          <a:ln/>
-        </p:spPr>
-        <p:txBody>
-          <a:bodyPr wrap="square" lIns="0" tIns="0" rIns="0" bIns="0" rtlCol="0" anchor="ctr"/>
-          <a:lstStyle/>
-          <a:p>
-            <a:pPr algn="ctr" indent="0" marL="0">
-              <a:buNone/>
-            </a:pPr>
-            <a:r>
-              <a:rPr lang="en-US" sz="700" b="1" dirty="0">
-                <a:solidFill>
-                  <a:srgbClr val="E8A020"/>
-                </a:solidFill>
-              </a:rPr>
-              <a:t>2</a:t>
-            </a:r>
-            <a:endParaRPr lang="en-US" sz="700" dirty="0"/>
-          </a:p>
-        </p:txBody>
-      </p:sp>
-      <p:sp>
-        <p:nvSpPr>
-          <p:cNvPr id="118" name="Shape 116"/>
-          <p:cNvSpPr/>
-          <p:nvPr/>
-        </p:nvSpPr>
-        <p:spPr>
-          <a:xfrm>
-            <a:off x="3496691" y="3505573"/>
-            <a:ext cx="102413" cy="102413"/>
-          </a:xfrm>
-          <a:prstGeom prst="ellipse">
-            <a:avLst/>
-          </a:prstGeom>
-          <a:solidFill>
-            <a:srgbClr val="E8A020"/>
-          </a:solidFill>
-          <a:ln w="6350">
-            <a:solidFill>
-              <a:srgbClr val="0D1B2A"/>
-            </a:solidFill>
-            <a:prstDash val="solid"/>
-          </a:ln>
-        </p:spPr>
-      </p:sp>
-      <p:sp>
-        <p:nvSpPr>
-          <p:cNvPr id="119" name="Text 117"/>
-          <p:cNvSpPr txBox="1"/>
-          <p:nvPr/>
-        </p:nvSpPr>
-        <p:spPr>
-          <a:xfrm>
-            <a:off x="3291867" y="3464607"/>
-            <a:ext cx="237744" cy="164592"/>
-          </a:xfrm>
-          <a:prstGeom prst="rect">
-            <a:avLst/>
-          </a:prstGeom>
-          <a:noFill/>
-          <a:ln/>
-        </p:spPr>
-        <p:txBody>
-          <a:bodyPr wrap="square" lIns="0" tIns="0" rIns="0" bIns="0" rtlCol="0" anchor="ctr"/>
-          <a:lstStyle/>
-          <a:p>
-            <a:pPr algn="ctr" indent="0" marL="0">
-              <a:buNone/>
-            </a:pPr>
-            <a:r>
-              <a:rPr lang="en-US" sz="700" b="1" dirty="0">
-                <a:solidFill>
-                  <a:srgbClr val="E8A020"/>
-                </a:solidFill>
-              </a:rPr>
-              <a:t>3</a:t>
-            </a:r>
-            <a:endParaRPr lang="en-US" sz="700" dirty="0"/>
-          </a:p>
-        </p:txBody>
-      </p:sp>
-      <p:sp>
-        <p:nvSpPr>
-          <p:cNvPr id="120" name="Shape 118"/>
+              <a:t>&amp; ML</a:t>
+            </a:r>
+            <a:endParaRPr lang="en-US" sz="800" dirty="0"/>
+          </a:p>
+        </p:txBody>
+      </p:sp>
+      <p:sp>
+        <p:nvSpPr>
+          <p:cNvPr id="91" name="Shape 89"/>
           <p:cNvSpPr/>
           <p:nvPr/>
         </p:nvSpPr>
         <p:spPr>
           <a:xfrm>
             <a:off x="8979408" y="1042416"/>
-            <a:ext cx="1554480" cy="201168"/>
+            <a:ext cx="1572768" cy="192024"/>
           </a:xfrm>
           <a:prstGeom prst="rect">
             <a:avLst/>
@@ -4512,14 +3831,14 @@
       </p:sp>
       <p:sp>
         <p:nvSpPr>
-          <p:cNvPr id="121" name="Shape 119"/>
+          <p:cNvPr id="92" name="Shape 90"/>
           <p:cNvSpPr/>
           <p:nvPr/>
         </p:nvSpPr>
         <p:spPr>
           <a:xfrm>
             <a:off x="8979408" y="1042416"/>
-            <a:ext cx="54864" cy="201168"/>
+            <a:ext cx="54864" cy="192024"/>
           </a:xfrm>
           <a:prstGeom prst="rect">
             <a:avLst/>
@@ -4532,14 +3851,14 @@
       </p:sp>
       <p:sp>
         <p:nvSpPr>
-          <p:cNvPr id="122" name="Text 120"/>
+          <p:cNvPr id="93" name="Text 91"/>
           <p:cNvSpPr txBox="1"/>
           <p:nvPr/>
         </p:nvSpPr>
         <p:spPr>
           <a:xfrm>
             <a:off x="9070848" y="1069848"/>
-            <a:ext cx="1444752" cy="164592"/>
+            <a:ext cx="1463040" cy="155448"/>
           </a:xfrm>
           <a:prstGeom prst="rect">
             <a:avLst/>
@@ -4568,14 +3887,14 @@
       </p:sp>
       <p:sp>
         <p:nvSpPr>
-          <p:cNvPr id="123" name="Text 121"/>
-          <p:cNvSpPr txBox="1"/>
-          <p:nvPr/>
-        </p:nvSpPr>
-        <p:spPr>
-          <a:xfrm>
-            <a:off x="9034272" y="1261872"/>
-            <a:ext cx="1481328" cy="148133"/>
+          <p:cNvPr id="94" name="Text 92"/>
+          <p:cNvSpPr txBox="1"/>
+          <p:nvPr/>
+        </p:nvSpPr>
+        <p:spPr>
+          <a:xfrm>
+            <a:off x="9043416" y="1252728"/>
+            <a:ext cx="1490472" cy="144475"/>
           </a:xfrm>
           <a:prstGeom prst="rect">
             <a:avLst/>
@@ -4604,14 +3923,14 @@
       </p:sp>
       <p:sp>
         <p:nvSpPr>
-          <p:cNvPr id="124" name="Text 122"/>
-          <p:cNvSpPr txBox="1"/>
-          <p:nvPr/>
-        </p:nvSpPr>
-        <p:spPr>
-          <a:xfrm>
-            <a:off x="9034272" y="1410005"/>
-            <a:ext cx="1481328" cy="148133"/>
+          <p:cNvPr id="95" name="Text 93"/>
+          <p:cNvSpPr txBox="1"/>
+          <p:nvPr/>
+        </p:nvSpPr>
+        <p:spPr>
+          <a:xfrm>
+            <a:off x="9043416" y="1397203"/>
+            <a:ext cx="1490472" cy="144475"/>
           </a:xfrm>
           <a:prstGeom prst="rect">
             <a:avLst/>
@@ -4640,14 +3959,14 @@
       </p:sp>
       <p:sp>
         <p:nvSpPr>
-          <p:cNvPr id="125" name="Text 123"/>
-          <p:cNvSpPr txBox="1"/>
-          <p:nvPr/>
-        </p:nvSpPr>
-        <p:spPr>
-          <a:xfrm>
-            <a:off x="9034272" y="1558138"/>
-            <a:ext cx="1481328" cy="148133"/>
+          <p:cNvPr id="96" name="Text 94"/>
+          <p:cNvSpPr txBox="1"/>
+          <p:nvPr/>
+        </p:nvSpPr>
+        <p:spPr>
+          <a:xfrm>
+            <a:off x="9043416" y="1541678"/>
+            <a:ext cx="1490472" cy="144475"/>
           </a:xfrm>
           <a:prstGeom prst="rect">
             <a:avLst/>
@@ -4676,14 +3995,14 @@
       </p:sp>
       <p:sp>
         <p:nvSpPr>
-          <p:cNvPr id="126" name="Text 124"/>
-          <p:cNvSpPr txBox="1"/>
-          <p:nvPr/>
-        </p:nvSpPr>
-        <p:spPr>
-          <a:xfrm>
-            <a:off x="9034272" y="1706270"/>
-            <a:ext cx="1481328" cy="148133"/>
+          <p:cNvPr id="97" name="Text 95"/>
+          <p:cNvSpPr txBox="1"/>
+          <p:nvPr/>
+        </p:nvSpPr>
+        <p:spPr>
+          <a:xfrm>
+            <a:off x="9043416" y="1686154"/>
+            <a:ext cx="1490472" cy="144475"/>
           </a:xfrm>
           <a:prstGeom prst="rect">
             <a:avLst/>
@@ -4712,14 +4031,14 @@
       </p:sp>
       <p:sp>
         <p:nvSpPr>
-          <p:cNvPr id="127" name="Text 125"/>
-          <p:cNvSpPr txBox="1"/>
-          <p:nvPr/>
-        </p:nvSpPr>
-        <p:spPr>
-          <a:xfrm>
-            <a:off x="9034272" y="1854403"/>
-            <a:ext cx="1481328" cy="148133"/>
+          <p:cNvPr id="98" name="Text 96"/>
+          <p:cNvSpPr txBox="1"/>
+          <p:nvPr/>
+        </p:nvSpPr>
+        <p:spPr>
+          <a:xfrm>
+            <a:off x="9043416" y="1830629"/>
+            <a:ext cx="1490472" cy="144475"/>
           </a:xfrm>
           <a:prstGeom prst="rect">
             <a:avLst/>
@@ -4748,122 +4067,14 @@
       </p:sp>
       <p:sp>
         <p:nvSpPr>
-          <p:cNvPr id="128" name="Text 126"/>
-          <p:cNvSpPr txBox="1"/>
-          <p:nvPr/>
-        </p:nvSpPr>
-        <p:spPr>
-          <a:xfrm>
-            <a:off x="9034272" y="2002536"/>
-            <a:ext cx="1481328" cy="148133"/>
-          </a:xfrm>
-          <a:prstGeom prst="rect">
-            <a:avLst/>
-          </a:prstGeom>
-          <a:noFill/>
-          <a:ln/>
-        </p:spPr>
-        <p:txBody>
-          <a:bodyPr wrap="square" lIns="0" tIns="0" rIns="0" bIns="0" rtlCol="0" anchor="ctr"/>
-          <a:lstStyle/>
-          <a:p>
-            <a:pPr indent="0" marL="0">
-              <a:buNone/>
-            </a:pPr>
-            <a:r>
-              <a:rPr lang="en-US" sz="650" dirty="0">
-                <a:solidFill>
-                  <a:srgbClr val="8AB0C8"/>
-                </a:solidFill>
-              </a:rPr>
-              <a:t>6. MATH-500</a:t>
-            </a:r>
-            <a:endParaRPr lang="en-US" sz="650" dirty="0"/>
-          </a:p>
-        </p:txBody>
-      </p:sp>
-      <p:sp>
-        <p:nvSpPr>
-          <p:cNvPr id="129" name="Text 127"/>
-          <p:cNvSpPr txBox="1"/>
-          <p:nvPr/>
-        </p:nvSpPr>
-        <p:spPr>
-          <a:xfrm>
-            <a:off x="9034272" y="2150669"/>
-            <a:ext cx="1481328" cy="148133"/>
-          </a:xfrm>
-          <a:prstGeom prst="rect">
-            <a:avLst/>
-          </a:prstGeom>
-          <a:noFill/>
-          <a:ln/>
-        </p:spPr>
-        <p:txBody>
-          <a:bodyPr wrap="square" lIns="0" tIns="0" rIns="0" bIns="0" rtlCol="0" anchor="ctr"/>
-          <a:lstStyle/>
-          <a:p>
-            <a:pPr indent="0" marL="0">
-              <a:buNone/>
-            </a:pPr>
-            <a:r>
-              <a:rPr lang="en-US" sz="650" dirty="0">
-                <a:solidFill>
-                  <a:srgbClr val="8AB0C8"/>
-                </a:solidFill>
-              </a:rPr>
-              <a:t>7. GPQA Diamond</a:t>
-            </a:r>
-            <a:endParaRPr lang="en-US" sz="650" dirty="0"/>
-          </a:p>
-        </p:txBody>
-      </p:sp>
-      <p:sp>
-        <p:nvSpPr>
-          <p:cNvPr id="130" name="Text 128"/>
-          <p:cNvSpPr txBox="1"/>
-          <p:nvPr/>
-        </p:nvSpPr>
-        <p:spPr>
-          <a:xfrm>
-            <a:off x="9034272" y="2298802"/>
-            <a:ext cx="1481328" cy="148133"/>
-          </a:xfrm>
-          <a:prstGeom prst="rect">
-            <a:avLst/>
-          </a:prstGeom>
-          <a:noFill/>
-          <a:ln/>
-        </p:spPr>
-        <p:txBody>
-          <a:bodyPr wrap="square" lIns="0" tIns="0" rIns="0" bIns="0" rtlCol="0" anchor="ctr"/>
-          <a:lstStyle/>
-          <a:p>
-            <a:pPr indent="0" marL="0">
-              <a:buNone/>
-            </a:pPr>
-            <a:r>
-              <a:rPr lang="en-US" sz="650" dirty="0">
-                <a:solidFill>
-                  <a:srgbClr val="8AB0C8"/>
-                </a:solidFill>
-              </a:rPr>
-              <a:t>8. MMLU-Pro</a:t>
-            </a:r>
-            <a:endParaRPr lang="en-US" sz="650" dirty="0"/>
-          </a:p>
-        </p:txBody>
-      </p:sp>
-      <p:sp>
-        <p:nvSpPr>
-          <p:cNvPr id="131" name="Shape 129"/>
-          <p:cNvSpPr/>
-          <p:nvPr/>
-        </p:nvSpPr>
-        <p:spPr>
-          <a:xfrm>
-            <a:off x="8979408" y="2520086"/>
-            <a:ext cx="1554480" cy="201168"/>
+          <p:cNvPr id="99" name="Shape 97"/>
+          <p:cNvSpPr/>
+          <p:nvPr/>
+        </p:nvSpPr>
+        <p:spPr>
+          <a:xfrm>
+            <a:off x="8979408" y="2057400"/>
+            <a:ext cx="1572768" cy="192024"/>
           </a:xfrm>
           <a:prstGeom prst="rect">
             <a:avLst/>
@@ -4878,14 +4089,14 @@
       </p:sp>
       <p:sp>
         <p:nvSpPr>
-          <p:cNvPr id="132" name="Shape 130"/>
-          <p:cNvSpPr/>
-          <p:nvPr/>
-        </p:nvSpPr>
-        <p:spPr>
-          <a:xfrm>
-            <a:off x="8979408" y="2520086"/>
-            <a:ext cx="54864" cy="201168"/>
+          <p:cNvPr id="100" name="Shape 98"/>
+          <p:cNvSpPr/>
+          <p:nvPr/>
+        </p:nvSpPr>
+        <p:spPr>
+          <a:xfrm>
+            <a:off x="8979408" y="2057400"/>
+            <a:ext cx="54864" cy="192024"/>
           </a:xfrm>
           <a:prstGeom prst="rect">
             <a:avLst/>
@@ -4898,14 +4109,14 @@
       </p:sp>
       <p:sp>
         <p:nvSpPr>
-          <p:cNvPr id="133" name="Text 131"/>
-          <p:cNvSpPr txBox="1"/>
-          <p:nvPr/>
-        </p:nvSpPr>
-        <p:spPr>
-          <a:xfrm>
-            <a:off x="9070848" y="2547518"/>
-            <a:ext cx="1444752" cy="164592"/>
+          <p:cNvPr id="101" name="Text 99"/>
+          <p:cNvSpPr txBox="1"/>
+          <p:nvPr/>
+        </p:nvSpPr>
+        <p:spPr>
+          <a:xfrm>
+            <a:off x="9070848" y="2084832"/>
+            <a:ext cx="1463040" cy="155448"/>
           </a:xfrm>
           <a:prstGeom prst="rect">
             <a:avLst/>
@@ -4934,14 +4145,14 @@
       </p:sp>
       <p:sp>
         <p:nvSpPr>
-          <p:cNvPr id="134" name="Text 132"/>
-          <p:cNvSpPr txBox="1"/>
-          <p:nvPr/>
-        </p:nvSpPr>
-        <p:spPr>
-          <a:xfrm>
-            <a:off x="9034272" y="2739542"/>
-            <a:ext cx="1481328" cy="148133"/>
+          <p:cNvPr id="102" name="Text 100"/>
+          <p:cNvSpPr txBox="1"/>
+          <p:nvPr/>
+        </p:nvSpPr>
+        <p:spPr>
+          <a:xfrm>
+            <a:off x="9043416" y="2267712"/>
+            <a:ext cx="1490472" cy="144475"/>
           </a:xfrm>
           <a:prstGeom prst="rect">
             <a:avLst/>
@@ -4970,14 +4181,14 @@
       </p:sp>
       <p:sp>
         <p:nvSpPr>
-          <p:cNvPr id="135" name="Text 133"/>
-          <p:cNvSpPr txBox="1"/>
-          <p:nvPr/>
-        </p:nvSpPr>
-        <p:spPr>
-          <a:xfrm>
-            <a:off x="9034272" y="2887675"/>
-            <a:ext cx="1481328" cy="148133"/>
+          <p:cNvPr id="103" name="Text 101"/>
+          <p:cNvSpPr txBox="1"/>
+          <p:nvPr/>
+        </p:nvSpPr>
+        <p:spPr>
+          <a:xfrm>
+            <a:off x="9043416" y="2412187"/>
+            <a:ext cx="1490472" cy="144475"/>
           </a:xfrm>
           <a:prstGeom prst="rect">
             <a:avLst/>
@@ -5006,14 +4217,14 @@
       </p:sp>
       <p:sp>
         <p:nvSpPr>
-          <p:cNvPr id="136" name="Text 134"/>
-          <p:cNvSpPr txBox="1"/>
-          <p:nvPr/>
-        </p:nvSpPr>
-        <p:spPr>
-          <a:xfrm>
-            <a:off x="9034272" y="3035808"/>
-            <a:ext cx="1481328" cy="148133"/>
+          <p:cNvPr id="104" name="Text 102"/>
+          <p:cNvSpPr txBox="1"/>
+          <p:nvPr/>
+        </p:nvSpPr>
+        <p:spPr>
+          <a:xfrm>
+            <a:off x="9043416" y="2556662"/>
+            <a:ext cx="1490472" cy="144475"/>
           </a:xfrm>
           <a:prstGeom prst="rect">
             <a:avLst/>
@@ -5042,14 +4253,14 @@
       </p:sp>
       <p:sp>
         <p:nvSpPr>
-          <p:cNvPr id="137" name="Text 135"/>
-          <p:cNvSpPr txBox="1"/>
-          <p:nvPr/>
-        </p:nvSpPr>
-        <p:spPr>
-          <a:xfrm>
-            <a:off x="9034272" y="3183941"/>
-            <a:ext cx="1481328" cy="148133"/>
+          <p:cNvPr id="105" name="Text 103"/>
+          <p:cNvSpPr txBox="1"/>
+          <p:nvPr/>
+        </p:nvSpPr>
+        <p:spPr>
+          <a:xfrm>
+            <a:off x="9043416" y="2701138"/>
+            <a:ext cx="1490472" cy="144475"/>
           </a:xfrm>
           <a:prstGeom prst="rect">
             <a:avLst/>
@@ -5078,14 +4289,14 @@
       </p:sp>
       <p:sp>
         <p:nvSpPr>
-          <p:cNvPr id="138" name="Text 136"/>
-          <p:cNvSpPr txBox="1"/>
-          <p:nvPr/>
-        </p:nvSpPr>
-        <p:spPr>
-          <a:xfrm>
-            <a:off x="9034272" y="3332074"/>
-            <a:ext cx="1481328" cy="148133"/>
+          <p:cNvPr id="106" name="Text 104"/>
+          <p:cNvSpPr txBox="1"/>
+          <p:nvPr/>
+        </p:nvSpPr>
+        <p:spPr>
+          <a:xfrm>
+            <a:off x="9043416" y="2845613"/>
+            <a:ext cx="1490472" cy="144475"/>
           </a:xfrm>
           <a:prstGeom prst="rect">
             <a:avLst/>
@@ -5114,14 +4325,14 @@
       </p:sp>
       <p:sp>
         <p:nvSpPr>
-          <p:cNvPr id="139" name="Text 137"/>
-          <p:cNvSpPr txBox="1"/>
-          <p:nvPr/>
-        </p:nvSpPr>
-        <p:spPr>
-          <a:xfrm>
-            <a:off x="9034272" y="3480206"/>
-            <a:ext cx="1481328" cy="148133"/>
+          <p:cNvPr id="107" name="Text 105"/>
+          <p:cNvSpPr txBox="1"/>
+          <p:nvPr/>
+        </p:nvSpPr>
+        <p:spPr>
+          <a:xfrm>
+            <a:off x="9043416" y="2990088"/>
+            <a:ext cx="1490472" cy="144475"/>
           </a:xfrm>
           <a:prstGeom prst="rect">
             <a:avLst/>
@@ -5150,86 +4361,14 @@
       </p:sp>
       <p:sp>
         <p:nvSpPr>
-          <p:cNvPr id="140" name="Text 138"/>
-          <p:cNvSpPr txBox="1"/>
-          <p:nvPr/>
-        </p:nvSpPr>
-        <p:spPr>
-          <a:xfrm>
-            <a:off x="9034272" y="3628339"/>
-            <a:ext cx="1481328" cy="148133"/>
-          </a:xfrm>
-          <a:prstGeom prst="rect">
-            <a:avLst/>
-          </a:prstGeom>
-          <a:noFill/>
-          <a:ln/>
-        </p:spPr>
-        <p:txBody>
-          <a:bodyPr wrap="square" lIns="0" tIns="0" rIns="0" bIns="0" rtlCol="0" anchor="ctr"/>
-          <a:lstStyle/>
-          <a:p>
-            <a:pPr indent="0" marL="0">
-              <a:buNone/>
-            </a:pPr>
-            <a:r>
-              <a:rPr lang="en-US" sz="650" dirty="0">
-                <a:solidFill>
-                  <a:srgbClr val="8AB0C8"/>
-                </a:solidFill>
-              </a:rPr>
-              <a:t>7. BigCodeBench</a:t>
-            </a:r>
-            <a:endParaRPr lang="en-US" sz="650" dirty="0"/>
-          </a:p>
-        </p:txBody>
-      </p:sp>
-      <p:sp>
-        <p:nvSpPr>
-          <p:cNvPr id="141" name="Text 139"/>
-          <p:cNvSpPr txBox="1"/>
-          <p:nvPr/>
-        </p:nvSpPr>
-        <p:spPr>
-          <a:xfrm>
-            <a:off x="9034272" y="3776472"/>
-            <a:ext cx="1481328" cy="148133"/>
-          </a:xfrm>
-          <a:prstGeom prst="rect">
-            <a:avLst/>
-          </a:prstGeom>
-          <a:noFill/>
-          <a:ln/>
-        </p:spPr>
-        <p:txBody>
-          <a:bodyPr wrap="square" lIns="0" tIns="0" rIns="0" bIns="0" rtlCol="0" anchor="ctr"/>
-          <a:lstStyle/>
-          <a:p>
-            <a:pPr indent="0" marL="0">
-              <a:buNone/>
-            </a:pPr>
-            <a:r>
-              <a:rPr lang="en-US" sz="650" dirty="0">
-                <a:solidFill>
-                  <a:srgbClr val="8AB0C8"/>
-                </a:solidFill>
-              </a:rPr>
-              <a:t>8. SciCode</a:t>
-            </a:r>
-            <a:endParaRPr lang="en-US" sz="650" dirty="0"/>
-          </a:p>
-        </p:txBody>
-      </p:sp>
-      <p:sp>
-        <p:nvSpPr>
-          <p:cNvPr id="142" name="Shape 140"/>
-          <p:cNvSpPr/>
-          <p:nvPr/>
-        </p:nvSpPr>
-        <p:spPr>
-          <a:xfrm>
-            <a:off x="8979408" y="3997757"/>
-            <a:ext cx="1554480" cy="201168"/>
+          <p:cNvPr id="108" name="Shape 106"/>
+          <p:cNvSpPr/>
+          <p:nvPr/>
+        </p:nvSpPr>
+        <p:spPr>
+          <a:xfrm>
+            <a:off x="8979408" y="3216859"/>
+            <a:ext cx="1572768" cy="192024"/>
           </a:xfrm>
           <a:prstGeom prst="rect">
             <a:avLst/>
@@ -5244,14 +4383,14 @@
       </p:sp>
       <p:sp>
         <p:nvSpPr>
-          <p:cNvPr id="143" name="Shape 141"/>
-          <p:cNvSpPr/>
-          <p:nvPr/>
-        </p:nvSpPr>
-        <p:spPr>
-          <a:xfrm>
-            <a:off x="8979408" y="3997757"/>
-            <a:ext cx="54864" cy="201168"/>
+          <p:cNvPr id="109" name="Shape 107"/>
+          <p:cNvSpPr/>
+          <p:nvPr/>
+        </p:nvSpPr>
+        <p:spPr>
+          <a:xfrm>
+            <a:off x="8979408" y="3216859"/>
+            <a:ext cx="54864" cy="192024"/>
           </a:xfrm>
           <a:prstGeom prst="rect">
             <a:avLst/>
@@ -5264,14 +4403,14 @@
       </p:sp>
       <p:sp>
         <p:nvSpPr>
-          <p:cNvPr id="144" name="Text 142"/>
-          <p:cNvSpPr txBox="1"/>
-          <p:nvPr/>
-        </p:nvSpPr>
-        <p:spPr>
-          <a:xfrm>
-            <a:off x="9070848" y="4025189"/>
-            <a:ext cx="1444752" cy="164592"/>
+          <p:cNvPr id="110" name="Text 108"/>
+          <p:cNvSpPr txBox="1"/>
+          <p:nvPr/>
+        </p:nvSpPr>
+        <p:spPr>
+          <a:xfrm>
+            <a:off x="9070848" y="3244291"/>
+            <a:ext cx="1463040" cy="155448"/>
           </a:xfrm>
           <a:prstGeom prst="rect">
             <a:avLst/>
@@ -5300,14 +4439,14 @@
       </p:sp>
       <p:sp>
         <p:nvSpPr>
-          <p:cNvPr id="145" name="Text 143"/>
-          <p:cNvSpPr txBox="1"/>
-          <p:nvPr/>
-        </p:nvSpPr>
-        <p:spPr>
-          <a:xfrm>
-            <a:off x="9034272" y="4217213"/>
-            <a:ext cx="1481328" cy="148133"/>
+          <p:cNvPr id="111" name="Text 109"/>
+          <p:cNvSpPr txBox="1"/>
+          <p:nvPr/>
+        </p:nvSpPr>
+        <p:spPr>
+          <a:xfrm>
+            <a:off x="9043416" y="3427171"/>
+            <a:ext cx="1490472" cy="144475"/>
           </a:xfrm>
           <a:prstGeom prst="rect">
             <a:avLst/>
@@ -5336,14 +4475,14 @@
       </p:sp>
       <p:sp>
         <p:nvSpPr>
-          <p:cNvPr id="146" name="Text 144"/>
-          <p:cNvSpPr txBox="1"/>
-          <p:nvPr/>
-        </p:nvSpPr>
-        <p:spPr>
-          <a:xfrm>
-            <a:off x="9034272" y="4365346"/>
-            <a:ext cx="1481328" cy="148133"/>
+          <p:cNvPr id="112" name="Text 110"/>
+          <p:cNvSpPr txBox="1"/>
+          <p:nvPr/>
+        </p:nvSpPr>
+        <p:spPr>
+          <a:xfrm>
+            <a:off x="9043416" y="3571646"/>
+            <a:ext cx="1490472" cy="144475"/>
           </a:xfrm>
           <a:prstGeom prst="rect">
             <a:avLst/>
@@ -5372,14 +4511,14 @@
       </p:sp>
       <p:sp>
         <p:nvSpPr>
-          <p:cNvPr id="147" name="Text 145"/>
-          <p:cNvSpPr txBox="1"/>
-          <p:nvPr/>
-        </p:nvSpPr>
-        <p:spPr>
-          <a:xfrm>
-            <a:off x="9034272" y="4513478"/>
-            <a:ext cx="1481328" cy="148133"/>
+          <p:cNvPr id="113" name="Text 111"/>
+          <p:cNvSpPr txBox="1"/>
+          <p:nvPr/>
+        </p:nvSpPr>
+        <p:spPr>
+          <a:xfrm>
+            <a:off x="9043416" y="3716122"/>
+            <a:ext cx="1490472" cy="144475"/>
           </a:xfrm>
           <a:prstGeom prst="rect">
             <a:avLst/>
@@ -5408,14 +4547,14 @@
       </p:sp>
       <p:sp>
         <p:nvSpPr>
-          <p:cNvPr id="148" name="Text 146"/>
-          <p:cNvSpPr txBox="1"/>
-          <p:nvPr/>
-        </p:nvSpPr>
-        <p:spPr>
-          <a:xfrm>
-            <a:off x="9034272" y="4661611"/>
-            <a:ext cx="1481328" cy="148133"/>
+          <p:cNvPr id="114" name="Text 112"/>
+          <p:cNvSpPr txBox="1"/>
+          <p:nvPr/>
+        </p:nvSpPr>
+        <p:spPr>
+          <a:xfrm>
+            <a:off x="9043416" y="3860597"/>
+            <a:ext cx="1490472" cy="144475"/>
           </a:xfrm>
           <a:prstGeom prst="rect">
             <a:avLst/>
@@ -5444,50 +4583,14 @@
       </p:sp>
       <p:sp>
         <p:nvSpPr>
-          <p:cNvPr id="149" name="Text 147"/>
-          <p:cNvSpPr txBox="1"/>
-          <p:nvPr/>
-        </p:nvSpPr>
-        <p:spPr>
-          <a:xfrm>
-            <a:off x="9034272" y="4809744"/>
-            <a:ext cx="1481328" cy="148133"/>
-          </a:xfrm>
-          <a:prstGeom prst="rect">
-            <a:avLst/>
-          </a:prstGeom>
-          <a:noFill/>
-          <a:ln/>
-        </p:spPr>
-        <p:txBody>
-          <a:bodyPr wrap="square" lIns="0" tIns="0" rIns="0" bIns="0" rtlCol="0" anchor="ctr"/>
-          <a:lstStyle/>
-          <a:p>
-            <a:pPr indent="0" marL="0">
-              <a:buNone/>
-            </a:pPr>
-            <a:r>
-              <a:rPr lang="en-US" sz="650" dirty="0">
-                <a:solidFill>
-                  <a:srgbClr val="8AB0C8"/>
-                </a:solidFill>
-              </a:rPr>
-              <a:t>5. LongBench v2</a:t>
-            </a:r>
-            <a:endParaRPr lang="en-US" sz="650" dirty="0"/>
-          </a:p>
-        </p:txBody>
-      </p:sp>
-      <p:sp>
-        <p:nvSpPr>
-          <p:cNvPr id="150" name="Shape 148"/>
-          <p:cNvSpPr/>
-          <p:nvPr/>
-        </p:nvSpPr>
-        <p:spPr>
-          <a:xfrm>
-            <a:off x="8979408" y="5031029"/>
-            <a:ext cx="1554480" cy="201168"/>
+          <p:cNvPr id="115" name="Shape 113"/>
+          <p:cNvSpPr/>
+          <p:nvPr/>
+        </p:nvSpPr>
+        <p:spPr>
+          <a:xfrm>
+            <a:off x="8979408" y="4087368"/>
+            <a:ext cx="1572768" cy="192024"/>
           </a:xfrm>
           <a:prstGeom prst="rect">
             <a:avLst/>
@@ -5502,14 +4605,14 @@
       </p:sp>
       <p:sp>
         <p:nvSpPr>
-          <p:cNvPr id="151" name="Shape 149"/>
-          <p:cNvSpPr/>
-          <p:nvPr/>
-        </p:nvSpPr>
-        <p:spPr>
-          <a:xfrm>
-            <a:off x="8979408" y="5031029"/>
-            <a:ext cx="54864" cy="201168"/>
+          <p:cNvPr id="116" name="Shape 114"/>
+          <p:cNvSpPr/>
+          <p:nvPr/>
+        </p:nvSpPr>
+        <p:spPr>
+          <a:xfrm>
+            <a:off x="8979408" y="4087368"/>
+            <a:ext cx="54864" cy="192024"/>
           </a:xfrm>
           <a:prstGeom prst="rect">
             <a:avLst/>
@@ -5522,14 +4625,14 @@
       </p:sp>
       <p:sp>
         <p:nvSpPr>
-          <p:cNvPr id="152" name="Text 150"/>
-          <p:cNvSpPr txBox="1"/>
-          <p:nvPr/>
-        </p:nvSpPr>
-        <p:spPr>
-          <a:xfrm>
-            <a:off x="9070848" y="5058461"/>
-            <a:ext cx="1444752" cy="164592"/>
+          <p:cNvPr id="117" name="Text 115"/>
+          <p:cNvSpPr txBox="1"/>
+          <p:nvPr/>
+        </p:nvSpPr>
+        <p:spPr>
+          <a:xfrm>
+            <a:off x="9070848" y="4114800"/>
+            <a:ext cx="1463040" cy="155448"/>
           </a:xfrm>
           <a:prstGeom prst="rect">
             <a:avLst/>
@@ -5558,14 +4661,14 @@
       </p:sp>
       <p:sp>
         <p:nvSpPr>
-          <p:cNvPr id="153" name="Text 151"/>
-          <p:cNvSpPr txBox="1"/>
-          <p:nvPr/>
-        </p:nvSpPr>
-        <p:spPr>
-          <a:xfrm>
-            <a:off x="9034272" y="5250485"/>
-            <a:ext cx="1481328" cy="148133"/>
+          <p:cNvPr id="118" name="Text 116"/>
+          <p:cNvSpPr txBox="1"/>
+          <p:nvPr/>
+        </p:nvSpPr>
+        <p:spPr>
+          <a:xfrm>
+            <a:off x="9043416" y="4297680"/>
+            <a:ext cx="1490472" cy="144475"/>
           </a:xfrm>
           <a:prstGeom prst="rect">
             <a:avLst/>
@@ -5594,14 +4697,14 @@
       </p:sp>
       <p:sp>
         <p:nvSpPr>
-          <p:cNvPr id="154" name="Text 152"/>
-          <p:cNvSpPr txBox="1"/>
-          <p:nvPr/>
-        </p:nvSpPr>
-        <p:spPr>
-          <a:xfrm>
-            <a:off x="9034272" y="5398618"/>
-            <a:ext cx="1481328" cy="148133"/>
+          <p:cNvPr id="119" name="Text 117"/>
+          <p:cNvSpPr txBox="1"/>
+          <p:nvPr/>
+        </p:nvSpPr>
+        <p:spPr>
+          <a:xfrm>
+            <a:off x="9043416" y="4442155"/>
+            <a:ext cx="1490472" cy="144475"/>
           </a:xfrm>
           <a:prstGeom prst="rect">
             <a:avLst/>
@@ -5630,230 +4733,14 @@
       </p:sp>
       <p:sp>
         <p:nvSpPr>
-          <p:cNvPr id="155" name="Text 153"/>
-          <p:cNvSpPr txBox="1"/>
-          <p:nvPr/>
-        </p:nvSpPr>
-        <p:spPr>
-          <a:xfrm>
-            <a:off x="9034272" y="5546750"/>
-            <a:ext cx="1481328" cy="148133"/>
-          </a:xfrm>
-          <a:prstGeom prst="rect">
-            <a:avLst/>
-          </a:prstGeom>
-          <a:noFill/>
-          <a:ln/>
-        </p:spPr>
-        <p:txBody>
-          <a:bodyPr wrap="square" lIns="0" tIns="0" rIns="0" bIns="0" rtlCol="0" anchor="ctr"/>
-          <a:lstStyle/>
-          <a:p>
-            <a:pPr indent="0" marL="0">
-              <a:buNone/>
-            </a:pPr>
-            <a:r>
-              <a:rPr lang="en-US" sz="650" dirty="0">
-                <a:solidFill>
-                  <a:srgbClr val="8AB0C8"/>
-                </a:solidFill>
-              </a:rPr>
-              <a:t>3. CharXiv</a:t>
-            </a:r>
-            <a:endParaRPr lang="en-US" sz="650" dirty="0"/>
-          </a:p>
-        </p:txBody>
-      </p:sp>
-      <p:sp>
-        <p:nvSpPr>
-          <p:cNvPr id="156" name="Text 154"/>
-          <p:cNvSpPr txBox="1"/>
-          <p:nvPr/>
-        </p:nvSpPr>
-        <p:spPr>
-          <a:xfrm>
-            <a:off x="9034272" y="5694883"/>
-            <a:ext cx="1481328" cy="148133"/>
-          </a:xfrm>
-          <a:prstGeom prst="rect">
-            <a:avLst/>
-          </a:prstGeom>
-          <a:noFill/>
-          <a:ln/>
-        </p:spPr>
-        <p:txBody>
-          <a:bodyPr wrap="square" lIns="0" tIns="0" rIns="0" bIns="0" rtlCol="0" anchor="ctr"/>
-          <a:lstStyle/>
-          <a:p>
-            <a:pPr indent="0" marL="0">
-              <a:buNone/>
-            </a:pPr>
-            <a:r>
-              <a:rPr lang="en-US" sz="650" dirty="0">
-                <a:solidFill>
-                  <a:srgbClr val="8AB0C8"/>
-                </a:solidFill>
-              </a:rPr>
-              <a:t>4. CharXiv-R</a:t>
-            </a:r>
-            <a:endParaRPr lang="en-US" sz="650" dirty="0"/>
-          </a:p>
-        </p:txBody>
-      </p:sp>
-      <p:sp>
-        <p:nvSpPr>
-          <p:cNvPr id="157" name="Text 155"/>
-          <p:cNvSpPr txBox="1"/>
-          <p:nvPr/>
-        </p:nvSpPr>
-        <p:spPr>
-          <a:xfrm>
-            <a:off x="9034272" y="5843016"/>
-            <a:ext cx="1481328" cy="148133"/>
-          </a:xfrm>
-          <a:prstGeom prst="rect">
-            <a:avLst/>
-          </a:prstGeom>
-          <a:noFill/>
-          <a:ln/>
-        </p:spPr>
-        <p:txBody>
-          <a:bodyPr wrap="square" lIns="0" tIns="0" rIns="0" bIns="0" rtlCol="0" anchor="ctr"/>
-          <a:lstStyle/>
-          <a:p>
-            <a:pPr indent="0" marL="0">
-              <a:buNone/>
-            </a:pPr>
-            <a:r>
-              <a:rPr lang="en-US" sz="650" dirty="0">
-                <a:solidFill>
-                  <a:srgbClr val="8AB0C8"/>
-                </a:solidFill>
-              </a:rPr>
-              <a:t>5. DocVQA</a:t>
-            </a:r>
-            <a:endParaRPr lang="en-US" sz="650" dirty="0"/>
-          </a:p>
-        </p:txBody>
-      </p:sp>
-      <p:sp>
-        <p:nvSpPr>
-          <p:cNvPr id="158" name="Text 156"/>
-          <p:cNvSpPr txBox="1"/>
-          <p:nvPr/>
-        </p:nvSpPr>
-        <p:spPr>
-          <a:xfrm>
-            <a:off x="9034272" y="5991149"/>
-            <a:ext cx="1481328" cy="148133"/>
-          </a:xfrm>
-          <a:prstGeom prst="rect">
-            <a:avLst/>
-          </a:prstGeom>
-          <a:noFill/>
-          <a:ln/>
-        </p:spPr>
-        <p:txBody>
-          <a:bodyPr wrap="square" lIns="0" tIns="0" rIns="0" bIns="0" rtlCol="0" anchor="ctr"/>
-          <a:lstStyle/>
-          <a:p>
-            <a:pPr indent="0" marL="0">
-              <a:buNone/>
-            </a:pPr>
-            <a:r>
-              <a:rPr lang="en-US" sz="650" dirty="0">
-                <a:solidFill>
-                  <a:srgbClr val="8AB0C8"/>
-                </a:solidFill>
-              </a:rPr>
-              <a:t>6. MathVision</a:t>
-            </a:r>
-            <a:endParaRPr lang="en-US" sz="650" dirty="0"/>
-          </a:p>
-        </p:txBody>
-      </p:sp>
-      <p:sp>
-        <p:nvSpPr>
-          <p:cNvPr id="159" name="Text 157"/>
-          <p:cNvSpPr txBox="1"/>
-          <p:nvPr/>
-        </p:nvSpPr>
-        <p:spPr>
-          <a:xfrm>
-            <a:off x="9034272" y="6139282"/>
-            <a:ext cx="1481328" cy="148133"/>
-          </a:xfrm>
-          <a:prstGeom prst="rect">
-            <a:avLst/>
-          </a:prstGeom>
-          <a:noFill/>
-          <a:ln/>
-        </p:spPr>
-        <p:txBody>
-          <a:bodyPr wrap="square" lIns="0" tIns="0" rIns="0" bIns="0" rtlCol="0" anchor="ctr"/>
-          <a:lstStyle/>
-          <a:p>
-            <a:pPr indent="0" marL="0">
-              <a:buNone/>
-            </a:pPr>
-            <a:r>
-              <a:rPr lang="en-US" sz="650" dirty="0">
-                <a:solidFill>
-                  <a:srgbClr val="8AB0C8"/>
-                </a:solidFill>
-              </a:rPr>
-              <a:t>7. MMVU</a:t>
-            </a:r>
-            <a:endParaRPr lang="en-US" sz="650" dirty="0"/>
-          </a:p>
-        </p:txBody>
-      </p:sp>
-      <p:sp>
-        <p:nvSpPr>
-          <p:cNvPr id="160" name="Text 158"/>
-          <p:cNvSpPr txBox="1"/>
-          <p:nvPr/>
-        </p:nvSpPr>
-        <p:spPr>
-          <a:xfrm>
-            <a:off x="9034272" y="6287414"/>
-            <a:ext cx="1481328" cy="148133"/>
-          </a:xfrm>
-          <a:prstGeom prst="rect">
-            <a:avLst/>
-          </a:prstGeom>
-          <a:noFill/>
-          <a:ln/>
-        </p:spPr>
-        <p:txBody>
-          <a:bodyPr wrap="square" lIns="0" tIns="0" rIns="0" bIns="0" rtlCol="0" anchor="ctr"/>
-          <a:lstStyle/>
-          <a:p>
-            <a:pPr indent="0" marL="0">
-              <a:buNone/>
-            </a:pPr>
-            <a:r>
-              <a:rPr lang="en-US" sz="650" dirty="0">
-                <a:solidFill>
-                  <a:srgbClr val="8AB0C8"/>
-                </a:solidFill>
-              </a:rPr>
-              <a:t>8. Chartography</a:t>
-            </a:r>
-            <a:endParaRPr lang="en-US" sz="650" dirty="0"/>
-          </a:p>
-        </p:txBody>
-      </p:sp>
-      <p:sp>
-        <p:nvSpPr>
-          <p:cNvPr id="161" name="Shape 159"/>
-          <p:cNvSpPr/>
-          <p:nvPr/>
-        </p:nvSpPr>
-        <p:spPr>
-          <a:xfrm>
-            <a:off x="10607040" y="1042416"/>
-            <a:ext cx="1554480" cy="201168"/>
+          <p:cNvPr id="120" name="Shape 118"/>
+          <p:cNvSpPr/>
+          <p:nvPr/>
+        </p:nvSpPr>
+        <p:spPr>
+          <a:xfrm>
+            <a:off x="10625328" y="1042416"/>
+            <a:ext cx="1572768" cy="192024"/>
           </a:xfrm>
           <a:prstGeom prst="rect">
             <a:avLst/>
@@ -5868,14 +4755,14 @@
       </p:sp>
       <p:sp>
         <p:nvSpPr>
-          <p:cNvPr id="162" name="Shape 160"/>
-          <p:cNvSpPr/>
-          <p:nvPr/>
-        </p:nvSpPr>
-        <p:spPr>
-          <a:xfrm>
-            <a:off x="10607040" y="1042416"/>
-            <a:ext cx="54864" cy="201168"/>
+          <p:cNvPr id="121" name="Shape 119"/>
+          <p:cNvSpPr/>
+          <p:nvPr/>
+        </p:nvSpPr>
+        <p:spPr>
+          <a:xfrm>
+            <a:off x="10625328" y="1042416"/>
+            <a:ext cx="54864" cy="192024"/>
           </a:xfrm>
           <a:prstGeom prst="rect">
             <a:avLst/>
@@ -5888,14 +4775,14 @@
       </p:sp>
       <p:sp>
         <p:nvSpPr>
-          <p:cNvPr id="163" name="Text 161"/>
-          <p:cNvSpPr txBox="1"/>
-          <p:nvPr/>
-        </p:nvSpPr>
-        <p:spPr>
-          <a:xfrm>
-            <a:off x="10698480" y="1069848"/>
-            <a:ext cx="1444752" cy="164592"/>
+          <p:cNvPr id="122" name="Text 120"/>
+          <p:cNvSpPr txBox="1"/>
+          <p:nvPr/>
+        </p:nvSpPr>
+        <p:spPr>
+          <a:xfrm>
+            <a:off x="10716768" y="1069848"/>
+            <a:ext cx="1463040" cy="155448"/>
           </a:xfrm>
           <a:prstGeom prst="rect">
             <a:avLst/>
@@ -5924,14 +4811,14 @@
       </p:sp>
       <p:sp>
         <p:nvSpPr>
-          <p:cNvPr id="164" name="Text 162"/>
-          <p:cNvSpPr txBox="1"/>
-          <p:nvPr/>
-        </p:nvSpPr>
-        <p:spPr>
-          <a:xfrm>
-            <a:off x="10661904" y="1261872"/>
-            <a:ext cx="1481328" cy="148133"/>
+          <p:cNvPr id="123" name="Text 121"/>
+          <p:cNvSpPr txBox="1"/>
+          <p:nvPr/>
+        </p:nvSpPr>
+        <p:spPr>
+          <a:xfrm>
+            <a:off x="10689336" y="1252728"/>
+            <a:ext cx="1490472" cy="144475"/>
           </a:xfrm>
           <a:prstGeom prst="rect">
             <a:avLst/>
@@ -5960,14 +4847,14 @@
       </p:sp>
       <p:sp>
         <p:nvSpPr>
-          <p:cNvPr id="165" name="Text 163"/>
-          <p:cNvSpPr txBox="1"/>
-          <p:nvPr/>
-        </p:nvSpPr>
-        <p:spPr>
-          <a:xfrm>
-            <a:off x="10661904" y="1410005"/>
-            <a:ext cx="1481328" cy="148133"/>
+          <p:cNvPr id="124" name="Text 122"/>
+          <p:cNvSpPr txBox="1"/>
+          <p:nvPr/>
+        </p:nvSpPr>
+        <p:spPr>
+          <a:xfrm>
+            <a:off x="10689336" y="1397203"/>
+            <a:ext cx="1490472" cy="144475"/>
           </a:xfrm>
           <a:prstGeom prst="rect">
             <a:avLst/>
@@ -5996,14 +4883,14 @@
       </p:sp>
       <p:sp>
         <p:nvSpPr>
-          <p:cNvPr id="166" name="Text 164"/>
-          <p:cNvSpPr txBox="1"/>
-          <p:nvPr/>
-        </p:nvSpPr>
-        <p:spPr>
-          <a:xfrm>
-            <a:off x="10661904" y="1558138"/>
-            <a:ext cx="1481328" cy="148133"/>
+          <p:cNvPr id="125" name="Text 123"/>
+          <p:cNvSpPr txBox="1"/>
+          <p:nvPr/>
+        </p:nvSpPr>
+        <p:spPr>
+          <a:xfrm>
+            <a:off x="10689336" y="1541678"/>
+            <a:ext cx="1490472" cy="144475"/>
           </a:xfrm>
           <a:prstGeom prst="rect">
             <a:avLst/>
@@ -6032,14 +4919,14 @@
       </p:sp>
       <p:sp>
         <p:nvSpPr>
-          <p:cNvPr id="167" name="Text 165"/>
-          <p:cNvSpPr txBox="1"/>
-          <p:nvPr/>
-        </p:nvSpPr>
-        <p:spPr>
-          <a:xfrm>
-            <a:off x="10661904" y="1706270"/>
-            <a:ext cx="1481328" cy="148133"/>
+          <p:cNvPr id="126" name="Text 124"/>
+          <p:cNvSpPr txBox="1"/>
+          <p:nvPr/>
+        </p:nvSpPr>
+        <p:spPr>
+          <a:xfrm>
+            <a:off x="10689336" y="1686154"/>
+            <a:ext cx="1490472" cy="144475"/>
           </a:xfrm>
           <a:prstGeom prst="rect">
             <a:avLst/>
@@ -6068,14 +4955,14 @@
       </p:sp>
       <p:sp>
         <p:nvSpPr>
-          <p:cNvPr id="168" name="Text 166"/>
-          <p:cNvSpPr txBox="1"/>
-          <p:nvPr/>
-        </p:nvSpPr>
-        <p:spPr>
-          <a:xfrm>
-            <a:off x="10661904" y="1854403"/>
-            <a:ext cx="1481328" cy="148133"/>
+          <p:cNvPr id="127" name="Text 125"/>
+          <p:cNvSpPr txBox="1"/>
+          <p:nvPr/>
+        </p:nvSpPr>
+        <p:spPr>
+          <a:xfrm>
+            <a:off x="10689336" y="1830629"/>
+            <a:ext cx="1490472" cy="144475"/>
           </a:xfrm>
           <a:prstGeom prst="rect">
             <a:avLst/>
@@ -6104,14 +4991,14 @@
       </p:sp>
       <p:sp>
         <p:nvSpPr>
-          <p:cNvPr id="169" name="Text 167"/>
-          <p:cNvSpPr txBox="1"/>
-          <p:nvPr/>
-        </p:nvSpPr>
-        <p:spPr>
-          <a:xfrm>
-            <a:off x="10661904" y="2002536"/>
-            <a:ext cx="1481328" cy="148133"/>
+          <p:cNvPr id="128" name="Text 126"/>
+          <p:cNvSpPr txBox="1"/>
+          <p:nvPr/>
+        </p:nvSpPr>
+        <p:spPr>
+          <a:xfrm>
+            <a:off x="10689336" y="1975104"/>
+            <a:ext cx="1490472" cy="144475"/>
           </a:xfrm>
           <a:prstGeom prst="rect">
             <a:avLst/>
@@ -6140,14 +5027,14 @@
       </p:sp>
       <p:sp>
         <p:nvSpPr>
-          <p:cNvPr id="170" name="Text 168"/>
-          <p:cNvSpPr txBox="1"/>
-          <p:nvPr/>
-        </p:nvSpPr>
-        <p:spPr>
-          <a:xfrm>
-            <a:off x="10661904" y="2150669"/>
-            <a:ext cx="1481328" cy="148133"/>
+          <p:cNvPr id="129" name="Text 127"/>
+          <p:cNvSpPr txBox="1"/>
+          <p:nvPr/>
+        </p:nvSpPr>
+        <p:spPr>
+          <a:xfrm>
+            <a:off x="10689336" y="2119579"/>
+            <a:ext cx="1490472" cy="144475"/>
           </a:xfrm>
           <a:prstGeom prst="rect">
             <a:avLst/>
@@ -6176,50 +5063,14 @@
       </p:sp>
       <p:sp>
         <p:nvSpPr>
-          <p:cNvPr id="171" name="Text 169"/>
-          <p:cNvSpPr txBox="1"/>
-          <p:nvPr/>
-        </p:nvSpPr>
-        <p:spPr>
-          <a:xfrm>
-            <a:off x="10661904" y="2298802"/>
-            <a:ext cx="1481328" cy="148133"/>
-          </a:xfrm>
-          <a:prstGeom prst="rect">
-            <a:avLst/>
-          </a:prstGeom>
-          <a:noFill/>
-          <a:ln/>
-        </p:spPr>
-        <p:txBody>
-          <a:bodyPr wrap="square" lIns="0" tIns="0" rIns="0" bIns="0" rtlCol="0" anchor="ctr"/>
-          <a:lstStyle/>
-          <a:p>
-            <a:pPr indent="0" marL="0">
-              <a:buNone/>
-            </a:pPr>
-            <a:r>
-              <a:rPr lang="en-US" sz="650" dirty="0">
-                <a:solidFill>
-                  <a:srgbClr val="8AB0C8"/>
-                </a:solidFill>
-              </a:rPr>
-              <a:t>8. APEX-Agents</a:t>
-            </a:r>
-            <a:endParaRPr lang="en-US" sz="650" dirty="0"/>
-          </a:p>
-        </p:txBody>
-      </p:sp>
-      <p:sp>
-        <p:nvSpPr>
-          <p:cNvPr id="172" name="Shape 170"/>
-          <p:cNvSpPr/>
-          <p:nvPr/>
-        </p:nvSpPr>
-        <p:spPr>
-          <a:xfrm>
-            <a:off x="10607040" y="2520086"/>
-            <a:ext cx="1554480" cy="201168"/>
+          <p:cNvPr id="130" name="Shape 128"/>
+          <p:cNvSpPr/>
+          <p:nvPr/>
+        </p:nvSpPr>
+        <p:spPr>
+          <a:xfrm>
+            <a:off x="10625328" y="2346350"/>
+            <a:ext cx="1572768" cy="192024"/>
           </a:xfrm>
           <a:prstGeom prst="rect">
             <a:avLst/>
@@ -6234,14 +5085,14 @@
       </p:sp>
       <p:sp>
         <p:nvSpPr>
-          <p:cNvPr id="173" name="Shape 171"/>
-          <p:cNvSpPr/>
-          <p:nvPr/>
-        </p:nvSpPr>
-        <p:spPr>
-          <a:xfrm>
-            <a:off x="10607040" y="2520086"/>
-            <a:ext cx="54864" cy="201168"/>
+          <p:cNvPr id="131" name="Shape 129"/>
+          <p:cNvSpPr/>
+          <p:nvPr/>
+        </p:nvSpPr>
+        <p:spPr>
+          <a:xfrm>
+            <a:off x="10625328" y="2346350"/>
+            <a:ext cx="54864" cy="192024"/>
           </a:xfrm>
           <a:prstGeom prst="rect">
             <a:avLst/>
@@ -6254,14 +5105,14 @@
       </p:sp>
       <p:sp>
         <p:nvSpPr>
-          <p:cNvPr id="174" name="Text 172"/>
-          <p:cNvSpPr txBox="1"/>
-          <p:nvPr/>
-        </p:nvSpPr>
-        <p:spPr>
-          <a:xfrm>
-            <a:off x="10698480" y="2547518"/>
-            <a:ext cx="1444752" cy="164592"/>
+          <p:cNvPr id="132" name="Text 130"/>
+          <p:cNvSpPr txBox="1"/>
+          <p:nvPr/>
+        </p:nvSpPr>
+        <p:spPr>
+          <a:xfrm>
+            <a:off x="10716768" y="2373782"/>
+            <a:ext cx="1463040" cy="155448"/>
           </a:xfrm>
           <a:prstGeom prst="rect">
             <a:avLst/>
@@ -6290,14 +5141,14 @@
       </p:sp>
       <p:sp>
         <p:nvSpPr>
-          <p:cNvPr id="175" name="Text 173"/>
-          <p:cNvSpPr txBox="1"/>
-          <p:nvPr/>
-        </p:nvSpPr>
-        <p:spPr>
-          <a:xfrm>
-            <a:off x="10661904" y="2739542"/>
-            <a:ext cx="1481328" cy="148133"/>
+          <p:cNvPr id="133" name="Text 131"/>
+          <p:cNvSpPr txBox="1"/>
+          <p:nvPr/>
+        </p:nvSpPr>
+        <p:spPr>
+          <a:xfrm>
+            <a:off x="10689336" y="2556662"/>
+            <a:ext cx="1490472" cy="144475"/>
           </a:xfrm>
           <a:prstGeom prst="rect">
             <a:avLst/>
@@ -6326,14 +5177,14 @@
       </p:sp>
       <p:sp>
         <p:nvSpPr>
-          <p:cNvPr id="176" name="Text 174"/>
-          <p:cNvSpPr txBox="1"/>
-          <p:nvPr/>
-        </p:nvSpPr>
-        <p:spPr>
-          <a:xfrm>
-            <a:off x="10661904" y="2887675"/>
-            <a:ext cx="1481328" cy="148133"/>
+          <p:cNvPr id="134" name="Text 132"/>
+          <p:cNvSpPr txBox="1"/>
+          <p:nvPr/>
+        </p:nvSpPr>
+        <p:spPr>
+          <a:xfrm>
+            <a:off x="10689336" y="2701138"/>
+            <a:ext cx="1490472" cy="144475"/>
           </a:xfrm>
           <a:prstGeom prst="rect">
             <a:avLst/>
@@ -6362,14 +5213,14 @@
       </p:sp>
       <p:sp>
         <p:nvSpPr>
-          <p:cNvPr id="177" name="Text 175"/>
-          <p:cNvSpPr txBox="1"/>
-          <p:nvPr/>
-        </p:nvSpPr>
-        <p:spPr>
-          <a:xfrm>
-            <a:off x="10661904" y="3035808"/>
-            <a:ext cx="1481328" cy="148133"/>
+          <p:cNvPr id="135" name="Text 133"/>
+          <p:cNvSpPr txBox="1"/>
+          <p:nvPr/>
+        </p:nvSpPr>
+        <p:spPr>
+          <a:xfrm>
+            <a:off x="10689336" y="2845613"/>
+            <a:ext cx="1490472" cy="144475"/>
           </a:xfrm>
           <a:prstGeom prst="rect">
             <a:avLst/>
@@ -6398,14 +5249,14 @@
       </p:sp>
       <p:sp>
         <p:nvSpPr>
-          <p:cNvPr id="178" name="Text 176"/>
-          <p:cNvSpPr txBox="1"/>
-          <p:nvPr/>
-        </p:nvSpPr>
-        <p:spPr>
-          <a:xfrm>
-            <a:off x="10661904" y="3183941"/>
-            <a:ext cx="1481328" cy="148133"/>
+          <p:cNvPr id="136" name="Text 134"/>
+          <p:cNvSpPr txBox="1"/>
+          <p:nvPr/>
+        </p:nvSpPr>
+        <p:spPr>
+          <a:xfrm>
+            <a:off x="10689336" y="2990088"/>
+            <a:ext cx="1490472" cy="144475"/>
           </a:xfrm>
           <a:prstGeom prst="rect">
             <a:avLst/>
@@ -6434,14 +5285,14 @@
       </p:sp>
       <p:sp>
         <p:nvSpPr>
-          <p:cNvPr id="179" name="Text 177"/>
-          <p:cNvSpPr txBox="1"/>
-          <p:nvPr/>
-        </p:nvSpPr>
-        <p:spPr>
-          <a:xfrm>
-            <a:off x="10661904" y="3332074"/>
-            <a:ext cx="1481328" cy="148133"/>
+          <p:cNvPr id="137" name="Text 135"/>
+          <p:cNvSpPr txBox="1"/>
+          <p:nvPr/>
+        </p:nvSpPr>
+        <p:spPr>
+          <a:xfrm>
+            <a:off x="10689336" y="3134563"/>
+            <a:ext cx="1490472" cy="144475"/>
           </a:xfrm>
           <a:prstGeom prst="rect">
             <a:avLst/>
@@ -6470,14 +5321,14 @@
       </p:sp>
       <p:sp>
         <p:nvSpPr>
-          <p:cNvPr id="180" name="Text 178"/>
-          <p:cNvSpPr txBox="1"/>
-          <p:nvPr/>
-        </p:nvSpPr>
-        <p:spPr>
-          <a:xfrm>
-            <a:off x="10661904" y="3480206"/>
-            <a:ext cx="1481328" cy="148133"/>
+          <p:cNvPr id="138" name="Text 136"/>
+          <p:cNvSpPr txBox="1"/>
+          <p:nvPr/>
+        </p:nvSpPr>
+        <p:spPr>
+          <a:xfrm>
+            <a:off x="10689336" y="3279038"/>
+            <a:ext cx="1490472" cy="144475"/>
           </a:xfrm>
           <a:prstGeom prst="rect">
             <a:avLst/>
@@ -6506,86 +5357,14 @@
       </p:sp>
       <p:sp>
         <p:nvSpPr>
-          <p:cNvPr id="181" name="Text 179"/>
-          <p:cNvSpPr txBox="1"/>
-          <p:nvPr/>
-        </p:nvSpPr>
-        <p:spPr>
-          <a:xfrm>
-            <a:off x="10661904" y="3628339"/>
-            <a:ext cx="1481328" cy="148133"/>
-          </a:xfrm>
-          <a:prstGeom prst="rect">
-            <a:avLst/>
-          </a:prstGeom>
-          <a:noFill/>
-          <a:ln/>
-        </p:spPr>
-        <p:txBody>
-          <a:bodyPr wrap="square" lIns="0" tIns="0" rIns="0" bIns="0" rtlCol="0" anchor="ctr"/>
-          <a:lstStyle/>
-          <a:p>
-            <a:pPr indent="0" marL="0">
-              <a:buNone/>
-            </a:pPr>
-            <a:r>
-              <a:rPr lang="en-US" sz="650" dirty="0">
-                <a:solidFill>
-                  <a:srgbClr val="8AB0C8"/>
-                </a:solidFill>
-              </a:rPr>
-              <a:t>7. SimpleQA</a:t>
-            </a:r>
-            <a:endParaRPr lang="en-US" sz="650" dirty="0"/>
-          </a:p>
-        </p:txBody>
-      </p:sp>
-      <p:sp>
-        <p:nvSpPr>
-          <p:cNvPr id="182" name="Text 180"/>
-          <p:cNvSpPr txBox="1"/>
-          <p:nvPr/>
-        </p:nvSpPr>
-        <p:spPr>
-          <a:xfrm>
-            <a:off x="10661904" y="3776472"/>
-            <a:ext cx="1481328" cy="148133"/>
-          </a:xfrm>
-          <a:prstGeom prst="rect">
-            <a:avLst/>
-          </a:prstGeom>
-          <a:noFill/>
-          <a:ln/>
-        </p:spPr>
-        <p:txBody>
-          <a:bodyPr wrap="square" lIns="0" tIns="0" rIns="0" bIns="0" rtlCol="0" anchor="ctr"/>
-          <a:lstStyle/>
-          <a:p>
-            <a:pPr indent="0" marL="0">
-              <a:buNone/>
-            </a:pPr>
-            <a:r>
-              <a:rPr lang="en-US" sz="650" dirty="0">
-                <a:solidFill>
-                  <a:srgbClr val="8AB0C8"/>
-                </a:solidFill>
-              </a:rPr>
-              <a:t>8. DRCD</a:t>
-            </a:r>
-            <a:endParaRPr lang="en-US" sz="650" dirty="0"/>
-          </a:p>
-        </p:txBody>
-      </p:sp>
-      <p:sp>
-        <p:nvSpPr>
-          <p:cNvPr id="183" name="Shape 181"/>
-          <p:cNvSpPr/>
-          <p:nvPr/>
-        </p:nvSpPr>
-        <p:spPr>
-          <a:xfrm>
-            <a:off x="10607040" y="3997757"/>
-            <a:ext cx="1554480" cy="201168"/>
+          <p:cNvPr id="139" name="Shape 137"/>
+          <p:cNvSpPr/>
+          <p:nvPr/>
+        </p:nvSpPr>
+        <p:spPr>
+          <a:xfrm>
+            <a:off x="10625328" y="3505810"/>
+            <a:ext cx="1572768" cy="192024"/>
           </a:xfrm>
           <a:prstGeom prst="rect">
             <a:avLst/>
@@ -6600,14 +5379,14 @@
       </p:sp>
       <p:sp>
         <p:nvSpPr>
-          <p:cNvPr id="184" name="Shape 182"/>
-          <p:cNvSpPr/>
-          <p:nvPr/>
-        </p:nvSpPr>
-        <p:spPr>
-          <a:xfrm>
-            <a:off x="10607040" y="3997757"/>
-            <a:ext cx="54864" cy="201168"/>
+          <p:cNvPr id="140" name="Shape 138"/>
+          <p:cNvSpPr/>
+          <p:nvPr/>
+        </p:nvSpPr>
+        <p:spPr>
+          <a:xfrm>
+            <a:off x="10625328" y="3505810"/>
+            <a:ext cx="54864" cy="192024"/>
           </a:xfrm>
           <a:prstGeom prst="rect">
             <a:avLst/>
@@ -6620,14 +5399,14 @@
       </p:sp>
       <p:sp>
         <p:nvSpPr>
-          <p:cNvPr id="185" name="Text 183"/>
-          <p:cNvSpPr txBox="1"/>
-          <p:nvPr/>
-        </p:nvSpPr>
-        <p:spPr>
-          <a:xfrm>
-            <a:off x="10698480" y="4025189"/>
-            <a:ext cx="1444752" cy="164592"/>
+          <p:cNvPr id="141" name="Text 139"/>
+          <p:cNvSpPr txBox="1"/>
+          <p:nvPr/>
+        </p:nvSpPr>
+        <p:spPr>
+          <a:xfrm>
+            <a:off x="10716768" y="3533242"/>
+            <a:ext cx="1463040" cy="155448"/>
           </a:xfrm>
           <a:prstGeom prst="rect">
             <a:avLst/>
@@ -6656,14 +5435,14 @@
       </p:sp>
       <p:sp>
         <p:nvSpPr>
-          <p:cNvPr id="186" name="Text 184"/>
-          <p:cNvSpPr txBox="1"/>
-          <p:nvPr/>
-        </p:nvSpPr>
-        <p:spPr>
-          <a:xfrm>
-            <a:off x="10661904" y="4217213"/>
-            <a:ext cx="1481328" cy="148133"/>
+          <p:cNvPr id="142" name="Text 140"/>
+          <p:cNvSpPr txBox="1"/>
+          <p:nvPr/>
+        </p:nvSpPr>
+        <p:spPr>
+          <a:xfrm>
+            <a:off x="10689336" y="3716122"/>
+            <a:ext cx="1490472" cy="144475"/>
           </a:xfrm>
           <a:prstGeom prst="rect">
             <a:avLst/>
@@ -6692,14 +5471,14 @@
       </p:sp>
       <p:sp>
         <p:nvSpPr>
-          <p:cNvPr id="187" name="Text 185"/>
-          <p:cNvSpPr txBox="1"/>
-          <p:nvPr/>
-        </p:nvSpPr>
-        <p:spPr>
-          <a:xfrm>
-            <a:off x="10661904" y="4365346"/>
-            <a:ext cx="1481328" cy="148133"/>
+          <p:cNvPr id="143" name="Text 141"/>
+          <p:cNvSpPr txBox="1"/>
+          <p:nvPr/>
+        </p:nvSpPr>
+        <p:spPr>
+          <a:xfrm>
+            <a:off x="10689336" y="3860597"/>
+            <a:ext cx="1490472" cy="144475"/>
           </a:xfrm>
           <a:prstGeom prst="rect">
             <a:avLst/>
@@ -6728,558 +5507,14 @@
       </p:sp>
       <p:sp>
         <p:nvSpPr>
-          <p:cNvPr id="188" name="Text 186"/>
-          <p:cNvSpPr txBox="1"/>
-          <p:nvPr/>
-        </p:nvSpPr>
-        <p:spPr>
-          <a:xfrm>
-            <a:off x="10661904" y="4513478"/>
-            <a:ext cx="1481328" cy="148133"/>
-          </a:xfrm>
-          <a:prstGeom prst="rect">
-            <a:avLst/>
-          </a:prstGeom>
-          <a:noFill/>
-          <a:ln/>
-        </p:spPr>
-        <p:txBody>
-          <a:bodyPr wrap="square" lIns="0" tIns="0" rIns="0" bIns="0" rtlCol="0" anchor="ctr"/>
-          <a:lstStyle/>
-          <a:p>
-            <a:pPr indent="0" marL="0">
-              <a:buNone/>
-            </a:pPr>
-            <a:r>
-              <a:rPr lang="en-US" sz="650" dirty="0">
-                <a:solidFill>
-                  <a:srgbClr val="8AB0C8"/>
-                </a:solidFill>
-              </a:rPr>
-              <a:t>3. SpreadsheetBench</a:t>
-            </a:r>
-            <a:endParaRPr lang="en-US" sz="650" dirty="0"/>
-          </a:p>
-        </p:txBody>
-      </p:sp>
-      <p:sp>
-        <p:nvSpPr>
-          <p:cNvPr id="189" name="Text 187"/>
-          <p:cNvSpPr txBox="1"/>
-          <p:nvPr/>
-        </p:nvSpPr>
-        <p:spPr>
-          <a:xfrm>
-            <a:off x="2802445" y="1315967"/>
-            <a:ext cx="1188720" cy="347472"/>
-          </a:xfrm>
-          <a:prstGeom prst="rect">
-            <a:avLst/>
-          </a:prstGeom>
-          <a:noFill/>
-          <a:ln/>
-        </p:spPr>
-        <p:txBody>
-          <a:bodyPr wrap="square" lIns="0" tIns="0" rIns="0" bIns="0" rtlCol="0" anchor="ctr"/>
-          <a:lstStyle/>
-          <a:p>
-            <a:pPr algn="ctr" indent="0" marL="0">
-              <a:buNone/>
-            </a:pPr>
-            <a:r>
-              <a:rPr lang="en-US" sz="800" b="1" dirty="0">
-                <a:solidFill>
-                  <a:srgbClr val="E85D4A"/>
-                </a:solidFill>
-              </a:rPr>
-              <a:t>Reasoning</a:t>
-            </a:r>
-            <a:endParaRPr lang="en-US" sz="800" dirty="0"/>
-          </a:p>
-          <a:p>
-            <a:pPr algn="ctr" indent="0" marL="0">
-              <a:buNone/>
-            </a:pPr>
-            <a:r>
-              <a:rPr lang="en-US" sz="800" b="1" dirty="0">
-                <a:solidFill>
-                  <a:srgbClr val="E85D4A"/>
-                </a:solidFill>
-              </a:rPr>
-              <a:t>&amp; Math</a:t>
-            </a:r>
-            <a:endParaRPr lang="en-US" sz="800" dirty="0"/>
-          </a:p>
-        </p:txBody>
-      </p:sp>
-      <p:sp>
-        <p:nvSpPr>
-          <p:cNvPr id="190" name="Text 188"/>
-          <p:cNvSpPr txBox="1"/>
-          <p:nvPr/>
-        </p:nvSpPr>
-        <p:spPr>
-          <a:xfrm>
-            <a:off x="5877899" y="835598"/>
-            <a:ext cx="1188720" cy="347472"/>
-          </a:xfrm>
-          <a:prstGeom prst="rect">
-            <a:avLst/>
-          </a:prstGeom>
-          <a:noFill/>
-          <a:ln/>
-        </p:spPr>
-        <p:txBody>
-          <a:bodyPr wrap="square" lIns="0" tIns="0" rIns="0" bIns="0" rtlCol="0" anchor="ctr"/>
-          <a:lstStyle/>
-          <a:p>
-            <a:pPr algn="ctr" indent="0" marL="0">
-              <a:buNone/>
-            </a:pPr>
-            <a:r>
-              <a:rPr lang="en-US" sz="800" b="1" dirty="0">
-                <a:solidFill>
-                  <a:srgbClr val="4A90D9"/>
-                </a:solidFill>
-              </a:rPr>
-              <a:t>Coding</a:t>
-            </a:r>
-            <a:endParaRPr lang="en-US" sz="800" dirty="0"/>
-          </a:p>
-          <a:p>
-            <a:pPr algn="ctr" indent="0" marL="0">
-              <a:buNone/>
-            </a:pPr>
-            <a:r>
-              <a:rPr lang="en-US" sz="800" b="1" dirty="0">
-                <a:solidFill>
-                  <a:srgbClr val="4A90D9"/>
-                </a:solidFill>
-              </a:rPr>
-              <a:t>&amp; SWE</a:t>
-            </a:r>
-            <a:endParaRPr lang="en-US" sz="800" dirty="0"/>
-          </a:p>
-        </p:txBody>
-      </p:sp>
-      <p:sp>
-        <p:nvSpPr>
-          <p:cNvPr id="191" name="Text 189"/>
-          <p:cNvSpPr txBox="1"/>
-          <p:nvPr/>
-        </p:nvSpPr>
-        <p:spPr>
-          <a:xfrm>
-            <a:off x="7104888" y="2641032"/>
-            <a:ext cx="1188720" cy="347472"/>
-          </a:xfrm>
-          <a:prstGeom prst="rect">
-            <a:avLst/>
-          </a:prstGeom>
-          <a:noFill/>
-          <a:ln/>
-        </p:spPr>
-        <p:txBody>
-          <a:bodyPr wrap="square" lIns="0" tIns="0" rIns="0" bIns="0" rtlCol="0" anchor="ctr"/>
-          <a:lstStyle/>
-          <a:p>
-            <a:pPr algn="ctr" indent="0" marL="0">
-              <a:buNone/>
-            </a:pPr>
-            <a:r>
-              <a:rPr lang="en-US" sz="800" b="1" dirty="0">
-                <a:solidFill>
-                  <a:srgbClr val="7B68EE"/>
-                </a:solidFill>
-              </a:rPr>
-              <a:t>Long</a:t>
-            </a:r>
-            <a:endParaRPr lang="en-US" sz="800" dirty="0"/>
-          </a:p>
-          <a:p>
-            <a:pPr algn="ctr" indent="0" marL="0">
-              <a:buNone/>
-            </a:pPr>
-            <a:r>
-              <a:rPr lang="en-US" sz="800" b="1" dirty="0">
-                <a:solidFill>
-                  <a:srgbClr val="7B68EE"/>
-                </a:solidFill>
-              </a:rPr>
-              <a:t>Context</a:t>
-            </a:r>
-            <a:endParaRPr lang="en-US" sz="800" dirty="0"/>
-          </a:p>
-        </p:txBody>
-      </p:sp>
-      <p:sp>
-        <p:nvSpPr>
-          <p:cNvPr id="192" name="Text 190"/>
-          <p:cNvSpPr txBox="1"/>
-          <p:nvPr/>
-        </p:nvSpPr>
-        <p:spPr>
-          <a:xfrm>
-            <a:off x="7091815" y="5007268"/>
-            <a:ext cx="1188720" cy="347472"/>
-          </a:xfrm>
-          <a:prstGeom prst="rect">
-            <a:avLst/>
-          </a:prstGeom>
-          <a:noFill/>
-          <a:ln/>
-        </p:spPr>
-        <p:txBody>
-          <a:bodyPr wrap="square" lIns="0" tIns="0" rIns="0" bIns="0" rtlCol="0" anchor="ctr"/>
-          <a:lstStyle/>
-          <a:p>
-            <a:pPr algn="ctr" indent="0" marL="0">
-              <a:buNone/>
-            </a:pPr>
-            <a:r>
-              <a:rPr lang="en-US" sz="800" b="1" dirty="0">
-                <a:solidFill>
-                  <a:srgbClr val="F0A500"/>
-                </a:solidFill>
-              </a:rPr>
-              <a:t>Multimodal</a:t>
-            </a:r>
-            <a:endParaRPr lang="en-US" sz="800" dirty="0"/>
-          </a:p>
-        </p:txBody>
-      </p:sp>
-      <p:sp>
-        <p:nvSpPr>
-          <p:cNvPr id="193" name="Text 191"/>
-          <p:cNvSpPr txBox="1"/>
-          <p:nvPr/>
-        </p:nvSpPr>
-        <p:spPr>
-          <a:xfrm>
-            <a:off x="4511164" y="6284193"/>
-            <a:ext cx="1188720" cy="347472"/>
-          </a:xfrm>
-          <a:prstGeom prst="rect">
-            <a:avLst/>
-          </a:prstGeom>
-          <a:noFill/>
-          <a:ln/>
-        </p:spPr>
-        <p:txBody>
-          <a:bodyPr wrap="square" lIns="0" tIns="0" rIns="0" bIns="0" rtlCol="0" anchor="ctr"/>
-          <a:lstStyle/>
-          <a:p>
-            <a:pPr algn="ctr" indent="0" marL="0">
-              <a:buNone/>
-            </a:pPr>
-            <a:r>
-              <a:rPr lang="en-US" sz="800" b="1" dirty="0">
-                <a:solidFill>
-                  <a:srgbClr val="3DAA6E"/>
-                </a:solidFill>
-              </a:rPr>
-              <a:t>Agents</a:t>
-            </a:r>
-            <a:endParaRPr lang="en-US" sz="800" dirty="0"/>
-          </a:p>
-          <a:p>
-            <a:pPr algn="ctr" indent="0" marL="0">
-              <a:buNone/>
-            </a:pPr>
-            <a:r>
-              <a:rPr lang="en-US" sz="800" b="1" dirty="0">
-                <a:solidFill>
-                  <a:srgbClr val="3DAA6E"/>
-                </a:solidFill>
-              </a:rPr>
-              <a:t>&amp; Tools</a:t>
-            </a:r>
-            <a:endParaRPr lang="en-US" sz="800" dirty="0"/>
-          </a:p>
-        </p:txBody>
-      </p:sp>
-      <p:sp>
-        <p:nvSpPr>
-          <p:cNvPr id="194" name="Text 192"/>
-          <p:cNvSpPr txBox="1"/>
-          <p:nvPr/>
-        </p:nvSpPr>
-        <p:spPr>
-          <a:xfrm>
-            <a:off x="2413700" y="5132270"/>
-            <a:ext cx="1188720" cy="347472"/>
-          </a:xfrm>
-          <a:prstGeom prst="rect">
-            <a:avLst/>
-          </a:prstGeom>
-          <a:noFill/>
-          <a:ln/>
-        </p:spPr>
-        <p:txBody>
-          <a:bodyPr wrap="square" lIns="0" tIns="0" rIns="0" bIns="0" rtlCol="0" anchor="ctr"/>
-          <a:lstStyle/>
-          <a:p>
-            <a:pPr algn="ctr" indent="0" marL="0">
-              <a:buNone/>
-            </a:pPr>
-            <a:r>
-              <a:rPr lang="en-US" sz="800" b="1" dirty="0">
-                <a:solidFill>
-                  <a:srgbClr val="9B59B6"/>
-                </a:solidFill>
-              </a:rPr>
-              <a:t>Knowledge</a:t>
-            </a:r>
-            <a:endParaRPr lang="en-US" sz="800" dirty="0"/>
-          </a:p>
-          <a:p>
-            <a:pPr algn="ctr" indent="0" marL="0">
-              <a:buNone/>
-            </a:pPr>
-            <a:r>
-              <a:rPr lang="en-US" sz="800" b="1" dirty="0">
-                <a:solidFill>
-                  <a:srgbClr val="9B59B6"/>
-                </a:solidFill>
-              </a:rPr>
-              <a:t>&amp; Language</a:t>
-            </a:r>
-            <a:endParaRPr lang="en-US" sz="800" dirty="0"/>
-          </a:p>
-        </p:txBody>
-      </p:sp>
-      <p:sp>
-        <p:nvSpPr>
-          <p:cNvPr id="195" name="Text 193"/>
-          <p:cNvSpPr txBox="1"/>
-          <p:nvPr/>
-        </p:nvSpPr>
-        <p:spPr>
-          <a:xfrm>
-            <a:off x="1856273" y="3422901"/>
-            <a:ext cx="1188720" cy="347472"/>
-          </a:xfrm>
-          <a:prstGeom prst="rect">
-            <a:avLst/>
-          </a:prstGeom>
-          <a:noFill/>
-          <a:ln/>
-        </p:spPr>
-        <p:txBody>
-          <a:bodyPr wrap="square" lIns="0" tIns="0" rIns="0" bIns="0" rtlCol="0" anchor="ctr"/>
-          <a:lstStyle/>
-          <a:p>
-            <a:pPr algn="ctr" indent="0" marL="0">
-              <a:buNone/>
-            </a:pPr>
-            <a:r>
-              <a:rPr lang="en-US" sz="800" b="1" dirty="0">
-                <a:solidFill>
-                  <a:srgbClr val="E8A020"/>
-                </a:solidFill>
-              </a:rPr>
-              <a:t>Data</a:t>
-            </a:r>
-            <a:endParaRPr lang="en-US" sz="800" dirty="0"/>
-          </a:p>
-          <a:p>
-            <a:pPr algn="ctr" indent="0" marL="0">
-              <a:buNone/>
-            </a:pPr>
-            <a:r>
-              <a:rPr lang="en-US" sz="800" b="1" dirty="0">
-                <a:solidFill>
-                  <a:srgbClr val="E8A020"/>
-                </a:solidFill>
-              </a:rPr>
-              <a:t>&amp; ML</a:t>
-            </a:r>
-            <a:endParaRPr lang="en-US" sz="800" dirty="0"/>
-          </a:p>
-        </p:txBody>
-      </p:sp>
-      <p:sp>
-        <p:nvSpPr>
-          <p:cNvPr id="196" name="Text 194"/>
-          <p:cNvSpPr txBox="1"/>
-          <p:nvPr/>
-        </p:nvSpPr>
-        <p:spPr>
-          <a:xfrm>
-            <a:off x="320040" y="164592"/>
-            <a:ext cx="6400800" cy="438912"/>
-          </a:xfrm>
-          <a:prstGeom prst="rect">
-            <a:avLst/>
-          </a:prstGeom>
-          <a:noFill/>
-          <a:ln/>
-        </p:spPr>
-        <p:txBody>
-          <a:bodyPr wrap="square" lIns="0" tIns="0" rIns="0" bIns="0" rtlCol="0" anchor="ctr"/>
-          <a:lstStyle/>
-          <a:p>
-            <a:pPr indent="0" marL="0">
-              <a:buNone/>
-            </a:pPr>
-            <a:r>
-              <a:rPr lang="en-US" sz="2000" b="1" dirty="0">
-                <a:solidFill>
-                  <a:srgbClr val="E8F4FF"/>
-                </a:solidFill>
-                <a:latin typeface="Cambria" pitchFamily="34" charset="0"/>
-                <a:ea typeface="Cambria" pitchFamily="34" charset="-122"/>
-                <a:cs typeface="Cambria" pitchFamily="34" charset="-120"/>
-              </a:rPr>
-              <a:t>FoxBrain Benchmark Priority Radar</a:t>
-            </a:r>
-            <a:endParaRPr lang="en-US" sz="2000" dirty="0"/>
-          </a:p>
-        </p:txBody>
-      </p:sp>
-      <p:sp>
-        <p:nvSpPr>
-          <p:cNvPr id="197" name="Text 195"/>
-          <p:cNvSpPr txBox="1"/>
-          <p:nvPr/>
-        </p:nvSpPr>
-        <p:spPr>
-          <a:xfrm>
-            <a:off x="320040" y="621792"/>
-            <a:ext cx="6400800" cy="274320"/>
-          </a:xfrm>
-          <a:prstGeom prst="rect">
-            <a:avLst/>
-          </a:prstGeom>
-          <a:noFill/>
-          <a:ln/>
-        </p:spPr>
-        <p:txBody>
-          <a:bodyPr wrap="square" lIns="0" tIns="0" rIns="0" bIns="0" rtlCol="0" anchor="ctr"/>
-          <a:lstStyle/>
-          <a:p>
-            <a:pPr indent="0" marL="0">
-              <a:buNone/>
-            </a:pPr>
-            <a:r>
-              <a:rPr lang="en-US" sz="950" dirty="0">
-                <a:solidFill>
-                  <a:srgbClr val="5A8AAF"/>
-                </a:solidFill>
-              </a:rPr>
-              <a:t>Closer to center = higher strategic priority for FoxBrain evaluation</a:t>
-            </a:r>
-            <a:endParaRPr lang="en-US" sz="950" dirty="0"/>
-          </a:p>
-        </p:txBody>
-      </p:sp>
-      <p:sp>
-        <p:nvSpPr>
-          <p:cNvPr id="198" name="Shape 196"/>
-          <p:cNvSpPr/>
-          <p:nvPr/>
-        </p:nvSpPr>
-        <p:spPr>
-          <a:xfrm>
-            <a:off x="10607040" y="164592"/>
-            <a:ext cx="1371600" cy="658368"/>
-          </a:xfrm>
-          <a:prstGeom prst="roundRect">
-            <a:avLst>
-              <a:gd name="adj" fmla="val 13889"/>
-            </a:avLst>
-          </a:prstGeom>
-          <a:solidFill>
-            <a:srgbClr val="7C3AED"/>
-          </a:solidFill>
-          <a:ln/>
-        </p:spPr>
-      </p:sp>
-      <p:sp>
-        <p:nvSpPr>
-          <p:cNvPr id="199" name="Text 197"/>
-          <p:cNvSpPr txBox="1"/>
-          <p:nvPr/>
-        </p:nvSpPr>
-        <p:spPr>
-          <a:xfrm>
-            <a:off x="10607040" y="182880"/>
-            <a:ext cx="1371600" cy="274320"/>
-          </a:xfrm>
-          <a:prstGeom prst="rect">
-            <a:avLst/>
-          </a:prstGeom>
-          <a:noFill/>
-          <a:ln/>
-        </p:spPr>
-        <p:txBody>
-          <a:bodyPr wrap="square" lIns="0" tIns="0" rIns="0" bIns="0" rtlCol="0" anchor="ctr"/>
-          <a:lstStyle/>
-          <a:p>
-            <a:pPr algn="ctr" indent="0" marL="0">
-              <a:buNone/>
-            </a:pPr>
-            <a:r>
-              <a:rPr lang="en-US" sz="1400" b="1" dirty="0">
-                <a:solidFill>
-                  <a:srgbClr val="FFFFFF"/>
-                </a:solidFill>
-                <a:latin typeface="Cambria" pitchFamily="34" charset="0"/>
-                <a:ea typeface="Cambria" pitchFamily="34" charset="-122"/>
-                <a:cs typeface="Cambria" pitchFamily="34" charset="-120"/>
-              </a:rPr>
-              <a:t>FOX</a:t>
-            </a:r>
-            <a:endParaRPr lang="en-US" sz="1400" dirty="0"/>
-          </a:p>
-        </p:txBody>
-      </p:sp>
-      <p:sp>
-        <p:nvSpPr>
-          <p:cNvPr id="200" name="Text 198"/>
-          <p:cNvSpPr txBox="1"/>
-          <p:nvPr/>
-        </p:nvSpPr>
-        <p:spPr>
-          <a:xfrm>
-            <a:off x="10607040" y="457200"/>
-            <a:ext cx="1371600" cy="274320"/>
-          </a:xfrm>
-          <a:prstGeom prst="rect">
-            <a:avLst/>
-          </a:prstGeom>
-          <a:noFill/>
-          <a:ln/>
-        </p:spPr>
-        <p:txBody>
-          <a:bodyPr wrap="square" lIns="0" tIns="0" rIns="0" bIns="0" rtlCol="0" anchor="ctr"/>
-          <a:lstStyle/>
-          <a:p>
-            <a:pPr algn="ctr" indent="0" marL="0">
-              <a:buNone/>
-            </a:pPr>
-            <a:r>
-              <a:rPr lang="en-US" sz="1000" b="1" dirty="0">
-                <a:solidFill>
-                  <a:srgbClr val="C4B5FD"/>
-                </a:solidFill>
-              </a:rPr>
-              <a:t>BRAIN</a:t>
-            </a:r>
-            <a:endParaRPr lang="en-US" sz="1000" dirty="0"/>
-          </a:p>
-        </p:txBody>
-      </p:sp>
-      <p:sp>
-        <p:nvSpPr>
-          <p:cNvPr id="201" name="Text 199"/>
+          <p:cNvPr id="144" name="Text 142"/>
           <p:cNvSpPr txBox="1"/>
           <p:nvPr/>
         </p:nvSpPr>
         <p:spPr>
           <a:xfrm>
             <a:off x="8979408" y="749808"/>
-            <a:ext cx="3108960" cy="219456"/>
+            <a:ext cx="3154680" cy="219456"/>
           </a:xfrm>
           <a:prstGeom prst="rect">
             <a:avLst/>
@@ -7308,14 +5543,14 @@
       </p:sp>
       <p:sp>
         <p:nvSpPr>
-          <p:cNvPr id="202" name="Shape 200"/>
+          <p:cNvPr id="145" name="Shape 143"/>
           <p:cNvSpPr/>
           <p:nvPr/>
         </p:nvSpPr>
         <p:spPr>
           <a:xfrm>
             <a:off x="8979408" y="1005840"/>
-            <a:ext cx="3063240" cy="0"/>
+            <a:ext cx="3108960" cy="0"/>
           </a:xfrm>
           <a:prstGeom prst="line">
             <a:avLst/>
@@ -7331,13 +5566,185 @@
       </p:sp>
       <p:sp>
         <p:nvSpPr>
-          <p:cNvPr id="203" name="Shape 201"/>
-          <p:cNvSpPr/>
-          <p:nvPr/>
-        </p:nvSpPr>
-        <p:spPr>
-          <a:xfrm>
-            <a:off x="320040" y="6455664"/>
+          <p:cNvPr id="146" name="Text 144"/>
+          <p:cNvSpPr txBox="1"/>
+          <p:nvPr/>
+        </p:nvSpPr>
+        <p:spPr>
+          <a:xfrm>
+            <a:off x="320040" y="164592"/>
+            <a:ext cx="8046720" cy="420624"/>
+          </a:xfrm>
+          <a:prstGeom prst="rect">
+            <a:avLst/>
+          </a:prstGeom>
+          <a:noFill/>
+          <a:ln/>
+        </p:spPr>
+        <p:txBody>
+          <a:bodyPr wrap="square" lIns="0" tIns="0" rIns="0" bIns="0" rtlCol="0" anchor="ctr"/>
+          <a:lstStyle/>
+          <a:p>
+            <a:pPr indent="0" marL="0">
+              <a:buNone/>
+            </a:pPr>
+            <a:r>
+              <a:rPr lang="en-US" sz="2000" b="1" dirty="0">
+                <a:solidFill>
+                  <a:srgbClr val="E8F4FF"/>
+                </a:solidFill>
+                <a:latin typeface="Cambria" pitchFamily="34" charset="0"/>
+                <a:ea typeface="Cambria" pitchFamily="34" charset="-122"/>
+                <a:cs typeface="Cambria" pitchFamily="34" charset="-120"/>
+              </a:rPr>
+              <a:t>FoxBrain Priority Radar — Act Now</a:t>
+            </a:r>
+            <a:endParaRPr lang="en-US" sz="2000" dirty="0"/>
+          </a:p>
+        </p:txBody>
+      </p:sp>
+      <p:sp>
+        <p:nvSpPr>
+          <p:cNvPr id="147" name="Text 145"/>
+          <p:cNvSpPr txBox="1"/>
+          <p:nvPr/>
+        </p:nvSpPr>
+        <p:spPr>
+          <a:xfrm>
+            <a:off x="320040" y="603504"/>
+            <a:ext cx="8046720" cy="256032"/>
+          </a:xfrm>
+          <a:prstGeom prst="rect">
+            <a:avLst/>
+          </a:prstGeom>
+          <a:noFill/>
+          <a:ln/>
+        </p:spPr>
+        <p:txBody>
+          <a:bodyPr wrap="square" lIns="0" tIns="0" rIns="0" bIns="0" rtlCol="0" anchor="ctr"/>
+          <a:lstStyle/>
+          <a:p>
+            <a:pPr indent="0" marL="0">
+              <a:buNone/>
+            </a:pPr>
+            <a:r>
+              <a:rPr lang="en-US" sz="950" dirty="0">
+                <a:solidFill>
+                  <a:srgbClr val="5A8AAF"/>
+                </a:solidFill>
+              </a:rPr>
+              <a:t>CRITICAL &amp; HIGH benchmarks only · Closer to center = evaluate first</a:t>
+            </a:r>
+            <a:endParaRPr lang="en-US" sz="950" dirty="0"/>
+          </a:p>
+        </p:txBody>
+      </p:sp>
+      <p:sp>
+        <p:nvSpPr>
+          <p:cNvPr id="148" name="Shape 146"/>
+          <p:cNvSpPr/>
+          <p:nvPr/>
+        </p:nvSpPr>
+        <p:spPr>
+          <a:xfrm>
+            <a:off x="11503152" y="164592"/>
+            <a:ext cx="548640" cy="658368"/>
+          </a:xfrm>
+          <a:prstGeom prst="roundRect">
+            <a:avLst>
+              <a:gd name="adj" fmla="val 13333"/>
+            </a:avLst>
+          </a:prstGeom>
+          <a:solidFill>
+            <a:srgbClr val="7C3AED"/>
+          </a:solidFill>
+          <a:ln/>
+        </p:spPr>
+      </p:sp>
+      <p:sp>
+        <p:nvSpPr>
+          <p:cNvPr id="149" name="Text 147"/>
+          <p:cNvSpPr txBox="1"/>
+          <p:nvPr/>
+        </p:nvSpPr>
+        <p:spPr>
+          <a:xfrm>
+            <a:off x="11484864" y="192024"/>
+            <a:ext cx="585216" cy="256032"/>
+          </a:xfrm>
+          <a:prstGeom prst="rect">
+            <a:avLst/>
+          </a:prstGeom>
+          <a:noFill/>
+          <a:ln/>
+        </p:spPr>
+        <p:txBody>
+          <a:bodyPr wrap="square" lIns="0" tIns="0" rIns="0" bIns="0" rtlCol="0" anchor="ctr"/>
+          <a:lstStyle/>
+          <a:p>
+            <a:pPr algn="ctr" indent="0" marL="0">
+              <a:buNone/>
+            </a:pPr>
+            <a:r>
+              <a:rPr lang="en-US" sz="900" b="1" dirty="0">
+                <a:solidFill>
+                  <a:srgbClr val="FFFFFF"/>
+                </a:solidFill>
+                <a:latin typeface="Cambria" pitchFamily="34" charset="0"/>
+                <a:ea typeface="Cambria" pitchFamily="34" charset="-122"/>
+                <a:cs typeface="Cambria" pitchFamily="34" charset="-120"/>
+              </a:rPr>
+              <a:t>FOX</a:t>
+            </a:r>
+            <a:endParaRPr lang="en-US" sz="900" dirty="0"/>
+          </a:p>
+        </p:txBody>
+      </p:sp>
+      <p:sp>
+        <p:nvSpPr>
+          <p:cNvPr id="150" name="Text 148"/>
+          <p:cNvSpPr txBox="1"/>
+          <p:nvPr/>
+        </p:nvSpPr>
+        <p:spPr>
+          <a:xfrm>
+            <a:off x="11484864" y="457200"/>
+            <a:ext cx="585216" cy="201168"/>
+          </a:xfrm>
+          <a:prstGeom prst="rect">
+            <a:avLst/>
+          </a:prstGeom>
+          <a:noFill/>
+          <a:ln/>
+        </p:spPr>
+        <p:txBody>
+          <a:bodyPr wrap="square" lIns="0" tIns="0" rIns="0" bIns="0" rtlCol="0" anchor="ctr"/>
+          <a:lstStyle/>
+          <a:p>
+            <a:pPr algn="ctr" indent="0" marL="0">
+              <a:buNone/>
+            </a:pPr>
+            <a:r>
+              <a:rPr lang="en-US" sz="650" b="1" dirty="0">
+                <a:solidFill>
+                  <a:srgbClr val="C4B5FD"/>
+                </a:solidFill>
+              </a:rPr>
+              <a:t>BRAIN</a:t>
+            </a:r>
+            <a:endParaRPr lang="en-US" sz="650" dirty="0"/>
+          </a:p>
+        </p:txBody>
+      </p:sp>
+      <p:sp>
+        <p:nvSpPr>
+          <p:cNvPr id="151" name="Shape 149"/>
+          <p:cNvSpPr/>
+          <p:nvPr/>
+        </p:nvSpPr>
+        <p:spPr>
+          <a:xfrm>
+            <a:off x="320040" y="6464808"/>
             <a:ext cx="118872" cy="118872"/>
           </a:xfrm>
           <a:prstGeom prst="ellipse">
@@ -7351,13 +5758,13 @@
       </p:sp>
       <p:sp>
         <p:nvSpPr>
-          <p:cNvPr id="204" name="Text 202"/>
-          <p:cNvSpPr txBox="1"/>
-          <p:nvPr/>
-        </p:nvSpPr>
-        <p:spPr>
-          <a:xfrm>
-            <a:off x="493776" y="6437376"/>
+          <p:cNvPr id="152" name="Text 150"/>
+          <p:cNvSpPr txBox="1"/>
+          <p:nvPr/>
+        </p:nvSpPr>
+        <p:spPr>
+          <a:xfrm>
+            <a:off x="493776" y="6446520"/>
             <a:ext cx="2103120" cy="155448"/>
           </a:xfrm>
           <a:prstGeom prst="rect">
@@ -7387,13 +5794,13 @@
       </p:sp>
       <p:sp>
         <p:nvSpPr>
-          <p:cNvPr id="205" name="Shape 203"/>
-          <p:cNvSpPr/>
-          <p:nvPr/>
-        </p:nvSpPr>
-        <p:spPr>
-          <a:xfrm>
-            <a:off x="2651760" y="6455664"/>
+          <p:cNvPr id="153" name="Shape 151"/>
+          <p:cNvSpPr/>
+          <p:nvPr/>
+        </p:nvSpPr>
+        <p:spPr>
+          <a:xfrm>
+            <a:off x="2651760" y="6464808"/>
             <a:ext cx="118872" cy="118872"/>
           </a:xfrm>
           <a:prstGeom prst="ellipse">
@@ -7407,13 +5814,13 @@
       </p:sp>
       <p:sp>
         <p:nvSpPr>
-          <p:cNvPr id="206" name="Text 204"/>
-          <p:cNvSpPr txBox="1"/>
-          <p:nvPr/>
-        </p:nvSpPr>
-        <p:spPr>
-          <a:xfrm>
-            <a:off x="2825496" y="6437376"/>
+          <p:cNvPr id="154" name="Text 152"/>
+          <p:cNvSpPr txBox="1"/>
+          <p:nvPr/>
+        </p:nvSpPr>
+        <p:spPr>
+          <a:xfrm>
+            <a:off x="2825496" y="6446520"/>
             <a:ext cx="2103120" cy="155448"/>
           </a:xfrm>
           <a:prstGeom prst="rect">
@@ -7443,33 +5850,33 @@
       </p:sp>
       <p:sp>
         <p:nvSpPr>
-          <p:cNvPr id="207" name="Shape 205"/>
-          <p:cNvSpPr/>
-          <p:nvPr/>
-        </p:nvSpPr>
-        <p:spPr>
-          <a:xfrm>
-            <a:off x="4983480" y="6455664"/>
+          <p:cNvPr id="155" name="Shape 153"/>
+          <p:cNvSpPr/>
+          <p:nvPr/>
+        </p:nvSpPr>
+        <p:spPr>
+          <a:xfrm>
+            <a:off x="4983480" y="6464808"/>
             <a:ext cx="118872" cy="118872"/>
           </a:xfrm>
           <a:prstGeom prst="ellipse">
             <a:avLst/>
           </a:prstGeom>
           <a:solidFill>
-            <a:srgbClr val="70B8E8"/>
-          </a:solidFill>
-          <a:ln/>
-        </p:spPr>
-      </p:sp>
-      <p:sp>
-        <p:nvSpPr>
-          <p:cNvPr id="208" name="Text 206"/>
-          <p:cNvSpPr txBox="1"/>
-          <p:nvPr/>
-        </p:nvSpPr>
-        <p:spPr>
-          <a:xfrm>
-            <a:off x="5157216" y="6437376"/>
+            <a:srgbClr val="00E5A0"/>
+          </a:solidFill>
+          <a:ln/>
+        </p:spPr>
+      </p:sp>
+      <p:sp>
+        <p:nvSpPr>
+          <p:cNvPr id="156" name="Text 154"/>
+          <p:cNvSpPr txBox="1"/>
+          <p:nvPr/>
+        </p:nvSpPr>
+        <p:spPr>
+          <a:xfrm>
+            <a:off x="5157216" y="6446520"/>
             <a:ext cx="2103120" cy="155448"/>
           </a:xfrm>
           <a:prstGeom prst="rect">
@@ -7491,7 +5898,7 @@
                   <a:srgbClr val="7A9AB5"/>
                 </a:solidFill>
               </a:rPr>
-              <a:t>MEDIUM  On roadmap</a:t>
+              <a:t>✓ Done  Already evaluated</a:t>
             </a:r>
             <a:endParaRPr lang="en-US" sz="800" dirty="0"/>
           </a:p>
@@ -7499,126 +5906,14 @@
       </p:sp>
       <p:sp>
         <p:nvSpPr>
-          <p:cNvPr id="209" name="Shape 207"/>
-          <p:cNvSpPr/>
-          <p:nvPr/>
-        </p:nvSpPr>
-        <p:spPr>
-          <a:xfrm>
-            <a:off x="7315200" y="6455664"/>
-            <a:ext cx="118872" cy="118872"/>
-          </a:xfrm>
-          <a:prstGeom prst="ellipse">
-            <a:avLst/>
-          </a:prstGeom>
-          <a:solidFill>
-            <a:srgbClr val="8888CC"/>
-          </a:solidFill>
-          <a:ln/>
-        </p:spPr>
-      </p:sp>
-      <p:sp>
-        <p:nvSpPr>
-          <p:cNvPr id="210" name="Text 208"/>
-          <p:cNvSpPr txBox="1"/>
-          <p:nvPr/>
-        </p:nvSpPr>
-        <p:spPr>
-          <a:xfrm>
-            <a:off x="7488936" y="6437376"/>
-            <a:ext cx="2103120" cy="155448"/>
-          </a:xfrm>
-          <a:prstGeom prst="rect">
-            <a:avLst/>
-          </a:prstGeom>
-          <a:noFill/>
-          <a:ln/>
-        </p:spPr>
-        <p:txBody>
-          <a:bodyPr wrap="square" lIns="0" tIns="0" rIns="0" bIns="0" rtlCol="0" anchor="ctr"/>
-          <a:lstStyle/>
-          <a:p>
-            <a:pPr indent="0" marL="0">
-              <a:buNone/>
-            </a:pPr>
-            <a:r>
-              <a:rPr lang="en-US" sz="800" dirty="0">
-                <a:solidFill>
-                  <a:srgbClr val="7A9AB5"/>
-                </a:solidFill>
-              </a:rPr>
-              <a:t>MONITOR  Emerging / watch</a:t>
-            </a:r>
-            <a:endParaRPr lang="en-US" sz="800" dirty="0"/>
-          </a:p>
-        </p:txBody>
-      </p:sp>
-      <p:sp>
-        <p:nvSpPr>
-          <p:cNvPr id="211" name="Shape 209"/>
-          <p:cNvSpPr/>
-          <p:nvPr/>
-        </p:nvSpPr>
-        <p:spPr>
-          <a:xfrm>
-            <a:off x="9646920" y="6455664"/>
-            <a:ext cx="118872" cy="118872"/>
-          </a:xfrm>
-          <a:prstGeom prst="ellipse">
-            <a:avLst/>
-          </a:prstGeom>
-          <a:solidFill>
-            <a:srgbClr val="00E5A0"/>
-          </a:solidFill>
-          <a:ln/>
-        </p:spPr>
-      </p:sp>
-      <p:sp>
-        <p:nvSpPr>
-          <p:cNvPr id="212" name="Text 210"/>
-          <p:cNvSpPr txBox="1"/>
-          <p:nvPr/>
-        </p:nvSpPr>
-        <p:spPr>
-          <a:xfrm>
-            <a:off x="9820656" y="6437376"/>
-            <a:ext cx="2103120" cy="155448"/>
-          </a:xfrm>
-          <a:prstGeom prst="rect">
-            <a:avLst/>
-          </a:prstGeom>
-          <a:noFill/>
-          <a:ln/>
-        </p:spPr>
-        <p:txBody>
-          <a:bodyPr wrap="square" lIns="0" tIns="0" rIns="0" bIns="0" rtlCol="0" anchor="ctr"/>
-          <a:lstStyle/>
-          <a:p>
-            <a:pPr indent="0" marL="0">
-              <a:buNone/>
-            </a:pPr>
-            <a:r>
-              <a:rPr lang="en-US" sz="800" dirty="0">
-                <a:solidFill>
-                  <a:srgbClr val="7A9AB5"/>
-                </a:solidFill>
-              </a:rPr>
-              <a:t>✓ Done  Already evaluated</a:t>
-            </a:r>
-            <a:endParaRPr lang="en-US" sz="800" dirty="0"/>
-          </a:p>
-        </p:txBody>
-      </p:sp>
-      <p:sp>
-        <p:nvSpPr>
-          <p:cNvPr id="213" name="Text 211"/>
-          <p:cNvSpPr txBox="1"/>
-          <p:nvPr/>
-        </p:nvSpPr>
-        <p:spPr>
-          <a:xfrm>
-            <a:off x="320040" y="6656832"/>
-            <a:ext cx="11521440" cy="164592"/>
+          <p:cNvPr id="157" name="Text 155"/>
+          <p:cNvSpPr txBox="1"/>
+          <p:nvPr/>
+        </p:nvSpPr>
+        <p:spPr>
+          <a:xfrm>
+            <a:off x="320040" y="6675120"/>
+            <a:ext cx="11521440" cy="146304"/>
           </a:xfrm>
           <a:prstGeom prst="rect">
             <a:avLst/>
@@ -7639,7 +5934,7 @@
                   <a:srgbClr val="1E3A52"/>
                 </a:solidFill>
               </a:rPr>
-              <a:t>EXECUTIVE VIEW  ·  Full scores &amp; headroom at FoxBrain EvalHub</a:t>
+              <a:t>Full SOTA scores &amp; headroom at FoxBrain EvalHub</a:t>
             </a:r>
             <a:endParaRPr lang="en-US" sz="700" dirty="0"/>
           </a:p>
@@ -7692,6 +5987,3155 @@
       </p:sp>
       <p:sp>
         <p:nvSpPr>
+          <p:cNvPr id="3" name="Shape 1"/>
+          <p:cNvSpPr/>
+          <p:nvPr/>
+        </p:nvSpPr>
+        <p:spPr>
+          <a:xfrm>
+            <a:off x="5120640" y="3611880"/>
+            <a:ext cx="-2720387" cy="-728926"/>
+          </a:xfrm>
+          <a:prstGeom prst="line">
+            <a:avLst/>
+          </a:prstGeom>
+          <a:noFill/>
+          <a:ln w="6350">
+            <a:solidFill>
+              <a:srgbClr val="1E3A52"/>
+            </a:solidFill>
+            <a:prstDash val="dash"/>
+          </a:ln>
+        </p:spPr>
+      </p:sp>
+      <p:sp>
+        <p:nvSpPr>
+          <p:cNvPr id="4" name="Shape 2"/>
+          <p:cNvSpPr/>
+          <p:nvPr/>
+        </p:nvSpPr>
+        <p:spPr>
+          <a:xfrm>
+            <a:off x="5120640" y="3611880"/>
+            <a:ext cx="-434629" cy="-2782613"/>
+          </a:xfrm>
+          <a:prstGeom prst="line">
+            <a:avLst/>
+          </a:prstGeom>
+          <a:noFill/>
+          <a:ln w="6350">
+            <a:solidFill>
+              <a:srgbClr val="1E3A52"/>
+            </a:solidFill>
+            <a:prstDash val="dash"/>
+          </a:ln>
+        </p:spPr>
+      </p:sp>
+      <p:sp>
+        <p:nvSpPr>
+          <p:cNvPr id="5" name="Shape 3"/>
+          <p:cNvSpPr/>
+          <p:nvPr/>
+        </p:nvSpPr>
+        <p:spPr>
+          <a:xfrm>
+            <a:off x="5120640" y="3611880"/>
+            <a:ext cx="2368526" cy="-1523785"/>
+          </a:xfrm>
+          <a:prstGeom prst="line">
+            <a:avLst/>
+          </a:prstGeom>
+          <a:noFill/>
+          <a:ln w="6350">
+            <a:solidFill>
+              <a:srgbClr val="1E3A52"/>
+            </a:solidFill>
+            <a:prstDash val="dash"/>
+          </a:ln>
+        </p:spPr>
+      </p:sp>
+      <p:sp>
+        <p:nvSpPr>
+          <p:cNvPr id="6" name="Shape 4"/>
+          <p:cNvSpPr/>
+          <p:nvPr/>
+        </p:nvSpPr>
+        <p:spPr>
+          <a:xfrm>
+            <a:off x="5120640" y="3611880"/>
+            <a:ext cx="2816312" cy="15047"/>
+          </a:xfrm>
+          <a:prstGeom prst="line">
+            <a:avLst/>
+          </a:prstGeom>
+          <a:noFill/>
+          <a:ln w="6350">
+            <a:solidFill>
+              <a:srgbClr val="1E3A52"/>
+            </a:solidFill>
+            <a:prstDash val="dash"/>
+          </a:ln>
+        </p:spPr>
+      </p:sp>
+      <p:sp>
+        <p:nvSpPr>
+          <p:cNvPr id="7" name="Shape 5"/>
+          <p:cNvSpPr/>
+          <p:nvPr/>
+        </p:nvSpPr>
+        <p:spPr>
+          <a:xfrm>
+            <a:off x="5120640" y="3611880"/>
+            <a:ext cx="1126237" cy="2581362"/>
+          </a:xfrm>
+          <a:prstGeom prst="line">
+            <a:avLst/>
+          </a:prstGeom>
+          <a:noFill/>
+          <a:ln w="6350">
+            <a:solidFill>
+              <a:srgbClr val="1E3A52"/>
+            </a:solidFill>
+            <a:prstDash val="dash"/>
+          </a:ln>
+        </p:spPr>
+      </p:sp>
+      <p:sp>
+        <p:nvSpPr>
+          <p:cNvPr id="8" name="Shape 6"/>
+          <p:cNvSpPr/>
+          <p:nvPr/>
+        </p:nvSpPr>
+        <p:spPr>
+          <a:xfrm>
+            <a:off x="5120640" y="3611880"/>
+            <a:ext cx="-1472823" cy="2400548"/>
+          </a:xfrm>
+          <a:prstGeom prst="line">
+            <a:avLst/>
+          </a:prstGeom>
+          <a:noFill/>
+          <a:ln w="6350">
+            <a:solidFill>
+              <a:srgbClr val="1E3A52"/>
+            </a:solidFill>
+            <a:prstDash val="dash"/>
+          </a:ln>
+        </p:spPr>
+      </p:sp>
+      <p:sp>
+        <p:nvSpPr>
+          <p:cNvPr id="9" name="Shape 7"/>
+          <p:cNvSpPr/>
+          <p:nvPr/>
+        </p:nvSpPr>
+        <p:spPr>
+          <a:xfrm>
+            <a:off x="5120640" y="3611880"/>
+            <a:ext cx="-2728021" cy="699815"/>
+          </a:xfrm>
+          <a:prstGeom prst="line">
+            <a:avLst/>
+          </a:prstGeom>
+          <a:noFill/>
+          <a:ln w="6350">
+            <a:solidFill>
+              <a:srgbClr val="1E3A52"/>
+            </a:solidFill>
+            <a:prstDash val="dash"/>
+          </a:ln>
+        </p:spPr>
+      </p:sp>
+      <p:sp>
+        <p:nvSpPr>
+          <p:cNvPr id="10" name="Shape 8"/>
+          <p:cNvSpPr/>
+          <p:nvPr/>
+        </p:nvSpPr>
+        <p:spPr>
+          <a:xfrm>
+            <a:off x="2487168" y="978408"/>
+            <a:ext cx="5266944" cy="5266944"/>
+          </a:xfrm>
+          <a:prstGeom prst="ellipse">
+            <a:avLst/>
+          </a:prstGeom>
+          <a:solidFill>
+            <a:srgbClr val="111A28">
+              <a:alpha val="35000"/>
+            </a:srgbClr>
+          </a:solidFill>
+          <a:ln w="19050">
+            <a:solidFill>
+              <a:srgbClr val="111A28">
+                <a:alpha val="45000"/>
+              </a:srgbClr>
+            </a:solidFill>
+            <a:prstDash val="solid"/>
+          </a:ln>
+        </p:spPr>
+      </p:sp>
+      <p:sp>
+        <p:nvSpPr>
+          <p:cNvPr id="11" name="Shape 9"/>
+          <p:cNvSpPr/>
+          <p:nvPr/>
+        </p:nvSpPr>
+        <p:spPr>
+          <a:xfrm>
+            <a:off x="3090672" y="1581912"/>
+            <a:ext cx="4059936" cy="4059936"/>
+          </a:xfrm>
+          <a:prstGeom prst="ellipse">
+            <a:avLst/>
+          </a:prstGeom>
+          <a:solidFill>
+            <a:srgbClr val="1A3E5A">
+              <a:alpha val="22000"/>
+            </a:srgbClr>
+          </a:solidFill>
+          <a:ln w="19050">
+            <a:solidFill>
+              <a:srgbClr val="1A3E5A">
+                <a:alpha val="45000"/>
+              </a:srgbClr>
+            </a:solidFill>
+            <a:prstDash val="solid"/>
+          </a:ln>
+        </p:spPr>
+      </p:sp>
+      <p:sp>
+        <p:nvSpPr>
+          <p:cNvPr id="12" name="Text 10"/>
+          <p:cNvSpPr txBox="1"/>
+          <p:nvPr/>
+        </p:nvSpPr>
+        <p:spPr>
+          <a:xfrm>
+            <a:off x="5156616" y="5374220"/>
+            <a:ext cx="822960" cy="219456"/>
+          </a:xfrm>
+          <a:prstGeom prst="rect">
+            <a:avLst/>
+          </a:prstGeom>
+          <a:noFill/>
+          <a:ln/>
+        </p:spPr>
+        <p:txBody>
+          <a:bodyPr wrap="square" lIns="0" tIns="0" rIns="0" bIns="0" rtlCol="0" anchor="ctr"/>
+          <a:lstStyle/>
+          <a:p>
+            <a:pPr algn="r" indent="0" marL="0">
+              <a:buNone/>
+            </a:pPr>
+            <a:r>
+              <a:rPr lang="en-US" sz="750" b="1" dirty="0">
+                <a:solidFill>
+                  <a:srgbClr val="70B8E8"/>
+                </a:solidFill>
+              </a:rPr>
+              <a:t>MEDIUM</a:t>
+            </a:r>
+            <a:endParaRPr lang="en-US" sz="750" dirty="0"/>
+          </a:p>
+        </p:txBody>
+      </p:sp>
+      <p:sp>
+        <p:nvSpPr>
+          <p:cNvPr id="13" name="Text 11"/>
+          <p:cNvSpPr txBox="1"/>
+          <p:nvPr/>
+        </p:nvSpPr>
+        <p:spPr>
+          <a:xfrm>
+            <a:off x="5411667" y="5921181"/>
+            <a:ext cx="822960" cy="219456"/>
+          </a:xfrm>
+          <a:prstGeom prst="rect">
+            <a:avLst/>
+          </a:prstGeom>
+          <a:noFill/>
+          <a:ln/>
+        </p:spPr>
+        <p:txBody>
+          <a:bodyPr wrap="square" lIns="0" tIns="0" rIns="0" bIns="0" rtlCol="0" anchor="ctr"/>
+          <a:lstStyle/>
+          <a:p>
+            <a:pPr algn="r" indent="0" marL="0">
+              <a:buNone/>
+            </a:pPr>
+            <a:r>
+              <a:rPr lang="en-US" sz="750" b="1" dirty="0">
+                <a:solidFill>
+                  <a:srgbClr val="A8A8E8"/>
+                </a:solidFill>
+              </a:rPr>
+              <a:t>MONITOR</a:t>
+            </a:r>
+            <a:endParaRPr lang="en-US" sz="750" dirty="0"/>
+          </a:p>
+        </p:txBody>
+      </p:sp>
+      <p:sp>
+        <p:nvSpPr>
+          <p:cNvPr id="14" name="Shape 12"/>
+          <p:cNvSpPr/>
+          <p:nvPr/>
+        </p:nvSpPr>
+        <p:spPr>
+          <a:xfrm>
+            <a:off x="3894242" y="2252890"/>
+            <a:ext cx="106070" cy="106070"/>
+          </a:xfrm>
+          <a:prstGeom prst="ellipse">
+            <a:avLst/>
+          </a:prstGeom>
+          <a:solidFill>
+            <a:srgbClr val="E85D4A"/>
+          </a:solidFill>
+          <a:ln w="6350">
+            <a:solidFill>
+              <a:srgbClr val="0D1B2A"/>
+            </a:solidFill>
+            <a:prstDash val="solid"/>
+          </a:ln>
+        </p:spPr>
+      </p:sp>
+      <p:sp>
+        <p:nvSpPr>
+          <p:cNvPr id="15" name="Text 13"/>
+          <p:cNvSpPr txBox="1"/>
+          <p:nvPr/>
+        </p:nvSpPr>
+        <p:spPr>
+          <a:xfrm>
+            <a:off x="3721481" y="2105655"/>
+            <a:ext cx="256032" cy="173736"/>
+          </a:xfrm>
+          <a:prstGeom prst="rect">
+            <a:avLst/>
+          </a:prstGeom>
+          <a:noFill/>
+          <a:ln/>
+        </p:spPr>
+        <p:txBody>
+          <a:bodyPr wrap="square" lIns="0" tIns="0" rIns="0" bIns="0" rtlCol="0" anchor="ctr"/>
+          <a:lstStyle/>
+          <a:p>
+            <a:pPr algn="ctr" indent="0" marL="0">
+              <a:buNone/>
+            </a:pPr>
+            <a:r>
+              <a:rPr lang="en-US" sz="700" b="1" dirty="0">
+                <a:solidFill>
+                  <a:srgbClr val="E85D4A"/>
+                </a:solidFill>
+              </a:rPr>
+              <a:t>6</a:t>
+            </a:r>
+            <a:endParaRPr lang="en-US" sz="700" dirty="0"/>
+          </a:p>
+        </p:txBody>
+      </p:sp>
+      <p:sp>
+        <p:nvSpPr>
+          <p:cNvPr id="16" name="Shape 14"/>
+          <p:cNvSpPr/>
+          <p:nvPr/>
+        </p:nvSpPr>
+        <p:spPr>
+          <a:xfrm>
+            <a:off x="2911483" y="2557166"/>
+            <a:ext cx="106070" cy="106070"/>
+          </a:xfrm>
+          <a:prstGeom prst="ellipse">
+            <a:avLst/>
+          </a:prstGeom>
+          <a:solidFill>
+            <a:srgbClr val="E85D4A"/>
+          </a:solidFill>
+          <a:ln w="6350">
+            <a:solidFill>
+              <a:srgbClr val="0D1B2A"/>
+            </a:solidFill>
+            <a:prstDash val="solid"/>
+          </a:ln>
+        </p:spPr>
+      </p:sp>
+      <p:sp>
+        <p:nvSpPr>
+          <p:cNvPr id="17" name="Text 15"/>
+          <p:cNvSpPr txBox="1"/>
+          <p:nvPr/>
+        </p:nvSpPr>
+        <p:spPr>
+          <a:xfrm>
+            <a:off x="2703818" y="2457120"/>
+            <a:ext cx="256032" cy="173736"/>
+          </a:xfrm>
+          <a:prstGeom prst="rect">
+            <a:avLst/>
+          </a:prstGeom>
+          <a:noFill/>
+          <a:ln/>
+        </p:spPr>
+        <p:txBody>
+          <a:bodyPr wrap="square" lIns="0" tIns="0" rIns="0" bIns="0" rtlCol="0" anchor="ctr"/>
+          <a:lstStyle/>
+          <a:p>
+            <a:pPr algn="ctr" indent="0" marL="0">
+              <a:buNone/>
+            </a:pPr>
+            <a:r>
+              <a:rPr lang="en-US" sz="700" b="1" dirty="0">
+                <a:solidFill>
+                  <a:srgbClr val="E85D4A"/>
+                </a:solidFill>
+              </a:rPr>
+              <a:t>7</a:t>
+            </a:r>
+            <a:endParaRPr lang="en-US" sz="700" dirty="0"/>
+          </a:p>
+        </p:txBody>
+      </p:sp>
+      <p:sp>
+        <p:nvSpPr>
+          <p:cNvPr id="18" name="Shape 16"/>
+          <p:cNvSpPr/>
+          <p:nvPr/>
+        </p:nvSpPr>
+        <p:spPr>
+          <a:xfrm>
+            <a:off x="4301598" y="1308188"/>
+            <a:ext cx="106070" cy="106070"/>
+          </a:xfrm>
+          <a:prstGeom prst="ellipse">
+            <a:avLst/>
+          </a:prstGeom>
+          <a:solidFill>
+            <a:srgbClr val="E85D4A"/>
+          </a:solidFill>
+          <a:ln w="6350">
+            <a:solidFill>
+              <a:srgbClr val="0D1B2A"/>
+            </a:solidFill>
+            <a:prstDash val="solid"/>
+          </a:ln>
+        </p:spPr>
+      </p:sp>
+      <p:sp>
+        <p:nvSpPr>
+          <p:cNvPr id="19" name="Text 17"/>
+          <p:cNvSpPr txBox="1"/>
+          <p:nvPr/>
+        </p:nvSpPr>
+        <p:spPr>
+          <a:xfrm>
+            <a:off x="4179478" y="1131282"/>
+            <a:ext cx="256032" cy="173736"/>
+          </a:xfrm>
+          <a:prstGeom prst="rect">
+            <a:avLst/>
+          </a:prstGeom>
+          <a:noFill/>
+          <a:ln/>
+        </p:spPr>
+        <p:txBody>
+          <a:bodyPr wrap="square" lIns="0" tIns="0" rIns="0" bIns="0" rtlCol="0" anchor="ctr"/>
+          <a:lstStyle/>
+          <a:p>
+            <a:pPr algn="ctr" indent="0" marL="0">
+              <a:buNone/>
+            </a:pPr>
+            <a:r>
+              <a:rPr lang="en-US" sz="700" b="1" dirty="0">
+                <a:solidFill>
+                  <a:srgbClr val="E85D4A"/>
+                </a:solidFill>
+              </a:rPr>
+              <a:t>8</a:t>
+            </a:r>
+            <a:endParaRPr lang="en-US" sz="700" dirty="0"/>
+          </a:p>
+        </p:txBody>
+      </p:sp>
+      <p:sp>
+        <p:nvSpPr>
+          <p:cNvPr id="20" name="Shape 18"/>
+          <p:cNvSpPr/>
+          <p:nvPr/>
+        </p:nvSpPr>
+        <p:spPr>
+          <a:xfrm>
+            <a:off x="5099496" y="1803486"/>
+            <a:ext cx="106070" cy="106070"/>
+          </a:xfrm>
+          <a:prstGeom prst="ellipse">
+            <a:avLst/>
+          </a:prstGeom>
+          <a:solidFill>
+            <a:srgbClr val="4A90D9"/>
+          </a:solidFill>
+          <a:ln w="6350">
+            <a:solidFill>
+              <a:srgbClr val="0D1B2A"/>
+            </a:solidFill>
+            <a:prstDash val="solid"/>
+          </a:ln>
+        </p:spPr>
+      </p:sp>
+      <p:sp>
+        <p:nvSpPr>
+          <p:cNvPr id="21" name="Text 19"/>
+          <p:cNvSpPr txBox="1"/>
+          <p:nvPr/>
+        </p:nvSpPr>
+        <p:spPr>
+          <a:xfrm>
+            <a:off x="5027172" y="1618802"/>
+            <a:ext cx="256032" cy="173736"/>
+          </a:xfrm>
+          <a:prstGeom prst="rect">
+            <a:avLst/>
+          </a:prstGeom>
+          <a:noFill/>
+          <a:ln/>
+        </p:spPr>
+        <p:txBody>
+          <a:bodyPr wrap="square" lIns="0" tIns="0" rIns="0" bIns="0" rtlCol="0" anchor="ctr"/>
+          <a:lstStyle/>
+          <a:p>
+            <a:pPr algn="ctr" indent="0" marL="0">
+              <a:buNone/>
+            </a:pPr>
+            <a:r>
+              <a:rPr lang="en-US" sz="700" b="1" dirty="0">
+                <a:solidFill>
+                  <a:srgbClr val="4A90D9"/>
+                </a:solidFill>
+              </a:rPr>
+              <a:t>7</a:t>
+            </a:r>
+            <a:endParaRPr lang="en-US" sz="700" dirty="0"/>
+          </a:p>
+        </p:txBody>
+      </p:sp>
+      <p:sp>
+        <p:nvSpPr>
+          <p:cNvPr id="22" name="Shape 20"/>
+          <p:cNvSpPr/>
+          <p:nvPr/>
+        </p:nvSpPr>
+        <p:spPr>
+          <a:xfrm>
+            <a:off x="6358407" y="2368833"/>
+            <a:ext cx="106070" cy="106070"/>
+          </a:xfrm>
+          <a:prstGeom prst="ellipse">
+            <a:avLst/>
+          </a:prstGeom>
+          <a:solidFill>
+            <a:srgbClr val="4A90D9"/>
+          </a:solidFill>
+          <a:ln w="6350">
+            <a:solidFill>
+              <a:srgbClr val="0D1B2A"/>
+            </a:solidFill>
+            <a:prstDash val="solid"/>
+          </a:ln>
+        </p:spPr>
+      </p:sp>
+      <p:sp>
+        <p:nvSpPr>
+          <p:cNvPr id="23" name="Text 21"/>
+          <p:cNvSpPr txBox="1"/>
+          <p:nvPr/>
+        </p:nvSpPr>
+        <p:spPr>
+          <a:xfrm>
+            <a:off x="6390993" y="2231260"/>
+            <a:ext cx="256032" cy="173736"/>
+          </a:xfrm>
+          <a:prstGeom prst="rect">
+            <a:avLst/>
+          </a:prstGeom>
+          <a:noFill/>
+          <a:ln/>
+        </p:spPr>
+        <p:txBody>
+          <a:bodyPr wrap="square" lIns="0" tIns="0" rIns="0" bIns="0" rtlCol="0" anchor="ctr"/>
+          <a:lstStyle/>
+          <a:p>
+            <a:pPr algn="ctr" indent="0" marL="0">
+              <a:buNone/>
+            </a:pPr>
+            <a:r>
+              <a:rPr lang="en-US" sz="700" b="1" dirty="0">
+                <a:solidFill>
+                  <a:srgbClr val="4A90D9"/>
+                </a:solidFill>
+              </a:rPr>
+              <a:t>8</a:t>
+            </a:r>
+            <a:endParaRPr lang="en-US" sz="700" dirty="0"/>
+          </a:p>
+        </p:txBody>
+      </p:sp>
+      <p:sp>
+        <p:nvSpPr>
+          <p:cNvPr id="24" name="Shape 22"/>
+          <p:cNvSpPr/>
+          <p:nvPr/>
+        </p:nvSpPr>
+        <p:spPr>
+          <a:xfrm>
+            <a:off x="6753333" y="3068314"/>
+            <a:ext cx="106070" cy="106070"/>
+          </a:xfrm>
+          <a:prstGeom prst="ellipse">
+            <a:avLst/>
+          </a:prstGeom>
+          <a:solidFill>
+            <a:srgbClr val="7B68EE"/>
+          </a:solidFill>
+          <a:ln w="6350">
+            <a:solidFill>
+              <a:srgbClr val="0D1B2A"/>
+            </a:solidFill>
+            <a:prstDash val="solid"/>
+          </a:ln>
+        </p:spPr>
+      </p:sp>
+      <p:sp>
+        <p:nvSpPr>
+          <p:cNvPr id="25" name="Text 23"/>
+          <p:cNvSpPr txBox="1"/>
+          <p:nvPr/>
+        </p:nvSpPr>
+        <p:spPr>
+          <a:xfrm>
+            <a:off x="6818830" y="2989032"/>
+            <a:ext cx="256032" cy="173736"/>
+          </a:xfrm>
+          <a:prstGeom prst="rect">
+            <a:avLst/>
+          </a:prstGeom>
+          <a:noFill/>
+          <a:ln/>
+        </p:spPr>
+        <p:txBody>
+          <a:bodyPr wrap="square" lIns="0" tIns="0" rIns="0" bIns="0" rtlCol="0" anchor="ctr"/>
+          <a:lstStyle/>
+          <a:p>
+            <a:pPr algn="ctr" indent="0" marL="0">
+              <a:buNone/>
+            </a:pPr>
+            <a:r>
+              <a:rPr lang="en-US" sz="700" b="1" dirty="0">
+                <a:solidFill>
+                  <a:srgbClr val="7B68EE"/>
+                </a:solidFill>
+              </a:rPr>
+              <a:t>5</a:t>
+            </a:r>
+            <a:endParaRPr lang="en-US" sz="700" dirty="0"/>
+          </a:p>
+        </p:txBody>
+      </p:sp>
+      <p:sp>
+        <p:nvSpPr>
+          <p:cNvPr id="26" name="Shape 24"/>
+          <p:cNvSpPr/>
+          <p:nvPr/>
+        </p:nvSpPr>
+        <p:spPr>
+          <a:xfrm>
+            <a:off x="6795373" y="3870482"/>
+            <a:ext cx="106070" cy="106070"/>
+          </a:xfrm>
+          <a:prstGeom prst="ellipse">
+            <a:avLst/>
+          </a:prstGeom>
+          <a:solidFill>
+            <a:srgbClr val="F0A500"/>
+          </a:solidFill>
+          <a:ln w="6350">
+            <a:solidFill>
+              <a:srgbClr val="0D1B2A"/>
+            </a:solidFill>
+            <a:prstDash val="solid"/>
+          </a:ln>
+        </p:spPr>
+      </p:sp>
+      <p:sp>
+        <p:nvSpPr>
+          <p:cNvPr id="27" name="Text 25"/>
+          <p:cNvSpPr txBox="1"/>
+          <p:nvPr/>
+        </p:nvSpPr>
+        <p:spPr>
+          <a:xfrm>
+            <a:off x="6864373" y="3858047"/>
+            <a:ext cx="256032" cy="173736"/>
+          </a:xfrm>
+          <a:prstGeom prst="rect">
+            <a:avLst/>
+          </a:prstGeom>
+          <a:noFill/>
+          <a:ln/>
+        </p:spPr>
+        <p:txBody>
+          <a:bodyPr wrap="square" lIns="0" tIns="0" rIns="0" bIns="0" rtlCol="0" anchor="ctr"/>
+          <a:lstStyle/>
+          <a:p>
+            <a:pPr algn="ctr" indent="0" marL="0">
+              <a:buNone/>
+            </a:pPr>
+            <a:r>
+              <a:rPr lang="en-US" sz="700" b="1" dirty="0">
+                <a:solidFill>
+                  <a:srgbClr val="F0A500"/>
+                </a:solidFill>
+              </a:rPr>
+              <a:t>3</a:t>
+            </a:r>
+            <a:endParaRPr lang="en-US" sz="700" dirty="0"/>
+          </a:p>
+        </p:txBody>
+      </p:sp>
+      <p:sp>
+        <p:nvSpPr>
+          <p:cNvPr id="28" name="Shape 26"/>
+          <p:cNvSpPr/>
+          <p:nvPr/>
+        </p:nvSpPr>
+        <p:spPr>
+          <a:xfrm>
+            <a:off x="6722739" y="4144362"/>
+            <a:ext cx="106070" cy="106070"/>
+          </a:xfrm>
+          <a:prstGeom prst="ellipse">
+            <a:avLst/>
+          </a:prstGeom>
+          <a:solidFill>
+            <a:srgbClr val="F0A500"/>
+          </a:solidFill>
+          <a:ln w="6350">
+            <a:solidFill>
+              <a:srgbClr val="0D1B2A"/>
+            </a:solidFill>
+            <a:prstDash val="solid"/>
+          </a:ln>
+        </p:spPr>
+      </p:sp>
+      <p:sp>
+        <p:nvSpPr>
+          <p:cNvPr id="29" name="Text 27"/>
+          <p:cNvSpPr txBox="1"/>
+          <p:nvPr/>
+        </p:nvSpPr>
+        <p:spPr>
+          <a:xfrm>
+            <a:off x="6785686" y="4154750"/>
+            <a:ext cx="256032" cy="173736"/>
+          </a:xfrm>
+          <a:prstGeom prst="rect">
+            <a:avLst/>
+          </a:prstGeom>
+          <a:noFill/>
+          <a:ln/>
+        </p:spPr>
+        <p:txBody>
+          <a:bodyPr wrap="square" lIns="0" tIns="0" rIns="0" bIns="0" rtlCol="0" anchor="ctr"/>
+          <a:lstStyle/>
+          <a:p>
+            <a:pPr algn="ctr" indent="0" marL="0">
+              <a:buNone/>
+            </a:pPr>
+            <a:r>
+              <a:rPr lang="en-US" sz="700" b="1" dirty="0">
+                <a:solidFill>
+                  <a:srgbClr val="F0A500"/>
+                </a:solidFill>
+              </a:rPr>
+              <a:t>4</a:t>
+            </a:r>
+            <a:endParaRPr lang="en-US" sz="700" dirty="0"/>
+          </a:p>
+        </p:txBody>
+      </p:sp>
+      <p:sp>
+        <p:nvSpPr>
+          <p:cNvPr id="30" name="Shape 28"/>
+          <p:cNvSpPr/>
+          <p:nvPr/>
+        </p:nvSpPr>
+        <p:spPr>
+          <a:xfrm>
+            <a:off x="6606994" y="4402990"/>
+            <a:ext cx="106070" cy="106070"/>
+          </a:xfrm>
+          <a:prstGeom prst="ellipse">
+            <a:avLst/>
+          </a:prstGeom>
+          <a:solidFill>
+            <a:srgbClr val="F0A500"/>
+          </a:solidFill>
+          <a:ln w="6350">
+            <a:solidFill>
+              <a:srgbClr val="0D1B2A"/>
+            </a:solidFill>
+            <a:prstDash val="solid"/>
+          </a:ln>
+        </p:spPr>
+      </p:sp>
+      <p:sp>
+        <p:nvSpPr>
+          <p:cNvPr id="31" name="Text 29"/>
+          <p:cNvSpPr txBox="1"/>
+          <p:nvPr/>
+        </p:nvSpPr>
+        <p:spPr>
+          <a:xfrm>
+            <a:off x="6660295" y="4434931"/>
+            <a:ext cx="256032" cy="173736"/>
+          </a:xfrm>
+          <a:prstGeom prst="rect">
+            <a:avLst/>
+          </a:prstGeom>
+          <a:noFill/>
+          <a:ln/>
+        </p:spPr>
+        <p:txBody>
+          <a:bodyPr wrap="square" lIns="0" tIns="0" rIns="0" bIns="0" rtlCol="0" anchor="ctr"/>
+          <a:lstStyle/>
+          <a:p>
+            <a:pPr algn="ctr" indent="0" marL="0">
+              <a:buNone/>
+            </a:pPr>
+            <a:r>
+              <a:rPr lang="en-US" sz="700" b="1" dirty="0">
+                <a:solidFill>
+                  <a:srgbClr val="F0A500"/>
+                </a:solidFill>
+              </a:rPr>
+              <a:t>5</a:t>
+            </a:r>
+            <a:endParaRPr lang="en-US" sz="700" dirty="0"/>
+          </a:p>
+        </p:txBody>
+      </p:sp>
+      <p:sp>
+        <p:nvSpPr>
+          <p:cNvPr id="32" name="Shape 30"/>
+          <p:cNvSpPr/>
+          <p:nvPr/>
+        </p:nvSpPr>
+        <p:spPr>
+          <a:xfrm>
+            <a:off x="6451151" y="4639631"/>
+            <a:ext cx="106070" cy="106070"/>
+          </a:xfrm>
+          <a:prstGeom prst="ellipse">
+            <a:avLst/>
+          </a:prstGeom>
+          <a:solidFill>
+            <a:srgbClr val="F0A500"/>
+          </a:solidFill>
+          <a:ln w="6350">
+            <a:solidFill>
+              <a:srgbClr val="0D1B2A"/>
+            </a:solidFill>
+            <a:prstDash val="solid"/>
+          </a:ln>
+        </p:spPr>
+      </p:sp>
+      <p:sp>
+        <p:nvSpPr>
+          <p:cNvPr id="33" name="Text 31"/>
+          <p:cNvSpPr txBox="1"/>
+          <p:nvPr/>
+        </p:nvSpPr>
+        <p:spPr>
+          <a:xfrm>
+            <a:off x="6491466" y="4691292"/>
+            <a:ext cx="256032" cy="173736"/>
+          </a:xfrm>
+          <a:prstGeom prst="rect">
+            <a:avLst/>
+          </a:prstGeom>
+          <a:noFill/>
+          <a:ln/>
+        </p:spPr>
+        <p:txBody>
+          <a:bodyPr wrap="square" lIns="0" tIns="0" rIns="0" bIns="0" rtlCol="0" anchor="ctr"/>
+          <a:lstStyle/>
+          <a:p>
+            <a:pPr algn="ctr" indent="0" marL="0">
+              <a:buNone/>
+            </a:pPr>
+            <a:r>
+              <a:rPr lang="en-US" sz="700" b="1" dirty="0">
+                <a:solidFill>
+                  <a:srgbClr val="F0A500"/>
+                </a:solidFill>
+              </a:rPr>
+              <a:t>6</a:t>
+            </a:r>
+            <a:endParaRPr lang="en-US" sz="700" dirty="0"/>
+          </a:p>
+        </p:txBody>
+      </p:sp>
+      <p:sp>
+        <p:nvSpPr>
+          <p:cNvPr id="34" name="Shape 32"/>
+          <p:cNvSpPr/>
+          <p:nvPr/>
+        </p:nvSpPr>
+        <p:spPr>
+          <a:xfrm>
+            <a:off x="6259271" y="4848120"/>
+            <a:ext cx="106070" cy="106070"/>
+          </a:xfrm>
+          <a:prstGeom prst="ellipse">
+            <a:avLst/>
+          </a:prstGeom>
+          <a:solidFill>
+            <a:srgbClr val="F0A500"/>
+          </a:solidFill>
+          <a:ln w="6350">
+            <a:solidFill>
+              <a:srgbClr val="0D1B2A"/>
+            </a:solidFill>
+            <a:prstDash val="solid"/>
+          </a:ln>
+        </p:spPr>
+      </p:sp>
+      <p:sp>
+        <p:nvSpPr>
+          <p:cNvPr id="35" name="Text 33"/>
+          <p:cNvSpPr txBox="1"/>
+          <p:nvPr/>
+        </p:nvSpPr>
+        <p:spPr>
+          <a:xfrm>
+            <a:off x="6283596" y="4917155"/>
+            <a:ext cx="256032" cy="173736"/>
+          </a:xfrm>
+          <a:prstGeom prst="rect">
+            <a:avLst/>
+          </a:prstGeom>
+          <a:noFill/>
+          <a:ln/>
+        </p:spPr>
+        <p:txBody>
+          <a:bodyPr wrap="square" lIns="0" tIns="0" rIns="0" bIns="0" rtlCol="0" anchor="ctr"/>
+          <a:lstStyle/>
+          <a:p>
+            <a:pPr algn="ctr" indent="0" marL="0">
+              <a:buNone/>
+            </a:pPr>
+            <a:r>
+              <a:rPr lang="en-US" sz="700" b="1" dirty="0">
+                <a:solidFill>
+                  <a:srgbClr val="F0A500"/>
+                </a:solidFill>
+              </a:rPr>
+              <a:t>7</a:t>
+            </a:r>
+            <a:endParaRPr lang="en-US" sz="700" dirty="0"/>
+          </a:p>
+        </p:txBody>
+      </p:sp>
+      <p:sp>
+        <p:nvSpPr>
+          <p:cNvPr id="36" name="Shape 34"/>
+          <p:cNvSpPr/>
+          <p:nvPr/>
+        </p:nvSpPr>
+        <p:spPr>
+          <a:xfrm>
+            <a:off x="6036351" y="5023027"/>
+            <a:ext cx="106070" cy="106070"/>
+          </a:xfrm>
+          <a:prstGeom prst="ellipse">
+            <a:avLst/>
+          </a:prstGeom>
+          <a:solidFill>
+            <a:srgbClr val="F0A500"/>
+          </a:solidFill>
+          <a:ln w="6350">
+            <a:solidFill>
+              <a:srgbClr val="0D1B2A"/>
+            </a:solidFill>
+            <a:prstDash val="solid"/>
+          </a:ln>
+        </p:spPr>
+      </p:sp>
+      <p:sp>
+        <p:nvSpPr>
+          <p:cNvPr id="37" name="Text 35"/>
+          <p:cNvSpPr txBox="1"/>
+          <p:nvPr/>
+        </p:nvSpPr>
+        <p:spPr>
+          <a:xfrm>
+            <a:off x="6042099" y="5106638"/>
+            <a:ext cx="256032" cy="173736"/>
+          </a:xfrm>
+          <a:prstGeom prst="rect">
+            <a:avLst/>
+          </a:prstGeom>
+          <a:noFill/>
+          <a:ln/>
+        </p:spPr>
+        <p:txBody>
+          <a:bodyPr wrap="square" lIns="0" tIns="0" rIns="0" bIns="0" rtlCol="0" anchor="ctr"/>
+          <a:lstStyle/>
+          <a:p>
+            <a:pPr algn="ctr" indent="0" marL="0">
+              <a:buNone/>
+            </a:pPr>
+            <a:r>
+              <a:rPr lang="en-US" sz="700" b="1" dirty="0">
+                <a:solidFill>
+                  <a:srgbClr val="F0A500"/>
+                </a:solidFill>
+              </a:rPr>
+              <a:t>8</a:t>
+            </a:r>
+            <a:endParaRPr lang="en-US" sz="700" dirty="0"/>
+          </a:p>
+        </p:txBody>
+      </p:sp>
+      <p:sp>
+        <p:nvSpPr>
+          <p:cNvPr id="38" name="Shape 36"/>
+          <p:cNvSpPr/>
+          <p:nvPr/>
+        </p:nvSpPr>
+        <p:spPr>
+          <a:xfrm>
+            <a:off x="4945761" y="5310260"/>
+            <a:ext cx="106070" cy="106070"/>
+          </a:xfrm>
+          <a:prstGeom prst="ellipse">
+            <a:avLst/>
+          </a:prstGeom>
+          <a:solidFill>
+            <a:srgbClr val="3DAA6E"/>
+          </a:solidFill>
+          <a:ln w="6350">
+            <a:solidFill>
+              <a:srgbClr val="0D1B2A"/>
+            </a:solidFill>
+            <a:prstDash val="solid"/>
+          </a:ln>
+        </p:spPr>
+      </p:sp>
+      <p:sp>
+        <p:nvSpPr>
+          <p:cNvPr id="39" name="Text 37"/>
+          <p:cNvSpPr txBox="1"/>
+          <p:nvPr/>
+        </p:nvSpPr>
+        <p:spPr>
+          <a:xfrm>
+            <a:off x="4860626" y="5417806"/>
+            <a:ext cx="256032" cy="173736"/>
+          </a:xfrm>
+          <a:prstGeom prst="rect">
+            <a:avLst/>
+          </a:prstGeom>
+          <a:noFill/>
+          <a:ln/>
+        </p:spPr>
+        <p:txBody>
+          <a:bodyPr wrap="square" lIns="0" tIns="0" rIns="0" bIns="0" rtlCol="0" anchor="ctr"/>
+          <a:lstStyle/>
+          <a:p>
+            <a:pPr algn="ctr" indent="0" marL="0">
+              <a:buNone/>
+            </a:pPr>
+            <a:r>
+              <a:rPr lang="en-US" sz="700" b="1" dirty="0">
+                <a:solidFill>
+                  <a:srgbClr val="3DAA6E"/>
+                </a:solidFill>
+              </a:rPr>
+              <a:t>8</a:t>
+            </a:r>
+            <a:endParaRPr lang="en-US" sz="700" dirty="0"/>
+          </a:p>
+        </p:txBody>
+      </p:sp>
+      <p:sp>
+        <p:nvSpPr>
+          <p:cNvPr id="40" name="Shape 38"/>
+          <p:cNvSpPr/>
+          <p:nvPr/>
+        </p:nvSpPr>
+        <p:spPr>
+          <a:xfrm>
+            <a:off x="3983274" y="4939615"/>
+            <a:ext cx="106070" cy="106070"/>
+          </a:xfrm>
+          <a:prstGeom prst="ellipse">
+            <a:avLst/>
+          </a:prstGeom>
+          <a:solidFill>
+            <a:srgbClr val="9B59B6"/>
+          </a:solidFill>
+          <a:ln w="6350">
+            <a:solidFill>
+              <a:srgbClr val="0D1B2A"/>
+            </a:solidFill>
+            <a:prstDash val="solid"/>
+          </a:ln>
+        </p:spPr>
+      </p:sp>
+      <p:sp>
+        <p:nvSpPr>
+          <p:cNvPr id="41" name="Text 39"/>
+          <p:cNvSpPr txBox="1"/>
+          <p:nvPr/>
+        </p:nvSpPr>
+        <p:spPr>
+          <a:xfrm>
+            <a:off x="3817932" y="5016274"/>
+            <a:ext cx="256032" cy="173736"/>
+          </a:xfrm>
+          <a:prstGeom prst="rect">
+            <a:avLst/>
+          </a:prstGeom>
+          <a:noFill/>
+          <a:ln/>
+        </p:spPr>
+        <p:txBody>
+          <a:bodyPr wrap="square" lIns="0" tIns="0" rIns="0" bIns="0" rtlCol="0" anchor="ctr"/>
+          <a:lstStyle/>
+          <a:p>
+            <a:pPr algn="ctr" indent="0" marL="0">
+              <a:buNone/>
+            </a:pPr>
+            <a:r>
+              <a:rPr lang="en-US" sz="700" b="1" dirty="0">
+                <a:solidFill>
+                  <a:srgbClr val="9B59B6"/>
+                </a:solidFill>
+              </a:rPr>
+              <a:t>7</a:t>
+            </a:r>
+            <a:endParaRPr lang="en-US" sz="700" dirty="0"/>
+          </a:p>
+        </p:txBody>
+      </p:sp>
+      <p:sp>
+        <p:nvSpPr>
+          <p:cNvPr id="42" name="Shape 40"/>
+          <p:cNvSpPr/>
+          <p:nvPr/>
+        </p:nvSpPr>
+        <p:spPr>
+          <a:xfrm>
+            <a:off x="3428566" y="4188013"/>
+            <a:ext cx="106070" cy="106070"/>
+          </a:xfrm>
+          <a:prstGeom prst="ellipse">
+            <a:avLst/>
+          </a:prstGeom>
+          <a:solidFill>
+            <a:srgbClr val="9B59B6"/>
+          </a:solidFill>
+          <a:ln w="6350">
+            <a:solidFill>
+              <a:srgbClr val="0D1B2A"/>
+            </a:solidFill>
+            <a:prstDash val="solid"/>
+          </a:ln>
+        </p:spPr>
+      </p:sp>
+      <p:sp>
+        <p:nvSpPr>
+          <p:cNvPr id="43" name="Text 41"/>
+          <p:cNvSpPr txBox="1"/>
+          <p:nvPr/>
+        </p:nvSpPr>
+        <p:spPr>
+          <a:xfrm>
+            <a:off x="3216999" y="4202039"/>
+            <a:ext cx="256032" cy="173736"/>
+          </a:xfrm>
+          <a:prstGeom prst="rect">
+            <a:avLst/>
+          </a:prstGeom>
+          <a:noFill/>
+          <a:ln/>
+        </p:spPr>
+        <p:txBody>
+          <a:bodyPr wrap="square" lIns="0" tIns="0" rIns="0" bIns="0" rtlCol="0" anchor="ctr"/>
+          <a:lstStyle/>
+          <a:p>
+            <a:pPr algn="ctr" indent="0" marL="0">
+              <a:buNone/>
+            </a:pPr>
+            <a:r>
+              <a:rPr lang="en-US" sz="700" b="1" dirty="0">
+                <a:solidFill>
+                  <a:srgbClr val="9B59B6"/>
+                </a:solidFill>
+              </a:rPr>
+              <a:t>8</a:t>
+            </a:r>
+            <a:endParaRPr lang="en-US" sz="700" dirty="0"/>
+          </a:p>
+        </p:txBody>
+      </p:sp>
+      <p:sp>
+        <p:nvSpPr>
+          <p:cNvPr id="44" name="Shape 42"/>
+          <p:cNvSpPr/>
+          <p:nvPr/>
+        </p:nvSpPr>
+        <p:spPr>
+          <a:xfrm>
+            <a:off x="3311982" y="3549465"/>
+            <a:ext cx="106070" cy="106070"/>
+          </a:xfrm>
+          <a:prstGeom prst="ellipse">
+            <a:avLst/>
+          </a:prstGeom>
+          <a:solidFill>
+            <a:srgbClr val="E8A020"/>
+          </a:solidFill>
+          <a:ln w="6350">
+            <a:solidFill>
+              <a:srgbClr val="0D1B2A"/>
+            </a:solidFill>
+            <a:prstDash val="solid"/>
+          </a:ln>
+        </p:spPr>
+      </p:sp>
+      <p:sp>
+        <p:nvSpPr>
+          <p:cNvPr id="45" name="Text 43"/>
+          <p:cNvSpPr txBox="1"/>
+          <p:nvPr/>
+        </p:nvSpPr>
+        <p:spPr>
+          <a:xfrm>
+            <a:off x="3090699" y="3510278"/>
+            <a:ext cx="256032" cy="173736"/>
+          </a:xfrm>
+          <a:prstGeom prst="rect">
+            <a:avLst/>
+          </a:prstGeom>
+          <a:noFill/>
+          <a:ln/>
+        </p:spPr>
+        <p:txBody>
+          <a:bodyPr wrap="square" lIns="0" tIns="0" rIns="0" bIns="0" rtlCol="0" anchor="ctr"/>
+          <a:lstStyle/>
+          <a:p>
+            <a:pPr algn="ctr" indent="0" marL="0">
+              <a:buNone/>
+            </a:pPr>
+            <a:r>
+              <a:rPr lang="en-US" sz="700" b="1" dirty="0">
+                <a:solidFill>
+                  <a:srgbClr val="E8A020"/>
+                </a:solidFill>
+              </a:rPr>
+              <a:t>3</a:t>
+            </a:r>
+            <a:endParaRPr lang="en-US" sz="700" dirty="0"/>
+          </a:p>
+        </p:txBody>
+      </p:sp>
+      <p:sp>
+        <p:nvSpPr>
+          <p:cNvPr id="46" name="Text 44"/>
+          <p:cNvSpPr txBox="1"/>
+          <p:nvPr/>
+        </p:nvSpPr>
+        <p:spPr>
+          <a:xfrm>
+            <a:off x="2607343" y="1329795"/>
+            <a:ext cx="1188720" cy="365760"/>
+          </a:xfrm>
+          <a:prstGeom prst="rect">
+            <a:avLst/>
+          </a:prstGeom>
+          <a:noFill/>
+          <a:ln/>
+        </p:spPr>
+        <p:txBody>
+          <a:bodyPr wrap="square" lIns="0" tIns="0" rIns="0" bIns="0" rtlCol="0" anchor="ctr"/>
+          <a:lstStyle/>
+          <a:p>
+            <a:pPr algn="ctr" indent="0" marL="0">
+              <a:buNone/>
+            </a:pPr>
+            <a:r>
+              <a:rPr lang="en-US" sz="800" b="1" dirty="0">
+                <a:solidFill>
+                  <a:srgbClr val="E85D4A"/>
+                </a:solidFill>
+              </a:rPr>
+              <a:t>Reasoning</a:t>
+            </a:r>
+            <a:endParaRPr lang="en-US" sz="800" dirty="0"/>
+          </a:p>
+          <a:p>
+            <a:pPr algn="ctr" indent="0" marL="0">
+              <a:buNone/>
+            </a:pPr>
+            <a:r>
+              <a:rPr lang="en-US" sz="800" b="1" dirty="0">
+                <a:solidFill>
+                  <a:srgbClr val="E85D4A"/>
+                </a:solidFill>
+              </a:rPr>
+              <a:t>&amp; Math</a:t>
+            </a:r>
+            <a:endParaRPr lang="en-US" sz="800" dirty="0"/>
+          </a:p>
+        </p:txBody>
+      </p:sp>
+      <p:sp>
+        <p:nvSpPr>
+          <p:cNvPr id="47" name="Text 45"/>
+          <p:cNvSpPr txBox="1"/>
+          <p:nvPr/>
+        </p:nvSpPr>
+        <p:spPr>
+          <a:xfrm>
+            <a:off x="5702511" y="846347"/>
+            <a:ext cx="1188720" cy="365760"/>
+          </a:xfrm>
+          <a:prstGeom prst="rect">
+            <a:avLst/>
+          </a:prstGeom>
+          <a:noFill/>
+          <a:ln/>
+        </p:spPr>
+        <p:txBody>
+          <a:bodyPr wrap="square" lIns="0" tIns="0" rIns="0" bIns="0" rtlCol="0" anchor="ctr"/>
+          <a:lstStyle/>
+          <a:p>
+            <a:pPr algn="ctr" indent="0" marL="0">
+              <a:buNone/>
+            </a:pPr>
+            <a:r>
+              <a:rPr lang="en-US" sz="800" b="1" dirty="0">
+                <a:solidFill>
+                  <a:srgbClr val="4A90D9"/>
+                </a:solidFill>
+              </a:rPr>
+              <a:t>Coding</a:t>
+            </a:r>
+            <a:endParaRPr lang="en-US" sz="800" dirty="0"/>
+          </a:p>
+          <a:p>
+            <a:pPr algn="ctr" indent="0" marL="0">
+              <a:buNone/>
+            </a:pPr>
+            <a:r>
+              <a:rPr lang="en-US" sz="800" b="1" dirty="0">
+                <a:solidFill>
+                  <a:srgbClr val="4A90D9"/>
+                </a:solidFill>
+              </a:rPr>
+              <a:t>&amp; SWE</a:t>
+            </a:r>
+            <a:endParaRPr lang="en-US" sz="800" dirty="0"/>
+          </a:p>
+        </p:txBody>
+      </p:sp>
+      <p:sp>
+        <p:nvSpPr>
+          <p:cNvPr id="48" name="Text 46"/>
+          <p:cNvSpPr txBox="1"/>
+          <p:nvPr/>
+        </p:nvSpPr>
+        <p:spPr>
+          <a:xfrm>
+            <a:off x="7283148" y="2663354"/>
+            <a:ext cx="1188720" cy="365760"/>
+          </a:xfrm>
+          <a:prstGeom prst="rect">
+            <a:avLst/>
+          </a:prstGeom>
+          <a:noFill/>
+          <a:ln/>
+        </p:spPr>
+        <p:txBody>
+          <a:bodyPr wrap="square" lIns="0" tIns="0" rIns="0" bIns="0" rtlCol="0" anchor="ctr"/>
+          <a:lstStyle/>
+          <a:p>
+            <a:pPr algn="ctr" indent="0" marL="0">
+              <a:buNone/>
+            </a:pPr>
+            <a:r>
+              <a:rPr lang="en-US" sz="800" b="1" dirty="0">
+                <a:solidFill>
+                  <a:srgbClr val="7B68EE"/>
+                </a:solidFill>
+              </a:rPr>
+              <a:t>Long</a:t>
+            </a:r>
+            <a:endParaRPr lang="en-US" sz="800" dirty="0"/>
+          </a:p>
+          <a:p>
+            <a:pPr algn="ctr" indent="0" marL="0">
+              <a:buNone/>
+            </a:pPr>
+            <a:r>
+              <a:rPr lang="en-US" sz="800" b="1" dirty="0">
+                <a:solidFill>
+                  <a:srgbClr val="7B68EE"/>
+                </a:solidFill>
+              </a:rPr>
+              <a:t>Context</a:t>
+            </a:r>
+            <a:endParaRPr lang="en-US" sz="800" dirty="0"/>
+          </a:p>
+        </p:txBody>
+      </p:sp>
+      <p:sp>
+        <p:nvSpPr>
+          <p:cNvPr id="49" name="Text 47"/>
+          <p:cNvSpPr txBox="1"/>
+          <p:nvPr/>
+        </p:nvSpPr>
+        <p:spPr>
+          <a:xfrm>
+            <a:off x="6924209" y="5044759"/>
+            <a:ext cx="1188720" cy="365760"/>
+          </a:xfrm>
+          <a:prstGeom prst="rect">
+            <a:avLst/>
+          </a:prstGeom>
+          <a:noFill/>
+          <a:ln/>
+        </p:spPr>
+        <p:txBody>
+          <a:bodyPr wrap="square" lIns="0" tIns="0" rIns="0" bIns="0" rtlCol="0" anchor="ctr"/>
+          <a:lstStyle/>
+          <a:p>
+            <a:pPr algn="ctr" indent="0" marL="0">
+              <a:buNone/>
+            </a:pPr>
+            <a:r>
+              <a:rPr lang="en-US" sz="800" b="1" dirty="0">
+                <a:solidFill>
+                  <a:srgbClr val="F0A500"/>
+                </a:solidFill>
+              </a:rPr>
+              <a:t>Multimodal</a:t>
+            </a:r>
+            <a:endParaRPr lang="en-US" sz="800" dirty="0"/>
+          </a:p>
+        </p:txBody>
+      </p:sp>
+      <p:sp>
+        <p:nvSpPr>
+          <p:cNvPr id="50" name="Text 48"/>
+          <p:cNvSpPr txBox="1"/>
+          <p:nvPr/>
+        </p:nvSpPr>
+        <p:spPr>
+          <a:xfrm>
+            <a:off x="4327014" y="6329869"/>
+            <a:ext cx="1188720" cy="365760"/>
+          </a:xfrm>
+          <a:prstGeom prst="rect">
+            <a:avLst/>
+          </a:prstGeom>
+          <a:noFill/>
+          <a:ln/>
+        </p:spPr>
+        <p:txBody>
+          <a:bodyPr wrap="square" lIns="0" tIns="0" rIns="0" bIns="0" rtlCol="0" anchor="ctr"/>
+          <a:lstStyle/>
+          <a:p>
+            <a:pPr algn="ctr" indent="0" marL="0">
+              <a:buNone/>
+            </a:pPr>
+            <a:r>
+              <a:rPr lang="en-US" sz="800" b="1" dirty="0">
+                <a:solidFill>
+                  <a:srgbClr val="3DAA6E"/>
+                </a:solidFill>
+              </a:rPr>
+              <a:t>Agents</a:t>
+            </a:r>
+            <a:endParaRPr lang="en-US" sz="800" dirty="0"/>
+          </a:p>
+          <a:p>
+            <a:pPr algn="ctr" indent="0" marL="0">
+              <a:buNone/>
+            </a:pPr>
+            <a:r>
+              <a:rPr lang="en-US" sz="800" b="1" dirty="0">
+                <a:solidFill>
+                  <a:srgbClr val="3DAA6E"/>
+                </a:solidFill>
+              </a:rPr>
+              <a:t>&amp; Tools</a:t>
+            </a:r>
+            <a:endParaRPr lang="en-US" sz="800" dirty="0"/>
+          </a:p>
+        </p:txBody>
+      </p:sp>
+      <p:sp>
+        <p:nvSpPr>
+          <p:cNvPr id="51" name="Text 49"/>
+          <p:cNvSpPr txBox="1"/>
+          <p:nvPr/>
+        </p:nvSpPr>
+        <p:spPr>
+          <a:xfrm>
+            <a:off x="2216106" y="5170562"/>
+            <a:ext cx="1188720" cy="365760"/>
+          </a:xfrm>
+          <a:prstGeom prst="rect">
+            <a:avLst/>
+          </a:prstGeom>
+          <a:noFill/>
+          <a:ln/>
+        </p:spPr>
+        <p:txBody>
+          <a:bodyPr wrap="square" lIns="0" tIns="0" rIns="0" bIns="0" rtlCol="0" anchor="ctr"/>
+          <a:lstStyle/>
+          <a:p>
+            <a:pPr algn="ctr" indent="0" marL="0">
+              <a:buNone/>
+            </a:pPr>
+            <a:r>
+              <a:rPr lang="en-US" sz="800" b="1" dirty="0">
+                <a:solidFill>
+                  <a:srgbClr val="9B59B6"/>
+                </a:solidFill>
+              </a:rPr>
+              <a:t>Knowledge</a:t>
+            </a:r>
+            <a:endParaRPr lang="en-US" sz="800" dirty="0"/>
+          </a:p>
+          <a:p>
+            <a:pPr algn="ctr" indent="0" marL="0">
+              <a:buNone/>
+            </a:pPr>
+            <a:r>
+              <a:rPr lang="en-US" sz="800" b="1" dirty="0">
+                <a:solidFill>
+                  <a:srgbClr val="9B59B6"/>
+                </a:solidFill>
+              </a:rPr>
+              <a:t>&amp; Language</a:t>
+            </a:r>
+            <a:endParaRPr lang="en-US" sz="800" dirty="0"/>
+          </a:p>
+        </p:txBody>
+      </p:sp>
+      <p:sp>
+        <p:nvSpPr>
+          <p:cNvPr id="52" name="Text 50"/>
+          <p:cNvSpPr txBox="1"/>
+          <p:nvPr/>
+        </p:nvSpPr>
+        <p:spPr>
+          <a:xfrm>
+            <a:off x="1655105" y="3450236"/>
+            <a:ext cx="1188720" cy="365760"/>
+          </a:xfrm>
+          <a:prstGeom prst="rect">
+            <a:avLst/>
+          </a:prstGeom>
+          <a:noFill/>
+          <a:ln/>
+        </p:spPr>
+        <p:txBody>
+          <a:bodyPr wrap="square" lIns="0" tIns="0" rIns="0" bIns="0" rtlCol="0" anchor="ctr"/>
+          <a:lstStyle/>
+          <a:p>
+            <a:pPr algn="ctr" indent="0" marL="0">
+              <a:buNone/>
+            </a:pPr>
+            <a:r>
+              <a:rPr lang="en-US" sz="800" b="1" dirty="0">
+                <a:solidFill>
+                  <a:srgbClr val="E8A020"/>
+                </a:solidFill>
+              </a:rPr>
+              <a:t>Data</a:t>
+            </a:r>
+            <a:endParaRPr lang="en-US" sz="800" dirty="0"/>
+          </a:p>
+          <a:p>
+            <a:pPr algn="ctr" indent="0" marL="0">
+              <a:buNone/>
+            </a:pPr>
+            <a:r>
+              <a:rPr lang="en-US" sz="800" b="1" dirty="0">
+                <a:solidFill>
+                  <a:srgbClr val="E8A020"/>
+                </a:solidFill>
+              </a:rPr>
+              <a:t>&amp; ML</a:t>
+            </a:r>
+            <a:endParaRPr lang="en-US" sz="800" dirty="0"/>
+          </a:p>
+        </p:txBody>
+      </p:sp>
+      <p:sp>
+        <p:nvSpPr>
+          <p:cNvPr id="53" name="Shape 51"/>
+          <p:cNvSpPr/>
+          <p:nvPr/>
+        </p:nvSpPr>
+        <p:spPr>
+          <a:xfrm>
+            <a:off x="8979408" y="1042416"/>
+            <a:ext cx="1572768" cy="192024"/>
+          </a:xfrm>
+          <a:prstGeom prst="rect">
+            <a:avLst/>
+          </a:prstGeom>
+          <a:solidFill>
+            <a:srgbClr val="E85D4A">
+              <a:alpha val="15000"/>
+            </a:srgbClr>
+          </a:solidFill>
+          <a:ln/>
+        </p:spPr>
+      </p:sp>
+      <p:sp>
+        <p:nvSpPr>
+          <p:cNvPr id="54" name="Shape 52"/>
+          <p:cNvSpPr/>
+          <p:nvPr/>
+        </p:nvSpPr>
+        <p:spPr>
+          <a:xfrm>
+            <a:off x="8979408" y="1042416"/>
+            <a:ext cx="54864" cy="192024"/>
+          </a:xfrm>
+          <a:prstGeom prst="rect">
+            <a:avLst/>
+          </a:prstGeom>
+          <a:solidFill>
+            <a:srgbClr val="E85D4A"/>
+          </a:solidFill>
+          <a:ln/>
+        </p:spPr>
+      </p:sp>
+      <p:sp>
+        <p:nvSpPr>
+          <p:cNvPr id="55" name="Text 53"/>
+          <p:cNvSpPr txBox="1"/>
+          <p:nvPr/>
+        </p:nvSpPr>
+        <p:spPr>
+          <a:xfrm>
+            <a:off x="9070848" y="1069848"/>
+            <a:ext cx="1463040" cy="155448"/>
+          </a:xfrm>
+          <a:prstGeom prst="rect">
+            <a:avLst/>
+          </a:prstGeom>
+          <a:noFill/>
+          <a:ln/>
+        </p:spPr>
+        <p:txBody>
+          <a:bodyPr wrap="square" lIns="0" tIns="0" rIns="0" bIns="0" rtlCol="0" anchor="ctr"/>
+          <a:lstStyle/>
+          <a:p>
+            <a:pPr indent="0" marL="0">
+              <a:buNone/>
+            </a:pPr>
+            <a:r>
+              <a:rPr lang="en-US" sz="750" b="1" dirty="0">
+                <a:solidFill>
+                  <a:srgbClr val="E85D4A"/>
+                </a:solidFill>
+              </a:rPr>
+              <a:t>Reasoning &amp; Math</a:t>
+            </a:r>
+            <a:endParaRPr lang="en-US" sz="750" dirty="0"/>
+          </a:p>
+        </p:txBody>
+      </p:sp>
+      <p:sp>
+        <p:nvSpPr>
+          <p:cNvPr id="56" name="Text 54"/>
+          <p:cNvSpPr txBox="1"/>
+          <p:nvPr/>
+        </p:nvSpPr>
+        <p:spPr>
+          <a:xfrm>
+            <a:off x="9043416" y="1252728"/>
+            <a:ext cx="1490472" cy="144475"/>
+          </a:xfrm>
+          <a:prstGeom prst="rect">
+            <a:avLst/>
+          </a:prstGeom>
+          <a:noFill/>
+          <a:ln/>
+        </p:spPr>
+        <p:txBody>
+          <a:bodyPr wrap="square" lIns="0" tIns="0" rIns="0" bIns="0" rtlCol="0" anchor="ctr"/>
+          <a:lstStyle/>
+          <a:p>
+            <a:pPr indent="0" marL="0">
+              <a:buNone/>
+            </a:pPr>
+            <a:r>
+              <a:rPr lang="en-US" sz="650" dirty="0">
+                <a:solidFill>
+                  <a:srgbClr val="8AB0C8"/>
+                </a:solidFill>
+              </a:rPr>
+              <a:t>6. MATH-500</a:t>
+            </a:r>
+            <a:endParaRPr lang="en-US" sz="650" dirty="0"/>
+          </a:p>
+        </p:txBody>
+      </p:sp>
+      <p:sp>
+        <p:nvSpPr>
+          <p:cNvPr id="57" name="Text 55"/>
+          <p:cNvSpPr txBox="1"/>
+          <p:nvPr/>
+        </p:nvSpPr>
+        <p:spPr>
+          <a:xfrm>
+            <a:off x="9043416" y="1397203"/>
+            <a:ext cx="1490472" cy="144475"/>
+          </a:xfrm>
+          <a:prstGeom prst="rect">
+            <a:avLst/>
+          </a:prstGeom>
+          <a:noFill/>
+          <a:ln/>
+        </p:spPr>
+        <p:txBody>
+          <a:bodyPr wrap="square" lIns="0" tIns="0" rIns="0" bIns="0" rtlCol="0" anchor="ctr"/>
+          <a:lstStyle/>
+          <a:p>
+            <a:pPr indent="0" marL="0">
+              <a:buNone/>
+            </a:pPr>
+            <a:r>
+              <a:rPr lang="en-US" sz="650" dirty="0">
+                <a:solidFill>
+                  <a:srgbClr val="8AB0C8"/>
+                </a:solidFill>
+              </a:rPr>
+              <a:t>7. GPQA Diamond</a:t>
+            </a:r>
+            <a:endParaRPr lang="en-US" sz="650" dirty="0"/>
+          </a:p>
+        </p:txBody>
+      </p:sp>
+      <p:sp>
+        <p:nvSpPr>
+          <p:cNvPr id="58" name="Text 56"/>
+          <p:cNvSpPr txBox="1"/>
+          <p:nvPr/>
+        </p:nvSpPr>
+        <p:spPr>
+          <a:xfrm>
+            <a:off x="9043416" y="1541678"/>
+            <a:ext cx="1490472" cy="144475"/>
+          </a:xfrm>
+          <a:prstGeom prst="rect">
+            <a:avLst/>
+          </a:prstGeom>
+          <a:noFill/>
+          <a:ln/>
+        </p:spPr>
+        <p:txBody>
+          <a:bodyPr wrap="square" lIns="0" tIns="0" rIns="0" bIns="0" rtlCol="0" anchor="ctr"/>
+          <a:lstStyle/>
+          <a:p>
+            <a:pPr indent="0" marL="0">
+              <a:buNone/>
+            </a:pPr>
+            <a:r>
+              <a:rPr lang="en-US" sz="650" dirty="0">
+                <a:solidFill>
+                  <a:srgbClr val="8AB0C8"/>
+                </a:solidFill>
+              </a:rPr>
+              <a:t>8. MMLU-Pro</a:t>
+            </a:r>
+            <a:endParaRPr lang="en-US" sz="650" dirty="0"/>
+          </a:p>
+        </p:txBody>
+      </p:sp>
+      <p:sp>
+        <p:nvSpPr>
+          <p:cNvPr id="59" name="Shape 57"/>
+          <p:cNvSpPr/>
+          <p:nvPr/>
+        </p:nvSpPr>
+        <p:spPr>
+          <a:xfrm>
+            <a:off x="8979408" y="1768450"/>
+            <a:ext cx="1572768" cy="192024"/>
+          </a:xfrm>
+          <a:prstGeom prst="rect">
+            <a:avLst/>
+          </a:prstGeom>
+          <a:solidFill>
+            <a:srgbClr val="4A90D9">
+              <a:alpha val="15000"/>
+            </a:srgbClr>
+          </a:solidFill>
+          <a:ln/>
+        </p:spPr>
+      </p:sp>
+      <p:sp>
+        <p:nvSpPr>
+          <p:cNvPr id="60" name="Shape 58"/>
+          <p:cNvSpPr/>
+          <p:nvPr/>
+        </p:nvSpPr>
+        <p:spPr>
+          <a:xfrm>
+            <a:off x="8979408" y="1768450"/>
+            <a:ext cx="54864" cy="192024"/>
+          </a:xfrm>
+          <a:prstGeom prst="rect">
+            <a:avLst/>
+          </a:prstGeom>
+          <a:solidFill>
+            <a:srgbClr val="4A90D9"/>
+          </a:solidFill>
+          <a:ln/>
+        </p:spPr>
+      </p:sp>
+      <p:sp>
+        <p:nvSpPr>
+          <p:cNvPr id="61" name="Text 59"/>
+          <p:cNvSpPr txBox="1"/>
+          <p:nvPr/>
+        </p:nvSpPr>
+        <p:spPr>
+          <a:xfrm>
+            <a:off x="9070848" y="1795882"/>
+            <a:ext cx="1463040" cy="155448"/>
+          </a:xfrm>
+          <a:prstGeom prst="rect">
+            <a:avLst/>
+          </a:prstGeom>
+          <a:noFill/>
+          <a:ln/>
+        </p:spPr>
+        <p:txBody>
+          <a:bodyPr wrap="square" lIns="0" tIns="0" rIns="0" bIns="0" rtlCol="0" anchor="ctr"/>
+          <a:lstStyle/>
+          <a:p>
+            <a:pPr indent="0" marL="0">
+              <a:buNone/>
+            </a:pPr>
+            <a:r>
+              <a:rPr lang="en-US" sz="750" b="1" dirty="0">
+                <a:solidFill>
+                  <a:srgbClr val="4A90D9"/>
+                </a:solidFill>
+              </a:rPr>
+              <a:t>Coding &amp; SWE</a:t>
+            </a:r>
+            <a:endParaRPr lang="en-US" sz="750" dirty="0"/>
+          </a:p>
+        </p:txBody>
+      </p:sp>
+      <p:sp>
+        <p:nvSpPr>
+          <p:cNvPr id="62" name="Text 60"/>
+          <p:cNvSpPr txBox="1"/>
+          <p:nvPr/>
+        </p:nvSpPr>
+        <p:spPr>
+          <a:xfrm>
+            <a:off x="9043416" y="1978762"/>
+            <a:ext cx="1490472" cy="144475"/>
+          </a:xfrm>
+          <a:prstGeom prst="rect">
+            <a:avLst/>
+          </a:prstGeom>
+          <a:noFill/>
+          <a:ln/>
+        </p:spPr>
+        <p:txBody>
+          <a:bodyPr wrap="square" lIns="0" tIns="0" rIns="0" bIns="0" rtlCol="0" anchor="ctr"/>
+          <a:lstStyle/>
+          <a:p>
+            <a:pPr indent="0" marL="0">
+              <a:buNone/>
+            </a:pPr>
+            <a:r>
+              <a:rPr lang="en-US" sz="650" dirty="0">
+                <a:solidFill>
+                  <a:srgbClr val="8AB0C8"/>
+                </a:solidFill>
+              </a:rPr>
+              <a:t>7. BigCodeBench</a:t>
+            </a:r>
+            <a:endParaRPr lang="en-US" sz="650" dirty="0"/>
+          </a:p>
+        </p:txBody>
+      </p:sp>
+      <p:sp>
+        <p:nvSpPr>
+          <p:cNvPr id="63" name="Text 61"/>
+          <p:cNvSpPr txBox="1"/>
+          <p:nvPr/>
+        </p:nvSpPr>
+        <p:spPr>
+          <a:xfrm>
+            <a:off x="9043416" y="2123237"/>
+            <a:ext cx="1490472" cy="144475"/>
+          </a:xfrm>
+          <a:prstGeom prst="rect">
+            <a:avLst/>
+          </a:prstGeom>
+          <a:noFill/>
+          <a:ln/>
+        </p:spPr>
+        <p:txBody>
+          <a:bodyPr wrap="square" lIns="0" tIns="0" rIns="0" bIns="0" rtlCol="0" anchor="ctr"/>
+          <a:lstStyle/>
+          <a:p>
+            <a:pPr indent="0" marL="0">
+              <a:buNone/>
+            </a:pPr>
+            <a:r>
+              <a:rPr lang="en-US" sz="650" dirty="0">
+                <a:solidFill>
+                  <a:srgbClr val="8AB0C8"/>
+                </a:solidFill>
+              </a:rPr>
+              <a:t>8. SciCode</a:t>
+            </a:r>
+            <a:endParaRPr lang="en-US" sz="650" dirty="0"/>
+          </a:p>
+        </p:txBody>
+      </p:sp>
+      <p:sp>
+        <p:nvSpPr>
+          <p:cNvPr id="64" name="Shape 62"/>
+          <p:cNvSpPr/>
+          <p:nvPr/>
+        </p:nvSpPr>
+        <p:spPr>
+          <a:xfrm>
+            <a:off x="8979408" y="2350008"/>
+            <a:ext cx="1572768" cy="192024"/>
+          </a:xfrm>
+          <a:prstGeom prst="rect">
+            <a:avLst/>
+          </a:prstGeom>
+          <a:solidFill>
+            <a:srgbClr val="7B68EE">
+              <a:alpha val="15000"/>
+            </a:srgbClr>
+          </a:solidFill>
+          <a:ln/>
+        </p:spPr>
+      </p:sp>
+      <p:sp>
+        <p:nvSpPr>
+          <p:cNvPr id="65" name="Shape 63"/>
+          <p:cNvSpPr/>
+          <p:nvPr/>
+        </p:nvSpPr>
+        <p:spPr>
+          <a:xfrm>
+            <a:off x="8979408" y="2350008"/>
+            <a:ext cx="54864" cy="192024"/>
+          </a:xfrm>
+          <a:prstGeom prst="rect">
+            <a:avLst/>
+          </a:prstGeom>
+          <a:solidFill>
+            <a:srgbClr val="7B68EE"/>
+          </a:solidFill>
+          <a:ln/>
+        </p:spPr>
+      </p:sp>
+      <p:sp>
+        <p:nvSpPr>
+          <p:cNvPr id="66" name="Text 64"/>
+          <p:cNvSpPr txBox="1"/>
+          <p:nvPr/>
+        </p:nvSpPr>
+        <p:spPr>
+          <a:xfrm>
+            <a:off x="9070848" y="2377440"/>
+            <a:ext cx="1463040" cy="155448"/>
+          </a:xfrm>
+          <a:prstGeom prst="rect">
+            <a:avLst/>
+          </a:prstGeom>
+          <a:noFill/>
+          <a:ln/>
+        </p:spPr>
+        <p:txBody>
+          <a:bodyPr wrap="square" lIns="0" tIns="0" rIns="0" bIns="0" rtlCol="0" anchor="ctr"/>
+          <a:lstStyle/>
+          <a:p>
+            <a:pPr indent="0" marL="0">
+              <a:buNone/>
+            </a:pPr>
+            <a:r>
+              <a:rPr lang="en-US" sz="750" b="1" dirty="0">
+                <a:solidFill>
+                  <a:srgbClr val="7B68EE"/>
+                </a:solidFill>
+              </a:rPr>
+              <a:t>Long Context</a:t>
+            </a:r>
+            <a:endParaRPr lang="en-US" sz="750" dirty="0"/>
+          </a:p>
+        </p:txBody>
+      </p:sp>
+      <p:sp>
+        <p:nvSpPr>
+          <p:cNvPr id="67" name="Text 65"/>
+          <p:cNvSpPr txBox="1"/>
+          <p:nvPr/>
+        </p:nvSpPr>
+        <p:spPr>
+          <a:xfrm>
+            <a:off x="9043416" y="2560320"/>
+            <a:ext cx="1490472" cy="144475"/>
+          </a:xfrm>
+          <a:prstGeom prst="rect">
+            <a:avLst/>
+          </a:prstGeom>
+          <a:noFill/>
+          <a:ln/>
+        </p:spPr>
+        <p:txBody>
+          <a:bodyPr wrap="square" lIns="0" tIns="0" rIns="0" bIns="0" rtlCol="0" anchor="ctr"/>
+          <a:lstStyle/>
+          <a:p>
+            <a:pPr indent="0" marL="0">
+              <a:buNone/>
+            </a:pPr>
+            <a:r>
+              <a:rPr lang="en-US" sz="650" dirty="0">
+                <a:solidFill>
+                  <a:srgbClr val="8AB0C8"/>
+                </a:solidFill>
+              </a:rPr>
+              <a:t>5. LongBench v2</a:t>
+            </a:r>
+            <a:endParaRPr lang="en-US" sz="650" dirty="0"/>
+          </a:p>
+        </p:txBody>
+      </p:sp>
+      <p:sp>
+        <p:nvSpPr>
+          <p:cNvPr id="68" name="Shape 66"/>
+          <p:cNvSpPr/>
+          <p:nvPr/>
+        </p:nvSpPr>
+        <p:spPr>
+          <a:xfrm>
+            <a:off x="8979408" y="2787091"/>
+            <a:ext cx="1572768" cy="192024"/>
+          </a:xfrm>
+          <a:prstGeom prst="rect">
+            <a:avLst/>
+          </a:prstGeom>
+          <a:solidFill>
+            <a:srgbClr val="F0A500">
+              <a:alpha val="15000"/>
+            </a:srgbClr>
+          </a:solidFill>
+          <a:ln/>
+        </p:spPr>
+      </p:sp>
+      <p:sp>
+        <p:nvSpPr>
+          <p:cNvPr id="69" name="Shape 67"/>
+          <p:cNvSpPr/>
+          <p:nvPr/>
+        </p:nvSpPr>
+        <p:spPr>
+          <a:xfrm>
+            <a:off x="8979408" y="2787091"/>
+            <a:ext cx="54864" cy="192024"/>
+          </a:xfrm>
+          <a:prstGeom prst="rect">
+            <a:avLst/>
+          </a:prstGeom>
+          <a:solidFill>
+            <a:srgbClr val="F0A500"/>
+          </a:solidFill>
+          <a:ln/>
+        </p:spPr>
+      </p:sp>
+      <p:sp>
+        <p:nvSpPr>
+          <p:cNvPr id="70" name="Text 68"/>
+          <p:cNvSpPr txBox="1"/>
+          <p:nvPr/>
+        </p:nvSpPr>
+        <p:spPr>
+          <a:xfrm>
+            <a:off x="9070848" y="2814523"/>
+            <a:ext cx="1463040" cy="155448"/>
+          </a:xfrm>
+          <a:prstGeom prst="rect">
+            <a:avLst/>
+          </a:prstGeom>
+          <a:noFill/>
+          <a:ln/>
+        </p:spPr>
+        <p:txBody>
+          <a:bodyPr wrap="square" lIns="0" tIns="0" rIns="0" bIns="0" rtlCol="0" anchor="ctr"/>
+          <a:lstStyle/>
+          <a:p>
+            <a:pPr indent="0" marL="0">
+              <a:buNone/>
+            </a:pPr>
+            <a:r>
+              <a:rPr lang="en-US" sz="750" b="1" dirty="0">
+                <a:solidFill>
+                  <a:srgbClr val="F0A500"/>
+                </a:solidFill>
+              </a:rPr>
+              <a:t>Multimodal</a:t>
+            </a:r>
+            <a:endParaRPr lang="en-US" sz="750" dirty="0"/>
+          </a:p>
+        </p:txBody>
+      </p:sp>
+      <p:sp>
+        <p:nvSpPr>
+          <p:cNvPr id="71" name="Text 69"/>
+          <p:cNvSpPr txBox="1"/>
+          <p:nvPr/>
+        </p:nvSpPr>
+        <p:spPr>
+          <a:xfrm>
+            <a:off x="9043416" y="2997403"/>
+            <a:ext cx="1490472" cy="144475"/>
+          </a:xfrm>
+          <a:prstGeom prst="rect">
+            <a:avLst/>
+          </a:prstGeom>
+          <a:noFill/>
+          <a:ln/>
+        </p:spPr>
+        <p:txBody>
+          <a:bodyPr wrap="square" lIns="0" tIns="0" rIns="0" bIns="0" rtlCol="0" anchor="ctr"/>
+          <a:lstStyle/>
+          <a:p>
+            <a:pPr indent="0" marL="0">
+              <a:buNone/>
+            </a:pPr>
+            <a:r>
+              <a:rPr lang="en-US" sz="650" dirty="0">
+                <a:solidFill>
+                  <a:srgbClr val="8AB0C8"/>
+                </a:solidFill>
+              </a:rPr>
+              <a:t>3. CharXiv</a:t>
+            </a:r>
+            <a:endParaRPr lang="en-US" sz="650" dirty="0"/>
+          </a:p>
+        </p:txBody>
+      </p:sp>
+      <p:sp>
+        <p:nvSpPr>
+          <p:cNvPr id="72" name="Text 70"/>
+          <p:cNvSpPr txBox="1"/>
+          <p:nvPr/>
+        </p:nvSpPr>
+        <p:spPr>
+          <a:xfrm>
+            <a:off x="9043416" y="3141878"/>
+            <a:ext cx="1490472" cy="144475"/>
+          </a:xfrm>
+          <a:prstGeom prst="rect">
+            <a:avLst/>
+          </a:prstGeom>
+          <a:noFill/>
+          <a:ln/>
+        </p:spPr>
+        <p:txBody>
+          <a:bodyPr wrap="square" lIns="0" tIns="0" rIns="0" bIns="0" rtlCol="0" anchor="ctr"/>
+          <a:lstStyle/>
+          <a:p>
+            <a:pPr indent="0" marL="0">
+              <a:buNone/>
+            </a:pPr>
+            <a:r>
+              <a:rPr lang="en-US" sz="650" dirty="0">
+                <a:solidFill>
+                  <a:srgbClr val="8AB0C8"/>
+                </a:solidFill>
+              </a:rPr>
+              <a:t>4. CharXiv-R</a:t>
+            </a:r>
+            <a:endParaRPr lang="en-US" sz="650" dirty="0"/>
+          </a:p>
+        </p:txBody>
+      </p:sp>
+      <p:sp>
+        <p:nvSpPr>
+          <p:cNvPr id="73" name="Text 71"/>
+          <p:cNvSpPr txBox="1"/>
+          <p:nvPr/>
+        </p:nvSpPr>
+        <p:spPr>
+          <a:xfrm>
+            <a:off x="9043416" y="3286354"/>
+            <a:ext cx="1490472" cy="144475"/>
+          </a:xfrm>
+          <a:prstGeom prst="rect">
+            <a:avLst/>
+          </a:prstGeom>
+          <a:noFill/>
+          <a:ln/>
+        </p:spPr>
+        <p:txBody>
+          <a:bodyPr wrap="square" lIns="0" tIns="0" rIns="0" bIns="0" rtlCol="0" anchor="ctr"/>
+          <a:lstStyle/>
+          <a:p>
+            <a:pPr indent="0" marL="0">
+              <a:buNone/>
+            </a:pPr>
+            <a:r>
+              <a:rPr lang="en-US" sz="650" dirty="0">
+                <a:solidFill>
+                  <a:srgbClr val="8AB0C8"/>
+                </a:solidFill>
+              </a:rPr>
+              <a:t>5. DocVQA</a:t>
+            </a:r>
+            <a:endParaRPr lang="en-US" sz="650" dirty="0"/>
+          </a:p>
+        </p:txBody>
+      </p:sp>
+      <p:sp>
+        <p:nvSpPr>
+          <p:cNvPr id="74" name="Text 72"/>
+          <p:cNvSpPr txBox="1"/>
+          <p:nvPr/>
+        </p:nvSpPr>
+        <p:spPr>
+          <a:xfrm>
+            <a:off x="9043416" y="3430829"/>
+            <a:ext cx="1490472" cy="144475"/>
+          </a:xfrm>
+          <a:prstGeom prst="rect">
+            <a:avLst/>
+          </a:prstGeom>
+          <a:noFill/>
+          <a:ln/>
+        </p:spPr>
+        <p:txBody>
+          <a:bodyPr wrap="square" lIns="0" tIns="0" rIns="0" bIns="0" rtlCol="0" anchor="ctr"/>
+          <a:lstStyle/>
+          <a:p>
+            <a:pPr indent="0" marL="0">
+              <a:buNone/>
+            </a:pPr>
+            <a:r>
+              <a:rPr lang="en-US" sz="650" dirty="0">
+                <a:solidFill>
+                  <a:srgbClr val="8AB0C8"/>
+                </a:solidFill>
+              </a:rPr>
+              <a:t>6. MathVision</a:t>
+            </a:r>
+            <a:endParaRPr lang="en-US" sz="650" dirty="0"/>
+          </a:p>
+        </p:txBody>
+      </p:sp>
+      <p:sp>
+        <p:nvSpPr>
+          <p:cNvPr id="75" name="Text 73"/>
+          <p:cNvSpPr txBox="1"/>
+          <p:nvPr/>
+        </p:nvSpPr>
+        <p:spPr>
+          <a:xfrm>
+            <a:off x="9043416" y="3575304"/>
+            <a:ext cx="1490472" cy="144475"/>
+          </a:xfrm>
+          <a:prstGeom prst="rect">
+            <a:avLst/>
+          </a:prstGeom>
+          <a:noFill/>
+          <a:ln/>
+        </p:spPr>
+        <p:txBody>
+          <a:bodyPr wrap="square" lIns="0" tIns="0" rIns="0" bIns="0" rtlCol="0" anchor="ctr"/>
+          <a:lstStyle/>
+          <a:p>
+            <a:pPr indent="0" marL="0">
+              <a:buNone/>
+            </a:pPr>
+            <a:r>
+              <a:rPr lang="en-US" sz="650" dirty="0">
+                <a:solidFill>
+                  <a:srgbClr val="8AB0C8"/>
+                </a:solidFill>
+              </a:rPr>
+              <a:t>7. MMVU</a:t>
+            </a:r>
+            <a:endParaRPr lang="en-US" sz="650" dirty="0"/>
+          </a:p>
+        </p:txBody>
+      </p:sp>
+      <p:sp>
+        <p:nvSpPr>
+          <p:cNvPr id="76" name="Text 74"/>
+          <p:cNvSpPr txBox="1"/>
+          <p:nvPr/>
+        </p:nvSpPr>
+        <p:spPr>
+          <a:xfrm>
+            <a:off x="9043416" y="3719779"/>
+            <a:ext cx="1490472" cy="144475"/>
+          </a:xfrm>
+          <a:prstGeom prst="rect">
+            <a:avLst/>
+          </a:prstGeom>
+          <a:noFill/>
+          <a:ln/>
+        </p:spPr>
+        <p:txBody>
+          <a:bodyPr wrap="square" lIns="0" tIns="0" rIns="0" bIns="0" rtlCol="0" anchor="ctr"/>
+          <a:lstStyle/>
+          <a:p>
+            <a:pPr indent="0" marL="0">
+              <a:buNone/>
+            </a:pPr>
+            <a:r>
+              <a:rPr lang="en-US" sz="650" dirty="0">
+                <a:solidFill>
+                  <a:srgbClr val="8AB0C8"/>
+                </a:solidFill>
+              </a:rPr>
+              <a:t>8. Chartography</a:t>
+            </a:r>
+            <a:endParaRPr lang="en-US" sz="650" dirty="0"/>
+          </a:p>
+        </p:txBody>
+      </p:sp>
+      <p:sp>
+        <p:nvSpPr>
+          <p:cNvPr id="77" name="Shape 75"/>
+          <p:cNvSpPr/>
+          <p:nvPr/>
+        </p:nvSpPr>
+        <p:spPr>
+          <a:xfrm>
+            <a:off x="10625328" y="1042416"/>
+            <a:ext cx="1572768" cy="192024"/>
+          </a:xfrm>
+          <a:prstGeom prst="rect">
+            <a:avLst/>
+          </a:prstGeom>
+          <a:solidFill>
+            <a:srgbClr val="3DAA6E">
+              <a:alpha val="15000"/>
+            </a:srgbClr>
+          </a:solidFill>
+          <a:ln/>
+        </p:spPr>
+      </p:sp>
+      <p:sp>
+        <p:nvSpPr>
+          <p:cNvPr id="78" name="Shape 76"/>
+          <p:cNvSpPr/>
+          <p:nvPr/>
+        </p:nvSpPr>
+        <p:spPr>
+          <a:xfrm>
+            <a:off x="10625328" y="1042416"/>
+            <a:ext cx="54864" cy="192024"/>
+          </a:xfrm>
+          <a:prstGeom prst="rect">
+            <a:avLst/>
+          </a:prstGeom>
+          <a:solidFill>
+            <a:srgbClr val="3DAA6E"/>
+          </a:solidFill>
+          <a:ln/>
+        </p:spPr>
+      </p:sp>
+      <p:sp>
+        <p:nvSpPr>
+          <p:cNvPr id="79" name="Text 77"/>
+          <p:cNvSpPr txBox="1"/>
+          <p:nvPr/>
+        </p:nvSpPr>
+        <p:spPr>
+          <a:xfrm>
+            <a:off x="10716768" y="1069848"/>
+            <a:ext cx="1463040" cy="155448"/>
+          </a:xfrm>
+          <a:prstGeom prst="rect">
+            <a:avLst/>
+          </a:prstGeom>
+          <a:noFill/>
+          <a:ln/>
+        </p:spPr>
+        <p:txBody>
+          <a:bodyPr wrap="square" lIns="0" tIns="0" rIns="0" bIns="0" rtlCol="0" anchor="ctr"/>
+          <a:lstStyle/>
+          <a:p>
+            <a:pPr indent="0" marL="0">
+              <a:buNone/>
+            </a:pPr>
+            <a:r>
+              <a:rPr lang="en-US" sz="750" b="1" dirty="0">
+                <a:solidFill>
+                  <a:srgbClr val="3DAA6E"/>
+                </a:solidFill>
+              </a:rPr>
+              <a:t>Agents &amp; Tools</a:t>
+            </a:r>
+            <a:endParaRPr lang="en-US" sz="750" dirty="0"/>
+          </a:p>
+        </p:txBody>
+      </p:sp>
+      <p:sp>
+        <p:nvSpPr>
+          <p:cNvPr id="80" name="Text 78"/>
+          <p:cNvSpPr txBox="1"/>
+          <p:nvPr/>
+        </p:nvSpPr>
+        <p:spPr>
+          <a:xfrm>
+            <a:off x="10689336" y="1252728"/>
+            <a:ext cx="1490472" cy="144475"/>
+          </a:xfrm>
+          <a:prstGeom prst="rect">
+            <a:avLst/>
+          </a:prstGeom>
+          <a:noFill/>
+          <a:ln/>
+        </p:spPr>
+        <p:txBody>
+          <a:bodyPr wrap="square" lIns="0" tIns="0" rIns="0" bIns="0" rtlCol="0" anchor="ctr"/>
+          <a:lstStyle/>
+          <a:p>
+            <a:pPr indent="0" marL="0">
+              <a:buNone/>
+            </a:pPr>
+            <a:r>
+              <a:rPr lang="en-US" sz="650" dirty="0">
+                <a:solidFill>
+                  <a:srgbClr val="8AB0C8"/>
+                </a:solidFill>
+              </a:rPr>
+              <a:t>8. APEX-Agents</a:t>
+            </a:r>
+            <a:endParaRPr lang="en-US" sz="650" dirty="0"/>
+          </a:p>
+        </p:txBody>
+      </p:sp>
+      <p:sp>
+        <p:nvSpPr>
+          <p:cNvPr id="81" name="Shape 79"/>
+          <p:cNvSpPr/>
+          <p:nvPr/>
+        </p:nvSpPr>
+        <p:spPr>
+          <a:xfrm>
+            <a:off x="10625328" y="1479499"/>
+            <a:ext cx="1572768" cy="192024"/>
+          </a:xfrm>
+          <a:prstGeom prst="rect">
+            <a:avLst/>
+          </a:prstGeom>
+          <a:solidFill>
+            <a:srgbClr val="9B59B6">
+              <a:alpha val="15000"/>
+            </a:srgbClr>
+          </a:solidFill>
+          <a:ln/>
+        </p:spPr>
+      </p:sp>
+      <p:sp>
+        <p:nvSpPr>
+          <p:cNvPr id="82" name="Shape 80"/>
+          <p:cNvSpPr/>
+          <p:nvPr/>
+        </p:nvSpPr>
+        <p:spPr>
+          <a:xfrm>
+            <a:off x="10625328" y="1479499"/>
+            <a:ext cx="54864" cy="192024"/>
+          </a:xfrm>
+          <a:prstGeom prst="rect">
+            <a:avLst/>
+          </a:prstGeom>
+          <a:solidFill>
+            <a:srgbClr val="9B59B6"/>
+          </a:solidFill>
+          <a:ln/>
+        </p:spPr>
+      </p:sp>
+      <p:sp>
+        <p:nvSpPr>
+          <p:cNvPr id="83" name="Text 81"/>
+          <p:cNvSpPr txBox="1"/>
+          <p:nvPr/>
+        </p:nvSpPr>
+        <p:spPr>
+          <a:xfrm>
+            <a:off x="10716768" y="1506931"/>
+            <a:ext cx="1463040" cy="155448"/>
+          </a:xfrm>
+          <a:prstGeom prst="rect">
+            <a:avLst/>
+          </a:prstGeom>
+          <a:noFill/>
+          <a:ln/>
+        </p:spPr>
+        <p:txBody>
+          <a:bodyPr wrap="square" lIns="0" tIns="0" rIns="0" bIns="0" rtlCol="0" anchor="ctr"/>
+          <a:lstStyle/>
+          <a:p>
+            <a:pPr indent="0" marL="0">
+              <a:buNone/>
+            </a:pPr>
+            <a:r>
+              <a:rPr lang="en-US" sz="750" b="1" dirty="0">
+                <a:solidFill>
+                  <a:srgbClr val="9B59B6"/>
+                </a:solidFill>
+              </a:rPr>
+              <a:t>Knowledge &amp; Language</a:t>
+            </a:r>
+            <a:endParaRPr lang="en-US" sz="750" dirty="0"/>
+          </a:p>
+        </p:txBody>
+      </p:sp>
+      <p:sp>
+        <p:nvSpPr>
+          <p:cNvPr id="84" name="Text 82"/>
+          <p:cNvSpPr txBox="1"/>
+          <p:nvPr/>
+        </p:nvSpPr>
+        <p:spPr>
+          <a:xfrm>
+            <a:off x="10689336" y="1689811"/>
+            <a:ext cx="1490472" cy="144475"/>
+          </a:xfrm>
+          <a:prstGeom prst="rect">
+            <a:avLst/>
+          </a:prstGeom>
+          <a:noFill/>
+          <a:ln/>
+        </p:spPr>
+        <p:txBody>
+          <a:bodyPr wrap="square" lIns="0" tIns="0" rIns="0" bIns="0" rtlCol="0" anchor="ctr"/>
+          <a:lstStyle/>
+          <a:p>
+            <a:pPr indent="0" marL="0">
+              <a:buNone/>
+            </a:pPr>
+            <a:r>
+              <a:rPr lang="en-US" sz="650" dirty="0">
+                <a:solidFill>
+                  <a:srgbClr val="8AB0C8"/>
+                </a:solidFill>
+              </a:rPr>
+              <a:t>7. SimpleQA</a:t>
+            </a:r>
+            <a:endParaRPr lang="en-US" sz="650" dirty="0"/>
+          </a:p>
+        </p:txBody>
+      </p:sp>
+      <p:sp>
+        <p:nvSpPr>
+          <p:cNvPr id="85" name="Text 83"/>
+          <p:cNvSpPr txBox="1"/>
+          <p:nvPr/>
+        </p:nvSpPr>
+        <p:spPr>
+          <a:xfrm>
+            <a:off x="10689336" y="1834286"/>
+            <a:ext cx="1490472" cy="144475"/>
+          </a:xfrm>
+          <a:prstGeom prst="rect">
+            <a:avLst/>
+          </a:prstGeom>
+          <a:noFill/>
+          <a:ln/>
+        </p:spPr>
+        <p:txBody>
+          <a:bodyPr wrap="square" lIns="0" tIns="0" rIns="0" bIns="0" rtlCol="0" anchor="ctr"/>
+          <a:lstStyle/>
+          <a:p>
+            <a:pPr indent="0" marL="0">
+              <a:buNone/>
+            </a:pPr>
+            <a:r>
+              <a:rPr lang="en-US" sz="650" dirty="0">
+                <a:solidFill>
+                  <a:srgbClr val="8AB0C8"/>
+                </a:solidFill>
+              </a:rPr>
+              <a:t>8. DRCD</a:t>
+            </a:r>
+            <a:endParaRPr lang="en-US" sz="650" dirty="0"/>
+          </a:p>
+        </p:txBody>
+      </p:sp>
+      <p:sp>
+        <p:nvSpPr>
+          <p:cNvPr id="86" name="Shape 84"/>
+          <p:cNvSpPr/>
+          <p:nvPr/>
+        </p:nvSpPr>
+        <p:spPr>
+          <a:xfrm>
+            <a:off x="10625328" y="2061058"/>
+            <a:ext cx="1572768" cy="192024"/>
+          </a:xfrm>
+          <a:prstGeom prst="rect">
+            <a:avLst/>
+          </a:prstGeom>
+          <a:solidFill>
+            <a:srgbClr val="E8A020">
+              <a:alpha val="15000"/>
+            </a:srgbClr>
+          </a:solidFill>
+          <a:ln/>
+        </p:spPr>
+      </p:sp>
+      <p:sp>
+        <p:nvSpPr>
+          <p:cNvPr id="87" name="Shape 85"/>
+          <p:cNvSpPr/>
+          <p:nvPr/>
+        </p:nvSpPr>
+        <p:spPr>
+          <a:xfrm>
+            <a:off x="10625328" y="2061058"/>
+            <a:ext cx="54864" cy="192024"/>
+          </a:xfrm>
+          <a:prstGeom prst="rect">
+            <a:avLst/>
+          </a:prstGeom>
+          <a:solidFill>
+            <a:srgbClr val="E8A020"/>
+          </a:solidFill>
+          <a:ln/>
+        </p:spPr>
+      </p:sp>
+      <p:sp>
+        <p:nvSpPr>
+          <p:cNvPr id="88" name="Text 86"/>
+          <p:cNvSpPr txBox="1"/>
+          <p:nvPr/>
+        </p:nvSpPr>
+        <p:spPr>
+          <a:xfrm>
+            <a:off x="10716768" y="2088490"/>
+            <a:ext cx="1463040" cy="155448"/>
+          </a:xfrm>
+          <a:prstGeom prst="rect">
+            <a:avLst/>
+          </a:prstGeom>
+          <a:noFill/>
+          <a:ln/>
+        </p:spPr>
+        <p:txBody>
+          <a:bodyPr wrap="square" lIns="0" tIns="0" rIns="0" bIns="0" rtlCol="0" anchor="ctr"/>
+          <a:lstStyle/>
+          <a:p>
+            <a:pPr indent="0" marL="0">
+              <a:buNone/>
+            </a:pPr>
+            <a:r>
+              <a:rPr lang="en-US" sz="750" b="1" dirty="0">
+                <a:solidFill>
+                  <a:srgbClr val="E8A020"/>
+                </a:solidFill>
+              </a:rPr>
+              <a:t>Data &amp; ML</a:t>
+            </a:r>
+            <a:endParaRPr lang="en-US" sz="750" dirty="0"/>
+          </a:p>
+        </p:txBody>
+      </p:sp>
+      <p:sp>
+        <p:nvSpPr>
+          <p:cNvPr id="89" name="Text 87"/>
+          <p:cNvSpPr txBox="1"/>
+          <p:nvPr/>
+        </p:nvSpPr>
+        <p:spPr>
+          <a:xfrm>
+            <a:off x="10689336" y="2271370"/>
+            <a:ext cx="1490472" cy="144475"/>
+          </a:xfrm>
+          <a:prstGeom prst="rect">
+            <a:avLst/>
+          </a:prstGeom>
+          <a:noFill/>
+          <a:ln/>
+        </p:spPr>
+        <p:txBody>
+          <a:bodyPr wrap="square" lIns="0" tIns="0" rIns="0" bIns="0" rtlCol="0" anchor="ctr"/>
+          <a:lstStyle/>
+          <a:p>
+            <a:pPr indent="0" marL="0">
+              <a:buNone/>
+            </a:pPr>
+            <a:r>
+              <a:rPr lang="en-US" sz="650" dirty="0">
+                <a:solidFill>
+                  <a:srgbClr val="8AB0C8"/>
+                </a:solidFill>
+              </a:rPr>
+              <a:t>3. SpreadsheetBench</a:t>
+            </a:r>
+            <a:endParaRPr lang="en-US" sz="650" dirty="0"/>
+          </a:p>
+        </p:txBody>
+      </p:sp>
+      <p:sp>
+        <p:nvSpPr>
+          <p:cNvPr id="90" name="Text 88"/>
+          <p:cNvSpPr txBox="1"/>
+          <p:nvPr/>
+        </p:nvSpPr>
+        <p:spPr>
+          <a:xfrm>
+            <a:off x="8979408" y="749808"/>
+            <a:ext cx="3154680" cy="219456"/>
+          </a:xfrm>
+          <a:prstGeom prst="rect">
+            <a:avLst/>
+          </a:prstGeom>
+          <a:noFill/>
+          <a:ln/>
+        </p:spPr>
+        <p:txBody>
+          <a:bodyPr wrap="square" lIns="0" tIns="0" rIns="0" bIns="0" rtlCol="0" anchor="ctr"/>
+          <a:lstStyle/>
+          <a:p>
+            <a:pPr indent="0" marL="0">
+              <a:buNone/>
+            </a:pPr>
+            <a:r>
+              <a:rPr lang="en-US" sz="750" b="1" dirty="0">
+                <a:solidFill>
+                  <a:srgbClr val="2A4A64"/>
+                </a:solidFill>
+              </a:rPr>
+              <a:t>BENCHMARKS BY DOMAIN</a:t>
+            </a:r>
+            <a:endParaRPr lang="en-US" sz="750" dirty="0"/>
+          </a:p>
+        </p:txBody>
+      </p:sp>
+      <p:sp>
+        <p:nvSpPr>
+          <p:cNvPr id="91" name="Shape 89"/>
+          <p:cNvSpPr/>
+          <p:nvPr/>
+        </p:nvSpPr>
+        <p:spPr>
+          <a:xfrm>
+            <a:off x="8979408" y="1005840"/>
+            <a:ext cx="3108960" cy="0"/>
+          </a:xfrm>
+          <a:prstGeom prst="line">
+            <a:avLst/>
+          </a:prstGeom>
+          <a:noFill/>
+          <a:ln w="9525">
+            <a:solidFill>
+              <a:srgbClr val="1E3A52"/>
+            </a:solidFill>
+            <a:prstDash val="solid"/>
+          </a:ln>
+        </p:spPr>
+      </p:sp>
+      <p:sp>
+        <p:nvSpPr>
+          <p:cNvPr id="92" name="Text 90"/>
+          <p:cNvSpPr txBox="1"/>
+          <p:nvPr/>
+        </p:nvSpPr>
+        <p:spPr>
+          <a:xfrm>
+            <a:off x="320040" y="164592"/>
+            <a:ext cx="8046720" cy="420624"/>
+          </a:xfrm>
+          <a:prstGeom prst="rect">
+            <a:avLst/>
+          </a:prstGeom>
+          <a:noFill/>
+          <a:ln/>
+        </p:spPr>
+        <p:txBody>
+          <a:bodyPr wrap="square" lIns="0" tIns="0" rIns="0" bIns="0" rtlCol="0" anchor="ctr"/>
+          <a:lstStyle/>
+          <a:p>
+            <a:pPr indent="0" marL="0">
+              <a:buNone/>
+            </a:pPr>
+            <a:r>
+              <a:rPr lang="en-US" sz="2000" b="1" dirty="0">
+                <a:solidFill>
+                  <a:srgbClr val="E8F4FF"/>
+                </a:solidFill>
+                <a:latin typeface="Cambria" pitchFamily="34" charset="0"/>
+                <a:ea typeface="Cambria" pitchFamily="34" charset="-122"/>
+                <a:cs typeface="Cambria" pitchFamily="34" charset="-120"/>
+              </a:rPr>
+              <a:t>FoxBrain Priority Radar — Roadmap</a:t>
+            </a:r>
+            <a:endParaRPr lang="en-US" sz="2000" dirty="0"/>
+          </a:p>
+        </p:txBody>
+      </p:sp>
+      <p:sp>
+        <p:nvSpPr>
+          <p:cNvPr id="93" name="Text 91"/>
+          <p:cNvSpPr txBox="1"/>
+          <p:nvPr/>
+        </p:nvSpPr>
+        <p:spPr>
+          <a:xfrm>
+            <a:off x="320040" y="603504"/>
+            <a:ext cx="8046720" cy="256032"/>
+          </a:xfrm>
+          <a:prstGeom prst="rect">
+            <a:avLst/>
+          </a:prstGeom>
+          <a:noFill/>
+          <a:ln/>
+        </p:spPr>
+        <p:txBody>
+          <a:bodyPr wrap="square" lIns="0" tIns="0" rIns="0" bIns="0" rtlCol="0" anchor="ctr"/>
+          <a:lstStyle/>
+          <a:p>
+            <a:pPr indent="0" marL="0">
+              <a:buNone/>
+            </a:pPr>
+            <a:r>
+              <a:rPr lang="en-US" sz="950" dirty="0">
+                <a:solidFill>
+                  <a:srgbClr val="5A8AAF"/>
+                </a:solidFill>
+              </a:rPr>
+              <a:t>MEDIUM &amp; MONITOR benchmarks · On-deck and emerging evaluations</a:t>
+            </a:r>
+            <a:endParaRPr lang="en-US" sz="950" dirty="0"/>
+          </a:p>
+        </p:txBody>
+      </p:sp>
+      <p:sp>
+        <p:nvSpPr>
+          <p:cNvPr id="94" name="Shape 92"/>
+          <p:cNvSpPr/>
+          <p:nvPr/>
+        </p:nvSpPr>
+        <p:spPr>
+          <a:xfrm>
+            <a:off x="11503152" y="164592"/>
+            <a:ext cx="548640" cy="658368"/>
+          </a:xfrm>
+          <a:prstGeom prst="roundRect">
+            <a:avLst>
+              <a:gd name="adj" fmla="val 13333"/>
+            </a:avLst>
+          </a:prstGeom>
+          <a:solidFill>
+            <a:srgbClr val="7C3AED"/>
+          </a:solidFill>
+          <a:ln/>
+        </p:spPr>
+      </p:sp>
+      <p:sp>
+        <p:nvSpPr>
+          <p:cNvPr id="95" name="Text 93"/>
+          <p:cNvSpPr txBox="1"/>
+          <p:nvPr/>
+        </p:nvSpPr>
+        <p:spPr>
+          <a:xfrm>
+            <a:off x="11484864" y="192024"/>
+            <a:ext cx="585216" cy="256032"/>
+          </a:xfrm>
+          <a:prstGeom prst="rect">
+            <a:avLst/>
+          </a:prstGeom>
+          <a:noFill/>
+          <a:ln/>
+        </p:spPr>
+        <p:txBody>
+          <a:bodyPr wrap="square" lIns="0" tIns="0" rIns="0" bIns="0" rtlCol="0" anchor="ctr"/>
+          <a:lstStyle/>
+          <a:p>
+            <a:pPr algn="ctr" indent="0" marL="0">
+              <a:buNone/>
+            </a:pPr>
+            <a:r>
+              <a:rPr lang="en-US" sz="900" b="1" dirty="0">
+                <a:solidFill>
+                  <a:srgbClr val="FFFFFF"/>
+                </a:solidFill>
+                <a:latin typeface="Cambria" pitchFamily="34" charset="0"/>
+                <a:ea typeface="Cambria" pitchFamily="34" charset="-122"/>
+                <a:cs typeface="Cambria" pitchFamily="34" charset="-120"/>
+              </a:rPr>
+              <a:t>FOX</a:t>
+            </a:r>
+            <a:endParaRPr lang="en-US" sz="900" dirty="0"/>
+          </a:p>
+        </p:txBody>
+      </p:sp>
+      <p:sp>
+        <p:nvSpPr>
+          <p:cNvPr id="96" name="Text 94"/>
+          <p:cNvSpPr txBox="1"/>
+          <p:nvPr/>
+        </p:nvSpPr>
+        <p:spPr>
+          <a:xfrm>
+            <a:off x="11484864" y="457200"/>
+            <a:ext cx="585216" cy="201168"/>
+          </a:xfrm>
+          <a:prstGeom prst="rect">
+            <a:avLst/>
+          </a:prstGeom>
+          <a:noFill/>
+          <a:ln/>
+        </p:spPr>
+        <p:txBody>
+          <a:bodyPr wrap="square" lIns="0" tIns="0" rIns="0" bIns="0" rtlCol="0" anchor="ctr"/>
+          <a:lstStyle/>
+          <a:p>
+            <a:pPr algn="ctr" indent="0" marL="0">
+              <a:buNone/>
+            </a:pPr>
+            <a:r>
+              <a:rPr lang="en-US" sz="650" b="1" dirty="0">
+                <a:solidFill>
+                  <a:srgbClr val="C4B5FD"/>
+                </a:solidFill>
+              </a:rPr>
+              <a:t>BRAIN</a:t>
+            </a:r>
+            <a:endParaRPr lang="en-US" sz="650" dirty="0"/>
+          </a:p>
+        </p:txBody>
+      </p:sp>
+      <p:sp>
+        <p:nvSpPr>
+          <p:cNvPr id="97" name="Shape 95"/>
+          <p:cNvSpPr/>
+          <p:nvPr/>
+        </p:nvSpPr>
+        <p:spPr>
+          <a:xfrm>
+            <a:off x="320040" y="6464808"/>
+            <a:ext cx="118872" cy="118872"/>
+          </a:xfrm>
+          <a:prstGeom prst="ellipse">
+            <a:avLst/>
+          </a:prstGeom>
+          <a:solidFill>
+            <a:srgbClr val="70B8E8"/>
+          </a:solidFill>
+          <a:ln/>
+        </p:spPr>
+      </p:sp>
+      <p:sp>
+        <p:nvSpPr>
+          <p:cNvPr id="98" name="Text 96"/>
+          <p:cNvSpPr txBox="1"/>
+          <p:nvPr/>
+        </p:nvSpPr>
+        <p:spPr>
+          <a:xfrm>
+            <a:off x="493776" y="6446520"/>
+            <a:ext cx="2103120" cy="155448"/>
+          </a:xfrm>
+          <a:prstGeom prst="rect">
+            <a:avLst/>
+          </a:prstGeom>
+          <a:noFill/>
+          <a:ln/>
+        </p:spPr>
+        <p:txBody>
+          <a:bodyPr wrap="square" lIns="0" tIns="0" rIns="0" bIns="0" rtlCol="0" anchor="ctr"/>
+          <a:lstStyle/>
+          <a:p>
+            <a:pPr indent="0" marL="0">
+              <a:buNone/>
+            </a:pPr>
+            <a:r>
+              <a:rPr lang="en-US" sz="800" dirty="0">
+                <a:solidFill>
+                  <a:srgbClr val="7A9AB5"/>
+                </a:solidFill>
+              </a:rPr>
+              <a:t>MEDIUM  On roadmap</a:t>
+            </a:r>
+            <a:endParaRPr lang="en-US" sz="800" dirty="0"/>
+          </a:p>
+        </p:txBody>
+      </p:sp>
+      <p:sp>
+        <p:nvSpPr>
+          <p:cNvPr id="99" name="Shape 97"/>
+          <p:cNvSpPr/>
+          <p:nvPr/>
+        </p:nvSpPr>
+        <p:spPr>
+          <a:xfrm>
+            <a:off x="2651760" y="6464808"/>
+            <a:ext cx="118872" cy="118872"/>
+          </a:xfrm>
+          <a:prstGeom prst="ellipse">
+            <a:avLst/>
+          </a:prstGeom>
+          <a:solidFill>
+            <a:srgbClr val="A8A8E8"/>
+          </a:solidFill>
+          <a:ln/>
+        </p:spPr>
+      </p:sp>
+      <p:sp>
+        <p:nvSpPr>
+          <p:cNvPr id="100" name="Text 98"/>
+          <p:cNvSpPr txBox="1"/>
+          <p:nvPr/>
+        </p:nvSpPr>
+        <p:spPr>
+          <a:xfrm>
+            <a:off x="2825496" y="6446520"/>
+            <a:ext cx="2103120" cy="155448"/>
+          </a:xfrm>
+          <a:prstGeom prst="rect">
+            <a:avLst/>
+          </a:prstGeom>
+          <a:noFill/>
+          <a:ln/>
+        </p:spPr>
+        <p:txBody>
+          <a:bodyPr wrap="square" lIns="0" tIns="0" rIns="0" bIns="0" rtlCol="0" anchor="ctr"/>
+          <a:lstStyle/>
+          <a:p>
+            <a:pPr indent="0" marL="0">
+              <a:buNone/>
+            </a:pPr>
+            <a:r>
+              <a:rPr lang="en-US" sz="800" dirty="0">
+                <a:solidFill>
+                  <a:srgbClr val="7A9AB5"/>
+                </a:solidFill>
+              </a:rPr>
+              <a:t>MONITOR  Emerging / watch</a:t>
+            </a:r>
+            <a:endParaRPr lang="en-US" sz="800" dirty="0"/>
+          </a:p>
+        </p:txBody>
+      </p:sp>
+      <p:sp>
+        <p:nvSpPr>
+          <p:cNvPr id="101" name="Text 99"/>
+          <p:cNvSpPr txBox="1"/>
+          <p:nvPr/>
+        </p:nvSpPr>
+        <p:spPr>
+          <a:xfrm>
+            <a:off x="320040" y="6675120"/>
+            <a:ext cx="11521440" cy="146304"/>
+          </a:xfrm>
+          <a:prstGeom prst="rect">
+            <a:avLst/>
+          </a:prstGeom>
+          <a:noFill/>
+          <a:ln/>
+        </p:spPr>
+        <p:txBody>
+          <a:bodyPr wrap="square" lIns="0" tIns="0" rIns="0" bIns="0" rtlCol="0" anchor="ctr"/>
+          <a:lstStyle/>
+          <a:p>
+            <a:pPr algn="ctr" indent="0" marL="0">
+              <a:buNone/>
+            </a:pPr>
+            <a:r>
+              <a:rPr lang="en-US" sz="700" dirty="0">
+                <a:solidFill>
+                  <a:srgbClr val="1E3A52"/>
+                </a:solidFill>
+              </a:rPr>
+              <a:t>Full SOTA scores &amp; headroom at FoxBrain EvalHub</a:t>
+            </a:r>
+            <a:endParaRPr lang="en-US" sz="700" dirty="0"/>
+          </a:p>
+        </p:txBody>
+      </p:sp>
+    </p:spTree>
+  </p:cSld>
+  <p:clrMapOvr>
+    <a:masterClrMapping/>
+  </p:clrMapOvr>
+</p:sld>
+</file>
+
+<file path=ppt/slides/slide3.xml><?xml version="1.0" encoding="utf-8"?>
+<p:sld xmlns:a="http://schemas.openxmlformats.org/drawingml/2006/main" xmlns:r="http://schemas.openxmlformats.org/officeDocument/2006/relationships" xmlns:p="http://schemas.openxmlformats.org/presentationml/2006/main">
+  <p:cSld name="Slide 3">
+    <p:spTree>
+      <p:nvGrpSpPr>
+        <p:cNvPr id="1" name=""/>
+        <p:cNvGrpSpPr/>
+        <p:nvPr/>
+      </p:nvGrpSpPr>
+      <p:grpSpPr>
+        <a:xfrm>
+          <a:off x="0" y="0"/>
+          <a:ext cx="0" cy="0"/>
+          <a:chOff x="0" y="0"/>
+          <a:chExt cx="0" cy="0"/>
+        </a:xfrm>
+      </p:grpSpPr>
+      <p:sp>
+        <p:nvSpPr>
+          <p:cNvPr id="2" name="Shape 0"/>
+          <p:cNvSpPr/>
+          <p:nvPr/>
+        </p:nvSpPr>
+        <p:spPr>
+          <a:xfrm>
+            <a:off x="0" y="0"/>
+            <a:ext cx="12188952" cy="6858000"/>
+          </a:xfrm>
+          <a:prstGeom prst="rect">
+            <a:avLst/>
+          </a:prstGeom>
+          <a:solidFill>
+            <a:srgbClr val="0D1B2A"/>
+          </a:solidFill>
+          <a:ln/>
+        </p:spPr>
+      </p:sp>
+      <p:sp>
+        <p:nvSpPr>
           <p:cNvPr id="3" name="Text 1"/>
           <p:cNvSpPr txBox="1"/>
           <p:nvPr/>
@@ -8133,7 +9577,7 @@
             <a:r>
               <a:rPr lang="en-US" sz="850" b="1" dirty="0">
                 <a:solidFill>
-                  <a:srgbClr val="8888CC"/>
+                  <a:srgbClr val="A8A8E8"/>
                 </a:solidFill>
               </a:rPr>
               <a:t>MONITOR</a:t>
@@ -8353,7 +9797,7 @@
             <a:r>
               <a:rPr lang="en-US" sz="900" b="1" dirty="0">
                 <a:solidFill>
-                  <a:srgbClr val="8888CC"/>
+                  <a:srgbClr val="A8A8E8"/>
                 </a:solidFill>
               </a:rPr>
               <a:t>GPQA Diamond · MMLU-Pro</a:t>
@@ -8905,7 +10349,7 @@
             <a:r>
               <a:rPr lang="en-US" sz="900" b="1" dirty="0">
                 <a:solidFill>
-                  <a:srgbClr val="FF9088"/>
+                  <a:srgbClr val="1E3A52"/>
                 </a:solidFill>
               </a:rPr>
               <a:t>—</a:t>
@@ -9565,7 +11009,7 @@
             <a:r>
               <a:rPr lang="en-US" sz="900" b="1" dirty="0">
                 <a:solidFill>
-                  <a:srgbClr val="FF9088"/>
+                  <a:srgbClr val="1E3A52"/>
                 </a:solidFill>
               </a:rPr>
               <a:t>—</a:t>
@@ -9957,7 +11401,7 @@
             <a:avLst/>
           </a:prstGeom>
           <a:solidFill>
-            <a:srgbClr val="8888CC"/>
+            <a:srgbClr val="A8A8E8"/>
           </a:solidFill>
           <a:ln/>
         </p:spPr>
@@ -10084,7 +11528,7 @@
                   <a:srgbClr val="1E3A52"/>
                 </a:solidFill>
               </a:rPr>
-              <a:t>Recommended: use Slide 1 for strategic discussion · Slide 2 for benchmark-level detail</a:t>
+              <a:t>Recommended: Slide 1 for strategic discussion · Slide 2 for roadmap · Slide 3 for benchmark-level detail</a:t>
             </a:r>
             <a:endParaRPr lang="en-US" sz="700" dirty="0"/>
           </a:p>
